--- a/Bases de Datos II/Clases/Clase 1 - Revision BD I y arranque VetCare/Presentacion.pptx
+++ b/Bases de Datos II/Clases/Clase 1 - Revision BD I y arranque VetCare/Presentacion.pptx
@@ -10,45 +10,37 @@
     <p:sldId id="258" r:id="rId9"/>
     <p:sldId id="259" r:id="rId10"/>
     <p:sldId id="260" r:id="rId11"/>
-    <p:sldId id="261" r:id="rId12"/>
-    <p:sldId id="262" r:id="rId13"/>
-    <p:sldId id="263" r:id="rId14"/>
-    <p:sldId id="264" r:id="rId15"/>
-    <p:sldId id="265" r:id="rId16"/>
-    <p:sldId id="266" r:id="rId17"/>
-    <p:sldId id="267" r:id="rId18"/>
-    <p:sldId id="268" r:id="rId19"/>
-    <p:sldId id="269" r:id="rId20"/>
-    <p:sldId id="270" r:id="rId21"/>
-    <p:sldId id="271" r:id="rId22"/>
-    <p:sldId id="272" r:id="rId23"/>
-    <p:sldId id="273" r:id="rId24"/>
-    <p:sldId id="274" r:id="rId25"/>
-    <p:sldId id="275" r:id="rId26"/>
-    <p:sldId id="276" r:id="rId27"/>
-    <p:sldId id="277" r:id="rId28"/>
-    <p:sldId id="278" r:id="rId29"/>
-    <p:sldId id="279" r:id="rId30"/>
-    <p:sldId id="280" r:id="rId31"/>
-    <p:sldId id="281" r:id="rId32"/>
-    <p:sldId id="282" r:id="rId33"/>
-    <p:sldId id="283" r:id="rId34"/>
-    <p:sldId id="284" r:id="rId35"/>
-    <p:sldId id="285" r:id="rId36"/>
-    <p:sldId id="286" r:id="rId37"/>
-    <p:sldId id="287" r:id="rId38"/>
-    <p:sldId id="288" r:id="rId39"/>
-    <p:sldId id="289" r:id="rId40"/>
-    <p:sldId id="290" r:id="rId41"/>
-    <p:sldId id="291" r:id="rId42"/>
-    <p:sldId id="292" r:id="rId43"/>
-    <p:sldId id="293" r:id="rId44"/>
-    <p:sldId id="294" r:id="rId45"/>
-    <p:sldId id="295" r:id="rId46"/>
-    <p:sldId id="296" r:id="rId47"/>
-    <p:sldId id="297" r:id="rId48"/>
-    <p:sldId id="298" r:id="rId49"/>
-    <p:sldId id="299" r:id="rId50"/>
+    <p:sldId id="261" r:id="rId13"/>
+    <p:sldId id="262" r:id="rId14"/>
+    <p:sldId id="263" r:id="rId15"/>
+    <p:sldId id="264" r:id="rId16"/>
+    <p:sldId id="265" r:id="rId17"/>
+    <p:sldId id="266" r:id="rId18"/>
+    <p:sldId id="267" r:id="rId19"/>
+    <p:sldId id="268" r:id="rId20"/>
+    <p:sldId id="269" r:id="rId21"/>
+    <p:sldId id="270" r:id="rId22"/>
+    <p:sldId id="271" r:id="rId23"/>
+    <p:sldId id="272" r:id="rId24"/>
+    <p:sldId id="273" r:id="rId25"/>
+    <p:sldId id="274" r:id="rId26"/>
+    <p:sldId id="275" r:id="rId27"/>
+    <p:sldId id="276" r:id="rId28"/>
+    <p:sldId id="277" r:id="rId29"/>
+    <p:sldId id="278" r:id="rId30"/>
+    <p:sldId id="279" r:id="rId31"/>
+    <p:sldId id="280" r:id="rId32"/>
+    <p:sldId id="281" r:id="rId33"/>
+    <p:sldId id="282" r:id="rId34"/>
+    <p:sldId id="283" r:id="rId35"/>
+    <p:sldId id="284" r:id="rId36"/>
+    <p:sldId id="285" r:id="rId37"/>
+    <p:sldId id="286" r:id="rId38"/>
+    <p:sldId id="287" r:id="rId39"/>
+    <p:sldId id="288" r:id="rId40"/>
+    <p:sldId id="289" r:id="rId41"/>
+    <p:sldId id="290" r:id="rId42"/>
+    <p:sldId id="291" r:id="rId43"/>
   </p:sldIdLst>
   <p:sldSz cx="12191695" cy="6858000" type="screen4x3"/>
   <p:notesSz cx="6858000" cy="9144000"/>
@@ -148,6 +140,1366 @@
     </a:lvl9pPr>
   </p:defaultTextStyle>
 </p:presentation>
+</file>
+
+<file path=ppt/notesMasters/notesMaster1.xml><?xml version="1.0" encoding="utf-8"?>
+<p:notesMaster xmlns:a="http://schemas.openxmlformats.org/drawingml/2006/main" xmlns:p="http://schemas.openxmlformats.org/presentationml/2006/main" xmlns:r="http://schemas.openxmlformats.org/officeDocument/2006/relationships">
+  <p:cSld>
+    <p:bg>
+      <p:bgRef idx="1001">
+        <a:schemeClr val="bg1"/>
+      </p:bgRef>
+    </p:bg>
+    <p:spTree>
+      <p:nvGrpSpPr>
+        <p:cNvPr id="1" name=""/>
+        <p:cNvGrpSpPr/>
+        <p:nvPr/>
+      </p:nvGrpSpPr>
+      <p:grpSpPr>
+        <a:xfrm>
+          <a:off x="0" y="0"/>
+          <a:ext cx="0" cy="0"/>
+          <a:chOff x="0" y="0"/>
+          <a:chExt cx="0" cy="0"/>
+        </a:xfrm>
+      </p:grpSpPr>
+      <p:sp>
+        <p:nvSpPr>
+          <p:cNvPr id="2" name="Header Placeholder 1"/>
+          <p:cNvSpPr>
+            <a:spLocks noGrp="1"/>
+          </p:cNvSpPr>
+          <p:nvPr>
+            <p:ph type="hdr" sz="quarter"/>
+          </p:nvPr>
+        </p:nvSpPr>
+        <p:spPr>
+          <a:xfrm>
+            <a:off x="0" y="0"/>
+            <a:ext cx="2971800" cy="457200"/>
+          </a:xfrm>
+          <a:prstGeom prst="rect">
+            <a:avLst/>
+          </a:prstGeom>
+        </p:spPr>
+        <p:txBody>
+          <a:bodyPr vert="horz" lIns="91440" tIns="45720" rIns="91440" bIns="45720" rtlCol="0"/>
+          <a:lstStyle>
+            <a:lvl1pPr algn="l">
+              <a:defRPr sz="1200"/>
+            </a:lvl1pPr>
+          </a:lstStyle>
+          <a:p>
+            <a:endParaRPr lang="en-US"/>
+          </a:p>
+        </p:txBody>
+      </p:sp>
+      <p:sp>
+        <p:nvSpPr>
+          <p:cNvPr id="3" name="Date Placeholder 2"/>
+          <p:cNvSpPr>
+            <a:spLocks noGrp="1"/>
+          </p:cNvSpPr>
+          <p:nvPr>
+            <p:ph type="dt" idx="1"/>
+          </p:nvPr>
+        </p:nvSpPr>
+        <p:spPr>
+          <a:xfrm>
+            <a:off x="3884613" y="0"/>
+            <a:ext cx="2971800" cy="457200"/>
+          </a:xfrm>
+          <a:prstGeom prst="rect">
+            <a:avLst/>
+          </a:prstGeom>
+        </p:spPr>
+        <p:txBody>
+          <a:bodyPr vert="horz" lIns="91440" tIns="45720" rIns="91440" bIns="45720" rtlCol="0"/>
+          <a:lstStyle>
+            <a:lvl1pPr algn="r">
+              <a:defRPr sz="1200"/>
+            </a:lvl1pPr>
+          </a:lstStyle>
+          <a:p>
+            <a:fld id="{0F89C1C7-3DCD-1040-A9CF-14679D8B5DDD}" type="datetimeFigureOut">
+              <a:rPr lang="en-US" smtClean="0"/>
+              <a:t>10/17/16</a:t>
+            </a:fld>
+            <a:endParaRPr lang="en-US"/>
+          </a:p>
+        </p:txBody>
+      </p:sp>
+      <p:sp>
+        <p:nvSpPr>
+          <p:cNvPr id="4" name="Slide Image Placeholder 3"/>
+          <p:cNvSpPr>
+            <a:spLocks noGrp="1" noRot="1" noChangeAspect="1"/>
+          </p:cNvSpPr>
+          <p:nvPr>
+            <p:ph type="sldImg" idx="2"/>
+          </p:nvPr>
+        </p:nvSpPr>
+        <p:spPr>
+          <a:xfrm>
+            <a:off x="1143000" y="685800"/>
+            <a:ext cx="4572000" cy="3429000"/>
+          </a:xfrm>
+          <a:prstGeom prst="rect">
+            <a:avLst/>
+          </a:prstGeom>
+          <a:noFill/>
+          <a:ln w="12700">
+            <a:solidFill>
+              <a:prstClr val="black"/>
+            </a:solidFill>
+          </a:ln>
+        </p:spPr>
+        <p:txBody>
+          <a:bodyPr vert="horz" lIns="91440" tIns="45720" rIns="91440" bIns="45720" rtlCol="0" anchor="ctr"/>
+          <a:lstStyle/>
+          <a:p>
+            <a:endParaRPr lang="en-US"/>
+          </a:p>
+        </p:txBody>
+      </p:sp>
+      <p:sp>
+        <p:nvSpPr>
+          <p:cNvPr id="5" name="Notes Placeholder 4"/>
+          <p:cNvSpPr>
+            <a:spLocks noGrp="1"/>
+          </p:cNvSpPr>
+          <p:nvPr>
+            <p:ph type="body" sz="quarter" idx="3"/>
+          </p:nvPr>
+        </p:nvSpPr>
+        <p:spPr>
+          <a:xfrm>
+            <a:off x="685800" y="4343400"/>
+            <a:ext cx="5486400" cy="4114800"/>
+          </a:xfrm>
+          <a:prstGeom prst="rect">
+            <a:avLst/>
+          </a:prstGeom>
+        </p:spPr>
+        <p:txBody>
+          <a:bodyPr vert="horz" lIns="91440" tIns="45720" rIns="91440" bIns="45720" rtlCol="0"/>
+          <a:lstStyle/>
+          <a:p>
+            <a:pPr lvl="0"/>
+            <a:r>
+              <a:rPr lang="en-US" smtClean="0"/>
+              <a:t>Click to edit Master text styles</a:t>
+            </a:r>
+          </a:p>
+          <a:p>
+            <a:pPr lvl="1"/>
+            <a:r>
+              <a:rPr lang="en-US" smtClean="0"/>
+              <a:t>Second level</a:t>
+            </a:r>
+          </a:p>
+          <a:p>
+            <a:pPr lvl="2"/>
+            <a:r>
+              <a:rPr lang="en-US" smtClean="0"/>
+              <a:t>Third level</a:t>
+            </a:r>
+          </a:p>
+          <a:p>
+            <a:pPr lvl="3"/>
+            <a:r>
+              <a:rPr lang="en-US" smtClean="0"/>
+              <a:t>Fourth level</a:t>
+            </a:r>
+          </a:p>
+          <a:p>
+            <a:pPr lvl="4"/>
+            <a:r>
+              <a:rPr lang="en-US" smtClean="0"/>
+              <a:t>Fifth level</a:t>
+            </a:r>
+            <a:endParaRPr lang="en-US"/>
+          </a:p>
+        </p:txBody>
+      </p:sp>
+      <p:sp>
+        <p:nvSpPr>
+          <p:cNvPr id="6" name="Footer Placeholder 5"/>
+          <p:cNvSpPr>
+            <a:spLocks noGrp="1"/>
+          </p:cNvSpPr>
+          <p:nvPr>
+            <p:ph type="ftr" sz="quarter" idx="4"/>
+          </p:nvPr>
+        </p:nvSpPr>
+        <p:spPr>
+          <a:xfrm>
+            <a:off x="0" y="8685213"/>
+            <a:ext cx="2971800" cy="457200"/>
+          </a:xfrm>
+          <a:prstGeom prst="rect">
+            <a:avLst/>
+          </a:prstGeom>
+        </p:spPr>
+        <p:txBody>
+          <a:bodyPr vert="horz" lIns="91440" tIns="45720" rIns="91440" bIns="45720" rtlCol="0" anchor="b"/>
+          <a:lstStyle>
+            <a:lvl1pPr algn="l">
+              <a:defRPr sz="1200"/>
+            </a:lvl1pPr>
+          </a:lstStyle>
+          <a:p>
+            <a:endParaRPr lang="en-US"/>
+          </a:p>
+        </p:txBody>
+      </p:sp>
+      <p:sp>
+        <p:nvSpPr>
+          <p:cNvPr id="7" name="Slide Number Placeholder 6"/>
+          <p:cNvSpPr>
+            <a:spLocks noGrp="1"/>
+          </p:cNvSpPr>
+          <p:nvPr>
+            <p:ph type="sldNum" sz="quarter" idx="5"/>
+          </p:nvPr>
+        </p:nvSpPr>
+        <p:spPr>
+          <a:xfrm>
+            <a:off x="3884613" y="8685213"/>
+            <a:ext cx="2971800" cy="457200"/>
+          </a:xfrm>
+          <a:prstGeom prst="rect">
+            <a:avLst/>
+          </a:prstGeom>
+        </p:spPr>
+        <p:txBody>
+          <a:bodyPr vert="horz" lIns="91440" tIns="45720" rIns="91440" bIns="45720" rtlCol="0" anchor="b"/>
+          <a:lstStyle>
+            <a:lvl1pPr algn="r">
+              <a:defRPr sz="1200"/>
+            </a:lvl1pPr>
+          </a:lstStyle>
+          <a:p>
+            <a:fld id="{BB5E49A5-4136-284D-997B-48E1D791AD67}" type="slidenum">
+              <a:rPr lang="en-US" smtClean="0"/>
+              <a:t>‹#›</a:t>
+            </a:fld>
+            <a:endParaRPr lang="en-US"/>
+          </a:p>
+        </p:txBody>
+      </p:sp>
+    </p:spTree>
+    <p:extLst>
+      <p:ext uri="{BB962C8B-B14F-4D97-AF65-F5344CB8AC3E}">
+        <p14:creationId xmlns:p14="http://schemas.microsoft.com/office/powerpoint/2010/main" val="2623252185"/>
+      </p:ext>
+    </p:extLst>
+  </p:cSld>
+  <p:clrMap bg1="lt1" tx1="dk1" bg2="lt2" tx2="dk2" accent1="accent1" accent2="accent2" accent3="accent3" accent4="accent4" accent5="accent5" accent6="accent6" hlink="hlink" folHlink="folHlink"/>
+  <p:notesStyle>
+    <a:lvl1pPr marL="0" algn="l" defTabSz="457200" rtl="0" eaLnBrk="1" latinLnBrk="0" hangingPunct="1">
+      <a:defRPr sz="1200" kern="1200">
+        <a:solidFill>
+          <a:schemeClr val="tx1"/>
+        </a:solidFill>
+        <a:latin typeface="+mn-lt"/>
+        <a:ea typeface="+mn-ea"/>
+        <a:cs typeface="+mn-cs"/>
+      </a:defRPr>
+    </a:lvl1pPr>
+    <a:lvl2pPr marL="457200" algn="l" defTabSz="457200" rtl="0" eaLnBrk="1" latinLnBrk="0" hangingPunct="1">
+      <a:defRPr sz="1200" kern="1200">
+        <a:solidFill>
+          <a:schemeClr val="tx1"/>
+        </a:solidFill>
+        <a:latin typeface="+mn-lt"/>
+        <a:ea typeface="+mn-ea"/>
+        <a:cs typeface="+mn-cs"/>
+      </a:defRPr>
+    </a:lvl2pPr>
+    <a:lvl3pPr marL="914400" algn="l" defTabSz="457200" rtl="0" eaLnBrk="1" latinLnBrk="0" hangingPunct="1">
+      <a:defRPr sz="1200" kern="1200">
+        <a:solidFill>
+          <a:schemeClr val="tx1"/>
+        </a:solidFill>
+        <a:latin typeface="+mn-lt"/>
+        <a:ea typeface="+mn-ea"/>
+        <a:cs typeface="+mn-cs"/>
+      </a:defRPr>
+    </a:lvl3pPr>
+    <a:lvl4pPr marL="1371600" algn="l" defTabSz="457200" rtl="0" eaLnBrk="1" latinLnBrk="0" hangingPunct="1">
+      <a:defRPr sz="1200" kern="1200">
+        <a:solidFill>
+          <a:schemeClr val="tx1"/>
+        </a:solidFill>
+        <a:latin typeface="+mn-lt"/>
+        <a:ea typeface="+mn-ea"/>
+        <a:cs typeface="+mn-cs"/>
+      </a:defRPr>
+    </a:lvl4pPr>
+    <a:lvl5pPr marL="1828800" algn="l" defTabSz="457200" rtl="0" eaLnBrk="1" latinLnBrk="0" hangingPunct="1">
+      <a:defRPr sz="1200" kern="1200">
+        <a:solidFill>
+          <a:schemeClr val="tx1"/>
+        </a:solidFill>
+        <a:latin typeface="+mn-lt"/>
+        <a:ea typeface="+mn-ea"/>
+        <a:cs typeface="+mn-cs"/>
+      </a:defRPr>
+    </a:lvl5pPr>
+    <a:lvl6pPr marL="2286000" algn="l" defTabSz="457200" rtl="0" eaLnBrk="1" latinLnBrk="0" hangingPunct="1">
+      <a:defRPr sz="1200" kern="1200">
+        <a:solidFill>
+          <a:schemeClr val="tx1"/>
+        </a:solidFill>
+        <a:latin typeface="+mn-lt"/>
+        <a:ea typeface="+mn-ea"/>
+        <a:cs typeface="+mn-cs"/>
+      </a:defRPr>
+    </a:lvl6pPr>
+    <a:lvl7pPr marL="2743200" algn="l" defTabSz="457200" rtl="0" eaLnBrk="1" latinLnBrk="0" hangingPunct="1">
+      <a:defRPr sz="1200" kern="1200">
+        <a:solidFill>
+          <a:schemeClr val="tx1"/>
+        </a:solidFill>
+        <a:latin typeface="+mn-lt"/>
+        <a:ea typeface="+mn-ea"/>
+        <a:cs typeface="+mn-cs"/>
+      </a:defRPr>
+    </a:lvl7pPr>
+    <a:lvl8pPr marL="3200400" algn="l" defTabSz="457200" rtl="0" eaLnBrk="1" latinLnBrk="0" hangingPunct="1">
+      <a:defRPr sz="1200" kern="1200">
+        <a:solidFill>
+          <a:schemeClr val="tx1"/>
+        </a:solidFill>
+        <a:latin typeface="+mn-lt"/>
+        <a:ea typeface="+mn-ea"/>
+        <a:cs typeface="+mn-cs"/>
+      </a:defRPr>
+    </a:lvl8pPr>
+    <a:lvl9pPr marL="3657600" algn="l" defTabSz="457200" rtl="0" eaLnBrk="1" latinLnBrk="0" hangingPunct="1">
+      <a:defRPr sz="1200" kern="1200">
+        <a:solidFill>
+          <a:schemeClr val="tx1"/>
+        </a:solidFill>
+        <a:latin typeface="+mn-lt"/>
+        <a:ea typeface="+mn-ea"/>
+        <a:cs typeface="+mn-cs"/>
+      </a:defRPr>
+    </a:lvl9pPr>
+  </p:notesStyle>
+</p:notesMaster>
+</file>
+
+<file path=ppt/notesSlides/notesSlide1.xml><?xml version="1.0" encoding="utf-8"?>
+<p:notes xmlns:a="http://schemas.openxmlformats.org/drawingml/2006/main" xmlns:p="http://schemas.openxmlformats.org/presentationml/2006/main" xmlns:r="http://schemas.openxmlformats.org/officeDocument/2006/relationships">
+  <p:cSld>
+    <p:spTree>
+      <p:nvGrpSpPr>
+        <p:cNvPr id="1" name=""/>
+        <p:cNvGrpSpPr/>
+        <p:nvPr/>
+      </p:nvGrpSpPr>
+      <p:grpSpPr>
+        <a:xfrm>
+          <a:off x="0" y="0"/>
+          <a:ext cx="0" cy="0"/>
+          <a:chOff x="0" y="0"/>
+          <a:chExt cx="0" cy="0"/>
+        </a:xfrm>
+      </p:grpSpPr>
+      <p:sp>
+        <p:nvSpPr>
+          <p:cNvPr id="2" name="Slide Image Placeholder 1"/>
+          <p:cNvSpPr>
+            <a:spLocks noGrp="1"/>
+          </p:cNvSpPr>
+          <p:nvPr>
+            <p:ph type="sldImg" idx="2"/>
+          </p:nvPr>
+        </p:nvSpPr>
+        <p:spPr/>
+      </p:sp>
+      <p:sp>
+        <p:nvSpPr>
+          <p:cNvPr id="3" name="Notes Placeholder 2"/>
+          <p:cNvSpPr>
+            <a:spLocks noGrp="1"/>
+          </p:cNvSpPr>
+          <p:nvPr>
+            <p:ph type="body" idx="3" sz="quarter"/>
+          </p:nvPr>
+        </p:nvSpPr>
+        <p:spPr/>
+        <p:txBody>
+          <a:bodyPr/>
+          <a:lstStyle/>
+          <a:p>
+            <a:r>
+              <a:t>Antes de dibujar una sola tabla hay que decir para quien se dibuja, porque el taller de hoy y los enunciados de las quince clases en ExamLab estan escritos sobre un cliente concreto y con nombre.</a:t>
+            </a:r>
+          </a:p>
+          <a:p>
+            <a:r>
+              <a:t>La Clinica Veterinaria Huellitas atiende un alto volumen de pacientes y lleva toda su gestion en carpetas de papel.</a:t>
+            </a:r>
+          </a:p>
+          <a:p>
+            <a:r>
+              <a:t>Un curso de bases de datos que no nombra al cliente convierte cada taller en un ejercicio suelto; nombrarlo hace que el estudiante pueda decidir por si mismo si un dato sobra.</a:t>
+            </a:r>
+          </a:p>
+          <a:p>
+            <a:r>
+              <a:t>Hay que fijar la nomenclatura en voz alta porque el material la usa con precision y el estudiante la mezcla: Huellitas es la CLINICA, es decir el cliente que tiene el problema</a:t>
+            </a:r>
+          </a:p>
+          <a:p>
+            <a:r>
+              <a:t>Programacion II construye la aplicacion para el mismo cliente y Seminario disena sus planos, asi que un estudiante que curse dos de las tres materias trabaja el mismo caso desde dos angulos.</a:t>
+            </a:r>
+          </a:p>
+          <a:p>
+            <a:r>
+              <a:t>Los tres interesados son la herramienta de decision mas util que se le puede dar hoy al estudiante, y estan en la diapositiva por eso.</a:t>
+            </a:r>
+          </a:p>
+          <a:p>
+            <a:r>
+              <a:t>El dueno de la clinica quiere metricas del negocio.</a:t>
+            </a:r>
+          </a:p>
+          <a:p>
+            <a:r>
+              <a:t>La recepcionista quiere agendar rapido y con pocos clics.</a:t>
+            </a:r>
+          </a:p>
+          <a:p>
+            <a:r>
+              <a:t>El veterinario quiere el historial del paciente a la mano durante la consulta.</a:t>
+            </a:r>
+          </a:p>
+          <a:p>
+            <a:r>
+              <a:t>Lo importante, y hay que subrayarlo, es que esos intereses ENTRAN EN CONFLICTO: pedir mas datos en el formulario de la cita da mejores metricas al dueno y le hace mas lento el trabajo a la recepcionista.</a:t>
+            </a:r>
+          </a:p>
+          <a:p>
+            <a:r>
+              <a:t>Ahi esta la diferencia entre un modelo copiado y uno decidido.</a:t>
+            </a:r>
+          </a:p>
+          <a:p>
+            <a:r>
+              <a:t>Cuando en un taller un estudiante pregunte si una columna sobra, la respuesta del docente no deberia ser si o no sino otra pregunta: cual de los tres la necesita, y que pierde otro si la agregamos.</a:t>
+            </a:r>
+          </a:p>
+        </p:txBody>
+      </p:sp>
+      <p:sp>
+        <p:nvSpPr>
+          <p:cNvPr id="4" name="Slide Number Placeholder 3"/>
+          <p:cNvSpPr>
+            <a:spLocks noGrp="1"/>
+          </p:cNvSpPr>
+          <p:nvPr>
+            <p:ph type="sldNum" idx="5" sz="quarter"/>
+          </p:nvPr>
+        </p:nvSpPr>
+        <p:spPr/>
+      </p:sp>
+    </p:spTree>
+  </p:cSld>
+  <p:clrMapOvr>
+    <a:masterClrMapping/>
+  </p:clrMapOvr>
+</p:notes>
+</file>
+
+<file path=ppt/notesSlides/notesSlide10.xml><?xml version="1.0" encoding="utf-8"?>
+<p:notes xmlns:a="http://schemas.openxmlformats.org/drawingml/2006/main" xmlns:p="http://schemas.openxmlformats.org/presentationml/2006/main" xmlns:r="http://schemas.openxmlformats.org/officeDocument/2006/relationships">
+  <p:cSld>
+    <p:spTree>
+      <p:nvGrpSpPr>
+        <p:cNvPr id="1" name=""/>
+        <p:cNvGrpSpPr/>
+        <p:nvPr/>
+      </p:nvGrpSpPr>
+      <p:grpSpPr>
+        <a:xfrm>
+          <a:off x="0" y="0"/>
+          <a:ext cx="0" cy="0"/>
+          <a:chOff x="0" y="0"/>
+          <a:chExt cx="0" cy="0"/>
+        </a:xfrm>
+      </p:grpSpPr>
+      <p:sp>
+        <p:nvSpPr>
+          <p:cNvPr id="2" name="Slide Image Placeholder 1"/>
+          <p:cNvSpPr>
+            <a:spLocks noGrp="1"/>
+          </p:cNvSpPr>
+          <p:nvPr>
+            <p:ph type="sldImg" idx="2"/>
+          </p:nvPr>
+        </p:nvSpPr>
+        <p:spPr/>
+      </p:sp>
+      <p:sp>
+        <p:nvSpPr>
+          <p:cNvPr id="3" name="Notes Placeholder 2"/>
+          <p:cNvSpPr>
+            <a:spLocks noGrp="1"/>
+          </p:cNvSpPr>
+          <p:nvPr>
+            <p:ph type="body" idx="3" sz="quarter"/>
+          </p:nvPr>
+        </p:nvSpPr>
+        <p:spPr/>
+        <p:txBody>
+          <a:bodyPr/>
+          <a:lstStyle/>
+          <a:p>
+            <a:r>
+              <a:t>En DB Fiddle, sin cuenta y en menos de un minuto, se ejecuta el guion completo de CREATE TABLE con claves primarias, foraneas y CHECK, se insertan Ana Perez, Luna y su cita, se corre el JOIN de las tres tablas y, sobre todo, se provoca el error de integridad en vivo insertando una cita con id_mascota inexistente para que el grupo lea el mensaje real del motor.</a:t>
+            </a:r>
+          </a:p>
+          <a:p>
+            <a:r>
+              <a:t>Lo que DB Fiddle no da es persistencia: cada ejecucion recrea el esquema desde cero y no hay usuarios ni roles reales, razon por la cual la Clase 2 trabaja con matriz documentada.</a:t>
+            </a:r>
+          </a:p>
+          <a:p>
+            <a:r>
+              <a:t>Oracle Live SQL exige cuenta gratuita pero conserva esquema y guiones entre sesiones y admite bloques PL/SQL, que es lo que se necesitara desde la Clase 3; conviene que el estudiante la cree hoy y no el dia que la necesite. draw.io corre en el navegador, no pide cuenta y exporta PNG, el formato que pide ExamLab.</a:t>
+            </a:r>
+          </a:p>
+          <a:p>
+            <a:r>
+              <a:t>De ahi sale la regla operativa del curso: la fuente de verdad es el archivo sql en la carpeta del proyecto, nunca la pestana del navegador, y el estudiante va bien si reconstruye el esquema completo en menos de cinco minutos pegando su propio guion.</a:t>
+            </a:r>
+          </a:p>
+        </p:txBody>
+      </p:sp>
+      <p:sp>
+        <p:nvSpPr>
+          <p:cNvPr id="4" name="Slide Number Placeholder 3"/>
+          <p:cNvSpPr>
+            <a:spLocks noGrp="1"/>
+          </p:cNvSpPr>
+          <p:nvPr>
+            <p:ph type="sldNum" idx="5" sz="quarter"/>
+          </p:nvPr>
+        </p:nvSpPr>
+        <p:spPr/>
+      </p:sp>
+    </p:spTree>
+  </p:cSld>
+  <p:clrMapOvr>
+    <a:masterClrMapping/>
+  </p:clrMapOvr>
+</p:notes>
+</file>
+
+<file path=ppt/notesSlides/notesSlide11.xml><?xml version="1.0" encoding="utf-8"?>
+<p:notes xmlns:a="http://schemas.openxmlformats.org/drawingml/2006/main" xmlns:p="http://schemas.openxmlformats.org/presentationml/2006/main" xmlns:r="http://schemas.openxmlformats.org/officeDocument/2006/relationships">
+  <p:cSld>
+    <p:spTree>
+      <p:nvGrpSpPr>
+        <p:cNvPr id="1" name=""/>
+        <p:cNvGrpSpPr/>
+        <p:nvPr/>
+      </p:nvGrpSpPr>
+      <p:grpSpPr>
+        <a:xfrm>
+          <a:off x="0" y="0"/>
+          <a:ext cx="0" cy="0"/>
+          <a:chOff x="0" y="0"/>
+          <a:chExt cx="0" cy="0"/>
+        </a:xfrm>
+      </p:grpSpPr>
+      <p:sp>
+        <p:nvSpPr>
+          <p:cNvPr id="2" name="Slide Image Placeholder 1"/>
+          <p:cNvSpPr>
+            <a:spLocks noGrp="1"/>
+          </p:cNvSpPr>
+          <p:nvPr>
+            <p:ph type="sldImg" idx="2"/>
+          </p:nvPr>
+        </p:nvSpPr>
+        <p:spPr/>
+      </p:sp>
+      <p:sp>
+        <p:nvSpPr>
+          <p:cNvPr id="3" name="Notes Placeholder 2"/>
+          <p:cNvSpPr>
+            <a:spLocks noGrp="1"/>
+          </p:cNvSpPr>
+          <p:nvPr>
+            <p:ph type="body" idx="3" sz="quarter"/>
+          </p:nvPr>
+        </p:nvSpPr>
+        <p:spPr/>
+        <p:txBody>
+          <a:bodyPr/>
+          <a:lstStyle/>
+          <a:p>
+            <a:r>
+              <a:t>Ultimo tramo, y es el que decide si el taller se entrega o no: como pasa el estudiante del dibujo a lo que la plataforma califica.</a:t>
+            </a:r>
+          </a:p>
+          <a:p>
+            <a:r>
+              <a:t>Eso no significa que haya que dibujar escribiendo codigo, y conviene decirlo asi para que nadie se bloquee: el camino corto es disenar visual en draw.io o Excalidraw, que es donde se piensa el modelo, y despues pedirle a una IA que traduzca ese boceto a Mermaid.</a:t>
+            </a:r>
+          </a:p>
+          <a:p>
+            <a:r>
+              <a:t>El PNG exportado se conserva en la carpeta del PI para el informe, pero no reemplaza la respuesta en la plataforma.</a:t>
+            </a:r>
+          </a:p>
+          <a:p>
+            <a:r>
+              <a:t>La demo debe terminar exactamente ahi, y deja los cuatro pasos proyectados mientras el grupo trabaja.</a:t>
+            </a:r>
+          </a:p>
+        </p:txBody>
+      </p:sp>
+      <p:sp>
+        <p:nvSpPr>
+          <p:cNvPr id="4" name="Slide Number Placeholder 3"/>
+          <p:cNvSpPr>
+            <a:spLocks noGrp="1"/>
+          </p:cNvSpPr>
+          <p:nvPr>
+            <p:ph type="sldNum" idx="5" sz="quarter"/>
+          </p:nvPr>
+        </p:nvSpPr>
+        <p:spPr/>
+      </p:sp>
+    </p:spTree>
+  </p:cSld>
+  <p:clrMapOvr>
+    <a:masterClrMapping/>
+  </p:clrMapOvr>
+</p:notes>
+</file>
+
+<file path=ppt/notesSlides/notesSlide12.xml><?xml version="1.0" encoding="utf-8"?>
+<p:notes xmlns:a="http://schemas.openxmlformats.org/drawingml/2006/main" xmlns:p="http://schemas.openxmlformats.org/presentationml/2006/main" xmlns:r="http://schemas.openxmlformats.org/officeDocument/2006/relationships">
+  <p:cSld>
+    <p:spTree>
+      <p:nvGrpSpPr>
+        <p:cNvPr id="1" name=""/>
+        <p:cNvGrpSpPr/>
+        <p:nvPr/>
+      </p:nvGrpSpPr>
+      <p:grpSpPr>
+        <a:xfrm>
+          <a:off x="0" y="0"/>
+          <a:ext cx="0" cy="0"/>
+          <a:chOff x="0" y="0"/>
+          <a:chExt cx="0" cy="0"/>
+        </a:xfrm>
+      </p:grpSpPr>
+      <p:sp>
+        <p:nvSpPr>
+          <p:cNvPr id="2" name="Slide Image Placeholder 1"/>
+          <p:cNvSpPr>
+            <a:spLocks noGrp="1"/>
+          </p:cNvSpPr>
+          <p:nvPr>
+            <p:ph type="sldImg" idx="2"/>
+          </p:nvPr>
+        </p:nvSpPr>
+        <p:spPr/>
+      </p:sp>
+      <p:sp>
+        <p:nvSpPr>
+          <p:cNvPr id="3" name="Notes Placeholder 2"/>
+          <p:cNvSpPr>
+            <a:spLocks noGrp="1"/>
+          </p:cNvSpPr>
+          <p:nvPr>
+            <p:ph type="body" idx="3" sz="quarter"/>
+          </p:nvPr>
+        </p:nvSpPr>
+        <p:spPr/>
+        <p:txBody>
+          <a:bodyPr/>
+          <a:lstStyle/>
+          <a:p>
+            <a:r>
+              <a:t>Tres preguntas aparecen casi siempre y conviene tener la respuesta lista.</a:t>
+            </a:r>
+          </a:p>
+          <a:p>
+            <a:r>
+              <a:t>La respuesta no es doctrinal sino de costo: ahi el telefono de un dueno con veinte citas vive veinte veces y basta una actualizacion parcial para que el sistema mienta; ademas ese diseno impide registrar un dueno sin cita o un insumo sin venta.</a:t>
+            </a:r>
+          </a:p>
+          <a:p>
+            <a:r>
+              <a:t>Esa regla necesita otra herramienta: un CHECK cuando mira solo columnas de la misma fila, un procedimiento almacenado cuando debe consultar otra tabla, que es el hito de la Clase 3, o un disparador cuando debe aplicarse aunque nadie llame al procedimiento, que es el hito de la Clase 4.</a:t>
+            </a:r>
+          </a:p>
+        </p:txBody>
+      </p:sp>
+      <p:sp>
+        <p:nvSpPr>
+          <p:cNvPr id="4" name="Slide Number Placeholder 3"/>
+          <p:cNvSpPr>
+            <a:spLocks noGrp="1"/>
+          </p:cNvSpPr>
+          <p:nvPr>
+            <p:ph type="sldNum" idx="5" sz="quarter"/>
+          </p:nvPr>
+        </p:nvSpPr>
+        <p:spPr/>
+      </p:sp>
+    </p:spTree>
+  </p:cSld>
+  <p:clrMapOvr>
+    <a:masterClrMapping/>
+  </p:clrMapOvr>
+</p:notes>
+</file>
+
+<file path=ppt/notesSlides/notesSlide2.xml><?xml version="1.0" encoding="utf-8"?>
+<p:notes xmlns:a="http://schemas.openxmlformats.org/drawingml/2006/main" xmlns:p="http://schemas.openxmlformats.org/presentationml/2006/main" xmlns:r="http://schemas.openxmlformats.org/officeDocument/2006/relationships">
+  <p:cSld>
+    <p:spTree>
+      <p:nvGrpSpPr>
+        <p:cNvPr id="1" name=""/>
+        <p:cNvGrpSpPr/>
+        <p:nvPr/>
+      </p:nvGrpSpPr>
+      <p:grpSpPr>
+        <a:xfrm>
+          <a:off x="0" y="0"/>
+          <a:ext cx="0" cy="0"/>
+          <a:chOff x="0" y="0"/>
+          <a:chExt cx="0" cy="0"/>
+        </a:xfrm>
+      </p:grpSpPr>
+      <p:sp>
+        <p:nvSpPr>
+          <p:cNvPr id="2" name="Slide Image Placeholder 1"/>
+          <p:cNvSpPr>
+            <a:spLocks noGrp="1"/>
+          </p:cNvSpPr>
+          <p:nvPr>
+            <p:ph type="sldImg" idx="2"/>
+          </p:nvPr>
+        </p:nvSpPr>
+        <p:spPr/>
+      </p:sp>
+      <p:sp>
+        <p:nvSpPr>
+          <p:cNvPr id="3" name="Notes Placeholder 2"/>
+          <p:cNvSpPr>
+            <a:spLocks noGrp="1"/>
+          </p:cNvSpPr>
+          <p:nvPr>
+            <p:ph type="body" idx="3" sz="quarter"/>
+          </p:nvPr>
+        </p:nvSpPr>
+        <p:spPr/>
+        <p:txBody>
+          <a:bodyPr/>
+          <a:lstStyle/>
+          <a:p>
+            <a:r>
+              <a:t>Esta clase parece repetir Bases de Datos I y no lo hace.</a:t>
+            </a:r>
+          </a:p>
+          <a:p>
+            <a:r>
+              <a:t>Conviene fijar el vocabulario operativo antes de dibujar nada.</a:t>
+            </a:r>
+          </a:p>
+          <a:p>
+            <a:r>
+              <a:t>Conviene desactivar una trampa de vocabulario: la palabra dominio se usara hoy con dos sentidos, el de un atributo y el del proyecto, que es la clinica Huellitas.</a:t>
+            </a:r>
+          </a:p>
+        </p:txBody>
+      </p:sp>
+      <p:sp>
+        <p:nvSpPr>
+          <p:cNvPr id="4" name="Slide Number Placeholder 3"/>
+          <p:cNvSpPr>
+            <a:spLocks noGrp="1"/>
+          </p:cNvSpPr>
+          <p:nvPr>
+            <p:ph type="sldNum" idx="5" sz="quarter"/>
+          </p:nvPr>
+        </p:nvSpPr>
+        <p:spPr/>
+      </p:sp>
+    </p:spTree>
+  </p:cSld>
+  <p:clrMapOvr>
+    <a:masterClrMapping/>
+  </p:clrMapOvr>
+</p:notes>
+</file>
+
+<file path=ppt/notesSlides/notesSlide3.xml><?xml version="1.0" encoding="utf-8"?>
+<p:notes xmlns:a="http://schemas.openxmlformats.org/drawingml/2006/main" xmlns:p="http://schemas.openxmlformats.org/presentationml/2006/main" xmlns:r="http://schemas.openxmlformats.org/officeDocument/2006/relationships">
+  <p:cSld>
+    <p:spTree>
+      <p:nvGrpSpPr>
+        <p:cNvPr id="1" name=""/>
+        <p:cNvGrpSpPr/>
+        <p:nvPr/>
+      </p:nvGrpSpPr>
+      <p:grpSpPr>
+        <a:xfrm>
+          <a:off x="0" y="0"/>
+          <a:ext cx="0" cy="0"/>
+          <a:chOff x="0" y="0"/>
+          <a:chExt cx="0" cy="0"/>
+        </a:xfrm>
+      </p:grpSpPr>
+      <p:sp>
+        <p:nvSpPr>
+          <p:cNvPr id="2" name="Slide Image Placeholder 1"/>
+          <p:cNvSpPr>
+            <a:spLocks noGrp="1"/>
+          </p:cNvSpPr>
+          <p:nvPr>
+            <p:ph type="sldImg" idx="2"/>
+          </p:nvPr>
+        </p:nvSpPr>
+        <p:spPr/>
+      </p:sp>
+      <p:sp>
+        <p:nvSpPr>
+          <p:cNvPr id="3" name="Notes Placeholder 2"/>
+          <p:cNvSpPr>
+            <a:spLocks noGrp="1"/>
+          </p:cNvSpPr>
+          <p:nvPr>
+            <p:ph type="body" idx="3" sz="quarter"/>
+          </p:nvPr>
+        </p:nvSpPr>
+        <p:spPr/>
+        <p:txBody>
+          <a:bodyPr/>
+          <a:lstStyle/>
+          <a:p>
+            <a:r>
+              <a:t>Antes de cualquier otra cosa hay que separar dos niveles que el estudiante mezcla y que hoy se recorren los dos.</a:t>
+            </a:r>
+          </a:p>
+          <a:p>
+            <a:r>
+              <a:t>Conviene decirlo en voz alta porque explica por que se exige tipo y longitud en el diagrama: no es decoracion, es lo que hace traducible el dibujo.</a:t>
+            </a:r>
+          </a:p>
+        </p:txBody>
+      </p:sp>
+      <p:sp>
+        <p:nvSpPr>
+          <p:cNvPr id="4" name="Slide Number Placeholder 3"/>
+          <p:cNvSpPr>
+            <a:spLocks noGrp="1"/>
+          </p:cNvSpPr>
+          <p:nvPr>
+            <p:ph type="sldNum" idx="5" sz="quarter"/>
+          </p:nvPr>
+        </p:nvSpPr>
+        <p:spPr/>
+      </p:sp>
+    </p:spTree>
+  </p:cSld>
+  <p:clrMapOvr>
+    <a:masterClrMapping/>
+  </p:clrMapOvr>
+</p:notes>
+</file>
+
+<file path=ppt/notesSlides/notesSlide4.xml><?xml version="1.0" encoding="utf-8"?>
+<p:notes xmlns:a="http://schemas.openxmlformats.org/drawingml/2006/main" xmlns:p="http://schemas.openxmlformats.org/presentationml/2006/main" xmlns:r="http://schemas.openxmlformats.org/officeDocument/2006/relationships">
+  <p:cSld>
+    <p:spTree>
+      <p:nvGrpSpPr>
+        <p:cNvPr id="1" name=""/>
+        <p:cNvGrpSpPr/>
+        <p:nvPr/>
+      </p:nvGrpSpPr>
+      <p:grpSpPr>
+        <a:xfrm>
+          <a:off x="0" y="0"/>
+          <a:ext cx="0" cy="0"/>
+          <a:chOff x="0" y="0"/>
+          <a:chExt cx="0" cy="0"/>
+        </a:xfrm>
+      </p:grpSpPr>
+      <p:sp>
+        <p:nvSpPr>
+          <p:cNvPr id="2" name="Slide Image Placeholder 1"/>
+          <p:cNvSpPr>
+            <a:spLocks noGrp="1"/>
+          </p:cNvSpPr>
+          <p:nvPr>
+            <p:ph type="sldImg" idx="2"/>
+          </p:nvPr>
+        </p:nvSpPr>
+        <p:spPr/>
+      </p:sp>
+      <p:sp>
+        <p:nvSpPr>
+          <p:cNvPr id="3" name="Notes Placeholder 2"/>
+          <p:cNvSpPr>
+            <a:spLocks noGrp="1"/>
+          </p:cNvSpPr>
+          <p:nvPr>
+            <p:ph type="body" idx="3" sz="quarter"/>
+          </p:nvPr>
+        </p:nvSpPr>
+        <p:spPr/>
+        <p:txBody>
+          <a:bodyPr/>
+          <a:lstStyle/>
+          <a:p>
+            <a:r>
+              <a:t>Eso no es estilo, es una restriccion que el motor verifica en cada INSERT y UPDATE y que rechaza con error.</a:t>
+            </a:r>
+          </a:p>
+          <a:p>
+            <a:r>
+              <a:t>La natural ahorra un JOIN cuando se busca por ella; la sustituta gana cuando el dato natural cambia, se repite o todavia no existe.</a:t>
+            </a:r>
+          </a:p>
+          <a:p>
+            <a:r>
+              <a:t>Por eso el esquema usa identificadores sustitutos y guarda el dato natural aparte con unicidad:.</a:t>
+            </a:r>
+          </a:p>
+          <a:p>
+            <a:r>
+              <a:t>UNIQUE impide dos duenos con la misma cedula, permite dejarla nula un rato y permite corregirla sin tocar las filas de mascota que apuntan al dueno.</a:t>
+            </a:r>
+          </a:p>
+        </p:txBody>
+      </p:sp>
+      <p:sp>
+        <p:nvSpPr>
+          <p:cNvPr id="4" name="Slide Number Placeholder 3"/>
+          <p:cNvSpPr>
+            <a:spLocks noGrp="1"/>
+          </p:cNvSpPr>
+          <p:nvPr>
+            <p:ph type="sldNum" idx="5" sz="quarter"/>
+          </p:nvPr>
+        </p:nvSpPr>
+        <p:spPr/>
+      </p:sp>
+    </p:spTree>
+  </p:cSld>
+  <p:clrMapOvr>
+    <a:masterClrMapping/>
+  </p:clrMapOvr>
+</p:notes>
+</file>
+
+<file path=ppt/notesSlides/notesSlide5.xml><?xml version="1.0" encoding="utf-8"?>
+<p:notes xmlns:a="http://schemas.openxmlformats.org/drawingml/2006/main" xmlns:p="http://schemas.openxmlformats.org/presentationml/2006/main" xmlns:r="http://schemas.openxmlformats.org/officeDocument/2006/relationships">
+  <p:cSld>
+    <p:spTree>
+      <p:nvGrpSpPr>
+        <p:cNvPr id="1" name=""/>
+        <p:cNvGrpSpPr/>
+        <p:nvPr/>
+      </p:nvGrpSpPr>
+      <p:grpSpPr>
+        <a:xfrm>
+          <a:off x="0" y="0"/>
+          <a:ext cx="0" cy="0"/>
+          <a:chOff x="0" y="0"/>
+          <a:chExt cx="0" cy="0"/>
+        </a:xfrm>
+      </p:grpSpPr>
+      <p:sp>
+        <p:nvSpPr>
+          <p:cNvPr id="2" name="Slide Image Placeholder 1"/>
+          <p:cNvSpPr>
+            <a:spLocks noGrp="1"/>
+          </p:cNvSpPr>
+          <p:nvPr>
+            <p:ph type="sldImg" idx="2"/>
+          </p:nvPr>
+        </p:nvSpPr>
+        <p:spPr/>
+      </p:sp>
+      <p:sp>
+        <p:nvSpPr>
+          <p:cNvPr id="3" name="Notes Placeholder 2"/>
+          <p:cNvSpPr>
+            <a:spLocks noGrp="1"/>
+          </p:cNvSpPr>
+          <p:nvPr>
+            <p:ph type="body" idx="3" sz="quarter"/>
+          </p:nvPr>
+        </p:nvSpPr>
+        <p:spPr/>
+        <p:txBody>
+          <a:bodyPr/>
+          <a:lstStyle/>
+          <a:p>
+            <a:r>
+              <a:t>Supongamos que el estudiante guarda el telefono del dueno dentro de cada fila de cita.</a:t>
+            </a:r>
+          </a:p>
+          <a:p>
+            <a:r>
+              <a:t>Aparecen tres anomalias.</a:t>
+            </a:r>
+          </a:p>
+          <a:p>
+            <a:r>
+              <a:t>Leidas asi, las tres formas normales son tres vacunas.</a:t>
+            </a:r>
+          </a:p>
+        </p:txBody>
+      </p:sp>
+      <p:sp>
+        <p:nvSpPr>
+          <p:cNvPr id="4" name="Slide Number Placeholder 3"/>
+          <p:cNvSpPr>
+            <a:spLocks noGrp="1"/>
+          </p:cNvSpPr>
+          <p:nvPr>
+            <p:ph type="sldNum" idx="5" sz="quarter"/>
+          </p:nvPr>
+        </p:nvSpPr>
+        <p:spPr/>
+      </p:sp>
+    </p:spTree>
+  </p:cSld>
+  <p:clrMapOvr>
+    <a:masterClrMapping/>
+  </p:clrMapOvr>
+</p:notes>
+</file>
+
+<file path=ppt/notesSlides/notesSlide6.xml><?xml version="1.0" encoding="utf-8"?>
+<p:notes xmlns:a="http://schemas.openxmlformats.org/drawingml/2006/main" xmlns:p="http://schemas.openxmlformats.org/presentationml/2006/main" xmlns:r="http://schemas.openxmlformats.org/officeDocument/2006/relationships">
+  <p:cSld>
+    <p:spTree>
+      <p:nvGrpSpPr>
+        <p:cNvPr id="1" name=""/>
+        <p:cNvGrpSpPr/>
+        <p:nvPr/>
+      </p:nvGrpSpPr>
+      <p:grpSpPr>
+        <a:xfrm>
+          <a:off x="0" y="0"/>
+          <a:ext cx="0" cy="0"/>
+          <a:chOff x="0" y="0"/>
+          <a:chExt cx="0" cy="0"/>
+        </a:xfrm>
+      </p:grpSpPr>
+      <p:sp>
+        <p:nvSpPr>
+          <p:cNvPr id="2" name="Slide Image Placeholder 1"/>
+          <p:cNvSpPr>
+            <a:spLocks noGrp="1"/>
+          </p:cNvSpPr>
+          <p:nvPr>
+            <p:ph type="sldImg" idx="2"/>
+          </p:nvPr>
+        </p:nvSpPr>
+        <p:spPr/>
+      </p:sp>
+      <p:sp>
+        <p:nvSpPr>
+          <p:cNvPr id="3" name="Notes Placeholder 2"/>
+          <p:cNvSpPr>
+            <a:spLocks noGrp="1"/>
+          </p:cNvSpPr>
+          <p:nvPr>
+            <p:ph type="body" idx="3" sz="quarter"/>
+          </p:nvPr>
+        </p:nvSpPr>
+        <p:spPr/>
+        <p:txBody>
+          <a:bodyPr/>
+          <a:lstStyle/>
+          <a:p>
+            <a:r>
+              <a:t>Lo que casi nunca se explica es la otra mitad: que pasa al borrar el padre.</a:t>
+            </a:r>
+          </a:p>
+          <a:p>
+            <a:r>
+              <a:t>Al declarar la clave foranea se elige el comportamiento</a:t>
+            </a:r>
+          </a:p>
+          <a:p>
+            <a:r>
+              <a:t>RESTRICT o NO ACTION impide borrar el dueno mientras tenga mascotas, CASCADE borra las filas hijas en cadena y SET NULL deja la referencia nula.</a:t>
+            </a:r>
+          </a:p>
+          <a:p>
+            <a:r>
+              <a:t>Esa baja logica es la que obliga a validar en la Clase 3 que una mascota inactiva no agende, porque la clave foranea la sigue aceptando: el identificador existe, el negocio no lo quiere.</a:t>
+            </a:r>
+          </a:p>
+        </p:txBody>
+      </p:sp>
+      <p:sp>
+        <p:nvSpPr>
+          <p:cNvPr id="4" name="Slide Number Placeholder 3"/>
+          <p:cNvSpPr>
+            <a:spLocks noGrp="1"/>
+          </p:cNvSpPr>
+          <p:nvPr>
+            <p:ph type="sldNum" idx="5" sz="quarter"/>
+          </p:nvPr>
+        </p:nvSpPr>
+        <p:spPr/>
+      </p:sp>
+    </p:spTree>
+  </p:cSld>
+  <p:clrMapOvr>
+    <a:masterClrMapping/>
+  </p:clrMapOvr>
+</p:notes>
+</file>
+
+<file path=ppt/notesSlides/notesSlide7.xml><?xml version="1.0" encoding="utf-8"?>
+<p:notes xmlns:a="http://schemas.openxmlformats.org/drawingml/2006/main" xmlns:p="http://schemas.openxmlformats.org/presentationml/2006/main" xmlns:r="http://schemas.openxmlformats.org/officeDocument/2006/relationships">
+  <p:cSld>
+    <p:spTree>
+      <p:nvGrpSpPr>
+        <p:cNvPr id="1" name=""/>
+        <p:cNvGrpSpPr/>
+        <p:nvPr/>
+      </p:nvGrpSpPr>
+      <p:grpSpPr>
+        <a:xfrm>
+          <a:off x="0" y="0"/>
+          <a:ext cx="0" cy="0"/>
+          <a:chOff x="0" y="0"/>
+          <a:chExt cx="0" cy="0"/>
+        </a:xfrm>
+      </p:grpSpPr>
+      <p:sp>
+        <p:nvSpPr>
+          <p:cNvPr id="2" name="Slide Image Placeholder 1"/>
+          <p:cNvSpPr>
+            <a:spLocks noGrp="1"/>
+          </p:cNvSpPr>
+          <p:nvPr>
+            <p:ph type="sldImg" idx="2"/>
+          </p:nvPr>
+        </p:nvSpPr>
+        <p:spPr/>
+      </p:sp>
+      <p:sp>
+        <p:nvSpPr>
+          <p:cNvPr id="3" name="Notes Placeholder 2"/>
+          <p:cNvSpPr>
+            <a:spLocks noGrp="1"/>
+          </p:cNvSpPr>
+          <p:nvPr>
+            <p:ph type="body" idx="3" sz="quarter"/>
+          </p:nvPr>
+        </p:nvSpPr>
+        <p:spPr/>
+        <p:txBody>
+          <a:bodyPr/>
+          <a:lstStyle/>
+          <a:p>
+            <a:r>
+              <a:t>Conviene detenerse en la baja logica porque es la decision que sostiene medio semestre y casi nunca se explica.</a:t>
+            </a:r>
+          </a:p>
+          <a:p>
+            <a:r>
+              <a:t>Lo que se hace es marcar la fila como inactiva: activa CHAR(1) DEFAULT 'S' CHECK (activa IN ('S','N')), y las consultas del dia a dia filtran WHERE activa = 'S'.</a:t>
+            </a:r>
+          </a:p>
+          <a:p>
+            <a:r>
+              <a:t>La consecuencia que hay que subrayar, porque es la que abre la Clase 3, es que la clave foranea NO defiende esa regla: para el motor, la mascota inactiva existe y su identificador es valido, asi que aceptara sin chistar una cita nueva sobre ella.</a:t>
+            </a:r>
+          </a:p>
+          <a:p>
+            <a:r>
+              <a:t>Si el estudiante sale hoy con DELETE en la cabeza, en la Clase 3 no va a entender por que hace falta sp_agendar_cita.</a:t>
+            </a:r>
+          </a:p>
+        </p:txBody>
+      </p:sp>
+      <p:sp>
+        <p:nvSpPr>
+          <p:cNvPr id="4" name="Slide Number Placeholder 3"/>
+          <p:cNvSpPr>
+            <a:spLocks noGrp="1"/>
+          </p:cNvSpPr>
+          <p:nvPr>
+            <p:ph type="sldNum" idx="5" sz="quarter"/>
+          </p:nvPr>
+        </p:nvSpPr>
+        <p:spPr/>
+      </p:sp>
+    </p:spTree>
+  </p:cSld>
+  <p:clrMapOvr>
+    <a:masterClrMapping/>
+  </p:clrMapOvr>
+</p:notes>
+</file>
+
+<file path=ppt/notesSlides/notesSlide8.xml><?xml version="1.0" encoding="utf-8"?>
+<p:notes xmlns:a="http://schemas.openxmlformats.org/drawingml/2006/main" xmlns:p="http://schemas.openxmlformats.org/presentationml/2006/main" xmlns:r="http://schemas.openxmlformats.org/officeDocument/2006/relationships">
+  <p:cSld>
+    <p:spTree>
+      <p:nvGrpSpPr>
+        <p:cNvPr id="1" name=""/>
+        <p:cNvGrpSpPr/>
+        <p:nvPr/>
+      </p:nvGrpSpPr>
+      <p:grpSpPr>
+        <a:xfrm>
+          <a:off x="0" y="0"/>
+          <a:ext cx="0" cy="0"/>
+          <a:chOff x="0" y="0"/>
+          <a:chExt cx="0" cy="0"/>
+        </a:xfrm>
+      </p:grpSpPr>
+      <p:sp>
+        <p:nvSpPr>
+          <p:cNvPr id="2" name="Slide Image Placeholder 1"/>
+          <p:cNvSpPr>
+            <a:spLocks noGrp="1"/>
+          </p:cNvSpPr>
+          <p:nvPr>
+            <p:ph type="sldImg" idx="2"/>
+          </p:nvPr>
+        </p:nvSpPr>
+        <p:spPr/>
+      </p:sp>
+      <p:sp>
+        <p:nvSpPr>
+          <p:cNvPr id="3" name="Notes Placeholder 2"/>
+          <p:cNvSpPr>
+            <a:spLocks noGrp="1"/>
+          </p:cNvSpPr>
+          <p:nvPr>
+            <p:ph type="body" idx="3" sz="quarter"/>
+          </p:nvPr>
+        </p:nvSpPr>
+        <p:spPr/>
+        <p:txBody>
+          <a:bodyPr/>
+          <a:lstStyle/>
+          <a:p>
+            <a:r>
+              <a:t>Eso se materializa como consulta.id_cita NOT NULL UNIQUE, no como una clave foranea simple, y decidirlo hoy evita la pregunta que aparece en la Clase 3 cuando alguien intenta registrar la consulta antes de la cita.</a:t>
+            </a:r>
+          </a:p>
+        </p:txBody>
+      </p:sp>
+      <p:sp>
+        <p:nvSpPr>
+          <p:cNvPr id="4" name="Slide Number Placeholder 3"/>
+          <p:cNvSpPr>
+            <a:spLocks noGrp="1"/>
+          </p:cNvSpPr>
+          <p:nvPr>
+            <p:ph type="sldNum" idx="5" sz="quarter"/>
+          </p:nvPr>
+        </p:nvSpPr>
+        <p:spPr/>
+      </p:sp>
+    </p:spTree>
+  </p:cSld>
+  <p:clrMapOvr>
+    <a:masterClrMapping/>
+  </p:clrMapOvr>
+</p:notes>
+</file>
+
+<file path=ppt/notesSlides/notesSlide9.xml><?xml version="1.0" encoding="utf-8"?>
+<p:notes xmlns:a="http://schemas.openxmlformats.org/drawingml/2006/main" xmlns:p="http://schemas.openxmlformats.org/presentationml/2006/main" xmlns:r="http://schemas.openxmlformats.org/officeDocument/2006/relationships">
+  <p:cSld>
+    <p:spTree>
+      <p:nvGrpSpPr>
+        <p:cNvPr id="1" name=""/>
+        <p:cNvGrpSpPr/>
+        <p:nvPr/>
+      </p:nvGrpSpPr>
+      <p:grpSpPr>
+        <a:xfrm>
+          <a:off x="0" y="0"/>
+          <a:ext cx="0" cy="0"/>
+          <a:chOff x="0" y="0"/>
+          <a:chExt cx="0" cy="0"/>
+        </a:xfrm>
+      </p:grpSpPr>
+      <p:sp>
+        <p:nvSpPr>
+          <p:cNvPr id="2" name="Slide Image Placeholder 1"/>
+          <p:cNvSpPr>
+            <a:spLocks noGrp="1"/>
+          </p:cNvSpPr>
+          <p:nvPr>
+            <p:ph type="sldImg" idx="2"/>
+          </p:nvPr>
+        </p:nvSpPr>
+        <p:spPr/>
+      </p:sp>
+      <p:sp>
+        <p:nvSpPr>
+          <p:cNvPr id="3" name="Notes Placeholder 2"/>
+          <p:cNvSpPr>
+            <a:spLocks noGrp="1"/>
+          </p:cNvSpPr>
+          <p:nvPr>
+            <p:ph type="body" idx="3" sz="quarter"/>
+          </p:nvPr>
+        </p:nvSpPr>
+        <p:spPr/>
+        <p:txBody>
+          <a:bodyPr/>
+          <a:lstStyle/>
+          <a:p>
+            <a:r>
+              <a:t>Convenciones de nombres del curso, y hay que exigirlas desde hoy porque el taller se corrige ejecutando el guion en el PostgreSQL que ExamLab trae en el navegador.</a:t>
+            </a:r>
+          </a:p>
+          <a:p>
+            <a:r>
+              <a:t>Identificadores sustitutos uniformes con el patron id_&lt;entidad&gt;, el mismo nombre en la tabla propia y en la que la referencia, para que el JOIN se escriba sin buscar como se llamo la columna alla.</a:t>
+            </a:r>
+          </a:p>
+        </p:txBody>
+      </p:sp>
+      <p:sp>
+        <p:nvSpPr>
+          <p:cNvPr id="4" name="Slide Number Placeholder 3"/>
+          <p:cNvSpPr>
+            <a:spLocks noGrp="1"/>
+          </p:cNvSpPr>
+          <p:nvPr>
+            <p:ph type="sldNum" idx="5" sz="quarter"/>
+          </p:nvPr>
+        </p:nvSpPr>
+        <p:spPr/>
+      </p:sp>
+    </p:spTree>
+  </p:cSld>
+  <p:clrMapOvr>
+    <a:masterClrMapping/>
+  </p:clrMapOvr>
+</p:notes>
 </file>
 
 <file path=ppt/slideLayouts/slideLayout1.xml><?xml version="1.0" encoding="utf-8"?>
@@ -6617,7 +7969,7 @@
                 </a:solidFill>
                 <a:latin typeface="Calibri"/>
               </a:rPr>
-              <a:t>Encuadre de hoy · Objetivo PI</a:t>
+              <a:t>Encuadre de hoy · Tema y objetivo</a:t>
             </a:r>
           </a:p>
         </p:txBody>
@@ -6665,7 +8017,7 @@
                 </a:solidFill>
                 <a:latin typeface="Calibri"/>
               </a:rPr>
-              <a:t>Hoy avanzamos el PI en:</a:t>
+              <a:t>Tema de hoy:</a:t>
             </a:r>
             <a:r>
               <a:rPr sz="2000" b="0" i="0">
@@ -6674,7 +8026,7 @@
                 </a:solidFill>
                 <a:latin typeface="Calibri"/>
               </a:rPr>
-              <a:t> Arranque PI: dominio, alcance y borrador ER de VetCare DB</a:t>
+              <a:t> Revision BD I · Arranque VetCare DB</a:t>
             </a:r>
           </a:p>
           <a:p>
@@ -6719,15 +8071,6 @@
               </a:rPr>
               <a:t>120 min</a:t>
             </a:r>
-            <a:r>
-              <a:rPr sz="2000" b="0" i="0">
-                <a:solidFill>
-                  <a:srgbClr val="333333"/>
-                </a:solidFill>
-                <a:latin typeface="Calibri"/>
-              </a:rPr>
-              <a:t> · Teoría breve · Taller PI</a:t>
-            </a:r>
           </a:p>
           <a:p>
             <a:pPr>
@@ -6742,25 +8085,7 @@
                 </a:solidFill>
                 <a:latin typeface="Calibri"/>
               </a:rPr>
-              <a:t>–   </a:t>
-            </a:r>
-            <a:r>
-              <a:rPr sz="2000" b="1" i="0">
-                <a:solidFill>
-                  <a:srgbClr val="333333"/>
-                </a:solidFill>
-                <a:latin typeface="Calibri"/>
-              </a:rPr>
-              <a:t>Entregable de hoy:</a:t>
-            </a:r>
-            <a:r>
-              <a:rPr sz="2000" b="0" i="0">
-                <a:solidFill>
-                  <a:srgbClr val="333333"/>
-                </a:solidFill>
-                <a:latin typeface="Calibri"/>
-              </a:rPr>
-              <a:t> Ficha del PI (plantilla) + ER en Mermaid renderizado en la plataforma del curso (PNG para tu carpeta) + 3 reglas Condicion -&gt; Accion</a:t>
+              <a:t>–   Gratis + navegador · free tier · sin software de pago obligatorio.</a:t>
             </a:r>
           </a:p>
           <a:p>
@@ -6776,7 +8101,7 @@
                 </a:solidFill>
                 <a:latin typeface="Calibri"/>
               </a:rPr>
-              <a:t>–   Gratis + navegador · free tier · sin software de pago obligatorio.</a:t>
+              <a:t>–   Recorrido: teoría del tema, una lámina por concepto, y demo del docente sobre VetCare DB.</a:t>
             </a:r>
           </a:p>
           <a:p>
@@ -6792,23 +8117,7 @@
                 </a:solidFill>
                 <a:latin typeface="Calibri"/>
               </a:rPr>
-              <a:t>–   La teoría no es un tema aislado: alimenta evidencias de la rúbrica del PI.</a:t>
-            </a:r>
-          </a:p>
-          <a:p>
-            <a:pPr>
-              <a:spcAft>
-                <a:spcPts val="800"/>
-              </a:spcAft>
-            </a:pPr>
-            <a:r>
-              <a:rPr sz="2000" b="0" i="0">
-                <a:solidFill>
-                  <a:srgbClr val="333333"/>
-                </a:solidFill>
-                <a:latin typeface="Calibri"/>
-              </a:rPr>
-              <a:t>–   Al salir: avance concreto en su paquete VetCare.</a:t>
+              <a:t>–   Cada lámina se sostiene sola: sirve para repasar aunque hayas faltado.</a:t>
             </a:r>
           </a:p>
         </p:txBody>
@@ -10788,7 +12097,7 @@
                 </a:solidFill>
                 <a:latin typeface="Calibri"/>
               </a:rPr>
-              <a:t>Taller guiado = tarea del PI</a:t>
+              <a:t>Práctica (opcional, guía en la carpeta)</a:t>
             </a:r>
           </a:p>
         </p:txBody>
@@ -10903,7 +12212,7 @@
                 </a:solidFill>
                 <a:latin typeface="Calibri"/>
               </a:rPr>
-              <a:t>Criterios de exito · cierre · dudas del PI</a:t>
+              <a:t>Cierre conceptual · dudas</a:t>
             </a:r>
           </a:p>
         </p:txBody>
@@ -13583,7 +14892,7 @@
                 </a:solidFill>
                 <a:latin typeface="Calibri"/>
               </a:rPr>
-              <a:t>Herramientas de hoy</a:t>
+              <a:t>Del boceto a la plataforma del curso (diagrama)</a:t>
             </a:r>
           </a:p>
         </p:txBody>
@@ -13617,7 +14926,7 @@
                 </a:solidFill>
                 <a:latin typeface="Calibri"/>
               </a:rPr>
-              <a:t>Gratis · navegador o free tier</a:t>
+              <a:t>El diagrama se entrega como codigo Mermaid dentro de la plataforma del curso, no como imagen</a:t>
             </a:r>
           </a:p>
         </p:txBody>
@@ -13630,8 +14939,8 @@
         </p:nvSpPr>
         <p:spPr>
           <a:xfrm>
-            <a:off x="457200" y="1591056"/>
-            <a:ext cx="3624986" cy="2299716"/>
+            <a:off x="457200" y="1659636"/>
+            <a:ext cx="11277295" cy="1051560"/>
           </a:xfrm>
           <a:prstGeom prst="roundRect">
             <a:avLst>
@@ -13669,17 +14978,19 @@
       </p:sp>
       <p:sp>
         <p:nvSpPr>
-          <p:cNvPr id="7" name="Rectangle 6"/>
+          <p:cNvPr id="7" name="Rounded Rectangle 6"/>
           <p:cNvSpPr/>
           <p:nvPr/>
         </p:nvSpPr>
         <p:spPr>
           <a:xfrm>
-            <a:off x="457200" y="1591056"/>
-            <a:ext cx="3624986" cy="64008"/>
-          </a:xfrm>
-          <a:prstGeom prst="rect">
-            <a:avLst/>
+            <a:off x="594360" y="1965960"/>
+            <a:ext cx="438912" cy="438912"/>
+          </a:xfrm>
+          <a:prstGeom prst="roundRect">
+            <a:avLst>
+              <a:gd name="adj" fmla="val 12000"/>
+            </a:avLst>
           </a:prstGeom>
           <a:solidFill>
             <a:srgbClr val="095292"/>
@@ -13712,20 +15023,103 @@
       </p:sp>
       <p:sp>
         <p:nvSpPr>
-          <p:cNvPr id="8" name="Rectangle 7"/>
+          <p:cNvPr id="8" name="TextBox 7"/>
+          <p:cNvSpPr txBox="1"/>
+          <p:nvPr/>
+        </p:nvSpPr>
+        <p:spPr>
+          <a:xfrm>
+            <a:off x="594360" y="1965960"/>
+            <a:ext cx="438912" cy="438912"/>
+          </a:xfrm>
+          <a:prstGeom prst="rect">
+            <a:avLst/>
+          </a:prstGeom>
+          <a:noFill/>
+        </p:spPr>
+        <p:txBody>
+          <a:bodyPr wrap="square" anchor="ctr"/>
+          <a:lstStyle/>
+          <a:p>
+            <a:pPr algn="ctr"/>
+            <a:r>
+              <a:rPr sz="1600" b="1" i="0">
+                <a:solidFill>
+                  <a:srgbClr val="FFFFFF"/>
+                </a:solidFill>
+                <a:latin typeface="Calibri"/>
+              </a:rPr>
+              <a:t>1</a:t>
+            </a:r>
+          </a:p>
+        </p:txBody>
+      </p:sp>
+      <p:sp>
+        <p:nvSpPr>
+          <p:cNvPr id="9" name="TextBox 8"/>
+          <p:cNvSpPr txBox="1"/>
+          <p:nvPr/>
+        </p:nvSpPr>
+        <p:spPr>
+          <a:xfrm>
+            <a:off x="1188720" y="1751076"/>
+            <a:ext cx="10271455" cy="886968"/>
+          </a:xfrm>
+          <a:prstGeom prst="rect">
+            <a:avLst/>
+          </a:prstGeom>
+          <a:noFill/>
+        </p:spPr>
+        <p:txBody>
+          <a:bodyPr wrap="square" anchor="ctr"/>
+          <a:lstStyle/>
+          <a:p>
+            <a:r>
+              <a:rPr sz="1500" b="1" i="0">
+                <a:solidFill>
+                  <a:srgbClr val="095292"/>
+                </a:solidFill>
+                <a:latin typeface="Calibri"/>
+              </a:rPr>
+              <a:t>Disena visual</a:t>
+            </a:r>
+          </a:p>
+          <a:p>
+            <a:pPr>
+              <a:spcBef>
+                <a:spcPts val="200"/>
+              </a:spcBef>
+            </a:pPr>
+            <a:r>
+              <a:rPr sz="1300" b="0" i="0">
+                <a:solidFill>
+                  <a:srgbClr val="333333"/>
+                </a:solidFill>
+                <a:latin typeface="Calibri"/>
+              </a:rPr>
+              <a:t>Dibuja el diagrama como quieras en Excalidraw o draw.io: es mas rapido arrastrar cajas que escribir codigo, y ahi es donde piensas el modelo.</a:t>
+            </a:r>
+          </a:p>
+        </p:txBody>
+      </p:sp>
+      <p:sp>
+        <p:nvSpPr>
+          <p:cNvPr id="10" name="Rounded Rectangle 9"/>
           <p:cNvSpPr/>
           <p:nvPr/>
         </p:nvSpPr>
         <p:spPr>
           <a:xfrm>
-            <a:off x="457200" y="1655064"/>
-            <a:ext cx="3624986" cy="27432"/>
-          </a:xfrm>
-          <a:prstGeom prst="rect">
-            <a:avLst/>
+            <a:off x="457200" y="2802636"/>
+            <a:ext cx="11277295" cy="1051560"/>
+          </a:xfrm>
+          <a:prstGeom prst="roundRect">
+            <a:avLst>
+              <a:gd name="adj" fmla="val 12000"/>
+            </a:avLst>
           </a:prstGeom>
           <a:solidFill>
-            <a:srgbClr val="FFD000"/>
+            <a:srgbClr val="E8F4FA"/>
           </a:solidFill>
           <a:ln>
             <a:noFill/>
@@ -13753,40 +15147,61 @@
           </a:p>
         </p:txBody>
       </p:sp>
-      <p:pic>
-        <p:nvPicPr>
-          <p:cNvPr id="9" name="Picture 8" descr="drawio.png"/>
-          <p:cNvPicPr>
-            <a:picLocks noChangeAspect="1"/>
-          </p:cNvPicPr>
-          <p:nvPr/>
-        </p:nvPicPr>
-        <p:blipFill>
-          <a:blip r:embed="rId2"/>
-          <a:stretch>
-            <a:fillRect/>
-          </a:stretch>
-        </p:blipFill>
-        <p:spPr>
-          <a:xfrm>
-            <a:off x="1659331" y="1847087"/>
-            <a:ext cx="1220724" cy="1220724"/>
-          </a:xfrm>
-          <a:prstGeom prst="rect">
-            <a:avLst/>
-          </a:prstGeom>
-        </p:spPr>
-      </p:pic>
-      <p:sp>
-        <p:nvSpPr>
-          <p:cNvPr id="10" name="TextBox 9"/>
+      <p:sp>
+        <p:nvSpPr>
+          <p:cNvPr id="11" name="Rounded Rectangle 10"/>
+          <p:cNvSpPr/>
+          <p:nvPr/>
+        </p:nvSpPr>
+        <p:spPr>
+          <a:xfrm>
+            <a:off x="594360" y="3108960"/>
+            <a:ext cx="438912" cy="438912"/>
+          </a:xfrm>
+          <a:prstGeom prst="roundRect">
+            <a:avLst>
+              <a:gd name="adj" fmla="val 12000"/>
+            </a:avLst>
+          </a:prstGeom>
+          <a:solidFill>
+            <a:srgbClr val="095292"/>
+          </a:solidFill>
+          <a:ln>
+            <a:noFill/>
+          </a:ln>
+        </p:spPr>
+        <p:style>
+          <a:lnRef idx="1">
+            <a:schemeClr val="accent1"/>
+          </a:lnRef>
+          <a:fillRef idx="3">
+            <a:schemeClr val="accent1"/>
+          </a:fillRef>
+          <a:effectRef idx="2">
+            <a:schemeClr val="accent1"/>
+          </a:effectRef>
+          <a:fontRef idx="minor">
+            <a:schemeClr val="lt1"/>
+          </a:fontRef>
+        </p:style>
+        <p:txBody>
+          <a:bodyPr rtlCol="0" anchor="ctr"/>
+          <a:lstStyle/>
+          <a:p>
+            <a:pPr algn="ctr"/>
+          </a:p>
+        </p:txBody>
+      </p:sp>
+      <p:sp>
+        <p:nvSpPr>
+          <p:cNvPr id="12" name="TextBox 11"/>
           <p:cNvSpPr txBox="1"/>
           <p:nvPr/>
         </p:nvSpPr>
         <p:spPr>
           <a:xfrm>
-            <a:off x="530352" y="3159251"/>
-            <a:ext cx="3478682" cy="621792"/>
+            <a:off x="594360" y="3108960"/>
+            <a:ext cx="438912" cy="438912"/>
           </a:xfrm>
           <a:prstGeom prst="rect">
             <a:avLst/>
@@ -13794,48 +15209,80 @@
           <a:noFill/>
         </p:spPr>
         <p:txBody>
-          <a:bodyPr wrap="square" anchor="t"/>
+          <a:bodyPr wrap="square" anchor="ctr"/>
           <a:lstStyle/>
           <a:p>
             <a:pPr algn="ctr"/>
             <a:r>
-              <a:rPr sz="1300" b="1" i="0">
+              <a:rPr sz="1600" b="1" i="0">
+                <a:solidFill>
+                  <a:srgbClr val="FFFFFF"/>
+                </a:solidFill>
+                <a:latin typeface="Calibri"/>
+              </a:rPr>
+              <a:t>2</a:t>
+            </a:r>
+          </a:p>
+        </p:txBody>
+      </p:sp>
+      <p:sp>
+        <p:nvSpPr>
+          <p:cNvPr id="13" name="TextBox 12"/>
+          <p:cNvSpPr txBox="1"/>
+          <p:nvPr/>
+        </p:nvSpPr>
+        <p:spPr>
+          <a:xfrm>
+            <a:off x="1188720" y="2894076"/>
+            <a:ext cx="10271455" cy="886968"/>
+          </a:xfrm>
+          <a:prstGeom prst="rect">
+            <a:avLst/>
+          </a:prstGeom>
+          <a:noFill/>
+        </p:spPr>
+        <p:txBody>
+          <a:bodyPr wrap="square" anchor="ctr"/>
+          <a:lstStyle/>
+          <a:p>
+            <a:r>
+              <a:rPr sz="1500" b="1" i="0">
                 <a:solidFill>
                   <a:srgbClr val="095292"/>
                 </a:solidFill>
                 <a:latin typeface="Calibri"/>
               </a:rPr>
-              <a:t>draw.io</a:t>
-            </a:r>
-          </a:p>
-          <a:p>
-            <a:pPr algn="ctr">
+              <a:t>Traduce con IA</a:t>
+            </a:r>
+          </a:p>
+          <a:p>
+            <a:pPr>
               <a:spcBef>
                 <a:spcPts val="200"/>
               </a:spcBef>
             </a:pPr>
             <a:r>
-              <a:rPr sz="1000" b="0" i="0">
-                <a:solidFill>
-                  <a:srgbClr val="666666"/>
-                </a:solidFill>
-                <a:latin typeface="Calibri"/>
-              </a:rPr>
-              <a:t>ER VetCare</a:t>
-            </a:r>
-          </a:p>
-        </p:txBody>
-      </p:sp>
-      <p:sp>
-        <p:nvSpPr>
-          <p:cNvPr id="11" name="Rounded Rectangle 10"/>
+              <a:rPr sz="1300" b="0" i="0">
+                <a:solidFill>
+                  <a:srgbClr val="333333"/>
+                </a:solidFill>
+                <a:latin typeface="Calibri"/>
+              </a:rPr>
+              <a:t>Copia o describe tu boceto a una IA y pidele el codigo Mermaid: «convierte este diagrama a Mermaid usando erDiagram». Revisa el resultado: la IA acierta la sintaxis, no tu modelo.</a:t>
+            </a:r>
+          </a:p>
+        </p:txBody>
+      </p:sp>
+      <p:sp>
+        <p:nvSpPr>
+          <p:cNvPr id="14" name="Rounded Rectangle 13"/>
           <p:cNvSpPr/>
           <p:nvPr/>
         </p:nvSpPr>
         <p:spPr>
           <a:xfrm>
-            <a:off x="4283354" y="1591056"/>
-            <a:ext cx="3624986" cy="2299716"/>
+            <a:off x="457200" y="3945636"/>
+            <a:ext cx="11277295" cy="1051560"/>
           </a:xfrm>
           <a:prstGeom prst="roundRect">
             <a:avLst>
@@ -13873,17 +15320,19 @@
       </p:sp>
       <p:sp>
         <p:nvSpPr>
-          <p:cNvPr id="12" name="Rectangle 11"/>
+          <p:cNvPr id="15" name="Rounded Rectangle 14"/>
           <p:cNvSpPr/>
           <p:nvPr/>
         </p:nvSpPr>
         <p:spPr>
           <a:xfrm>
-            <a:off x="4283354" y="1591056"/>
-            <a:ext cx="3624986" cy="64008"/>
-          </a:xfrm>
-          <a:prstGeom prst="rect">
-            <a:avLst/>
+            <a:off x="594360" y="4251960"/>
+            <a:ext cx="438912" cy="438912"/>
+          </a:xfrm>
+          <a:prstGeom prst="roundRect">
+            <a:avLst>
+              <a:gd name="adj" fmla="val 12000"/>
+            </a:avLst>
           </a:prstGeom>
           <a:solidFill>
             <a:srgbClr val="095292"/>
@@ -13916,20 +15365,103 @@
       </p:sp>
       <p:sp>
         <p:nvSpPr>
-          <p:cNvPr id="13" name="Rectangle 12"/>
+          <p:cNvPr id="16" name="TextBox 15"/>
+          <p:cNvSpPr txBox="1"/>
+          <p:nvPr/>
+        </p:nvSpPr>
+        <p:spPr>
+          <a:xfrm>
+            <a:off x="594360" y="4251960"/>
+            <a:ext cx="438912" cy="438912"/>
+          </a:xfrm>
+          <a:prstGeom prst="rect">
+            <a:avLst/>
+          </a:prstGeom>
+          <a:noFill/>
+        </p:spPr>
+        <p:txBody>
+          <a:bodyPr wrap="square" anchor="ctr"/>
+          <a:lstStyle/>
+          <a:p>
+            <a:pPr algn="ctr"/>
+            <a:r>
+              <a:rPr sz="1600" b="1" i="0">
+                <a:solidFill>
+                  <a:srgbClr val="FFFFFF"/>
+                </a:solidFill>
+                <a:latin typeface="Calibri"/>
+              </a:rPr>
+              <a:t>3</a:t>
+            </a:r>
+          </a:p>
+        </p:txBody>
+      </p:sp>
+      <p:sp>
+        <p:nvSpPr>
+          <p:cNvPr id="17" name="TextBox 16"/>
+          <p:cNvSpPr txBox="1"/>
+          <p:nvPr/>
+        </p:nvSpPr>
+        <p:spPr>
+          <a:xfrm>
+            <a:off x="1188720" y="4037076"/>
+            <a:ext cx="10271455" cy="886968"/>
+          </a:xfrm>
+          <a:prstGeom prst="rect">
+            <a:avLst/>
+          </a:prstGeom>
+          <a:noFill/>
+        </p:spPr>
+        <p:txBody>
+          <a:bodyPr wrap="square" anchor="ctr"/>
+          <a:lstStyle/>
+          <a:p>
+            <a:r>
+              <a:rPr sz="1500" b="1" i="0">
+                <a:solidFill>
+                  <a:srgbClr val="095292"/>
+                </a:solidFill>
+                <a:latin typeface="Calibri"/>
+              </a:rPr>
+              <a:t>Pega y renderiza en la plataforma del curso</a:t>
+            </a:r>
+          </a:p>
+          <a:p>
+            <a:pPr>
+              <a:spcBef>
+                <a:spcPts val="200"/>
+              </a:spcBef>
+            </a:pPr>
+            <a:r>
+              <a:rPr sz="1300" b="0" i="0">
+                <a:solidFill>
+                  <a:srgbClr val="333333"/>
+                </a:solidFill>
+                <a:latin typeface="Calibri"/>
+              </a:rPr>
+              <a:t>Pega ese codigo en la caja de texto de la pregunta y mira como lo dibuja la plataforma. Si no renderiza, corrige ahi mismo: lo que se califica es el diagrama renderizado dentro de la plataforma del curso.</a:t>
+            </a:r>
+          </a:p>
+        </p:txBody>
+      </p:sp>
+      <p:sp>
+        <p:nvSpPr>
+          <p:cNvPr id="18" name="Rounded Rectangle 17"/>
           <p:cNvSpPr/>
           <p:nvPr/>
         </p:nvSpPr>
         <p:spPr>
           <a:xfrm>
-            <a:off x="4283354" y="1655064"/>
-            <a:ext cx="3624986" cy="27432"/>
-          </a:xfrm>
-          <a:prstGeom prst="rect">
-            <a:avLst/>
+            <a:off x="457200" y="5088636"/>
+            <a:ext cx="11277295" cy="1051560"/>
+          </a:xfrm>
+          <a:prstGeom prst="roundRect">
+            <a:avLst>
+              <a:gd name="adj" fmla="val 12000"/>
+            </a:avLst>
           </a:prstGeom>
           <a:solidFill>
-            <a:srgbClr val="FFD000"/>
+            <a:srgbClr val="E8F4FA"/>
           </a:solidFill>
           <a:ln>
             <a:noFill/>
@@ -13957,137 +15489,21 @@
           </a:p>
         </p:txBody>
       </p:sp>
-      <p:pic>
-        <p:nvPicPr>
-          <p:cNvPr id="14" name="Picture 13" descr="dbfiddle.png"/>
-          <p:cNvPicPr>
-            <a:picLocks noChangeAspect="1"/>
-          </p:cNvPicPr>
-          <p:nvPr/>
-        </p:nvPicPr>
-        <p:blipFill>
-          <a:blip r:embed="rId3"/>
-          <a:stretch>
-            <a:fillRect/>
-          </a:stretch>
-        </p:blipFill>
-        <p:spPr>
-          <a:xfrm>
-            <a:off x="5485485" y="1847087"/>
-            <a:ext cx="1220724" cy="1220724"/>
-          </a:xfrm>
-          <a:prstGeom prst="rect">
-            <a:avLst/>
-          </a:prstGeom>
-        </p:spPr>
-      </p:pic>
-      <p:sp>
-        <p:nvSpPr>
-          <p:cNvPr id="15" name="TextBox 14"/>
-          <p:cNvSpPr txBox="1"/>
-          <p:nvPr/>
-        </p:nvSpPr>
-        <p:spPr>
-          <a:xfrm>
-            <a:off x="4356506" y="3159251"/>
-            <a:ext cx="3478682" cy="621792"/>
-          </a:xfrm>
-          <a:prstGeom prst="rect">
-            <a:avLst/>
-          </a:prstGeom>
-          <a:noFill/>
-        </p:spPr>
-        <p:txBody>
-          <a:bodyPr wrap="square" anchor="t"/>
-          <a:lstStyle/>
-          <a:p>
-            <a:pPr algn="ctr"/>
-            <a:r>
-              <a:rPr sz="1300" b="1" i="0">
-                <a:solidFill>
-                  <a:srgbClr val="095292"/>
-                </a:solidFill>
-                <a:latin typeface="Calibri"/>
-              </a:rPr>
-              <a:t>DB Fiddle</a:t>
-            </a:r>
-          </a:p>
-          <a:p>
-            <a:pPr algn="ctr">
-              <a:spcBef>
-                <a:spcPts val="200"/>
-              </a:spcBef>
-            </a:pPr>
-            <a:r>
-              <a:rPr sz="1000" b="0" i="0">
-                <a:solidFill>
-                  <a:srgbClr val="666666"/>
-                </a:solidFill>
-                <a:latin typeface="Calibri"/>
-              </a:rPr>
-              <a:t>DDL demo</a:t>
-            </a:r>
-          </a:p>
-        </p:txBody>
-      </p:sp>
-      <p:sp>
-        <p:nvSpPr>
-          <p:cNvPr id="16" name="Rounded Rectangle 15"/>
+      <p:sp>
+        <p:nvSpPr>
+          <p:cNvPr id="19" name="Rounded Rectangle 18"/>
           <p:cNvSpPr/>
           <p:nvPr/>
         </p:nvSpPr>
         <p:spPr>
           <a:xfrm>
-            <a:off x="8109508" y="1591056"/>
-            <a:ext cx="3624986" cy="2299716"/>
+            <a:off x="594360" y="5394960"/>
+            <a:ext cx="438912" cy="438912"/>
           </a:xfrm>
           <a:prstGeom prst="roundRect">
             <a:avLst>
               <a:gd name="adj" fmla="val 12000"/>
             </a:avLst>
-          </a:prstGeom>
-          <a:solidFill>
-            <a:srgbClr val="F2F2F2"/>
-          </a:solidFill>
-          <a:ln>
-            <a:noFill/>
-          </a:ln>
-        </p:spPr>
-        <p:style>
-          <a:lnRef idx="1">
-            <a:schemeClr val="accent1"/>
-          </a:lnRef>
-          <a:fillRef idx="3">
-            <a:schemeClr val="accent1"/>
-          </a:fillRef>
-          <a:effectRef idx="2">
-            <a:schemeClr val="accent1"/>
-          </a:effectRef>
-          <a:fontRef idx="minor">
-            <a:schemeClr val="lt1"/>
-          </a:fontRef>
-        </p:style>
-        <p:txBody>
-          <a:bodyPr rtlCol="0" anchor="ctr"/>
-          <a:lstStyle/>
-          <a:p>
-            <a:pPr algn="ctr"/>
-          </a:p>
-        </p:txBody>
-      </p:sp>
-      <p:sp>
-        <p:nvSpPr>
-          <p:cNvPr id="17" name="Rectangle 16"/>
-          <p:cNvSpPr/>
-          <p:nvPr/>
-        </p:nvSpPr>
-        <p:spPr>
-          <a:xfrm>
-            <a:off x="8109508" y="1591056"/>
-            <a:ext cx="3624986" cy="64008"/>
-          </a:xfrm>
-          <a:prstGeom prst="rect">
-            <a:avLst/>
           </a:prstGeom>
           <a:solidFill>
             <a:srgbClr val="095292"/>
@@ -14120,81 +15536,14 @@
       </p:sp>
       <p:sp>
         <p:nvSpPr>
-          <p:cNvPr id="18" name="Rectangle 17"/>
-          <p:cNvSpPr/>
-          <p:nvPr/>
-        </p:nvSpPr>
-        <p:spPr>
-          <a:xfrm>
-            <a:off x="8109508" y="1655064"/>
-            <a:ext cx="3624986" cy="27432"/>
-          </a:xfrm>
-          <a:prstGeom prst="rect">
-            <a:avLst/>
-          </a:prstGeom>
-          <a:solidFill>
-            <a:srgbClr val="FFD000"/>
-          </a:solidFill>
-          <a:ln>
-            <a:noFill/>
-          </a:ln>
-        </p:spPr>
-        <p:style>
-          <a:lnRef idx="1">
-            <a:schemeClr val="accent1"/>
-          </a:lnRef>
-          <a:fillRef idx="3">
-            <a:schemeClr val="accent1"/>
-          </a:fillRef>
-          <a:effectRef idx="2">
-            <a:schemeClr val="accent1"/>
-          </a:effectRef>
-          <a:fontRef idx="minor">
-            <a:schemeClr val="lt1"/>
-          </a:fontRef>
-        </p:style>
-        <p:txBody>
-          <a:bodyPr rtlCol="0" anchor="ctr"/>
-          <a:lstStyle/>
-          <a:p>
-            <a:pPr algn="ctr"/>
-          </a:p>
-        </p:txBody>
-      </p:sp>
-      <p:pic>
-        <p:nvPicPr>
-          <p:cNvPr id="19" name="Picture 18" descr="oracle_livesql.png"/>
-          <p:cNvPicPr>
-            <a:picLocks noChangeAspect="1"/>
-          </p:cNvPicPr>
-          <p:nvPr/>
-        </p:nvPicPr>
-        <p:blipFill>
-          <a:blip r:embed="rId4"/>
-          <a:stretch>
-            <a:fillRect/>
-          </a:stretch>
-        </p:blipFill>
-        <p:spPr>
-          <a:xfrm>
-            <a:off x="9311640" y="1847087"/>
-            <a:ext cx="1220724" cy="1220724"/>
-          </a:xfrm>
-          <a:prstGeom prst="rect">
-            <a:avLst/>
-          </a:prstGeom>
-        </p:spPr>
-      </p:pic>
-      <p:sp>
-        <p:nvSpPr>
           <p:cNvPr id="20" name="TextBox 19"/>
           <p:cNvSpPr txBox="1"/>
           <p:nvPr/>
         </p:nvSpPr>
         <p:spPr>
           <a:xfrm>
-            <a:off x="8182660" y="3159251"/>
-            <a:ext cx="3478682" cy="621792"/>
+            <a:off x="594360" y="5394960"/>
+            <a:ext cx="438912" cy="438912"/>
           </a:xfrm>
           <a:prstGeom prst="rect">
             <a:avLst/>
@@ -14202,653 +15551,73 @@
           <a:noFill/>
         </p:spPr>
         <p:txBody>
-          <a:bodyPr wrap="square" anchor="t"/>
+          <a:bodyPr wrap="square" anchor="ctr"/>
           <a:lstStyle/>
           <a:p>
             <a:pPr algn="ctr"/>
             <a:r>
-              <a:rPr sz="1300" b="1" i="0">
+              <a:rPr sz="1600" b="1" i="0">
+                <a:solidFill>
+                  <a:srgbClr val="FFFFFF"/>
+                </a:solidFill>
+                <a:latin typeface="Calibri"/>
+              </a:rPr>
+              <a:t>4</a:t>
+            </a:r>
+          </a:p>
+        </p:txBody>
+      </p:sp>
+      <p:sp>
+        <p:nvSpPr>
+          <p:cNvPr id="21" name="TextBox 20"/>
+          <p:cNvSpPr txBox="1"/>
+          <p:nvPr/>
+        </p:nvSpPr>
+        <p:spPr>
+          <a:xfrm>
+            <a:off x="1188720" y="5180076"/>
+            <a:ext cx="10271455" cy="886968"/>
+          </a:xfrm>
+          <a:prstGeom prst="rect">
+            <a:avLst/>
+          </a:prstGeom>
+          <a:noFill/>
+        </p:spPr>
+        <p:txBody>
+          <a:bodyPr wrap="square" anchor="ctr"/>
+          <a:lstStyle/>
+          <a:p>
+            <a:r>
+              <a:rPr sz="1500" b="1" i="0">
                 <a:solidFill>
                   <a:srgbClr val="095292"/>
                 </a:solidFill>
                 <a:latin typeface="Calibri"/>
               </a:rPr>
-              <a:t>Oracle Live SQL</a:t>
-            </a:r>
-          </a:p>
-          <a:p>
-            <a:pPr algn="ctr">
+              <a:t>Guarda el PNG para tu PI</a:t>
+            </a:r>
+          </a:p>
+          <a:p>
+            <a:pPr>
               <a:spcBef>
                 <a:spcPts val="200"/>
               </a:spcBef>
             </a:pPr>
             <a:r>
-              <a:rPr sz="1000" b="0" i="0">
-                <a:solidFill>
-                  <a:srgbClr val="666666"/>
-                </a:solidFill>
-                <a:latin typeface="Calibri"/>
-              </a:rPr>
-              <a:t>Playground</a:t>
-            </a:r>
-          </a:p>
-        </p:txBody>
-      </p:sp>
-      <p:sp>
-        <p:nvSpPr>
-          <p:cNvPr id="21" name="Rounded Rectangle 20"/>
-          <p:cNvSpPr/>
-          <p:nvPr/>
-        </p:nvSpPr>
-        <p:spPr>
-          <a:xfrm>
-            <a:off x="457200" y="4055364"/>
-            <a:ext cx="3624986" cy="2299716"/>
-          </a:xfrm>
-          <a:prstGeom prst="roundRect">
-            <a:avLst>
-              <a:gd name="adj" fmla="val 12000"/>
-            </a:avLst>
-          </a:prstGeom>
-          <a:solidFill>
-            <a:srgbClr val="F2F2F2"/>
-          </a:solidFill>
-          <a:ln>
-            <a:noFill/>
-          </a:ln>
-        </p:spPr>
-        <p:style>
-          <a:lnRef idx="1">
-            <a:schemeClr val="accent1"/>
-          </a:lnRef>
-          <a:fillRef idx="3">
-            <a:schemeClr val="accent1"/>
-          </a:fillRef>
-          <a:effectRef idx="2">
-            <a:schemeClr val="accent1"/>
-          </a:effectRef>
-          <a:fontRef idx="minor">
-            <a:schemeClr val="lt1"/>
-          </a:fontRef>
-        </p:style>
-        <p:txBody>
-          <a:bodyPr rtlCol="0" anchor="ctr"/>
-          <a:lstStyle/>
-          <a:p>
-            <a:pPr algn="ctr"/>
-          </a:p>
-        </p:txBody>
-      </p:sp>
-      <p:sp>
-        <p:nvSpPr>
-          <p:cNvPr id="22" name="Rectangle 21"/>
-          <p:cNvSpPr/>
-          <p:nvPr/>
-        </p:nvSpPr>
-        <p:spPr>
-          <a:xfrm>
-            <a:off x="457200" y="4055364"/>
-            <a:ext cx="3624986" cy="64008"/>
-          </a:xfrm>
-          <a:prstGeom prst="rect">
-            <a:avLst/>
-          </a:prstGeom>
-          <a:solidFill>
-            <a:srgbClr val="095292"/>
-          </a:solidFill>
-          <a:ln>
-            <a:noFill/>
-          </a:ln>
-        </p:spPr>
-        <p:style>
-          <a:lnRef idx="1">
-            <a:schemeClr val="accent1"/>
-          </a:lnRef>
-          <a:fillRef idx="3">
-            <a:schemeClr val="accent1"/>
-          </a:fillRef>
-          <a:effectRef idx="2">
-            <a:schemeClr val="accent1"/>
-          </a:effectRef>
-          <a:fontRef idx="minor">
-            <a:schemeClr val="lt1"/>
-          </a:fontRef>
-        </p:style>
-        <p:txBody>
-          <a:bodyPr rtlCol="0" anchor="ctr"/>
-          <a:lstStyle/>
-          <a:p>
-            <a:pPr algn="ctr"/>
-          </a:p>
-        </p:txBody>
-      </p:sp>
-      <p:sp>
-        <p:nvSpPr>
-          <p:cNvPr id="23" name="Rectangle 22"/>
-          <p:cNvSpPr/>
-          <p:nvPr/>
-        </p:nvSpPr>
-        <p:spPr>
-          <a:xfrm>
-            <a:off x="457200" y="4119372"/>
-            <a:ext cx="3624986" cy="27432"/>
-          </a:xfrm>
-          <a:prstGeom prst="rect">
-            <a:avLst/>
-          </a:prstGeom>
-          <a:solidFill>
-            <a:srgbClr val="FFD000"/>
-          </a:solidFill>
-          <a:ln>
-            <a:noFill/>
-          </a:ln>
-        </p:spPr>
-        <p:style>
-          <a:lnRef idx="1">
-            <a:schemeClr val="accent1"/>
-          </a:lnRef>
-          <a:fillRef idx="3">
-            <a:schemeClr val="accent1"/>
-          </a:fillRef>
-          <a:effectRef idx="2">
-            <a:schemeClr val="accent1"/>
-          </a:effectRef>
-          <a:fontRef idx="minor">
-            <a:schemeClr val="lt1"/>
-          </a:fontRef>
-        </p:style>
-        <p:txBody>
-          <a:bodyPr rtlCol="0" anchor="ctr"/>
-          <a:lstStyle/>
-          <a:p>
-            <a:pPr algn="ctr"/>
-          </a:p>
-        </p:txBody>
-      </p:sp>
-      <p:pic>
-        <p:nvPicPr>
-          <p:cNvPr id="24" name="Picture 23" descr="google_docs.png"/>
-          <p:cNvPicPr>
-            <a:picLocks noChangeAspect="1"/>
-          </p:cNvPicPr>
-          <p:nvPr/>
-        </p:nvPicPr>
-        <p:blipFill>
-          <a:blip r:embed="rId5"/>
-          <a:stretch>
-            <a:fillRect/>
-          </a:stretch>
-        </p:blipFill>
-        <p:spPr>
-          <a:xfrm>
-            <a:off x="1659331" y="4311396"/>
-            <a:ext cx="1220724" cy="1220724"/>
-          </a:xfrm>
-          <a:prstGeom prst="rect">
-            <a:avLst/>
-          </a:prstGeom>
-        </p:spPr>
-      </p:pic>
-      <p:sp>
-        <p:nvSpPr>
-          <p:cNvPr id="25" name="TextBox 24"/>
-          <p:cNvSpPr txBox="1"/>
-          <p:nvPr/>
-        </p:nvSpPr>
-        <p:spPr>
-          <a:xfrm>
-            <a:off x="530352" y="5623560"/>
-            <a:ext cx="3478682" cy="621792"/>
-          </a:xfrm>
-          <a:prstGeom prst="rect">
-            <a:avLst/>
-          </a:prstGeom>
-          <a:noFill/>
-        </p:spPr>
-        <p:txBody>
-          <a:bodyPr wrap="square" anchor="t"/>
-          <a:lstStyle/>
-          <a:p>
-            <a:pPr algn="ctr"/>
-            <a:r>
-              <a:rPr sz="1300" b="1" i="0">
-                <a:solidFill>
-                  <a:srgbClr val="095292"/>
-                </a:solidFill>
-                <a:latin typeface="Calibri"/>
-              </a:rPr>
-              <a:t>Google Docs</a:t>
-            </a:r>
-          </a:p>
-          <a:p>
-            <a:pPr algn="ctr">
-              <a:spcBef>
-                <a:spcPts val="200"/>
-              </a:spcBef>
-            </a:pPr>
-            <a:r>
-              <a:rPr sz="1000" b="0" i="0">
-                <a:solidFill>
-                  <a:srgbClr val="666666"/>
-                </a:solidFill>
-                <a:latin typeface="Calibri"/>
-              </a:rPr>
-              <a:t>Ficha del PI</a:t>
-            </a:r>
-          </a:p>
-        </p:txBody>
-      </p:sp>
-      <p:sp>
-        <p:nvSpPr>
-          <p:cNvPr id="26" name="Rounded Rectangle 25"/>
-          <p:cNvSpPr/>
-          <p:nvPr/>
-        </p:nvSpPr>
-        <p:spPr>
-          <a:xfrm>
-            <a:off x="4283354" y="4055364"/>
-            <a:ext cx="3624986" cy="2299716"/>
-          </a:xfrm>
-          <a:prstGeom prst="roundRect">
-            <a:avLst>
-              <a:gd name="adj" fmla="val 12000"/>
-            </a:avLst>
-          </a:prstGeom>
-          <a:solidFill>
-            <a:srgbClr val="F2F2F2"/>
-          </a:solidFill>
-          <a:ln>
-            <a:noFill/>
-          </a:ln>
-        </p:spPr>
-        <p:style>
-          <a:lnRef idx="1">
-            <a:schemeClr val="accent1"/>
-          </a:lnRef>
-          <a:fillRef idx="3">
-            <a:schemeClr val="accent1"/>
-          </a:fillRef>
-          <a:effectRef idx="2">
-            <a:schemeClr val="accent1"/>
-          </a:effectRef>
-          <a:fontRef idx="minor">
-            <a:schemeClr val="lt1"/>
-          </a:fontRef>
-        </p:style>
-        <p:txBody>
-          <a:bodyPr rtlCol="0" anchor="ctr"/>
-          <a:lstStyle/>
-          <a:p>
-            <a:pPr algn="ctr"/>
-          </a:p>
-        </p:txBody>
-      </p:sp>
-      <p:sp>
-        <p:nvSpPr>
-          <p:cNvPr id="27" name="Rectangle 26"/>
-          <p:cNvSpPr/>
-          <p:nvPr/>
-        </p:nvSpPr>
-        <p:spPr>
-          <a:xfrm>
-            <a:off x="4283354" y="4055364"/>
-            <a:ext cx="3624986" cy="64008"/>
-          </a:xfrm>
-          <a:prstGeom prst="rect">
-            <a:avLst/>
-          </a:prstGeom>
-          <a:solidFill>
-            <a:srgbClr val="095292"/>
-          </a:solidFill>
-          <a:ln>
-            <a:noFill/>
-          </a:ln>
-        </p:spPr>
-        <p:style>
-          <a:lnRef idx="1">
-            <a:schemeClr val="accent1"/>
-          </a:lnRef>
-          <a:fillRef idx="3">
-            <a:schemeClr val="accent1"/>
-          </a:fillRef>
-          <a:effectRef idx="2">
-            <a:schemeClr val="accent1"/>
-          </a:effectRef>
-          <a:fontRef idx="minor">
-            <a:schemeClr val="lt1"/>
-          </a:fontRef>
-        </p:style>
-        <p:txBody>
-          <a:bodyPr rtlCol="0" anchor="ctr"/>
-          <a:lstStyle/>
-          <a:p>
-            <a:pPr algn="ctr"/>
-          </a:p>
-        </p:txBody>
-      </p:sp>
-      <p:sp>
-        <p:nvSpPr>
-          <p:cNvPr id="28" name="Rectangle 27"/>
-          <p:cNvSpPr/>
-          <p:nvPr/>
-        </p:nvSpPr>
-        <p:spPr>
-          <a:xfrm>
-            <a:off x="4283354" y="4119372"/>
-            <a:ext cx="3624986" cy="27432"/>
-          </a:xfrm>
-          <a:prstGeom prst="rect">
-            <a:avLst/>
-          </a:prstGeom>
-          <a:solidFill>
-            <a:srgbClr val="FFD000"/>
-          </a:solidFill>
-          <a:ln>
-            <a:noFill/>
-          </a:ln>
-        </p:spPr>
-        <p:style>
-          <a:lnRef idx="1">
-            <a:schemeClr val="accent1"/>
-          </a:lnRef>
-          <a:fillRef idx="3">
-            <a:schemeClr val="accent1"/>
-          </a:fillRef>
-          <a:effectRef idx="2">
-            <a:schemeClr val="accent1"/>
-          </a:effectRef>
-          <a:fontRef idx="minor">
-            <a:schemeClr val="lt1"/>
-          </a:fontRef>
-        </p:style>
-        <p:txBody>
-          <a:bodyPr rtlCol="0" anchor="ctr"/>
-          <a:lstStyle/>
-          <a:p>
-            <a:pPr algn="ctr"/>
-          </a:p>
-        </p:txBody>
-      </p:sp>
-      <p:pic>
-        <p:nvPicPr>
-          <p:cNvPr id="29" name="Picture 28" descr="mermaid.png"/>
-          <p:cNvPicPr>
-            <a:picLocks noChangeAspect="1"/>
-          </p:cNvPicPr>
-          <p:nvPr/>
-        </p:nvPicPr>
-        <p:blipFill>
-          <a:blip r:embed="rId6"/>
-          <a:stretch>
-            <a:fillRect/>
-          </a:stretch>
-        </p:blipFill>
-        <p:spPr>
-          <a:xfrm>
-            <a:off x="5485485" y="4311396"/>
-            <a:ext cx="1220724" cy="1220724"/>
-          </a:xfrm>
-          <a:prstGeom prst="rect">
-            <a:avLst/>
-          </a:prstGeom>
-        </p:spPr>
-      </p:pic>
-      <p:sp>
-        <p:nvSpPr>
-          <p:cNvPr id="30" name="TextBox 29"/>
-          <p:cNvSpPr txBox="1"/>
-          <p:nvPr/>
-        </p:nvSpPr>
-        <p:spPr>
-          <a:xfrm>
-            <a:off x="4356506" y="5623560"/>
-            <a:ext cx="3478682" cy="621792"/>
-          </a:xfrm>
-          <a:prstGeom prst="rect">
-            <a:avLst/>
-          </a:prstGeom>
-          <a:noFill/>
-        </p:spPr>
-        <p:txBody>
-          <a:bodyPr wrap="square" anchor="t"/>
-          <a:lstStyle/>
-          <a:p>
-            <a:pPr algn="ctr"/>
-            <a:r>
-              <a:rPr sz="1300" b="1" i="0">
-                <a:solidFill>
-                  <a:srgbClr val="095292"/>
-                </a:solidFill>
-                <a:latin typeface="Calibri"/>
-              </a:rPr>
-              <a:t>Mermaid</a:t>
-            </a:r>
-          </a:p>
-          <a:p>
-            <a:pPr algn="ctr">
-              <a:spcBef>
-                <a:spcPts val="200"/>
-              </a:spcBef>
-            </a:pPr>
-            <a:r>
-              <a:rPr sz="1000" b="0" i="0">
-                <a:solidFill>
-                  <a:srgbClr val="666666"/>
-                </a:solidFill>
-                <a:latin typeface="Calibri"/>
-              </a:rPr>
-              <a:t>Codigo del ER</a:t>
-            </a:r>
-          </a:p>
-        </p:txBody>
-      </p:sp>
-      <p:sp>
-        <p:nvSpPr>
-          <p:cNvPr id="31" name="Rounded Rectangle 30"/>
-          <p:cNvSpPr/>
-          <p:nvPr/>
-        </p:nvSpPr>
-        <p:spPr>
-          <a:xfrm>
-            <a:off x="8109508" y="4055364"/>
-            <a:ext cx="3624986" cy="2299716"/>
-          </a:xfrm>
-          <a:prstGeom prst="roundRect">
-            <a:avLst>
-              <a:gd name="adj" fmla="val 12000"/>
-            </a:avLst>
-          </a:prstGeom>
-          <a:solidFill>
-            <a:srgbClr val="F2F2F2"/>
-          </a:solidFill>
-          <a:ln>
-            <a:noFill/>
-          </a:ln>
-        </p:spPr>
-        <p:style>
-          <a:lnRef idx="1">
-            <a:schemeClr val="accent1"/>
-          </a:lnRef>
-          <a:fillRef idx="3">
-            <a:schemeClr val="accent1"/>
-          </a:fillRef>
-          <a:effectRef idx="2">
-            <a:schemeClr val="accent1"/>
-          </a:effectRef>
-          <a:fontRef idx="minor">
-            <a:schemeClr val="lt1"/>
-          </a:fontRef>
-        </p:style>
-        <p:txBody>
-          <a:bodyPr rtlCol="0" anchor="ctr"/>
-          <a:lstStyle/>
-          <a:p>
-            <a:pPr algn="ctr"/>
-          </a:p>
-        </p:txBody>
-      </p:sp>
-      <p:sp>
-        <p:nvSpPr>
-          <p:cNvPr id="32" name="Rectangle 31"/>
-          <p:cNvSpPr/>
-          <p:nvPr/>
-        </p:nvSpPr>
-        <p:spPr>
-          <a:xfrm>
-            <a:off x="8109508" y="4055364"/>
-            <a:ext cx="3624986" cy="64008"/>
-          </a:xfrm>
-          <a:prstGeom prst="rect">
-            <a:avLst/>
-          </a:prstGeom>
-          <a:solidFill>
-            <a:srgbClr val="095292"/>
-          </a:solidFill>
-          <a:ln>
-            <a:noFill/>
-          </a:ln>
-        </p:spPr>
-        <p:style>
-          <a:lnRef idx="1">
-            <a:schemeClr val="accent1"/>
-          </a:lnRef>
-          <a:fillRef idx="3">
-            <a:schemeClr val="accent1"/>
-          </a:fillRef>
-          <a:effectRef idx="2">
-            <a:schemeClr val="accent1"/>
-          </a:effectRef>
-          <a:fontRef idx="minor">
-            <a:schemeClr val="lt1"/>
-          </a:fontRef>
-        </p:style>
-        <p:txBody>
-          <a:bodyPr rtlCol="0" anchor="ctr"/>
-          <a:lstStyle/>
-          <a:p>
-            <a:pPr algn="ctr"/>
-          </a:p>
-        </p:txBody>
-      </p:sp>
-      <p:sp>
-        <p:nvSpPr>
-          <p:cNvPr id="33" name="Rectangle 32"/>
-          <p:cNvSpPr/>
-          <p:nvPr/>
-        </p:nvSpPr>
-        <p:spPr>
-          <a:xfrm>
-            <a:off x="8109508" y="4119372"/>
-            <a:ext cx="3624986" cy="27432"/>
-          </a:xfrm>
-          <a:prstGeom prst="rect">
-            <a:avLst/>
-          </a:prstGeom>
-          <a:solidFill>
-            <a:srgbClr val="FFD000"/>
-          </a:solidFill>
-          <a:ln>
-            <a:noFill/>
-          </a:ln>
-        </p:spPr>
-        <p:style>
-          <a:lnRef idx="1">
-            <a:schemeClr val="accent1"/>
-          </a:lnRef>
-          <a:fillRef idx="3">
-            <a:schemeClr val="accent1"/>
-          </a:fillRef>
-          <a:effectRef idx="2">
-            <a:schemeClr val="accent1"/>
-          </a:effectRef>
-          <a:fontRef idx="minor">
-            <a:schemeClr val="lt1"/>
-          </a:fontRef>
-        </p:style>
-        <p:txBody>
-          <a:bodyPr rtlCol="0" anchor="ctr"/>
-          <a:lstStyle/>
-          <a:p>
-            <a:pPr algn="ctr"/>
-          </a:p>
-        </p:txBody>
-      </p:sp>
-      <p:pic>
-        <p:nvPicPr>
-          <p:cNvPr id="34" name="Picture 33" descr="examlab.png"/>
-          <p:cNvPicPr>
-            <a:picLocks noChangeAspect="1"/>
-          </p:cNvPicPr>
-          <p:nvPr/>
-        </p:nvPicPr>
-        <p:blipFill>
-          <a:blip r:embed="rId7"/>
-          <a:stretch>
-            <a:fillRect/>
-          </a:stretch>
-        </p:blipFill>
-        <p:spPr>
-          <a:xfrm>
-            <a:off x="9311640" y="4311396"/>
-            <a:ext cx="1220724" cy="1220724"/>
-          </a:xfrm>
-          <a:prstGeom prst="rect">
-            <a:avLst/>
-          </a:prstGeom>
-        </p:spPr>
-      </p:pic>
-      <p:sp>
-        <p:nvSpPr>
-          <p:cNvPr id="35" name="TextBox 34"/>
-          <p:cNvSpPr txBox="1"/>
-          <p:nvPr/>
-        </p:nvSpPr>
-        <p:spPr>
-          <a:xfrm>
-            <a:off x="8182660" y="5623560"/>
-            <a:ext cx="3478682" cy="621792"/>
-          </a:xfrm>
-          <a:prstGeom prst="rect">
-            <a:avLst/>
-          </a:prstGeom>
-          <a:noFill/>
-        </p:spPr>
-        <p:txBody>
-          <a:bodyPr wrap="square" anchor="t"/>
-          <a:lstStyle/>
-          <a:p>
-            <a:pPr algn="ctr"/>
-            <a:r>
-              <a:rPr sz="1300" b="1" i="0">
-                <a:solidFill>
-                  <a:srgbClr val="095292"/>
-                </a:solidFill>
-                <a:latin typeface="Calibri"/>
-              </a:rPr>
-              <a:t>la plataforma del curso</a:t>
-            </a:r>
-          </a:p>
-          <a:p>
-            <a:pPr algn="ctr">
-              <a:spcBef>
-                <a:spcPts val="200"/>
-              </a:spcBef>
-            </a:pPr>
-            <a:r>
-              <a:rPr sz="1000" b="0" i="0">
-                <a:solidFill>
-                  <a:srgbClr val="666666"/>
-                </a:solidFill>
-                <a:latin typeface="Calibri"/>
-              </a:rPr>
-              <a:t>Donde se entrega</a:t>
-            </a:r>
-          </a:p>
-        </p:txBody>
-      </p:sp>
-      <p:sp>
-        <p:nvSpPr>
-          <p:cNvPr id="36" name="TextBox 35"/>
+              <a:rPr sz="1300" b="0" i="0">
+                <a:solidFill>
+                  <a:srgbClr val="333333"/>
+                </a:solidFill>
+                <a:latin typeface="Calibri"/>
+              </a:rPr>
+              <a:t>Exporta tambien la imagen a la carpeta de tu Proyecto Integrador. Esa copia es para tu informe; no reemplaza la respuesta en la plataforma.</a:t>
+            </a:r>
+          </a:p>
+        </p:txBody>
+      </p:sp>
+      <p:sp>
+        <p:nvSpPr>
+          <p:cNvPr id="22" name="TextBox 21"/>
           <p:cNvSpPr txBox="1"/>
           <p:nvPr/>
         </p:nvSpPr>
@@ -14916,13 +15685,13 @@
         <p:spPr>
           <a:xfrm>
             <a:off x="0" y="0"/>
-            <a:ext cx="12191695" cy="1170432"/>
+            <a:ext cx="12191695" cy="164592"/>
           </a:xfrm>
           <a:prstGeom prst="rect">
             <a:avLst/>
           </a:prstGeom>
           <a:solidFill>
-            <a:srgbClr val="095292"/>
+            <a:srgbClr val="269CCB"/>
           </a:solidFill>
           <a:ln>
             <a:noFill/>
@@ -14950,49 +15719,30 @@
           </a:p>
         </p:txBody>
       </p:sp>
-      <p:sp>
-        <p:nvSpPr>
-          <p:cNvPr id="3" name="Rectangle 2"/>
-          <p:cNvSpPr/>
-          <p:nvPr/>
-        </p:nvSpPr>
-        <p:spPr>
-          <a:xfrm>
-            <a:off x="0" y="1170432"/>
-            <a:ext cx="12191695" cy="41148"/>
-          </a:xfrm>
-          <a:prstGeom prst="rect">
-            <a:avLst/>
-          </a:prstGeom>
-          <a:solidFill>
-            <a:srgbClr val="FFD000"/>
-          </a:solidFill>
-          <a:ln>
-            <a:noFill/>
-          </a:ln>
-        </p:spPr>
-        <p:style>
-          <a:lnRef idx="1">
-            <a:schemeClr val="accent1"/>
-          </a:lnRef>
-          <a:fillRef idx="3">
-            <a:schemeClr val="accent1"/>
-          </a:fillRef>
-          <a:effectRef idx="2">
-            <a:schemeClr val="accent1"/>
-          </a:effectRef>
-          <a:fontRef idx="minor">
-            <a:schemeClr val="lt1"/>
-          </a:fontRef>
-        </p:style>
-        <p:txBody>
-          <a:bodyPr rtlCol="0" anchor="ctr"/>
-          <a:lstStyle/>
-          <a:p>
-            <a:pPr algn="ctr"/>
-          </a:p>
-        </p:txBody>
-      </p:sp>
+      <p:pic>
+        <p:nvPicPr>
+          <p:cNvPr id="3" name="Picture 2" descr="logo_uniajc_color.png"/>
+          <p:cNvPicPr>
+            <a:picLocks noChangeAspect="1"/>
+          </p:cNvPicPr>
+          <p:nvPr/>
+        </p:nvPicPr>
+        <p:blipFill>
+          <a:blip r:embed="rId2"/>
+          <a:stretch>
+            <a:fillRect/>
+          </a:stretch>
+        </p:blipFill>
+        <p:spPr>
+          <a:xfrm>
+            <a:off x="10271455" y="5998464"/>
+            <a:ext cx="1463040" cy="643233"/>
+          </a:xfrm>
+          <a:prstGeom prst="rect">
+            <a:avLst/>
+          </a:prstGeom>
+        </p:spPr>
+      </p:pic>
       <p:sp>
         <p:nvSpPr>
           <p:cNvPr id="4" name="TextBox 3"/>
@@ -15001,8 +15751,41 @@
         </p:nvSpPr>
         <p:spPr>
           <a:xfrm>
-            <a:off x="457200" y="164592"/>
-            <a:ext cx="11277295" cy="384048"/>
+            <a:off x="457200" y="1737360"/>
+            <a:ext cx="11277295" cy="1097280"/>
+          </a:xfrm>
+          <a:prstGeom prst="rect">
+            <a:avLst/>
+          </a:prstGeom>
+          <a:noFill/>
+        </p:spPr>
+        <p:txBody>
+          <a:bodyPr wrap="square" anchor="ctr"/>
+          <a:lstStyle/>
+          <a:p>
+            <a:pPr algn="ctr"/>
+            <a:r>
+              <a:rPr sz="3400" b="1" i="0">
+                <a:solidFill>
+                  <a:srgbClr val="095292"/>
+                </a:solidFill>
+                <a:latin typeface="Calibri"/>
+              </a:rPr>
+              <a:t>Clase 1 · Revision BD I · Arranque VetCare DB</a:t>
+            </a:r>
+          </a:p>
+        </p:txBody>
+      </p:sp>
+      <p:sp>
+        <p:nvSpPr>
+          <p:cNvPr id="5" name="TextBox 4"/>
+          <p:cNvSpPr txBox="1"/>
+          <p:nvPr/>
+        </p:nvSpPr>
+        <p:spPr>
+          <a:xfrm>
+            <a:off x="457200" y="3017520"/>
+            <a:ext cx="11277295" cy="1645920"/>
           </a:xfrm>
           <a:prstGeom prst="rect">
             <a:avLst/>
@@ -15015,28 +15798,65 @@
           </a:bodyPr>
           <a:lstStyle/>
           <a:p>
-            <a:r>
-              <a:rPr sz="2600" b="1" i="0">
-                <a:solidFill>
-                  <a:srgbClr val="FFFFFF"/>
-                </a:solidFill>
-                <a:latin typeface="Calibri"/>
-              </a:rPr>
-              <a:t>Del boceto a la plataforma del curso (diagrama)</a:t>
-            </a:r>
-          </a:p>
-        </p:txBody>
-      </p:sp>
-      <p:sp>
-        <p:nvSpPr>
-          <p:cNvPr id="5" name="TextBox 4"/>
+            <a:pPr algn="ctr">
+              <a:spcAft>
+                <a:spcPts val="600"/>
+              </a:spcAft>
+            </a:pPr>
+            <a:r>
+              <a:rPr sz="1600" b="0" i="0">
+                <a:solidFill>
+                  <a:srgbClr val="333333"/>
+                </a:solidFill>
+                <a:latin typeface="Calibri"/>
+              </a:rPr>
+              <a:t>El cliente</a:t>
+            </a:r>
+          </a:p>
+          <a:p>
+            <a:pPr algn="ctr">
+              <a:spcAft>
+                <a:spcPts val="600"/>
+              </a:spcAft>
+            </a:pPr>
+            <a:r>
+              <a:rPr sz="1600" b="0" i="0">
+                <a:solidFill>
+                  <a:srgbClr val="333333"/>
+                </a:solidFill>
+                <a:latin typeface="Calibri"/>
+              </a:rPr>
+              <a:t>Por que esto no es Bases de Datos I, y el vocabulario minimo</a:t>
+            </a:r>
+          </a:p>
+          <a:p>
+            <a:pPr algn="ctr">
+              <a:spcAft>
+                <a:spcPts val="600"/>
+              </a:spcAft>
+            </a:pPr>
+            <a:r>
+              <a:rPr sz="1600" b="0" i="0">
+                <a:solidFill>
+                  <a:srgbClr val="333333"/>
+                </a:solidFill>
+                <a:latin typeface="Calibri"/>
+              </a:rPr>
+              <a:t>Nivel conceptual y nivel fisico</a:t>
+            </a:r>
+          </a:p>
+        </p:txBody>
+      </p:sp>
+      <p:sp>
+        <p:nvSpPr>
+          <p:cNvPr id="6" name="TextBox 5"/>
           <p:cNvSpPr txBox="1"/>
           <p:nvPr/>
         </p:nvSpPr>
         <p:spPr>
           <a:xfrm>
-            <a:off x="457200" y="566928"/>
-            <a:ext cx="11277295" cy="411480"/>
+            <a:off x="457200" y="4754880"/>
+            <a:ext cx="11277295" cy="640080"/>
           </a:xfrm>
           <a:prstGeom prst="rect">
             <a:avLst/>
@@ -15049,1679 +15869,15 @@
           </a:bodyPr>
           <a:lstStyle/>
           <a:p>
-            <a:r>
-              <a:rPr sz="1400" b="0" i="0">
-                <a:solidFill>
-                  <a:srgbClr val="B8D8EE"/>
-                </a:solidFill>
-                <a:latin typeface="Calibri"/>
-              </a:rPr>
-              <a:t>El diagrama se entrega como codigo Mermaid dentro de la plataforma del curso, no como imagen</a:t>
-            </a:r>
-          </a:p>
-        </p:txBody>
-      </p:sp>
-      <p:sp>
-        <p:nvSpPr>
-          <p:cNvPr id="6" name="Rounded Rectangle 5"/>
-          <p:cNvSpPr/>
-          <p:nvPr/>
-        </p:nvSpPr>
-        <p:spPr>
-          <a:xfrm>
-            <a:off x="457200" y="1659636"/>
-            <a:ext cx="11277295" cy="1051560"/>
-          </a:xfrm>
-          <a:prstGeom prst="roundRect">
-            <a:avLst>
-              <a:gd name="adj" fmla="val 12000"/>
-            </a:avLst>
-          </a:prstGeom>
-          <a:solidFill>
-            <a:srgbClr val="F2F2F2"/>
-          </a:solidFill>
-          <a:ln>
-            <a:noFill/>
-          </a:ln>
-        </p:spPr>
-        <p:style>
-          <a:lnRef idx="1">
-            <a:schemeClr val="accent1"/>
-          </a:lnRef>
-          <a:fillRef idx="3">
-            <a:schemeClr val="accent1"/>
-          </a:fillRef>
-          <a:effectRef idx="2">
-            <a:schemeClr val="accent1"/>
-          </a:effectRef>
-          <a:fontRef idx="minor">
-            <a:schemeClr val="lt1"/>
-          </a:fontRef>
-        </p:style>
-        <p:txBody>
-          <a:bodyPr rtlCol="0" anchor="ctr"/>
-          <a:lstStyle/>
-          <a:p>
             <a:pPr algn="ctr"/>
-          </a:p>
-        </p:txBody>
-      </p:sp>
-      <p:sp>
-        <p:nvSpPr>
-          <p:cNvPr id="7" name="Rounded Rectangle 6"/>
-          <p:cNvSpPr/>
-          <p:nvPr/>
-        </p:nvSpPr>
-        <p:spPr>
-          <a:xfrm>
-            <a:off x="594360" y="1965960"/>
-            <a:ext cx="438912" cy="438912"/>
-          </a:xfrm>
-          <a:prstGeom prst="roundRect">
-            <a:avLst>
-              <a:gd name="adj" fmla="val 12000"/>
-            </a:avLst>
-          </a:prstGeom>
-          <a:solidFill>
-            <a:srgbClr val="095292"/>
-          </a:solidFill>
-          <a:ln>
-            <a:noFill/>
-          </a:ln>
-        </p:spPr>
-        <p:style>
-          <a:lnRef idx="1">
-            <a:schemeClr val="accent1"/>
-          </a:lnRef>
-          <a:fillRef idx="3">
-            <a:schemeClr val="accent1"/>
-          </a:fillRef>
-          <a:effectRef idx="2">
-            <a:schemeClr val="accent1"/>
-          </a:effectRef>
-          <a:fontRef idx="minor">
-            <a:schemeClr val="lt1"/>
-          </a:fontRef>
-        </p:style>
-        <p:txBody>
-          <a:bodyPr rtlCol="0" anchor="ctr"/>
-          <a:lstStyle/>
-          <a:p>
-            <a:pPr algn="ctr"/>
-          </a:p>
-        </p:txBody>
-      </p:sp>
-      <p:sp>
-        <p:nvSpPr>
-          <p:cNvPr id="8" name="TextBox 7"/>
-          <p:cNvSpPr txBox="1"/>
-          <p:nvPr/>
-        </p:nvSpPr>
-        <p:spPr>
-          <a:xfrm>
-            <a:off x="594360" y="1965960"/>
-            <a:ext cx="438912" cy="438912"/>
-          </a:xfrm>
-          <a:prstGeom prst="rect">
-            <a:avLst/>
-          </a:prstGeom>
-          <a:noFill/>
-        </p:spPr>
-        <p:txBody>
-          <a:bodyPr wrap="square" anchor="ctr"/>
-          <a:lstStyle/>
-          <a:p>
-            <a:pPr algn="ctr"/>
-            <a:r>
-              <a:rPr sz="1600" b="1" i="0">
-                <a:solidFill>
-                  <a:srgbClr val="FFFFFF"/>
-                </a:solidFill>
-                <a:latin typeface="Calibri"/>
-              </a:rPr>
-              <a:t>1</a:t>
-            </a:r>
-          </a:p>
-        </p:txBody>
-      </p:sp>
-      <p:sp>
-        <p:nvSpPr>
-          <p:cNvPr id="9" name="TextBox 8"/>
-          <p:cNvSpPr txBox="1"/>
-          <p:nvPr/>
-        </p:nvSpPr>
-        <p:spPr>
-          <a:xfrm>
-            <a:off x="1188720" y="1751076"/>
-            <a:ext cx="10271455" cy="886968"/>
-          </a:xfrm>
-          <a:prstGeom prst="rect">
-            <a:avLst/>
-          </a:prstGeom>
-          <a:noFill/>
-        </p:spPr>
-        <p:txBody>
-          <a:bodyPr wrap="square" anchor="ctr"/>
-          <a:lstStyle/>
-          <a:p>
-            <a:r>
-              <a:rPr sz="1500" b="1" i="0">
-                <a:solidFill>
-                  <a:srgbClr val="095292"/>
-                </a:solidFill>
-                <a:latin typeface="Calibri"/>
-              </a:rPr>
-              <a:t>Disena visual</a:t>
-            </a:r>
-          </a:p>
-          <a:p>
-            <a:pPr>
-              <a:spcBef>
-                <a:spcPts val="200"/>
-              </a:spcBef>
-            </a:pPr>
-            <a:r>
-              <a:rPr sz="1300" b="0" i="0">
-                <a:solidFill>
-                  <a:srgbClr val="333333"/>
-                </a:solidFill>
-                <a:latin typeface="Calibri"/>
-              </a:rPr>
-              <a:t>Dibuja el diagrama como quieras en Excalidraw o draw.io: es mas rapido arrastrar cajas que escribir codigo, y ahi es donde piensas el modelo.</a:t>
-            </a:r>
-          </a:p>
-        </p:txBody>
-      </p:sp>
-      <p:sp>
-        <p:nvSpPr>
-          <p:cNvPr id="10" name="Rounded Rectangle 9"/>
-          <p:cNvSpPr/>
-          <p:nvPr/>
-        </p:nvSpPr>
-        <p:spPr>
-          <a:xfrm>
-            <a:off x="457200" y="2802636"/>
-            <a:ext cx="11277295" cy="1051560"/>
-          </a:xfrm>
-          <a:prstGeom prst="roundRect">
-            <a:avLst>
-              <a:gd name="adj" fmla="val 12000"/>
-            </a:avLst>
-          </a:prstGeom>
-          <a:solidFill>
-            <a:srgbClr val="E8F4FA"/>
-          </a:solidFill>
-          <a:ln>
-            <a:noFill/>
-          </a:ln>
-        </p:spPr>
-        <p:style>
-          <a:lnRef idx="1">
-            <a:schemeClr val="accent1"/>
-          </a:lnRef>
-          <a:fillRef idx="3">
-            <a:schemeClr val="accent1"/>
-          </a:fillRef>
-          <a:effectRef idx="2">
-            <a:schemeClr val="accent1"/>
-          </a:effectRef>
-          <a:fontRef idx="minor">
-            <a:schemeClr val="lt1"/>
-          </a:fontRef>
-        </p:style>
-        <p:txBody>
-          <a:bodyPr rtlCol="0" anchor="ctr"/>
-          <a:lstStyle/>
-          <a:p>
-            <a:pPr algn="ctr"/>
-          </a:p>
-        </p:txBody>
-      </p:sp>
-      <p:sp>
-        <p:nvSpPr>
-          <p:cNvPr id="11" name="Rounded Rectangle 10"/>
-          <p:cNvSpPr/>
-          <p:nvPr/>
-        </p:nvSpPr>
-        <p:spPr>
-          <a:xfrm>
-            <a:off x="594360" y="3108960"/>
-            <a:ext cx="438912" cy="438912"/>
-          </a:xfrm>
-          <a:prstGeom prst="roundRect">
-            <a:avLst>
-              <a:gd name="adj" fmla="val 12000"/>
-            </a:avLst>
-          </a:prstGeom>
-          <a:solidFill>
-            <a:srgbClr val="095292"/>
-          </a:solidFill>
-          <a:ln>
-            <a:noFill/>
-          </a:ln>
-        </p:spPr>
-        <p:style>
-          <a:lnRef idx="1">
-            <a:schemeClr val="accent1"/>
-          </a:lnRef>
-          <a:fillRef idx="3">
-            <a:schemeClr val="accent1"/>
-          </a:fillRef>
-          <a:effectRef idx="2">
-            <a:schemeClr val="accent1"/>
-          </a:effectRef>
-          <a:fontRef idx="minor">
-            <a:schemeClr val="lt1"/>
-          </a:fontRef>
-        </p:style>
-        <p:txBody>
-          <a:bodyPr rtlCol="0" anchor="ctr"/>
-          <a:lstStyle/>
-          <a:p>
-            <a:pPr algn="ctr"/>
-          </a:p>
-        </p:txBody>
-      </p:sp>
-      <p:sp>
-        <p:nvSpPr>
-          <p:cNvPr id="12" name="TextBox 11"/>
-          <p:cNvSpPr txBox="1"/>
-          <p:nvPr/>
-        </p:nvSpPr>
-        <p:spPr>
-          <a:xfrm>
-            <a:off x="594360" y="3108960"/>
-            <a:ext cx="438912" cy="438912"/>
-          </a:xfrm>
-          <a:prstGeom prst="rect">
-            <a:avLst/>
-          </a:prstGeom>
-          <a:noFill/>
-        </p:spPr>
-        <p:txBody>
-          <a:bodyPr wrap="square" anchor="ctr"/>
-          <a:lstStyle/>
-          <a:p>
-            <a:pPr algn="ctr"/>
-            <a:r>
-              <a:rPr sz="1600" b="1" i="0">
-                <a:solidFill>
-                  <a:srgbClr val="FFFFFF"/>
-                </a:solidFill>
-                <a:latin typeface="Calibri"/>
-              </a:rPr>
-              <a:t>2</a:t>
-            </a:r>
-          </a:p>
-        </p:txBody>
-      </p:sp>
-      <p:sp>
-        <p:nvSpPr>
-          <p:cNvPr id="13" name="TextBox 12"/>
-          <p:cNvSpPr txBox="1"/>
-          <p:nvPr/>
-        </p:nvSpPr>
-        <p:spPr>
-          <a:xfrm>
-            <a:off x="1188720" y="2894076"/>
-            <a:ext cx="10271455" cy="886968"/>
-          </a:xfrm>
-          <a:prstGeom prst="rect">
-            <a:avLst/>
-          </a:prstGeom>
-          <a:noFill/>
-        </p:spPr>
-        <p:txBody>
-          <a:bodyPr wrap="square" anchor="ctr"/>
-          <a:lstStyle/>
-          <a:p>
-            <a:r>
-              <a:rPr sz="1500" b="1" i="0">
-                <a:solidFill>
-                  <a:srgbClr val="095292"/>
-                </a:solidFill>
-                <a:latin typeface="Calibri"/>
-              </a:rPr>
-              <a:t>Traduce con IA</a:t>
-            </a:r>
-          </a:p>
-          <a:p>
-            <a:pPr>
-              <a:spcBef>
-                <a:spcPts val="200"/>
-              </a:spcBef>
-            </a:pPr>
-            <a:r>
-              <a:rPr sz="1300" b="0" i="0">
-                <a:solidFill>
-                  <a:srgbClr val="333333"/>
-                </a:solidFill>
-                <a:latin typeface="Calibri"/>
-              </a:rPr>
-              <a:t>Copia o describe tu boceto a una IA y pidele el codigo Mermaid: «convierte este diagrama a Mermaid usando erDiagram». Revisa el resultado: la IA acierta la sintaxis, no tu modelo.</a:t>
-            </a:r>
-          </a:p>
-        </p:txBody>
-      </p:sp>
-      <p:sp>
-        <p:nvSpPr>
-          <p:cNvPr id="14" name="Rounded Rectangle 13"/>
-          <p:cNvSpPr/>
-          <p:nvPr/>
-        </p:nvSpPr>
-        <p:spPr>
-          <a:xfrm>
-            <a:off x="457200" y="3945636"/>
-            <a:ext cx="11277295" cy="1051560"/>
-          </a:xfrm>
-          <a:prstGeom prst="roundRect">
-            <a:avLst>
-              <a:gd name="adj" fmla="val 12000"/>
-            </a:avLst>
-          </a:prstGeom>
-          <a:solidFill>
-            <a:srgbClr val="F2F2F2"/>
-          </a:solidFill>
-          <a:ln>
-            <a:noFill/>
-          </a:ln>
-        </p:spPr>
-        <p:style>
-          <a:lnRef idx="1">
-            <a:schemeClr val="accent1"/>
-          </a:lnRef>
-          <a:fillRef idx="3">
-            <a:schemeClr val="accent1"/>
-          </a:fillRef>
-          <a:effectRef idx="2">
-            <a:schemeClr val="accent1"/>
-          </a:effectRef>
-          <a:fontRef idx="minor">
-            <a:schemeClr val="lt1"/>
-          </a:fontRef>
-        </p:style>
-        <p:txBody>
-          <a:bodyPr rtlCol="0" anchor="ctr"/>
-          <a:lstStyle/>
-          <a:p>
-            <a:pPr algn="ctr"/>
-          </a:p>
-        </p:txBody>
-      </p:sp>
-      <p:sp>
-        <p:nvSpPr>
-          <p:cNvPr id="15" name="Rounded Rectangle 14"/>
-          <p:cNvSpPr/>
-          <p:nvPr/>
-        </p:nvSpPr>
-        <p:spPr>
-          <a:xfrm>
-            <a:off x="594360" y="4251960"/>
-            <a:ext cx="438912" cy="438912"/>
-          </a:xfrm>
-          <a:prstGeom prst="roundRect">
-            <a:avLst>
-              <a:gd name="adj" fmla="val 12000"/>
-            </a:avLst>
-          </a:prstGeom>
-          <a:solidFill>
-            <a:srgbClr val="095292"/>
-          </a:solidFill>
-          <a:ln>
-            <a:noFill/>
-          </a:ln>
-        </p:spPr>
-        <p:style>
-          <a:lnRef idx="1">
-            <a:schemeClr val="accent1"/>
-          </a:lnRef>
-          <a:fillRef idx="3">
-            <a:schemeClr val="accent1"/>
-          </a:fillRef>
-          <a:effectRef idx="2">
-            <a:schemeClr val="accent1"/>
-          </a:effectRef>
-          <a:fontRef idx="minor">
-            <a:schemeClr val="lt1"/>
-          </a:fontRef>
-        </p:style>
-        <p:txBody>
-          <a:bodyPr rtlCol="0" anchor="ctr"/>
-          <a:lstStyle/>
-          <a:p>
-            <a:pPr algn="ctr"/>
-          </a:p>
-        </p:txBody>
-      </p:sp>
-      <p:sp>
-        <p:nvSpPr>
-          <p:cNvPr id="16" name="TextBox 15"/>
-          <p:cNvSpPr txBox="1"/>
-          <p:nvPr/>
-        </p:nvSpPr>
-        <p:spPr>
-          <a:xfrm>
-            <a:off x="594360" y="4251960"/>
-            <a:ext cx="438912" cy="438912"/>
-          </a:xfrm>
-          <a:prstGeom prst="rect">
-            <a:avLst/>
-          </a:prstGeom>
-          <a:noFill/>
-        </p:spPr>
-        <p:txBody>
-          <a:bodyPr wrap="square" anchor="ctr"/>
-          <a:lstStyle/>
-          <a:p>
-            <a:pPr algn="ctr"/>
-            <a:r>
-              <a:rPr sz="1600" b="1" i="0">
-                <a:solidFill>
-                  <a:srgbClr val="FFFFFF"/>
-                </a:solidFill>
-                <a:latin typeface="Calibri"/>
-              </a:rPr>
-              <a:t>3</a:t>
-            </a:r>
-          </a:p>
-        </p:txBody>
-      </p:sp>
-      <p:sp>
-        <p:nvSpPr>
-          <p:cNvPr id="17" name="TextBox 16"/>
-          <p:cNvSpPr txBox="1"/>
-          <p:nvPr/>
-        </p:nvSpPr>
-        <p:spPr>
-          <a:xfrm>
-            <a:off x="1188720" y="4037076"/>
-            <a:ext cx="10271455" cy="886968"/>
-          </a:xfrm>
-          <a:prstGeom prst="rect">
-            <a:avLst/>
-          </a:prstGeom>
-          <a:noFill/>
-        </p:spPr>
-        <p:txBody>
-          <a:bodyPr wrap="square" anchor="ctr"/>
-          <a:lstStyle/>
-          <a:p>
-            <a:r>
-              <a:rPr sz="1500" b="1" i="0">
-                <a:solidFill>
-                  <a:srgbClr val="095292"/>
-                </a:solidFill>
-                <a:latin typeface="Calibri"/>
-              </a:rPr>
-              <a:t>Pega y renderiza en la plataforma del curso</a:t>
-            </a:r>
-          </a:p>
-          <a:p>
-            <a:pPr>
-              <a:spcBef>
-                <a:spcPts val="200"/>
-              </a:spcBef>
-            </a:pPr>
-            <a:r>
-              <a:rPr sz="1300" b="0" i="0">
-                <a:solidFill>
-                  <a:srgbClr val="333333"/>
-                </a:solidFill>
-                <a:latin typeface="Calibri"/>
-              </a:rPr>
-              <a:t>Pega ese codigo en la caja de texto de la pregunta y mira como lo dibuja la plataforma. Si no renderiza, corrige ahi mismo: lo que se califica es el diagrama renderizado dentro de la plataforma del curso.</a:t>
-            </a:r>
-          </a:p>
-        </p:txBody>
-      </p:sp>
-      <p:sp>
-        <p:nvSpPr>
-          <p:cNvPr id="18" name="Rounded Rectangle 17"/>
-          <p:cNvSpPr/>
-          <p:nvPr/>
-        </p:nvSpPr>
-        <p:spPr>
-          <a:xfrm>
-            <a:off x="457200" y="5088636"/>
-            <a:ext cx="11277295" cy="1051560"/>
-          </a:xfrm>
-          <a:prstGeom prst="roundRect">
-            <a:avLst>
-              <a:gd name="adj" fmla="val 12000"/>
-            </a:avLst>
-          </a:prstGeom>
-          <a:solidFill>
-            <a:srgbClr val="E8F4FA"/>
-          </a:solidFill>
-          <a:ln>
-            <a:noFill/>
-          </a:ln>
-        </p:spPr>
-        <p:style>
-          <a:lnRef idx="1">
-            <a:schemeClr val="accent1"/>
-          </a:lnRef>
-          <a:fillRef idx="3">
-            <a:schemeClr val="accent1"/>
-          </a:fillRef>
-          <a:effectRef idx="2">
-            <a:schemeClr val="accent1"/>
-          </a:effectRef>
-          <a:fontRef idx="minor">
-            <a:schemeClr val="lt1"/>
-          </a:fontRef>
-        </p:style>
-        <p:txBody>
-          <a:bodyPr rtlCol="0" anchor="ctr"/>
-          <a:lstStyle/>
-          <a:p>
-            <a:pPr algn="ctr"/>
-          </a:p>
-        </p:txBody>
-      </p:sp>
-      <p:sp>
-        <p:nvSpPr>
-          <p:cNvPr id="19" name="Rounded Rectangle 18"/>
-          <p:cNvSpPr/>
-          <p:nvPr/>
-        </p:nvSpPr>
-        <p:spPr>
-          <a:xfrm>
-            <a:off x="594360" y="5394960"/>
-            <a:ext cx="438912" cy="438912"/>
-          </a:xfrm>
-          <a:prstGeom prst="roundRect">
-            <a:avLst>
-              <a:gd name="adj" fmla="val 12000"/>
-            </a:avLst>
-          </a:prstGeom>
-          <a:solidFill>
-            <a:srgbClr val="095292"/>
-          </a:solidFill>
-          <a:ln>
-            <a:noFill/>
-          </a:ln>
-        </p:spPr>
-        <p:style>
-          <a:lnRef idx="1">
-            <a:schemeClr val="accent1"/>
-          </a:lnRef>
-          <a:fillRef idx="3">
-            <a:schemeClr val="accent1"/>
-          </a:fillRef>
-          <a:effectRef idx="2">
-            <a:schemeClr val="accent1"/>
-          </a:effectRef>
-          <a:fontRef idx="minor">
-            <a:schemeClr val="lt1"/>
-          </a:fontRef>
-        </p:style>
-        <p:txBody>
-          <a:bodyPr rtlCol="0" anchor="ctr"/>
-          <a:lstStyle/>
-          <a:p>
-            <a:pPr algn="ctr"/>
-          </a:p>
-        </p:txBody>
-      </p:sp>
-      <p:sp>
-        <p:nvSpPr>
-          <p:cNvPr id="20" name="TextBox 19"/>
-          <p:cNvSpPr txBox="1"/>
-          <p:nvPr/>
-        </p:nvSpPr>
-        <p:spPr>
-          <a:xfrm>
-            <a:off x="594360" y="5394960"/>
-            <a:ext cx="438912" cy="438912"/>
-          </a:xfrm>
-          <a:prstGeom prst="rect">
-            <a:avLst/>
-          </a:prstGeom>
-          <a:noFill/>
-        </p:spPr>
-        <p:txBody>
-          <a:bodyPr wrap="square" anchor="ctr"/>
-          <a:lstStyle/>
-          <a:p>
-            <a:pPr algn="ctr"/>
-            <a:r>
-              <a:rPr sz="1600" b="1" i="0">
-                <a:solidFill>
-                  <a:srgbClr val="FFFFFF"/>
-                </a:solidFill>
-                <a:latin typeface="Calibri"/>
-              </a:rPr>
-              <a:t>4</a:t>
-            </a:r>
-          </a:p>
-        </p:txBody>
-      </p:sp>
-      <p:sp>
-        <p:nvSpPr>
-          <p:cNvPr id="21" name="TextBox 20"/>
-          <p:cNvSpPr txBox="1"/>
-          <p:nvPr/>
-        </p:nvSpPr>
-        <p:spPr>
-          <a:xfrm>
-            <a:off x="1188720" y="5180076"/>
-            <a:ext cx="10271455" cy="886968"/>
-          </a:xfrm>
-          <a:prstGeom prst="rect">
-            <a:avLst/>
-          </a:prstGeom>
-          <a:noFill/>
-        </p:spPr>
-        <p:txBody>
-          <a:bodyPr wrap="square" anchor="ctr"/>
-          <a:lstStyle/>
-          <a:p>
-            <a:r>
-              <a:rPr sz="1500" b="1" i="0">
-                <a:solidFill>
-                  <a:srgbClr val="095292"/>
-                </a:solidFill>
-                <a:latin typeface="Calibri"/>
-              </a:rPr>
-              <a:t>Guarda el PNG para tu PI</a:t>
-            </a:r>
-          </a:p>
-          <a:p>
-            <a:pPr>
-              <a:spcBef>
-                <a:spcPts val="200"/>
-              </a:spcBef>
-            </a:pPr>
-            <a:r>
-              <a:rPr sz="1300" b="0" i="0">
-                <a:solidFill>
-                  <a:srgbClr val="333333"/>
-                </a:solidFill>
-                <a:latin typeface="Calibri"/>
-              </a:rPr>
-              <a:t>Exporta tambien la imagen a la carpeta de tu Proyecto Integrador. Esa copia es para tu informe; no reemplaza la respuesta en la plataforma.</a:t>
-            </a:r>
-          </a:p>
-        </p:txBody>
-      </p:sp>
-      <p:sp>
-        <p:nvSpPr>
-          <p:cNvPr id="22" name="TextBox 21"/>
-          <p:cNvSpPr txBox="1"/>
-          <p:nvPr/>
-        </p:nvSpPr>
-        <p:spPr>
-          <a:xfrm>
-            <a:off x="11185855" y="6473952"/>
-            <a:ext cx="640080" cy="274320"/>
-          </a:xfrm>
-          <a:prstGeom prst="rect">
-            <a:avLst/>
-          </a:prstGeom>
-          <a:noFill/>
-        </p:spPr>
-        <p:txBody>
-          <a:bodyPr wrap="square">
-            <a:spAutoFit/>
-          </a:bodyPr>
-          <a:lstStyle/>
-          <a:p>
-            <a:pPr algn="r"/>
-            <a:r>
-              <a:rPr sz="1100" b="0" i="0">
-                <a:solidFill>
-                  <a:srgbClr val="666666"/>
-                </a:solidFill>
-                <a:latin typeface="Calibri"/>
-              </a:rPr>
-              <a:t>36</a:t>
-            </a:r>
-          </a:p>
-        </p:txBody>
-      </p:sp>
-    </p:spTree>
-  </p:cSld>
-  <p:clrMapOvr>
-    <a:masterClrMapping/>
-  </p:clrMapOvr>
-</p:sld>
-</file>
-
-<file path=ppt/slides/slide37.xml><?xml version="1.0" encoding="utf-8"?>
-<p:sld xmlns:a="http://schemas.openxmlformats.org/drawingml/2006/main" xmlns:p="http://schemas.openxmlformats.org/presentationml/2006/main" xmlns:r="http://schemas.openxmlformats.org/officeDocument/2006/relationships">
-  <p:cSld>
-    <p:bg>
-      <p:bgPr>
-        <a:solidFill>
-          <a:srgbClr val="FFFFFF"/>
-        </a:solidFill>
-        <a:effectLst/>
-      </p:bgPr>
-    </p:bg>
-    <p:spTree>
-      <p:nvGrpSpPr>
-        <p:cNvPr id="1" name=""/>
-        <p:cNvGrpSpPr/>
-        <p:nvPr/>
-      </p:nvGrpSpPr>
-      <p:grpSpPr/>
-      <p:sp>
-        <p:nvSpPr>
-          <p:cNvPr id="2" name="Rectangle 1"/>
-          <p:cNvSpPr/>
-          <p:nvPr/>
-        </p:nvSpPr>
-        <p:spPr>
-          <a:xfrm>
-            <a:off x="0" y="0"/>
-            <a:ext cx="12191695" cy="960120"/>
-          </a:xfrm>
-          <a:prstGeom prst="rect">
-            <a:avLst/>
-          </a:prstGeom>
-          <a:solidFill>
-            <a:srgbClr val="095292"/>
-          </a:solidFill>
-          <a:ln>
-            <a:noFill/>
-          </a:ln>
-        </p:spPr>
-        <p:style>
-          <a:lnRef idx="1">
-            <a:schemeClr val="accent1"/>
-          </a:lnRef>
-          <a:fillRef idx="3">
-            <a:schemeClr val="accent1"/>
-          </a:fillRef>
-          <a:effectRef idx="2">
-            <a:schemeClr val="accent1"/>
-          </a:effectRef>
-          <a:fontRef idx="minor">
-            <a:schemeClr val="lt1"/>
-          </a:fontRef>
-        </p:style>
-        <p:txBody>
-          <a:bodyPr rtlCol="0" anchor="ctr"/>
-          <a:lstStyle/>
-          <a:p>
-            <a:pPr algn="ctr"/>
-          </a:p>
-        </p:txBody>
-      </p:sp>
-      <p:sp>
-        <p:nvSpPr>
-          <p:cNvPr id="3" name="Rectangle 2"/>
-          <p:cNvSpPr/>
-          <p:nvPr/>
-        </p:nvSpPr>
-        <p:spPr>
-          <a:xfrm>
-            <a:off x="0" y="960120"/>
-            <a:ext cx="12191695" cy="41148"/>
-          </a:xfrm>
-          <a:prstGeom prst="rect">
-            <a:avLst/>
-          </a:prstGeom>
-          <a:solidFill>
-            <a:srgbClr val="FFD000"/>
-          </a:solidFill>
-          <a:ln>
-            <a:noFill/>
-          </a:ln>
-        </p:spPr>
-        <p:style>
-          <a:lnRef idx="1">
-            <a:schemeClr val="accent1"/>
-          </a:lnRef>
-          <a:fillRef idx="3">
-            <a:schemeClr val="accent1"/>
-          </a:fillRef>
-          <a:effectRef idx="2">
-            <a:schemeClr val="accent1"/>
-          </a:effectRef>
-          <a:fontRef idx="minor">
-            <a:schemeClr val="lt1"/>
-          </a:fontRef>
-        </p:style>
-        <p:txBody>
-          <a:bodyPr rtlCol="0" anchor="ctr"/>
-          <a:lstStyle/>
-          <a:p>
-            <a:pPr algn="ctr"/>
-          </a:p>
-        </p:txBody>
-      </p:sp>
-      <p:sp>
-        <p:nvSpPr>
-          <p:cNvPr id="4" name="TextBox 3"/>
-          <p:cNvSpPr txBox="1"/>
-          <p:nvPr/>
-        </p:nvSpPr>
-        <p:spPr>
-          <a:xfrm>
-            <a:off x="457200" y="164592"/>
-            <a:ext cx="11277295" cy="502920"/>
-          </a:xfrm>
-          <a:prstGeom prst="rect">
-            <a:avLst/>
-          </a:prstGeom>
-          <a:noFill/>
-        </p:spPr>
-        <p:txBody>
-          <a:bodyPr wrap="square">
-            <a:spAutoFit/>
-          </a:bodyPr>
-          <a:lstStyle/>
-          <a:p>
-            <a:r>
-              <a:rPr sz="2600" b="1" i="0">
-                <a:solidFill>
-                  <a:srgbClr val="FFFFFF"/>
-                </a:solidFill>
-                <a:latin typeface="Calibri"/>
-              </a:rPr>
-              <a:t>Taller PI VetCare — contexto / por que importa</a:t>
-            </a:r>
-          </a:p>
-        </p:txBody>
-      </p:sp>
-      <p:sp>
-        <p:nvSpPr>
-          <p:cNvPr id="5" name="TextBox 4"/>
-          <p:cNvSpPr txBox="1"/>
-          <p:nvPr/>
-        </p:nvSpPr>
-        <p:spPr>
-          <a:xfrm>
-            <a:off x="457200" y="1170432"/>
-            <a:ext cx="11277295" cy="5230368"/>
-          </a:xfrm>
-          <a:prstGeom prst="rect">
-            <a:avLst/>
-          </a:prstGeom>
-          <a:noFill/>
-        </p:spPr>
-        <p:txBody>
-          <a:bodyPr wrap="square">
-            <a:spAutoFit/>
-          </a:bodyPr>
-          <a:lstStyle/>
-          <a:p>
-            <a:pPr>
-              <a:spcAft>
-                <a:spcPts val="800"/>
-              </a:spcAft>
-            </a:pPr>
-            <a:r>
-              <a:rPr sz="2000" b="0" i="0">
-                <a:solidFill>
-                  <a:srgbClr val="333333"/>
-                </a:solidFill>
-                <a:latin typeface="Calibri"/>
-              </a:rPr>
-              <a:t>–   </a:t>
-            </a:r>
             <a:r>
               <a:rPr sz="2000" b="1" i="0">
                 <a:solidFill>
-                  <a:srgbClr val="333333"/>
-                </a:solidFill>
-                <a:latin typeface="Calibri"/>
-              </a:rPr>
-              <a:t>Por qué importa al PI VetCare:</a:t>
-            </a:r>
-            <a:r>
-              <a:rPr sz="2000" b="0" i="0">
-                <a:solidFill>
-                  <a:srgbClr val="333333"/>
-                </a:solidFill>
-                <a:latin typeface="Calibri"/>
-              </a:rPr>
-              <a:t> sin ER/alcance no hay base para procs ni seguridad.</a:t>
-            </a:r>
-          </a:p>
-          <a:p>
-            <a:pPr>
-              <a:spcAft>
-                <a:spcPts val="800"/>
-              </a:spcAft>
-            </a:pPr>
-            <a:r>
-              <a:rPr sz="2000" b="0" i="0">
-                <a:solidFill>
-                  <a:srgbClr val="333333"/>
-                </a:solidFill>
-                <a:latin typeface="Calibri"/>
-              </a:rPr>
-              <a:t>–   Hoy cierras dominio + entidades mínimas + reglas de negocio propias.</a:t>
-            </a:r>
-          </a:p>
-          <a:p>
-            <a:pPr>
-              <a:spcAft>
-                <a:spcPts val="800"/>
-              </a:spcAft>
-            </a:pPr>
-            <a:r>
-              <a:rPr sz="2000" b="0" i="0">
-                <a:solidFill>
-                  <a:srgbClr val="333333"/>
-                </a:solidFill>
-                <a:latin typeface="Calibri"/>
-              </a:rPr>
-              <a:t>–   El DDL demo (Codigo/) es semilla; tu ER manda.</a:t>
-            </a:r>
-          </a:p>
-        </p:txBody>
-      </p:sp>
-      <p:sp>
-        <p:nvSpPr>
-          <p:cNvPr id="6" name="TextBox 5"/>
-          <p:cNvSpPr txBox="1"/>
-          <p:nvPr/>
-        </p:nvSpPr>
-        <p:spPr>
-          <a:xfrm>
-            <a:off x="11185855" y="6473952"/>
-            <a:ext cx="640080" cy="274320"/>
-          </a:xfrm>
-          <a:prstGeom prst="rect">
-            <a:avLst/>
-          </a:prstGeom>
-          <a:noFill/>
-        </p:spPr>
-        <p:txBody>
-          <a:bodyPr wrap="square">
-            <a:spAutoFit/>
-          </a:bodyPr>
-          <a:lstStyle/>
-          <a:p>
-            <a:pPr algn="r"/>
-            <a:r>
-              <a:rPr sz="1100" b="0" i="0">
-                <a:solidFill>
-                  <a:srgbClr val="666666"/>
-                </a:solidFill>
-                <a:latin typeface="Calibri"/>
-              </a:rPr>
-              <a:t>37</a:t>
-            </a:r>
-          </a:p>
-        </p:txBody>
-      </p:sp>
-    </p:spTree>
-  </p:cSld>
-  <p:clrMapOvr>
-    <a:masterClrMapping/>
-  </p:clrMapOvr>
-</p:sld>
-</file>
-
-<file path=ppt/slides/slide38.xml><?xml version="1.0" encoding="utf-8"?>
-<p:sld xmlns:a="http://schemas.openxmlformats.org/drawingml/2006/main" xmlns:p="http://schemas.openxmlformats.org/presentationml/2006/main" xmlns:r="http://schemas.openxmlformats.org/officeDocument/2006/relationships">
-  <p:cSld>
-    <p:bg>
-      <p:bgPr>
-        <a:solidFill>
-          <a:srgbClr val="FFFFFF"/>
-        </a:solidFill>
-        <a:effectLst/>
-      </p:bgPr>
-    </p:bg>
-    <p:spTree>
-      <p:nvGrpSpPr>
-        <p:cNvPr id="1" name=""/>
-        <p:cNvGrpSpPr/>
-        <p:nvPr/>
-      </p:nvGrpSpPr>
-      <p:grpSpPr/>
-      <p:sp>
-        <p:nvSpPr>
-          <p:cNvPr id="2" name="Rectangle 1"/>
-          <p:cNvSpPr/>
-          <p:nvPr/>
-        </p:nvSpPr>
-        <p:spPr>
-          <a:xfrm>
-            <a:off x="0" y="0"/>
-            <a:ext cx="12191695" cy="960120"/>
-          </a:xfrm>
-          <a:prstGeom prst="rect">
-            <a:avLst/>
-          </a:prstGeom>
-          <a:solidFill>
-            <a:srgbClr val="095292"/>
-          </a:solidFill>
-          <a:ln>
-            <a:noFill/>
-          </a:ln>
-        </p:spPr>
-        <p:style>
-          <a:lnRef idx="1">
-            <a:schemeClr val="accent1"/>
-          </a:lnRef>
-          <a:fillRef idx="3">
-            <a:schemeClr val="accent1"/>
-          </a:fillRef>
-          <a:effectRef idx="2">
-            <a:schemeClr val="accent1"/>
-          </a:effectRef>
-          <a:fontRef idx="minor">
-            <a:schemeClr val="lt1"/>
-          </a:fontRef>
-        </p:style>
-        <p:txBody>
-          <a:bodyPr rtlCol="0" anchor="ctr"/>
-          <a:lstStyle/>
-          <a:p>
-            <a:pPr algn="ctr"/>
-          </a:p>
-        </p:txBody>
-      </p:sp>
-      <p:sp>
-        <p:nvSpPr>
-          <p:cNvPr id="3" name="Rectangle 2"/>
-          <p:cNvSpPr/>
-          <p:nvPr/>
-        </p:nvSpPr>
-        <p:spPr>
-          <a:xfrm>
-            <a:off x="0" y="960120"/>
-            <a:ext cx="12191695" cy="41148"/>
-          </a:xfrm>
-          <a:prstGeom prst="rect">
-            <a:avLst/>
-          </a:prstGeom>
-          <a:solidFill>
-            <a:srgbClr val="FFD000"/>
-          </a:solidFill>
-          <a:ln>
-            <a:noFill/>
-          </a:ln>
-        </p:spPr>
-        <p:style>
-          <a:lnRef idx="1">
-            <a:schemeClr val="accent1"/>
-          </a:lnRef>
-          <a:fillRef idx="3">
-            <a:schemeClr val="accent1"/>
-          </a:fillRef>
-          <a:effectRef idx="2">
-            <a:schemeClr val="accent1"/>
-          </a:effectRef>
-          <a:fontRef idx="minor">
-            <a:schemeClr val="lt1"/>
-          </a:fontRef>
-        </p:style>
-        <p:txBody>
-          <a:bodyPr rtlCol="0" anchor="ctr"/>
-          <a:lstStyle/>
-          <a:p>
-            <a:pPr algn="ctr"/>
-          </a:p>
-        </p:txBody>
-      </p:sp>
-      <p:sp>
-        <p:nvSpPr>
-          <p:cNvPr id="4" name="TextBox 3"/>
-          <p:cNvSpPr txBox="1"/>
-          <p:nvPr/>
-        </p:nvSpPr>
-        <p:spPr>
-          <a:xfrm>
-            <a:off x="457200" y="164592"/>
-            <a:ext cx="11277295" cy="502920"/>
-          </a:xfrm>
-          <a:prstGeom prst="rect">
-            <a:avLst/>
-          </a:prstGeom>
-          <a:noFill/>
-        </p:spPr>
-        <p:txBody>
-          <a:bodyPr wrap="square">
-            <a:spAutoFit/>
-          </a:bodyPr>
-          <a:lstStyle/>
-          <a:p>
-            <a:r>
-              <a:rPr sz="2600" b="1" i="0">
-                <a:solidFill>
-                  <a:srgbClr val="FFFFFF"/>
-                </a:solidFill>
-                <a:latin typeface="Calibri"/>
-              </a:rPr>
-              <a:t>Taller PI VetCare — objetivo y criterios</a:t>
-            </a:r>
-          </a:p>
-        </p:txBody>
-      </p:sp>
-      <p:sp>
-        <p:nvSpPr>
-          <p:cNvPr id="5" name="TextBox 4"/>
-          <p:cNvSpPr txBox="1"/>
-          <p:nvPr/>
-        </p:nvSpPr>
-        <p:spPr>
-          <a:xfrm>
-            <a:off x="457200" y="1170432"/>
-            <a:ext cx="11277295" cy="5230368"/>
-          </a:xfrm>
-          <a:prstGeom prst="rect">
-            <a:avLst/>
-          </a:prstGeom>
-          <a:noFill/>
-        </p:spPr>
-        <p:txBody>
-          <a:bodyPr wrap="square">
-            <a:spAutoFit/>
-          </a:bodyPr>
-          <a:lstStyle/>
-          <a:p>
-            <a:pPr>
-              <a:spcAft>
-                <a:spcPts val="800"/>
-              </a:spcAft>
-            </a:pPr>
-            <a:r>
-              <a:rPr sz="2000" b="0" i="0">
-                <a:solidFill>
-                  <a:srgbClr val="333333"/>
-                </a:solidFill>
-                <a:latin typeface="Calibri"/>
-              </a:rPr>
-              <a:t>–   </a:t>
-            </a:r>
-            <a:r>
-              <a:rPr sz="2000" b="1" i="0">
-                <a:solidFill>
-                  <a:srgbClr val="333333"/>
-                </a:solidFill>
-                <a:latin typeface="Calibri"/>
-              </a:rPr>
-              <a:t>Objetivo:</a:t>
-            </a:r>
-            <a:r>
-              <a:rPr sz="2000" b="0" i="0">
-                <a:solidFill>
-                  <a:srgbClr val="333333"/>
-                </a:solidFill>
-                <a:latin typeface="Calibri"/>
-              </a:rPr>
-              <a:t> Arrancar VetCare: ficha + ER borrador + entidades/reglas.</a:t>
-            </a:r>
-          </a:p>
-          <a:p>
-            <a:pPr>
-              <a:spcAft>
-                <a:spcPts val="800"/>
-              </a:spcAft>
-            </a:pPr>
-            <a:r>
-              <a:rPr sz="2000" b="0" i="0">
-                <a:solidFill>
-                  <a:srgbClr val="333333"/>
-                </a:solidFill>
-                <a:latin typeface="Calibri"/>
-              </a:rPr>
-              <a:t>–   </a:t>
-            </a:r>
-            <a:r>
-              <a:rPr sz="2000" b="1" i="0">
-                <a:solidFill>
-                  <a:srgbClr val="333333"/>
-                </a:solidFill>
-                <a:latin typeface="Calibri"/>
-              </a:rPr>
-              <a:t>Exito:</a:t>
-            </a:r>
-            <a:r>
-              <a:rPr sz="2000" b="0" i="0">
-                <a:solidFill>
-                  <a:srgbClr val="333333"/>
-                </a:solidFill>
-                <a:latin typeface="Calibri"/>
-              </a:rPr>
-              <a:t> Proyecto nombrado y registrado.</a:t>
-            </a:r>
-          </a:p>
-          <a:p>
-            <a:pPr>
-              <a:spcAft>
-                <a:spcPts val="800"/>
-              </a:spcAft>
-            </a:pPr>
-            <a:r>
-              <a:rPr sz="2000" b="0" i="0">
-                <a:solidFill>
-                  <a:srgbClr val="333333"/>
-                </a:solidFill>
-                <a:latin typeface="Calibri"/>
-              </a:rPr>
-              <a:t>–   </a:t>
-            </a:r>
-            <a:r>
-              <a:rPr sz="2000" b="1" i="0">
-                <a:solidFill>
-                  <a:srgbClr val="333333"/>
-                </a:solidFill>
-                <a:latin typeface="Calibri"/>
-              </a:rPr>
-              <a:t>Exito:</a:t>
-            </a:r>
-            <a:r>
-              <a:rPr sz="2000" b="0" i="0">
-                <a:solidFill>
-                  <a:srgbClr val="333333"/>
-                </a:solidFill>
-                <a:latin typeface="Calibri"/>
-              </a:rPr>
-              <a:t> ER PNG con entidades mínimas.</a:t>
-            </a:r>
-          </a:p>
-          <a:p>
-            <a:pPr>
-              <a:spcAft>
-                <a:spcPts val="800"/>
-              </a:spcAft>
-            </a:pPr>
-            <a:r>
-              <a:rPr sz="2000" b="0" i="0">
-                <a:solidFill>
-                  <a:srgbClr val="333333"/>
-                </a:solidFill>
-                <a:latin typeface="Calibri"/>
-              </a:rPr>
-              <a:t>–   </a:t>
-            </a:r>
-            <a:r>
-              <a:rPr sz="2000" b="1" i="0">
-                <a:solidFill>
-                  <a:srgbClr val="333333"/>
-                </a:solidFill>
-                <a:latin typeface="Calibri"/>
-              </a:rPr>
-              <a:t>Exito:</a:t>
-            </a:r>
-            <a:r>
-              <a:rPr sz="2000" b="0" i="0">
-                <a:solidFill>
-                  <a:srgbClr val="333333"/>
-                </a:solidFill>
-                <a:latin typeface="Calibri"/>
-              </a:rPr>
-              <a:t> 3 reglas de negocio propias.</a:t>
-            </a:r>
-          </a:p>
-          <a:p>
-            <a:pPr>
-              <a:spcAft>
-                <a:spcPts val="800"/>
-              </a:spcAft>
-            </a:pPr>
-            <a:r>
-              <a:rPr sz="2000" b="0" i="0">
-                <a:solidFill>
-                  <a:srgbClr val="333333"/>
-                </a:solidFill>
-                <a:latin typeface="Calibri"/>
-              </a:rPr>
-              <a:t>–   </a:t>
-            </a:r>
-            <a:r>
-              <a:rPr sz="2000" b="1" i="0">
-                <a:solidFill>
-                  <a:srgbClr val="333333"/>
-                </a:solidFill>
-                <a:latin typeface="Calibri"/>
-              </a:rPr>
-              <a:t>Exito:</a:t>
-            </a:r>
-            <a:r>
-              <a:rPr sz="2000" b="0" i="0">
-                <a:solidFill>
-                  <a:srgbClr val="333333"/>
-                </a:solidFill>
-                <a:latin typeface="Calibri"/>
-              </a:rPr>
-              <a:t> Alcance SI/NO 5-8 lineas.</a:t>
-            </a:r>
-          </a:p>
-          <a:p>
-            <a:pPr>
-              <a:spcAft>
-                <a:spcPts val="800"/>
-              </a:spcAft>
-            </a:pPr>
-            <a:r>
-              <a:rPr sz="2000" b="0" i="0">
-                <a:solidFill>
-                  <a:srgbClr val="333333"/>
-                </a:solidFill>
-                <a:latin typeface="Calibri"/>
-              </a:rPr>
-              <a:t>–   </a:t>
-            </a:r>
-            <a:r>
-              <a:rPr sz="2000" b="1" i="0">
-                <a:solidFill>
-                  <a:srgbClr val="333333"/>
-                </a:solidFill>
-                <a:latin typeface="Calibri"/>
-              </a:rPr>
-              <a:t>Exito:</a:t>
-            </a:r>
-            <a:r>
-              <a:rPr sz="2000" b="0" i="0">
-                <a:solidFill>
-                  <a:srgbClr val="333333"/>
-                </a:solidFill>
-                <a:latin typeface="Calibri"/>
-              </a:rPr>
-              <a:t> Entrega en la fecha que indique el docente.</a:t>
-            </a:r>
-          </a:p>
-        </p:txBody>
-      </p:sp>
-      <p:sp>
-        <p:nvSpPr>
-          <p:cNvPr id="6" name="TextBox 5"/>
-          <p:cNvSpPr txBox="1"/>
-          <p:nvPr/>
-        </p:nvSpPr>
-        <p:spPr>
-          <a:xfrm>
-            <a:off x="11185855" y="6473952"/>
-            <a:ext cx="640080" cy="274320"/>
-          </a:xfrm>
-          <a:prstGeom prst="rect">
-            <a:avLst/>
-          </a:prstGeom>
-          <a:noFill/>
-        </p:spPr>
-        <p:txBody>
-          <a:bodyPr wrap="square">
-            <a:spAutoFit/>
-          </a:bodyPr>
-          <a:lstStyle/>
-          <a:p>
-            <a:pPr algn="r"/>
-            <a:r>
-              <a:rPr sz="1100" b="0" i="0">
-                <a:solidFill>
-                  <a:srgbClr val="666666"/>
-                </a:solidFill>
-                <a:latin typeface="Calibri"/>
-              </a:rPr>
-              <a:t>38</a:t>
-            </a:r>
-          </a:p>
-        </p:txBody>
-      </p:sp>
-    </p:spTree>
-  </p:cSld>
-  <p:clrMapOvr>
-    <a:masterClrMapping/>
-  </p:clrMapOvr>
-</p:sld>
-</file>
-
-<file path=ppt/slides/slide39.xml><?xml version="1.0" encoding="utf-8"?>
-<p:sld xmlns:a="http://schemas.openxmlformats.org/drawingml/2006/main" xmlns:p="http://schemas.openxmlformats.org/presentationml/2006/main" xmlns:r="http://schemas.openxmlformats.org/officeDocument/2006/relationships">
-  <p:cSld>
-    <p:bg>
-      <p:bgPr>
-        <a:solidFill>
-          <a:srgbClr val="FFFFFF"/>
-        </a:solidFill>
-        <a:effectLst/>
-      </p:bgPr>
-    </p:bg>
-    <p:spTree>
-      <p:nvGrpSpPr>
-        <p:cNvPr id="1" name=""/>
-        <p:cNvGrpSpPr/>
-        <p:nvPr/>
-      </p:nvGrpSpPr>
-      <p:grpSpPr/>
-      <p:sp>
-        <p:nvSpPr>
-          <p:cNvPr id="2" name="Rectangle 1"/>
-          <p:cNvSpPr/>
-          <p:nvPr/>
-        </p:nvSpPr>
-        <p:spPr>
-          <a:xfrm>
-            <a:off x="0" y="0"/>
-            <a:ext cx="12191695" cy="960120"/>
-          </a:xfrm>
-          <a:prstGeom prst="rect">
-            <a:avLst/>
-          </a:prstGeom>
-          <a:solidFill>
-            <a:srgbClr val="095292"/>
-          </a:solidFill>
-          <a:ln>
-            <a:noFill/>
-          </a:ln>
-        </p:spPr>
-        <p:style>
-          <a:lnRef idx="1">
-            <a:schemeClr val="accent1"/>
-          </a:lnRef>
-          <a:fillRef idx="3">
-            <a:schemeClr val="accent1"/>
-          </a:fillRef>
-          <a:effectRef idx="2">
-            <a:schemeClr val="accent1"/>
-          </a:effectRef>
-          <a:fontRef idx="minor">
-            <a:schemeClr val="lt1"/>
-          </a:fontRef>
-        </p:style>
-        <p:txBody>
-          <a:bodyPr rtlCol="0" anchor="ctr"/>
-          <a:lstStyle/>
-          <a:p>
-            <a:pPr algn="ctr"/>
-          </a:p>
-        </p:txBody>
-      </p:sp>
-      <p:sp>
-        <p:nvSpPr>
-          <p:cNvPr id="3" name="Rectangle 2"/>
-          <p:cNvSpPr/>
-          <p:nvPr/>
-        </p:nvSpPr>
-        <p:spPr>
-          <a:xfrm>
-            <a:off x="0" y="960120"/>
-            <a:ext cx="12191695" cy="41148"/>
-          </a:xfrm>
-          <a:prstGeom prst="rect">
-            <a:avLst/>
-          </a:prstGeom>
-          <a:solidFill>
-            <a:srgbClr val="FFD000"/>
-          </a:solidFill>
-          <a:ln>
-            <a:noFill/>
-          </a:ln>
-        </p:spPr>
-        <p:style>
-          <a:lnRef idx="1">
-            <a:schemeClr val="accent1"/>
-          </a:lnRef>
-          <a:fillRef idx="3">
-            <a:schemeClr val="accent1"/>
-          </a:fillRef>
-          <a:effectRef idx="2">
-            <a:schemeClr val="accent1"/>
-          </a:effectRef>
-          <a:fontRef idx="minor">
-            <a:schemeClr val="lt1"/>
-          </a:fontRef>
-        </p:style>
-        <p:txBody>
-          <a:bodyPr rtlCol="0" anchor="ctr"/>
-          <a:lstStyle/>
-          <a:p>
-            <a:pPr algn="ctr"/>
-          </a:p>
-        </p:txBody>
-      </p:sp>
-      <p:sp>
-        <p:nvSpPr>
-          <p:cNvPr id="4" name="TextBox 3"/>
-          <p:cNvSpPr txBox="1"/>
-          <p:nvPr/>
-        </p:nvSpPr>
-        <p:spPr>
-          <a:xfrm>
-            <a:off x="457200" y="164592"/>
-            <a:ext cx="11277295" cy="502920"/>
-          </a:xfrm>
-          <a:prstGeom prst="rect">
-            <a:avLst/>
-          </a:prstGeom>
-          <a:noFill/>
-        </p:spPr>
-        <p:txBody>
-          <a:bodyPr wrap="square">
-            <a:spAutoFit/>
-          </a:bodyPr>
-          <a:lstStyle/>
-          <a:p>
-            <a:r>
-              <a:rPr sz="2600" b="1" i="0">
-                <a:solidFill>
-                  <a:srgbClr val="FFFFFF"/>
-                </a:solidFill>
-                <a:latin typeface="Calibri"/>
-              </a:rPr>
-              <a:t>Taller PI VetCare — escenario / datos de partida</a:t>
-            </a:r>
-          </a:p>
-        </p:txBody>
-      </p:sp>
-      <p:sp>
-        <p:nvSpPr>
-          <p:cNvPr id="5" name="TextBox 4"/>
-          <p:cNvSpPr txBox="1"/>
-          <p:nvPr/>
-        </p:nvSpPr>
-        <p:spPr>
-          <a:xfrm>
-            <a:off x="457200" y="1170432"/>
-            <a:ext cx="11277295" cy="5230368"/>
-          </a:xfrm>
-          <a:prstGeom prst="rect">
-            <a:avLst/>
-          </a:prstGeom>
-          <a:noFill/>
-        </p:spPr>
-        <p:txBody>
-          <a:bodyPr wrap="square">
-            <a:spAutoFit/>
-          </a:bodyPr>
-          <a:lstStyle/>
-          <a:p>
-            <a:pPr>
-              <a:spcAft>
-                <a:spcPts val="800"/>
-              </a:spcAft>
-            </a:pPr>
-            <a:r>
-              <a:rPr sz="2000" b="0" i="0">
-                <a:solidFill>
-                  <a:srgbClr val="333333"/>
-                </a:solidFill>
-                <a:latin typeface="Calibri"/>
-              </a:rPr>
-              <a:t>–   Cliente: Clínica Veterinaria «Huellitas» · Sistema: VetCare DB (la base de datos).</a:t>
-            </a:r>
-          </a:p>
-          <a:p>
-            <a:pPr>
-              <a:spcAft>
-                <a:spcPts val="800"/>
-              </a:spcAft>
-            </a:pPr>
-            <a:r>
-              <a:rPr sz="2000" b="0" i="0">
-                <a:solidFill>
-                  <a:srgbClr val="333333"/>
-                </a:solidFill>
-                <a:latin typeface="Calibri"/>
-              </a:rPr>
-              <a:t>–   Ficha con plantilla fija: VetCare - [Apellido], alcance SI / NO y 3 reglas Condición → Acción.</a:t>
-            </a:r>
-          </a:p>
-          <a:p>
-            <a:pPr>
-              <a:spcAft>
-                <a:spcPts val="800"/>
-              </a:spcAft>
-            </a:pPr>
-            <a:r>
-              <a:rPr sz="2000" b="0" i="0">
-                <a:solidFill>
-                  <a:srgbClr val="333333"/>
-                </a:solidFill>
-                <a:latin typeface="Calibri"/>
-              </a:rPr>
-              <a:t>–   Diagrama: boceto visual en Excalidraw o draw.io → código Mermaid (erDiagram) → la plataforma del curso.</a:t>
-            </a:r>
-          </a:p>
-          <a:p>
-            <a:pPr>
-              <a:spcAft>
-                <a:spcPts val="800"/>
-              </a:spcAft>
-            </a:pPr>
-            <a:r>
-              <a:rPr sz="2000" b="0" i="0">
-                <a:solidFill>
-                  <a:srgbClr val="333333"/>
-                </a:solidFill>
-                <a:latin typeface="Calibri"/>
-              </a:rPr>
-              <a:t>–   Nombres en minúscula y singular (dueno, mascota, cita) con id_&lt;entidad&gt;: iguales en ER, DDL y Mermaid.</a:t>
-            </a:r>
-          </a:p>
-        </p:txBody>
-      </p:sp>
-      <p:sp>
-        <p:nvSpPr>
-          <p:cNvPr id="6" name="TextBox 5"/>
-          <p:cNvSpPr txBox="1"/>
-          <p:nvPr/>
-        </p:nvSpPr>
-        <p:spPr>
-          <a:xfrm>
-            <a:off x="11185855" y="6473952"/>
-            <a:ext cx="640080" cy="274320"/>
-          </a:xfrm>
-          <a:prstGeom prst="rect">
-            <a:avLst/>
-          </a:prstGeom>
-          <a:noFill/>
-        </p:spPr>
-        <p:txBody>
-          <a:bodyPr wrap="square">
-            <a:spAutoFit/>
-          </a:bodyPr>
-          <a:lstStyle/>
-          <a:p>
-            <a:pPr algn="r"/>
-            <a:r>
-              <a:rPr sz="1100" b="0" i="0">
-                <a:solidFill>
-                  <a:srgbClr val="666666"/>
-                </a:solidFill>
-                <a:latin typeface="Calibri"/>
-              </a:rPr>
-              <a:t>39</a:t>
+                  <a:srgbClr val="269CCB"/>
+                </a:solidFill>
+                <a:latin typeface="Calibri"/>
+              </a:rPr>
+              <a:t>Todo lo visto queda proyectado para repasar</a:t>
             </a:r>
           </a:p>
         </p:txBody>
@@ -17202,3125 +16358,6 @@
                 <a:latin typeface="Calibri"/>
               </a:rPr>
               <a:t>4</a:t>
-            </a:r>
-          </a:p>
-        </p:txBody>
-      </p:sp>
-    </p:spTree>
-  </p:cSld>
-  <p:clrMapOvr>
-    <a:masterClrMapping/>
-  </p:clrMapOvr>
-</p:sld>
-</file>
-
-<file path=ppt/slides/slide40.xml><?xml version="1.0" encoding="utf-8"?>
-<p:sld xmlns:a="http://schemas.openxmlformats.org/drawingml/2006/main" xmlns:p="http://schemas.openxmlformats.org/presentationml/2006/main" xmlns:r="http://schemas.openxmlformats.org/officeDocument/2006/relationships">
-  <p:cSld>
-    <p:bg>
-      <p:bgPr>
-        <a:solidFill>
-          <a:srgbClr val="FFFFFF"/>
-        </a:solidFill>
-        <a:effectLst/>
-      </p:bgPr>
-    </p:bg>
-    <p:spTree>
-      <p:nvGrpSpPr>
-        <p:cNvPr id="1" name=""/>
-        <p:cNvGrpSpPr/>
-        <p:nvPr/>
-      </p:nvGrpSpPr>
-      <p:grpSpPr/>
-      <p:sp>
-        <p:nvSpPr>
-          <p:cNvPr id="2" name="Rectangle 1"/>
-          <p:cNvSpPr/>
-          <p:nvPr/>
-        </p:nvSpPr>
-        <p:spPr>
-          <a:xfrm>
-            <a:off x="0" y="0"/>
-            <a:ext cx="12191695" cy="960120"/>
-          </a:xfrm>
-          <a:prstGeom prst="rect">
-            <a:avLst/>
-          </a:prstGeom>
-          <a:solidFill>
-            <a:srgbClr val="095292"/>
-          </a:solidFill>
-          <a:ln>
-            <a:noFill/>
-          </a:ln>
-        </p:spPr>
-        <p:style>
-          <a:lnRef idx="1">
-            <a:schemeClr val="accent1"/>
-          </a:lnRef>
-          <a:fillRef idx="3">
-            <a:schemeClr val="accent1"/>
-          </a:fillRef>
-          <a:effectRef idx="2">
-            <a:schemeClr val="accent1"/>
-          </a:effectRef>
-          <a:fontRef idx="minor">
-            <a:schemeClr val="lt1"/>
-          </a:fontRef>
-        </p:style>
-        <p:txBody>
-          <a:bodyPr rtlCol="0" anchor="ctr"/>
-          <a:lstStyle/>
-          <a:p>
-            <a:pPr algn="ctr"/>
-          </a:p>
-        </p:txBody>
-      </p:sp>
-      <p:sp>
-        <p:nvSpPr>
-          <p:cNvPr id="3" name="Rectangle 2"/>
-          <p:cNvSpPr/>
-          <p:nvPr/>
-        </p:nvSpPr>
-        <p:spPr>
-          <a:xfrm>
-            <a:off x="0" y="960120"/>
-            <a:ext cx="12191695" cy="41148"/>
-          </a:xfrm>
-          <a:prstGeom prst="rect">
-            <a:avLst/>
-          </a:prstGeom>
-          <a:solidFill>
-            <a:srgbClr val="FFD000"/>
-          </a:solidFill>
-          <a:ln>
-            <a:noFill/>
-          </a:ln>
-        </p:spPr>
-        <p:style>
-          <a:lnRef idx="1">
-            <a:schemeClr val="accent1"/>
-          </a:lnRef>
-          <a:fillRef idx="3">
-            <a:schemeClr val="accent1"/>
-          </a:fillRef>
-          <a:effectRef idx="2">
-            <a:schemeClr val="accent1"/>
-          </a:effectRef>
-          <a:fontRef idx="minor">
-            <a:schemeClr val="lt1"/>
-          </a:fontRef>
-        </p:style>
-        <p:txBody>
-          <a:bodyPr rtlCol="0" anchor="ctr"/>
-          <a:lstStyle/>
-          <a:p>
-            <a:pPr algn="ctr"/>
-          </a:p>
-        </p:txBody>
-      </p:sp>
-      <p:sp>
-        <p:nvSpPr>
-          <p:cNvPr id="4" name="TextBox 3"/>
-          <p:cNvSpPr txBox="1"/>
-          <p:nvPr/>
-        </p:nvSpPr>
-        <p:spPr>
-          <a:xfrm>
-            <a:off x="457200" y="164592"/>
-            <a:ext cx="11277295" cy="502920"/>
-          </a:xfrm>
-          <a:prstGeom prst="rect">
-            <a:avLst/>
-          </a:prstGeom>
-          <a:noFill/>
-        </p:spPr>
-        <p:txBody>
-          <a:bodyPr wrap="square">
-            <a:spAutoFit/>
-          </a:bodyPr>
-          <a:lstStyle/>
-          <a:p>
-            <a:r>
-              <a:rPr sz="2600" b="1" i="0">
-                <a:solidFill>
-                  <a:srgbClr val="FFFFFF"/>
-                </a:solidFill>
-                <a:latin typeface="Calibri"/>
-              </a:rPr>
-              <a:t>Taller PI VetCare — pasos guiados</a:t>
-            </a:r>
-          </a:p>
-        </p:txBody>
-      </p:sp>
-      <p:sp>
-        <p:nvSpPr>
-          <p:cNvPr id="5" name="Rounded Rectangle 4"/>
-          <p:cNvSpPr/>
-          <p:nvPr/>
-        </p:nvSpPr>
-        <p:spPr>
-          <a:xfrm>
-            <a:off x="457200" y="1554480"/>
-            <a:ext cx="11277295" cy="1051560"/>
-          </a:xfrm>
-          <a:prstGeom prst="roundRect">
-            <a:avLst>
-              <a:gd name="adj" fmla="val 12000"/>
-            </a:avLst>
-          </a:prstGeom>
-          <a:solidFill>
-            <a:srgbClr val="F2F2F2"/>
-          </a:solidFill>
-          <a:ln>
-            <a:noFill/>
-          </a:ln>
-        </p:spPr>
-        <p:style>
-          <a:lnRef idx="1">
-            <a:schemeClr val="accent1"/>
-          </a:lnRef>
-          <a:fillRef idx="3">
-            <a:schemeClr val="accent1"/>
-          </a:fillRef>
-          <a:effectRef idx="2">
-            <a:schemeClr val="accent1"/>
-          </a:effectRef>
-          <a:fontRef idx="minor">
-            <a:schemeClr val="lt1"/>
-          </a:fontRef>
-        </p:style>
-        <p:txBody>
-          <a:bodyPr rtlCol="0" anchor="ctr"/>
-          <a:lstStyle/>
-          <a:p>
-            <a:pPr algn="ctr"/>
-          </a:p>
-        </p:txBody>
-      </p:sp>
-      <p:sp>
-        <p:nvSpPr>
-          <p:cNvPr id="6" name="Rounded Rectangle 5"/>
-          <p:cNvSpPr/>
-          <p:nvPr/>
-        </p:nvSpPr>
-        <p:spPr>
-          <a:xfrm>
-            <a:off x="594360" y="1860804"/>
-            <a:ext cx="438912" cy="438912"/>
-          </a:xfrm>
-          <a:prstGeom prst="roundRect">
-            <a:avLst>
-              <a:gd name="adj" fmla="val 12000"/>
-            </a:avLst>
-          </a:prstGeom>
-          <a:solidFill>
-            <a:srgbClr val="095292"/>
-          </a:solidFill>
-          <a:ln>
-            <a:noFill/>
-          </a:ln>
-        </p:spPr>
-        <p:style>
-          <a:lnRef idx="1">
-            <a:schemeClr val="accent1"/>
-          </a:lnRef>
-          <a:fillRef idx="3">
-            <a:schemeClr val="accent1"/>
-          </a:fillRef>
-          <a:effectRef idx="2">
-            <a:schemeClr val="accent1"/>
-          </a:effectRef>
-          <a:fontRef idx="minor">
-            <a:schemeClr val="lt1"/>
-          </a:fontRef>
-        </p:style>
-        <p:txBody>
-          <a:bodyPr rtlCol="0" anchor="ctr"/>
-          <a:lstStyle/>
-          <a:p>
-            <a:pPr algn="ctr"/>
-          </a:p>
-        </p:txBody>
-      </p:sp>
-      <p:sp>
-        <p:nvSpPr>
-          <p:cNvPr id="7" name="TextBox 6"/>
-          <p:cNvSpPr txBox="1"/>
-          <p:nvPr/>
-        </p:nvSpPr>
-        <p:spPr>
-          <a:xfrm>
-            <a:off x="594360" y="1860804"/>
-            <a:ext cx="438912" cy="438912"/>
-          </a:xfrm>
-          <a:prstGeom prst="rect">
-            <a:avLst/>
-          </a:prstGeom>
-          <a:noFill/>
-        </p:spPr>
-        <p:txBody>
-          <a:bodyPr wrap="square" anchor="ctr"/>
-          <a:lstStyle/>
-          <a:p>
-            <a:pPr algn="ctr"/>
-            <a:r>
-              <a:rPr sz="1600" b="1" i="0">
-                <a:solidFill>
-                  <a:srgbClr val="FFFFFF"/>
-                </a:solidFill>
-                <a:latin typeface="Calibri"/>
-              </a:rPr>
-              <a:t>1</a:t>
-            </a:r>
-          </a:p>
-        </p:txBody>
-      </p:sp>
-      <p:sp>
-        <p:nvSpPr>
-          <p:cNvPr id="8" name="TextBox 7"/>
-          <p:cNvSpPr txBox="1"/>
-          <p:nvPr/>
-        </p:nvSpPr>
-        <p:spPr>
-          <a:xfrm>
-            <a:off x="1188720" y="1645920"/>
-            <a:ext cx="10271455" cy="886968"/>
-          </a:xfrm>
-          <a:prstGeom prst="rect">
-            <a:avLst/>
-          </a:prstGeom>
-          <a:noFill/>
-        </p:spPr>
-        <p:txBody>
-          <a:bodyPr wrap="square" anchor="ctr"/>
-          <a:lstStyle/>
-          <a:p>
-            <a:r>
-              <a:rPr sz="1500" b="1" i="0">
-                <a:solidFill>
-                  <a:srgbClr val="095292"/>
-                </a:solidFill>
-                <a:latin typeface="Calibri"/>
-              </a:rPr>
-              <a:t>Registrar el proyecto con el nombre exacto VetCare - [Apellido] (trabajo individual por defecto; equipo de 2-3 solo si el docente lo autoriza).</a:t>
-            </a:r>
-          </a:p>
-        </p:txBody>
-      </p:sp>
-      <p:sp>
-        <p:nvSpPr>
-          <p:cNvPr id="9" name="Rounded Rectangle 8"/>
-          <p:cNvSpPr/>
-          <p:nvPr/>
-        </p:nvSpPr>
-        <p:spPr>
-          <a:xfrm>
-            <a:off x="457200" y="2697480"/>
-            <a:ext cx="11277295" cy="1051560"/>
-          </a:xfrm>
-          <a:prstGeom prst="roundRect">
-            <a:avLst>
-              <a:gd name="adj" fmla="val 12000"/>
-            </a:avLst>
-          </a:prstGeom>
-          <a:solidFill>
-            <a:srgbClr val="E8F4FA"/>
-          </a:solidFill>
-          <a:ln>
-            <a:noFill/>
-          </a:ln>
-        </p:spPr>
-        <p:style>
-          <a:lnRef idx="1">
-            <a:schemeClr val="accent1"/>
-          </a:lnRef>
-          <a:fillRef idx="3">
-            <a:schemeClr val="accent1"/>
-          </a:fillRef>
-          <a:effectRef idx="2">
-            <a:schemeClr val="accent1"/>
-          </a:effectRef>
-          <a:fontRef idx="minor">
-            <a:schemeClr val="lt1"/>
-          </a:fontRef>
-        </p:style>
-        <p:txBody>
-          <a:bodyPr rtlCol="0" anchor="ctr"/>
-          <a:lstStyle/>
-          <a:p>
-            <a:pPr algn="ctr"/>
-          </a:p>
-        </p:txBody>
-      </p:sp>
-      <p:sp>
-        <p:nvSpPr>
-          <p:cNvPr id="10" name="Rounded Rectangle 9"/>
-          <p:cNvSpPr/>
-          <p:nvPr/>
-        </p:nvSpPr>
-        <p:spPr>
-          <a:xfrm>
-            <a:off x="594360" y="3003804"/>
-            <a:ext cx="438912" cy="438912"/>
-          </a:xfrm>
-          <a:prstGeom prst="roundRect">
-            <a:avLst>
-              <a:gd name="adj" fmla="val 12000"/>
-            </a:avLst>
-          </a:prstGeom>
-          <a:solidFill>
-            <a:srgbClr val="095292"/>
-          </a:solidFill>
-          <a:ln>
-            <a:noFill/>
-          </a:ln>
-        </p:spPr>
-        <p:style>
-          <a:lnRef idx="1">
-            <a:schemeClr val="accent1"/>
-          </a:lnRef>
-          <a:fillRef idx="3">
-            <a:schemeClr val="accent1"/>
-          </a:fillRef>
-          <a:effectRef idx="2">
-            <a:schemeClr val="accent1"/>
-          </a:effectRef>
-          <a:fontRef idx="minor">
-            <a:schemeClr val="lt1"/>
-          </a:fontRef>
-        </p:style>
-        <p:txBody>
-          <a:bodyPr rtlCol="0" anchor="ctr"/>
-          <a:lstStyle/>
-          <a:p>
-            <a:pPr algn="ctr"/>
-          </a:p>
-        </p:txBody>
-      </p:sp>
-      <p:sp>
-        <p:nvSpPr>
-          <p:cNvPr id="11" name="TextBox 10"/>
-          <p:cNvSpPr txBox="1"/>
-          <p:nvPr/>
-        </p:nvSpPr>
-        <p:spPr>
-          <a:xfrm>
-            <a:off x="594360" y="3003804"/>
-            <a:ext cx="438912" cy="438912"/>
-          </a:xfrm>
-          <a:prstGeom prst="rect">
-            <a:avLst/>
-          </a:prstGeom>
-          <a:noFill/>
-        </p:spPr>
-        <p:txBody>
-          <a:bodyPr wrap="square" anchor="ctr"/>
-          <a:lstStyle/>
-          <a:p>
-            <a:pPr algn="ctr"/>
-            <a:r>
-              <a:rPr sz="1600" b="1" i="0">
-                <a:solidFill>
-                  <a:srgbClr val="FFFFFF"/>
-                </a:solidFill>
-                <a:latin typeface="Calibri"/>
-              </a:rPr>
-              <a:t>2</a:t>
-            </a:r>
-          </a:p>
-        </p:txBody>
-      </p:sp>
-      <p:sp>
-        <p:nvSpPr>
-          <p:cNvPr id="12" name="TextBox 11"/>
-          <p:cNvSpPr txBox="1"/>
-          <p:nvPr/>
-        </p:nvSpPr>
-        <p:spPr>
-          <a:xfrm>
-            <a:off x="1188720" y="2788920"/>
-            <a:ext cx="10271455" cy="886968"/>
-          </a:xfrm>
-          <a:prstGeom prst="rect">
-            <a:avLst/>
-          </a:prstGeom>
-          <a:noFill/>
-        </p:spPr>
-        <p:txBody>
-          <a:bodyPr wrap="square" anchor="ctr"/>
-          <a:lstStyle/>
-          <a:p>
-            <a:r>
-              <a:rPr sz="1500" b="1" i="0">
-                <a:solidFill>
-                  <a:srgbClr val="095292"/>
-                </a:solidFill>
-                <a:latin typeface="Calibri"/>
-              </a:rPr>
-              <a:t>Llenar la plantilla de la ficha del PI: alcance SI / alcance NO y 3 reglas de negocio propias en formato Condicion -&gt; Accion.</a:t>
-            </a:r>
-          </a:p>
-        </p:txBody>
-      </p:sp>
-      <p:sp>
-        <p:nvSpPr>
-          <p:cNvPr id="13" name="Rounded Rectangle 12"/>
-          <p:cNvSpPr/>
-          <p:nvPr/>
-        </p:nvSpPr>
-        <p:spPr>
-          <a:xfrm>
-            <a:off x="457200" y="3840480"/>
-            <a:ext cx="11277295" cy="1051560"/>
-          </a:xfrm>
-          <a:prstGeom prst="roundRect">
-            <a:avLst>
-              <a:gd name="adj" fmla="val 12000"/>
-            </a:avLst>
-          </a:prstGeom>
-          <a:solidFill>
-            <a:srgbClr val="F2F2F2"/>
-          </a:solidFill>
-          <a:ln>
-            <a:noFill/>
-          </a:ln>
-        </p:spPr>
-        <p:style>
-          <a:lnRef idx="1">
-            <a:schemeClr val="accent1"/>
-          </a:lnRef>
-          <a:fillRef idx="3">
-            <a:schemeClr val="accent1"/>
-          </a:fillRef>
-          <a:effectRef idx="2">
-            <a:schemeClr val="accent1"/>
-          </a:effectRef>
-          <a:fontRef idx="minor">
-            <a:schemeClr val="lt1"/>
-          </a:fontRef>
-        </p:style>
-        <p:txBody>
-          <a:bodyPr rtlCol="0" anchor="ctr"/>
-          <a:lstStyle/>
-          <a:p>
-            <a:pPr algn="ctr"/>
-          </a:p>
-        </p:txBody>
-      </p:sp>
-      <p:sp>
-        <p:nvSpPr>
-          <p:cNvPr id="14" name="Rounded Rectangle 13"/>
-          <p:cNvSpPr/>
-          <p:nvPr/>
-        </p:nvSpPr>
-        <p:spPr>
-          <a:xfrm>
-            <a:off x="594360" y="4146804"/>
-            <a:ext cx="438912" cy="438912"/>
-          </a:xfrm>
-          <a:prstGeom prst="roundRect">
-            <a:avLst>
-              <a:gd name="adj" fmla="val 12000"/>
-            </a:avLst>
-          </a:prstGeom>
-          <a:solidFill>
-            <a:srgbClr val="095292"/>
-          </a:solidFill>
-          <a:ln>
-            <a:noFill/>
-          </a:ln>
-        </p:spPr>
-        <p:style>
-          <a:lnRef idx="1">
-            <a:schemeClr val="accent1"/>
-          </a:lnRef>
-          <a:fillRef idx="3">
-            <a:schemeClr val="accent1"/>
-          </a:fillRef>
-          <a:effectRef idx="2">
-            <a:schemeClr val="accent1"/>
-          </a:effectRef>
-          <a:fontRef idx="minor">
-            <a:schemeClr val="lt1"/>
-          </a:fontRef>
-        </p:style>
-        <p:txBody>
-          <a:bodyPr rtlCol="0" anchor="ctr"/>
-          <a:lstStyle/>
-          <a:p>
-            <a:pPr algn="ctr"/>
-          </a:p>
-        </p:txBody>
-      </p:sp>
-      <p:sp>
-        <p:nvSpPr>
-          <p:cNvPr id="15" name="TextBox 14"/>
-          <p:cNvSpPr txBox="1"/>
-          <p:nvPr/>
-        </p:nvSpPr>
-        <p:spPr>
-          <a:xfrm>
-            <a:off x="594360" y="4146804"/>
-            <a:ext cx="438912" cy="438912"/>
-          </a:xfrm>
-          <a:prstGeom prst="rect">
-            <a:avLst/>
-          </a:prstGeom>
-          <a:noFill/>
-        </p:spPr>
-        <p:txBody>
-          <a:bodyPr wrap="square" anchor="ctr"/>
-          <a:lstStyle/>
-          <a:p>
-            <a:pPr algn="ctr"/>
-            <a:r>
-              <a:rPr sz="1600" b="1" i="0">
-                <a:solidFill>
-                  <a:srgbClr val="FFFFFF"/>
-                </a:solidFill>
-                <a:latin typeface="Calibri"/>
-              </a:rPr>
-              <a:t>3</a:t>
-            </a:r>
-          </a:p>
-        </p:txBody>
-      </p:sp>
-      <p:sp>
-        <p:nvSpPr>
-          <p:cNvPr id="16" name="TextBox 15"/>
-          <p:cNvSpPr txBox="1"/>
-          <p:nvPr/>
-        </p:nvSpPr>
-        <p:spPr>
-          <a:xfrm>
-            <a:off x="1188720" y="3931920"/>
-            <a:ext cx="10271455" cy="886968"/>
-          </a:xfrm>
-          <a:prstGeom prst="rect">
-            <a:avLst/>
-          </a:prstGeom>
-          <a:noFill/>
-        </p:spPr>
-        <p:txBody>
-          <a:bodyPr wrap="square" anchor="ctr"/>
-          <a:lstStyle/>
-          <a:p>
-            <a:r>
-              <a:rPr sz="1500" b="1" i="0">
-                <a:solidFill>
-                  <a:srgbClr val="095292"/>
-                </a:solidFill>
-                <a:latin typeface="Calibri"/>
-              </a:rPr>
-              <a:t>Dibujar el ER borrador en Excalidraw o draw.io, pasarlo a Mermaid (erDiagram) con ayuda de una IA y pegarlo renderizado en la plataforma del curso.</a:t>
-            </a:r>
-          </a:p>
-        </p:txBody>
-      </p:sp>
-      <p:sp>
-        <p:nvSpPr>
-          <p:cNvPr id="17" name="Rounded Rectangle 16"/>
-          <p:cNvSpPr/>
-          <p:nvPr/>
-        </p:nvSpPr>
-        <p:spPr>
-          <a:xfrm>
-            <a:off x="457200" y="4983480"/>
-            <a:ext cx="11277295" cy="1051560"/>
-          </a:xfrm>
-          <a:prstGeom prst="roundRect">
-            <a:avLst>
-              <a:gd name="adj" fmla="val 12000"/>
-            </a:avLst>
-          </a:prstGeom>
-          <a:solidFill>
-            <a:srgbClr val="E8F4FA"/>
-          </a:solidFill>
-          <a:ln>
-            <a:noFill/>
-          </a:ln>
-        </p:spPr>
-        <p:style>
-          <a:lnRef idx="1">
-            <a:schemeClr val="accent1"/>
-          </a:lnRef>
-          <a:fillRef idx="3">
-            <a:schemeClr val="accent1"/>
-          </a:fillRef>
-          <a:effectRef idx="2">
-            <a:schemeClr val="accent1"/>
-          </a:effectRef>
-          <a:fontRef idx="minor">
-            <a:schemeClr val="lt1"/>
-          </a:fontRef>
-        </p:style>
-        <p:txBody>
-          <a:bodyPr rtlCol="0" anchor="ctr"/>
-          <a:lstStyle/>
-          <a:p>
-            <a:pPr algn="ctr"/>
-          </a:p>
-        </p:txBody>
-      </p:sp>
-      <p:sp>
-        <p:nvSpPr>
-          <p:cNvPr id="18" name="Rounded Rectangle 17"/>
-          <p:cNvSpPr/>
-          <p:nvPr/>
-        </p:nvSpPr>
-        <p:spPr>
-          <a:xfrm>
-            <a:off x="594360" y="5289804"/>
-            <a:ext cx="438912" cy="438912"/>
-          </a:xfrm>
-          <a:prstGeom prst="roundRect">
-            <a:avLst>
-              <a:gd name="adj" fmla="val 12000"/>
-            </a:avLst>
-          </a:prstGeom>
-          <a:solidFill>
-            <a:srgbClr val="095292"/>
-          </a:solidFill>
-          <a:ln>
-            <a:noFill/>
-          </a:ln>
-        </p:spPr>
-        <p:style>
-          <a:lnRef idx="1">
-            <a:schemeClr val="accent1"/>
-          </a:lnRef>
-          <a:fillRef idx="3">
-            <a:schemeClr val="accent1"/>
-          </a:fillRef>
-          <a:effectRef idx="2">
-            <a:schemeClr val="accent1"/>
-          </a:effectRef>
-          <a:fontRef idx="minor">
-            <a:schemeClr val="lt1"/>
-          </a:fontRef>
-        </p:style>
-        <p:txBody>
-          <a:bodyPr rtlCol="0" anchor="ctr"/>
-          <a:lstStyle/>
-          <a:p>
-            <a:pPr algn="ctr"/>
-          </a:p>
-        </p:txBody>
-      </p:sp>
-      <p:sp>
-        <p:nvSpPr>
-          <p:cNvPr id="19" name="TextBox 18"/>
-          <p:cNvSpPr txBox="1"/>
-          <p:nvPr/>
-        </p:nvSpPr>
-        <p:spPr>
-          <a:xfrm>
-            <a:off x="594360" y="5289804"/>
-            <a:ext cx="438912" cy="438912"/>
-          </a:xfrm>
-          <a:prstGeom prst="rect">
-            <a:avLst/>
-          </a:prstGeom>
-          <a:noFill/>
-        </p:spPr>
-        <p:txBody>
-          <a:bodyPr wrap="square" anchor="ctr"/>
-          <a:lstStyle/>
-          <a:p>
-            <a:pPr algn="ctr"/>
-            <a:r>
-              <a:rPr sz="1600" b="1" i="0">
-                <a:solidFill>
-                  <a:srgbClr val="FFFFFF"/>
-                </a:solidFill>
-                <a:latin typeface="Calibri"/>
-              </a:rPr>
-              <a:t>4</a:t>
-            </a:r>
-          </a:p>
-        </p:txBody>
-      </p:sp>
-      <p:sp>
-        <p:nvSpPr>
-          <p:cNvPr id="20" name="TextBox 19"/>
-          <p:cNvSpPr txBox="1"/>
-          <p:nvPr/>
-        </p:nvSpPr>
-        <p:spPr>
-          <a:xfrm>
-            <a:off x="1188720" y="5074920"/>
-            <a:ext cx="10271455" cy="886968"/>
-          </a:xfrm>
-          <a:prstGeom prst="rect">
-            <a:avLst/>
-          </a:prstGeom>
-          <a:noFill/>
-        </p:spPr>
-        <p:txBody>
-          <a:bodyPr wrap="square" anchor="ctr"/>
-          <a:lstStyle/>
-          <a:p>
-            <a:r>
-              <a:rPr sz="1500" b="1" i="0">
-                <a:solidFill>
-                  <a:srgbClr val="095292"/>
-                </a:solidFill>
-                <a:latin typeface="Calibri"/>
-              </a:rPr>
-              <a:t>Exportar tambien el PNG del ER a la carpeta del PI y verificar que los nombres coincidan con el DDL (minusculas, singular, id_&lt;entidad&gt;).</a:t>
-            </a:r>
-          </a:p>
-        </p:txBody>
-      </p:sp>
-      <p:sp>
-        <p:nvSpPr>
-          <p:cNvPr id="21" name="TextBox 20"/>
-          <p:cNvSpPr txBox="1"/>
-          <p:nvPr/>
-        </p:nvSpPr>
-        <p:spPr>
-          <a:xfrm>
-            <a:off x="11185855" y="6473952"/>
-            <a:ext cx="640080" cy="274320"/>
-          </a:xfrm>
-          <a:prstGeom prst="rect">
-            <a:avLst/>
-          </a:prstGeom>
-          <a:noFill/>
-        </p:spPr>
-        <p:txBody>
-          <a:bodyPr wrap="square">
-            <a:spAutoFit/>
-          </a:bodyPr>
-          <a:lstStyle/>
-          <a:p>
-            <a:pPr algn="r"/>
-            <a:r>
-              <a:rPr sz="1100" b="0" i="0">
-                <a:solidFill>
-                  <a:srgbClr val="666666"/>
-                </a:solidFill>
-                <a:latin typeface="Calibri"/>
-              </a:rPr>
-              <a:t>40</a:t>
-            </a:r>
-          </a:p>
-        </p:txBody>
-      </p:sp>
-    </p:spTree>
-  </p:cSld>
-  <p:clrMapOvr>
-    <a:masterClrMapping/>
-  </p:clrMapOvr>
-</p:sld>
-</file>
-
-<file path=ppt/slides/slide41.xml><?xml version="1.0" encoding="utf-8"?>
-<p:sld xmlns:a="http://schemas.openxmlformats.org/drawingml/2006/main" xmlns:p="http://schemas.openxmlformats.org/presentationml/2006/main" xmlns:r="http://schemas.openxmlformats.org/officeDocument/2006/relationships">
-  <p:cSld>
-    <p:bg>
-      <p:bgPr>
-        <a:solidFill>
-          <a:srgbClr val="FFFFFF"/>
-        </a:solidFill>
-        <a:effectLst/>
-      </p:bgPr>
-    </p:bg>
-    <p:spTree>
-      <p:nvGrpSpPr>
-        <p:cNvPr id="1" name=""/>
-        <p:cNvGrpSpPr/>
-        <p:nvPr/>
-      </p:nvGrpSpPr>
-      <p:grpSpPr/>
-      <p:sp>
-        <p:nvSpPr>
-          <p:cNvPr id="2" name="Rectangle 1"/>
-          <p:cNvSpPr/>
-          <p:nvPr/>
-        </p:nvSpPr>
-        <p:spPr>
-          <a:xfrm>
-            <a:off x="0" y="0"/>
-            <a:ext cx="12191695" cy="960120"/>
-          </a:xfrm>
-          <a:prstGeom prst="rect">
-            <a:avLst/>
-          </a:prstGeom>
-          <a:solidFill>
-            <a:srgbClr val="095292"/>
-          </a:solidFill>
-          <a:ln>
-            <a:noFill/>
-          </a:ln>
-        </p:spPr>
-        <p:style>
-          <a:lnRef idx="1">
-            <a:schemeClr val="accent1"/>
-          </a:lnRef>
-          <a:fillRef idx="3">
-            <a:schemeClr val="accent1"/>
-          </a:fillRef>
-          <a:effectRef idx="2">
-            <a:schemeClr val="accent1"/>
-          </a:effectRef>
-          <a:fontRef idx="minor">
-            <a:schemeClr val="lt1"/>
-          </a:fontRef>
-        </p:style>
-        <p:txBody>
-          <a:bodyPr rtlCol="0" anchor="ctr"/>
-          <a:lstStyle/>
-          <a:p>
-            <a:pPr algn="ctr"/>
-          </a:p>
-        </p:txBody>
-      </p:sp>
-      <p:sp>
-        <p:nvSpPr>
-          <p:cNvPr id="3" name="Rectangle 2"/>
-          <p:cNvSpPr/>
-          <p:nvPr/>
-        </p:nvSpPr>
-        <p:spPr>
-          <a:xfrm>
-            <a:off x="0" y="960120"/>
-            <a:ext cx="12191695" cy="41148"/>
-          </a:xfrm>
-          <a:prstGeom prst="rect">
-            <a:avLst/>
-          </a:prstGeom>
-          <a:solidFill>
-            <a:srgbClr val="FFD000"/>
-          </a:solidFill>
-          <a:ln>
-            <a:noFill/>
-          </a:ln>
-        </p:spPr>
-        <p:style>
-          <a:lnRef idx="1">
-            <a:schemeClr val="accent1"/>
-          </a:lnRef>
-          <a:fillRef idx="3">
-            <a:schemeClr val="accent1"/>
-          </a:fillRef>
-          <a:effectRef idx="2">
-            <a:schemeClr val="accent1"/>
-          </a:effectRef>
-          <a:fontRef idx="minor">
-            <a:schemeClr val="lt1"/>
-          </a:fontRef>
-        </p:style>
-        <p:txBody>
-          <a:bodyPr rtlCol="0" anchor="ctr"/>
-          <a:lstStyle/>
-          <a:p>
-            <a:pPr algn="ctr"/>
-          </a:p>
-        </p:txBody>
-      </p:sp>
-      <p:sp>
-        <p:nvSpPr>
-          <p:cNvPr id="4" name="TextBox 3"/>
-          <p:cNvSpPr txBox="1"/>
-          <p:nvPr/>
-        </p:nvSpPr>
-        <p:spPr>
-          <a:xfrm>
-            <a:off x="457200" y="164592"/>
-            <a:ext cx="11277295" cy="502920"/>
-          </a:xfrm>
-          <a:prstGeom prst="rect">
-            <a:avLst/>
-          </a:prstGeom>
-          <a:noFill/>
-        </p:spPr>
-        <p:txBody>
-          <a:bodyPr wrap="square">
-            <a:spAutoFit/>
-          </a:bodyPr>
-          <a:lstStyle/>
-          <a:p>
-            <a:r>
-              <a:rPr sz="2600" b="1" i="0">
-                <a:solidFill>
-                  <a:srgbClr val="FFFFFF"/>
-                </a:solidFill>
-                <a:latin typeface="Calibri"/>
-              </a:rPr>
-              <a:t>Taller PI VetCare — pistas (checklist vacio)</a:t>
-            </a:r>
-          </a:p>
-        </p:txBody>
-      </p:sp>
-      <p:sp>
-        <p:nvSpPr>
-          <p:cNvPr id="5" name="Rounded Rectangle 4"/>
-          <p:cNvSpPr/>
-          <p:nvPr/>
-        </p:nvSpPr>
-        <p:spPr>
-          <a:xfrm>
-            <a:off x="457200" y="1261872"/>
-            <a:ext cx="11277295" cy="566928"/>
-          </a:xfrm>
-          <a:prstGeom prst="roundRect">
-            <a:avLst>
-              <a:gd name="adj" fmla="val 12000"/>
-            </a:avLst>
-          </a:prstGeom>
-          <a:solidFill>
-            <a:srgbClr val="F2F2F2"/>
-          </a:solidFill>
-          <a:ln>
-            <a:noFill/>
-          </a:ln>
-        </p:spPr>
-        <p:style>
-          <a:lnRef idx="1">
-            <a:schemeClr val="accent1"/>
-          </a:lnRef>
-          <a:fillRef idx="3">
-            <a:schemeClr val="accent1"/>
-          </a:fillRef>
-          <a:effectRef idx="2">
-            <a:schemeClr val="accent1"/>
-          </a:effectRef>
-          <a:fontRef idx="minor">
-            <a:schemeClr val="lt1"/>
-          </a:fontRef>
-        </p:style>
-        <p:txBody>
-          <a:bodyPr rtlCol="0" anchor="ctr"/>
-          <a:lstStyle/>
-          <a:p>
-            <a:pPr algn="ctr"/>
-          </a:p>
-        </p:txBody>
-      </p:sp>
-      <p:sp>
-        <p:nvSpPr>
-          <p:cNvPr id="6" name="Rectangle 5"/>
-          <p:cNvSpPr/>
-          <p:nvPr/>
-        </p:nvSpPr>
-        <p:spPr>
-          <a:xfrm>
-            <a:off x="640080" y="1408175"/>
-            <a:ext cx="274320" cy="274320"/>
-          </a:xfrm>
-          <a:prstGeom prst="rect">
-            <a:avLst/>
-          </a:prstGeom>
-          <a:solidFill>
-            <a:srgbClr val="FFFFFF"/>
-          </a:solidFill>
-          <a:ln>
-            <a:solidFill>
-              <a:srgbClr val="333333"/>
-            </a:solidFill>
-          </a:ln>
-        </p:spPr>
-        <p:style>
-          <a:lnRef idx="1">
-            <a:schemeClr val="accent1"/>
-          </a:lnRef>
-          <a:fillRef idx="3">
-            <a:schemeClr val="accent1"/>
-          </a:fillRef>
-          <a:effectRef idx="2">
-            <a:schemeClr val="accent1"/>
-          </a:effectRef>
-          <a:fontRef idx="minor">
-            <a:schemeClr val="lt1"/>
-          </a:fontRef>
-        </p:style>
-        <p:txBody>
-          <a:bodyPr rtlCol="0" anchor="ctr"/>
-          <a:lstStyle/>
-          <a:p>
-            <a:pPr algn="ctr"/>
-          </a:p>
-        </p:txBody>
-      </p:sp>
-      <p:sp>
-        <p:nvSpPr>
-          <p:cNvPr id="7" name="Rectangle 6"/>
-          <p:cNvSpPr/>
-          <p:nvPr/>
-        </p:nvSpPr>
-        <p:spPr>
-          <a:xfrm>
-            <a:off x="640080" y="1408175"/>
-            <a:ext cx="73152" cy="274320"/>
-          </a:xfrm>
-          <a:prstGeom prst="rect">
-            <a:avLst/>
-          </a:prstGeom>
-          <a:solidFill>
-            <a:srgbClr val="269CCB"/>
-          </a:solidFill>
-          <a:ln>
-            <a:noFill/>
-          </a:ln>
-        </p:spPr>
-        <p:style>
-          <a:lnRef idx="1">
-            <a:schemeClr val="accent1"/>
-          </a:lnRef>
-          <a:fillRef idx="3">
-            <a:schemeClr val="accent1"/>
-          </a:fillRef>
-          <a:effectRef idx="2">
-            <a:schemeClr val="accent1"/>
-          </a:effectRef>
-          <a:fontRef idx="minor">
-            <a:schemeClr val="lt1"/>
-          </a:fontRef>
-        </p:style>
-        <p:txBody>
-          <a:bodyPr rtlCol="0" anchor="ctr"/>
-          <a:lstStyle/>
-          <a:p>
-            <a:pPr algn="ctr"/>
-          </a:p>
-        </p:txBody>
-      </p:sp>
-      <p:sp>
-        <p:nvSpPr>
-          <p:cNvPr id="8" name="TextBox 7"/>
-          <p:cNvSpPr txBox="1"/>
-          <p:nvPr/>
-        </p:nvSpPr>
-        <p:spPr>
-          <a:xfrm>
-            <a:off x="1097280" y="1353312"/>
-            <a:ext cx="10362895" cy="402336"/>
-          </a:xfrm>
-          <a:prstGeom prst="rect">
-            <a:avLst/>
-          </a:prstGeom>
-          <a:noFill/>
-        </p:spPr>
-        <p:txBody>
-          <a:bodyPr wrap="square" anchor="ctr"/>
-          <a:lstStyle/>
-          <a:p>
-            <a:r>
-              <a:rPr sz="1500" b="0" i="0">
-                <a:solidFill>
-                  <a:srgbClr val="333333"/>
-                </a:solidFill>
-                <a:latin typeface="Calibri"/>
-              </a:rPr>
-              <a:t>□ El proyecto se llama VetCare - [Apellido]?</a:t>
-            </a:r>
-          </a:p>
-        </p:txBody>
-      </p:sp>
-      <p:sp>
-        <p:nvSpPr>
-          <p:cNvPr id="9" name="Rounded Rectangle 8"/>
-          <p:cNvSpPr/>
-          <p:nvPr/>
-        </p:nvSpPr>
-        <p:spPr>
-          <a:xfrm>
-            <a:off x="457200" y="1938528"/>
-            <a:ext cx="11277295" cy="566928"/>
-          </a:xfrm>
-          <a:prstGeom prst="roundRect">
-            <a:avLst>
-              <a:gd name="adj" fmla="val 12000"/>
-            </a:avLst>
-          </a:prstGeom>
-          <a:solidFill>
-            <a:srgbClr val="F2F2F2"/>
-          </a:solidFill>
-          <a:ln>
-            <a:noFill/>
-          </a:ln>
-        </p:spPr>
-        <p:style>
-          <a:lnRef idx="1">
-            <a:schemeClr val="accent1"/>
-          </a:lnRef>
-          <a:fillRef idx="3">
-            <a:schemeClr val="accent1"/>
-          </a:fillRef>
-          <a:effectRef idx="2">
-            <a:schemeClr val="accent1"/>
-          </a:effectRef>
-          <a:fontRef idx="minor">
-            <a:schemeClr val="lt1"/>
-          </a:fontRef>
-        </p:style>
-        <p:txBody>
-          <a:bodyPr rtlCol="0" anchor="ctr"/>
-          <a:lstStyle/>
-          <a:p>
-            <a:pPr algn="ctr"/>
-          </a:p>
-        </p:txBody>
-      </p:sp>
-      <p:sp>
-        <p:nvSpPr>
-          <p:cNvPr id="10" name="Rectangle 9"/>
-          <p:cNvSpPr/>
-          <p:nvPr/>
-        </p:nvSpPr>
-        <p:spPr>
-          <a:xfrm>
-            <a:off x="640080" y="2084832"/>
-            <a:ext cx="274320" cy="274320"/>
-          </a:xfrm>
-          <a:prstGeom prst="rect">
-            <a:avLst/>
-          </a:prstGeom>
-          <a:solidFill>
-            <a:srgbClr val="FFFFFF"/>
-          </a:solidFill>
-          <a:ln>
-            <a:solidFill>
-              <a:srgbClr val="333333"/>
-            </a:solidFill>
-          </a:ln>
-        </p:spPr>
-        <p:style>
-          <a:lnRef idx="1">
-            <a:schemeClr val="accent1"/>
-          </a:lnRef>
-          <a:fillRef idx="3">
-            <a:schemeClr val="accent1"/>
-          </a:fillRef>
-          <a:effectRef idx="2">
-            <a:schemeClr val="accent1"/>
-          </a:effectRef>
-          <a:fontRef idx="minor">
-            <a:schemeClr val="lt1"/>
-          </a:fontRef>
-        </p:style>
-        <p:txBody>
-          <a:bodyPr rtlCol="0" anchor="ctr"/>
-          <a:lstStyle/>
-          <a:p>
-            <a:pPr algn="ctr"/>
-          </a:p>
-        </p:txBody>
-      </p:sp>
-      <p:sp>
-        <p:nvSpPr>
-          <p:cNvPr id="11" name="Rectangle 10"/>
-          <p:cNvSpPr/>
-          <p:nvPr/>
-        </p:nvSpPr>
-        <p:spPr>
-          <a:xfrm>
-            <a:off x="640080" y="2084832"/>
-            <a:ext cx="73152" cy="274320"/>
-          </a:xfrm>
-          <a:prstGeom prst="rect">
-            <a:avLst/>
-          </a:prstGeom>
-          <a:solidFill>
-            <a:srgbClr val="269CCB"/>
-          </a:solidFill>
-          <a:ln>
-            <a:noFill/>
-          </a:ln>
-        </p:spPr>
-        <p:style>
-          <a:lnRef idx="1">
-            <a:schemeClr val="accent1"/>
-          </a:lnRef>
-          <a:fillRef idx="3">
-            <a:schemeClr val="accent1"/>
-          </a:fillRef>
-          <a:effectRef idx="2">
-            <a:schemeClr val="accent1"/>
-          </a:effectRef>
-          <a:fontRef idx="minor">
-            <a:schemeClr val="lt1"/>
-          </a:fontRef>
-        </p:style>
-        <p:txBody>
-          <a:bodyPr rtlCol="0" anchor="ctr"/>
-          <a:lstStyle/>
-          <a:p>
-            <a:pPr algn="ctr"/>
-          </a:p>
-        </p:txBody>
-      </p:sp>
-      <p:sp>
-        <p:nvSpPr>
-          <p:cNvPr id="12" name="TextBox 11"/>
-          <p:cNvSpPr txBox="1"/>
-          <p:nvPr/>
-        </p:nvSpPr>
-        <p:spPr>
-          <a:xfrm>
-            <a:off x="1097280" y="2029968"/>
-            <a:ext cx="10362895" cy="402336"/>
-          </a:xfrm>
-          <a:prstGeom prst="rect">
-            <a:avLst/>
-          </a:prstGeom>
-          <a:noFill/>
-        </p:spPr>
-        <p:txBody>
-          <a:bodyPr wrap="square" anchor="ctr"/>
-          <a:lstStyle/>
-          <a:p>
-            <a:r>
-              <a:rPr sz="1500" b="0" i="0">
-                <a:solidFill>
-                  <a:srgbClr val="333333"/>
-                </a:solidFill>
-                <a:latin typeface="Calibri"/>
-              </a:rPr>
-              <a:t>□ Las 3 reglas están escritas como Condición → Acción?</a:t>
-            </a:r>
-          </a:p>
-        </p:txBody>
-      </p:sp>
-      <p:sp>
-        <p:nvSpPr>
-          <p:cNvPr id="13" name="Rounded Rectangle 12"/>
-          <p:cNvSpPr/>
-          <p:nvPr/>
-        </p:nvSpPr>
-        <p:spPr>
-          <a:xfrm>
-            <a:off x="457200" y="2615184"/>
-            <a:ext cx="11277295" cy="566928"/>
-          </a:xfrm>
-          <a:prstGeom prst="roundRect">
-            <a:avLst>
-              <a:gd name="adj" fmla="val 12000"/>
-            </a:avLst>
-          </a:prstGeom>
-          <a:solidFill>
-            <a:srgbClr val="F2F2F2"/>
-          </a:solidFill>
-          <a:ln>
-            <a:noFill/>
-          </a:ln>
-        </p:spPr>
-        <p:style>
-          <a:lnRef idx="1">
-            <a:schemeClr val="accent1"/>
-          </a:lnRef>
-          <a:fillRef idx="3">
-            <a:schemeClr val="accent1"/>
-          </a:fillRef>
-          <a:effectRef idx="2">
-            <a:schemeClr val="accent1"/>
-          </a:effectRef>
-          <a:fontRef idx="minor">
-            <a:schemeClr val="lt1"/>
-          </a:fontRef>
-        </p:style>
-        <p:txBody>
-          <a:bodyPr rtlCol="0" anchor="ctr"/>
-          <a:lstStyle/>
-          <a:p>
-            <a:pPr algn="ctr"/>
-          </a:p>
-        </p:txBody>
-      </p:sp>
-      <p:sp>
-        <p:nvSpPr>
-          <p:cNvPr id="14" name="Rectangle 13"/>
-          <p:cNvSpPr/>
-          <p:nvPr/>
-        </p:nvSpPr>
-        <p:spPr>
-          <a:xfrm>
-            <a:off x="640080" y="2761488"/>
-            <a:ext cx="274320" cy="274320"/>
-          </a:xfrm>
-          <a:prstGeom prst="rect">
-            <a:avLst/>
-          </a:prstGeom>
-          <a:solidFill>
-            <a:srgbClr val="FFFFFF"/>
-          </a:solidFill>
-          <a:ln>
-            <a:solidFill>
-              <a:srgbClr val="333333"/>
-            </a:solidFill>
-          </a:ln>
-        </p:spPr>
-        <p:style>
-          <a:lnRef idx="1">
-            <a:schemeClr val="accent1"/>
-          </a:lnRef>
-          <a:fillRef idx="3">
-            <a:schemeClr val="accent1"/>
-          </a:fillRef>
-          <a:effectRef idx="2">
-            <a:schemeClr val="accent1"/>
-          </a:effectRef>
-          <a:fontRef idx="minor">
-            <a:schemeClr val="lt1"/>
-          </a:fontRef>
-        </p:style>
-        <p:txBody>
-          <a:bodyPr rtlCol="0" anchor="ctr"/>
-          <a:lstStyle/>
-          <a:p>
-            <a:pPr algn="ctr"/>
-          </a:p>
-        </p:txBody>
-      </p:sp>
-      <p:sp>
-        <p:nvSpPr>
-          <p:cNvPr id="15" name="Rectangle 14"/>
-          <p:cNvSpPr/>
-          <p:nvPr/>
-        </p:nvSpPr>
-        <p:spPr>
-          <a:xfrm>
-            <a:off x="640080" y="2761488"/>
-            <a:ext cx="73152" cy="274320"/>
-          </a:xfrm>
-          <a:prstGeom prst="rect">
-            <a:avLst/>
-          </a:prstGeom>
-          <a:solidFill>
-            <a:srgbClr val="269CCB"/>
-          </a:solidFill>
-          <a:ln>
-            <a:noFill/>
-          </a:ln>
-        </p:spPr>
-        <p:style>
-          <a:lnRef idx="1">
-            <a:schemeClr val="accent1"/>
-          </a:lnRef>
-          <a:fillRef idx="3">
-            <a:schemeClr val="accent1"/>
-          </a:fillRef>
-          <a:effectRef idx="2">
-            <a:schemeClr val="accent1"/>
-          </a:effectRef>
-          <a:fontRef idx="minor">
-            <a:schemeClr val="lt1"/>
-          </a:fontRef>
-        </p:style>
-        <p:txBody>
-          <a:bodyPr rtlCol="0" anchor="ctr"/>
-          <a:lstStyle/>
-          <a:p>
-            <a:pPr algn="ctr"/>
-          </a:p>
-        </p:txBody>
-      </p:sp>
-      <p:sp>
-        <p:nvSpPr>
-          <p:cNvPr id="16" name="TextBox 15"/>
-          <p:cNvSpPr txBox="1"/>
-          <p:nvPr/>
-        </p:nvSpPr>
-        <p:spPr>
-          <a:xfrm>
-            <a:off x="1097280" y="2706624"/>
-            <a:ext cx="10362895" cy="402336"/>
-          </a:xfrm>
-          <a:prstGeom prst="rect">
-            <a:avLst/>
-          </a:prstGeom>
-          <a:noFill/>
-        </p:spPr>
-        <p:txBody>
-          <a:bodyPr wrap="square" anchor="ctr"/>
-          <a:lstStyle/>
-          <a:p>
-            <a:r>
-              <a:rPr sz="1500" b="0" i="0">
-                <a:solidFill>
-                  <a:srgbClr val="333333"/>
-                </a:solidFill>
-                <a:latin typeface="Calibri"/>
-              </a:rPr>
-              <a:t>□ El Mermaid renderiza dentro de la plataforma del curso (no basta el PNG)?</a:t>
-            </a:r>
-          </a:p>
-        </p:txBody>
-      </p:sp>
-      <p:sp>
-        <p:nvSpPr>
-          <p:cNvPr id="17" name="Rounded Rectangle 16"/>
-          <p:cNvSpPr/>
-          <p:nvPr/>
-        </p:nvSpPr>
-        <p:spPr>
-          <a:xfrm>
-            <a:off x="457200" y="3291840"/>
-            <a:ext cx="11277295" cy="566928"/>
-          </a:xfrm>
-          <a:prstGeom prst="roundRect">
-            <a:avLst>
-              <a:gd name="adj" fmla="val 12000"/>
-            </a:avLst>
-          </a:prstGeom>
-          <a:solidFill>
-            <a:srgbClr val="F2F2F2"/>
-          </a:solidFill>
-          <a:ln>
-            <a:noFill/>
-          </a:ln>
-        </p:spPr>
-        <p:style>
-          <a:lnRef idx="1">
-            <a:schemeClr val="accent1"/>
-          </a:lnRef>
-          <a:fillRef idx="3">
-            <a:schemeClr val="accent1"/>
-          </a:fillRef>
-          <a:effectRef idx="2">
-            <a:schemeClr val="accent1"/>
-          </a:effectRef>
-          <a:fontRef idx="minor">
-            <a:schemeClr val="lt1"/>
-          </a:fontRef>
-        </p:style>
-        <p:txBody>
-          <a:bodyPr rtlCol="0" anchor="ctr"/>
-          <a:lstStyle/>
-          <a:p>
-            <a:pPr algn="ctr"/>
-          </a:p>
-        </p:txBody>
-      </p:sp>
-      <p:sp>
-        <p:nvSpPr>
-          <p:cNvPr id="18" name="Rectangle 17"/>
-          <p:cNvSpPr/>
-          <p:nvPr/>
-        </p:nvSpPr>
-        <p:spPr>
-          <a:xfrm>
-            <a:off x="640080" y="3438144"/>
-            <a:ext cx="274320" cy="274320"/>
-          </a:xfrm>
-          <a:prstGeom prst="rect">
-            <a:avLst/>
-          </a:prstGeom>
-          <a:solidFill>
-            <a:srgbClr val="FFFFFF"/>
-          </a:solidFill>
-          <a:ln>
-            <a:solidFill>
-              <a:srgbClr val="333333"/>
-            </a:solidFill>
-          </a:ln>
-        </p:spPr>
-        <p:style>
-          <a:lnRef idx="1">
-            <a:schemeClr val="accent1"/>
-          </a:lnRef>
-          <a:fillRef idx="3">
-            <a:schemeClr val="accent1"/>
-          </a:fillRef>
-          <a:effectRef idx="2">
-            <a:schemeClr val="accent1"/>
-          </a:effectRef>
-          <a:fontRef idx="minor">
-            <a:schemeClr val="lt1"/>
-          </a:fontRef>
-        </p:style>
-        <p:txBody>
-          <a:bodyPr rtlCol="0" anchor="ctr"/>
-          <a:lstStyle/>
-          <a:p>
-            <a:pPr algn="ctr"/>
-          </a:p>
-        </p:txBody>
-      </p:sp>
-      <p:sp>
-        <p:nvSpPr>
-          <p:cNvPr id="19" name="Rectangle 18"/>
-          <p:cNvSpPr/>
-          <p:nvPr/>
-        </p:nvSpPr>
-        <p:spPr>
-          <a:xfrm>
-            <a:off x="640080" y="3438144"/>
-            <a:ext cx="73152" cy="274320"/>
-          </a:xfrm>
-          <a:prstGeom prst="rect">
-            <a:avLst/>
-          </a:prstGeom>
-          <a:solidFill>
-            <a:srgbClr val="269CCB"/>
-          </a:solidFill>
-          <a:ln>
-            <a:noFill/>
-          </a:ln>
-        </p:spPr>
-        <p:style>
-          <a:lnRef idx="1">
-            <a:schemeClr val="accent1"/>
-          </a:lnRef>
-          <a:fillRef idx="3">
-            <a:schemeClr val="accent1"/>
-          </a:fillRef>
-          <a:effectRef idx="2">
-            <a:schemeClr val="accent1"/>
-          </a:effectRef>
-          <a:fontRef idx="minor">
-            <a:schemeClr val="lt1"/>
-          </a:fontRef>
-        </p:style>
-        <p:txBody>
-          <a:bodyPr rtlCol="0" anchor="ctr"/>
-          <a:lstStyle/>
-          <a:p>
-            <a:pPr algn="ctr"/>
-          </a:p>
-        </p:txBody>
-      </p:sp>
-      <p:sp>
-        <p:nvSpPr>
-          <p:cNvPr id="20" name="TextBox 19"/>
-          <p:cNvSpPr txBox="1"/>
-          <p:nvPr/>
-        </p:nvSpPr>
-        <p:spPr>
-          <a:xfrm>
-            <a:off x="1097280" y="3383280"/>
-            <a:ext cx="10362895" cy="402336"/>
-          </a:xfrm>
-          <a:prstGeom prst="rect">
-            <a:avLst/>
-          </a:prstGeom>
-          <a:noFill/>
-        </p:spPr>
-        <p:txBody>
-          <a:bodyPr wrap="square" anchor="ctr"/>
-          <a:lstStyle/>
-          <a:p>
-            <a:r>
-              <a:rPr sz="1500" b="0" i="0">
-                <a:solidFill>
-                  <a:srgbClr val="333333"/>
-                </a:solidFill>
-                <a:latin typeface="Calibri"/>
-              </a:rPr>
-              <a:t>□ Hay PK/FK visibles en el ER?</a:t>
-            </a:r>
-          </a:p>
-        </p:txBody>
-      </p:sp>
-      <p:sp>
-        <p:nvSpPr>
-          <p:cNvPr id="21" name="Rounded Rectangle 20"/>
-          <p:cNvSpPr/>
-          <p:nvPr/>
-        </p:nvSpPr>
-        <p:spPr>
-          <a:xfrm>
-            <a:off x="457200" y="3968496"/>
-            <a:ext cx="11277295" cy="566928"/>
-          </a:xfrm>
-          <a:prstGeom prst="roundRect">
-            <a:avLst>
-              <a:gd name="adj" fmla="val 12000"/>
-            </a:avLst>
-          </a:prstGeom>
-          <a:solidFill>
-            <a:srgbClr val="F2F2F2"/>
-          </a:solidFill>
-          <a:ln>
-            <a:noFill/>
-          </a:ln>
-        </p:spPr>
-        <p:style>
-          <a:lnRef idx="1">
-            <a:schemeClr val="accent1"/>
-          </a:lnRef>
-          <a:fillRef idx="3">
-            <a:schemeClr val="accent1"/>
-          </a:fillRef>
-          <a:effectRef idx="2">
-            <a:schemeClr val="accent1"/>
-          </a:effectRef>
-          <a:fontRef idx="minor">
-            <a:schemeClr val="lt1"/>
-          </a:fontRef>
-        </p:style>
-        <p:txBody>
-          <a:bodyPr rtlCol="0" anchor="ctr"/>
-          <a:lstStyle/>
-          <a:p>
-            <a:pPr algn="ctr"/>
-          </a:p>
-        </p:txBody>
-      </p:sp>
-      <p:sp>
-        <p:nvSpPr>
-          <p:cNvPr id="22" name="Rectangle 21"/>
-          <p:cNvSpPr/>
-          <p:nvPr/>
-        </p:nvSpPr>
-        <p:spPr>
-          <a:xfrm>
-            <a:off x="640080" y="4114800"/>
-            <a:ext cx="274320" cy="274320"/>
-          </a:xfrm>
-          <a:prstGeom prst="rect">
-            <a:avLst/>
-          </a:prstGeom>
-          <a:solidFill>
-            <a:srgbClr val="FFFFFF"/>
-          </a:solidFill>
-          <a:ln>
-            <a:solidFill>
-              <a:srgbClr val="333333"/>
-            </a:solidFill>
-          </a:ln>
-        </p:spPr>
-        <p:style>
-          <a:lnRef idx="1">
-            <a:schemeClr val="accent1"/>
-          </a:lnRef>
-          <a:fillRef idx="3">
-            <a:schemeClr val="accent1"/>
-          </a:fillRef>
-          <a:effectRef idx="2">
-            <a:schemeClr val="accent1"/>
-          </a:effectRef>
-          <a:fontRef idx="minor">
-            <a:schemeClr val="lt1"/>
-          </a:fontRef>
-        </p:style>
-        <p:txBody>
-          <a:bodyPr rtlCol="0" anchor="ctr"/>
-          <a:lstStyle/>
-          <a:p>
-            <a:pPr algn="ctr"/>
-          </a:p>
-        </p:txBody>
-      </p:sp>
-      <p:sp>
-        <p:nvSpPr>
-          <p:cNvPr id="23" name="Rectangle 22"/>
-          <p:cNvSpPr/>
-          <p:nvPr/>
-        </p:nvSpPr>
-        <p:spPr>
-          <a:xfrm>
-            <a:off x="640080" y="4114800"/>
-            <a:ext cx="73152" cy="274320"/>
-          </a:xfrm>
-          <a:prstGeom prst="rect">
-            <a:avLst/>
-          </a:prstGeom>
-          <a:solidFill>
-            <a:srgbClr val="269CCB"/>
-          </a:solidFill>
-          <a:ln>
-            <a:noFill/>
-          </a:ln>
-        </p:spPr>
-        <p:style>
-          <a:lnRef idx="1">
-            <a:schemeClr val="accent1"/>
-          </a:lnRef>
-          <a:fillRef idx="3">
-            <a:schemeClr val="accent1"/>
-          </a:fillRef>
-          <a:effectRef idx="2">
-            <a:schemeClr val="accent1"/>
-          </a:effectRef>
-          <a:fontRef idx="minor">
-            <a:schemeClr val="lt1"/>
-          </a:fontRef>
-        </p:style>
-        <p:txBody>
-          <a:bodyPr rtlCol="0" anchor="ctr"/>
-          <a:lstStyle/>
-          <a:p>
-            <a:pPr algn="ctr"/>
-          </a:p>
-        </p:txBody>
-      </p:sp>
-      <p:sp>
-        <p:nvSpPr>
-          <p:cNvPr id="24" name="TextBox 23"/>
-          <p:cNvSpPr txBox="1"/>
-          <p:nvPr/>
-        </p:nvSpPr>
-        <p:spPr>
-          <a:xfrm>
-            <a:off x="1097280" y="4059936"/>
-            <a:ext cx="10362895" cy="402336"/>
-          </a:xfrm>
-          <a:prstGeom prst="rect">
-            <a:avLst/>
-          </a:prstGeom>
-          <a:noFill/>
-        </p:spPr>
-        <p:txBody>
-          <a:bodyPr wrap="square" anchor="ctr"/>
-          <a:lstStyle/>
-          <a:p>
-            <a:r>
-              <a:rPr sz="1500" b="0" i="0">
-                <a:solidFill>
-                  <a:srgbClr val="333333"/>
-                </a:solidFill>
-                <a:latin typeface="Calibri"/>
-              </a:rPr>
-              <a:t>□ Mascota inactiva / stock aparecen como regla?</a:t>
-            </a:r>
-          </a:p>
-        </p:txBody>
-      </p:sp>
-      <p:sp>
-        <p:nvSpPr>
-          <p:cNvPr id="25" name="Rounded Rectangle 24"/>
-          <p:cNvSpPr/>
-          <p:nvPr/>
-        </p:nvSpPr>
-        <p:spPr>
-          <a:xfrm>
-            <a:off x="457200" y="4645152"/>
-            <a:ext cx="11277295" cy="566928"/>
-          </a:xfrm>
-          <a:prstGeom prst="roundRect">
-            <a:avLst>
-              <a:gd name="adj" fmla="val 12000"/>
-            </a:avLst>
-          </a:prstGeom>
-          <a:solidFill>
-            <a:srgbClr val="F2F2F2"/>
-          </a:solidFill>
-          <a:ln>
-            <a:noFill/>
-          </a:ln>
-        </p:spPr>
-        <p:style>
-          <a:lnRef idx="1">
-            <a:schemeClr val="accent1"/>
-          </a:lnRef>
-          <a:fillRef idx="3">
-            <a:schemeClr val="accent1"/>
-          </a:fillRef>
-          <a:effectRef idx="2">
-            <a:schemeClr val="accent1"/>
-          </a:effectRef>
-          <a:fontRef idx="minor">
-            <a:schemeClr val="lt1"/>
-          </a:fontRef>
-        </p:style>
-        <p:txBody>
-          <a:bodyPr rtlCol="0" anchor="ctr"/>
-          <a:lstStyle/>
-          <a:p>
-            <a:pPr algn="ctr"/>
-          </a:p>
-        </p:txBody>
-      </p:sp>
-      <p:sp>
-        <p:nvSpPr>
-          <p:cNvPr id="26" name="Rectangle 25"/>
-          <p:cNvSpPr/>
-          <p:nvPr/>
-        </p:nvSpPr>
-        <p:spPr>
-          <a:xfrm>
-            <a:off x="640080" y="4791456"/>
-            <a:ext cx="274320" cy="274320"/>
-          </a:xfrm>
-          <a:prstGeom prst="rect">
-            <a:avLst/>
-          </a:prstGeom>
-          <a:solidFill>
-            <a:srgbClr val="FFFFFF"/>
-          </a:solidFill>
-          <a:ln>
-            <a:solidFill>
-              <a:srgbClr val="333333"/>
-            </a:solidFill>
-          </a:ln>
-        </p:spPr>
-        <p:style>
-          <a:lnRef idx="1">
-            <a:schemeClr val="accent1"/>
-          </a:lnRef>
-          <a:fillRef idx="3">
-            <a:schemeClr val="accent1"/>
-          </a:fillRef>
-          <a:effectRef idx="2">
-            <a:schemeClr val="accent1"/>
-          </a:effectRef>
-          <a:fontRef idx="minor">
-            <a:schemeClr val="lt1"/>
-          </a:fontRef>
-        </p:style>
-        <p:txBody>
-          <a:bodyPr rtlCol="0" anchor="ctr"/>
-          <a:lstStyle/>
-          <a:p>
-            <a:pPr algn="ctr"/>
-          </a:p>
-        </p:txBody>
-      </p:sp>
-      <p:sp>
-        <p:nvSpPr>
-          <p:cNvPr id="27" name="Rectangle 26"/>
-          <p:cNvSpPr/>
-          <p:nvPr/>
-        </p:nvSpPr>
-        <p:spPr>
-          <a:xfrm>
-            <a:off x="640080" y="4791456"/>
-            <a:ext cx="73152" cy="274320"/>
-          </a:xfrm>
-          <a:prstGeom prst="rect">
-            <a:avLst/>
-          </a:prstGeom>
-          <a:solidFill>
-            <a:srgbClr val="269CCB"/>
-          </a:solidFill>
-          <a:ln>
-            <a:noFill/>
-          </a:ln>
-        </p:spPr>
-        <p:style>
-          <a:lnRef idx="1">
-            <a:schemeClr val="accent1"/>
-          </a:lnRef>
-          <a:fillRef idx="3">
-            <a:schemeClr val="accent1"/>
-          </a:fillRef>
-          <a:effectRef idx="2">
-            <a:schemeClr val="accent1"/>
-          </a:effectRef>
-          <a:fontRef idx="minor">
-            <a:schemeClr val="lt1"/>
-          </a:fontRef>
-        </p:style>
-        <p:txBody>
-          <a:bodyPr rtlCol="0" anchor="ctr"/>
-          <a:lstStyle/>
-          <a:p>
-            <a:pPr algn="ctr"/>
-          </a:p>
-        </p:txBody>
-      </p:sp>
-      <p:sp>
-        <p:nvSpPr>
-          <p:cNvPr id="28" name="TextBox 27"/>
-          <p:cNvSpPr txBox="1"/>
-          <p:nvPr/>
-        </p:nvSpPr>
-        <p:spPr>
-          <a:xfrm>
-            <a:off x="1097280" y="4736592"/>
-            <a:ext cx="10362895" cy="402336"/>
-          </a:xfrm>
-          <a:prstGeom prst="rect">
-            <a:avLst/>
-          </a:prstGeom>
-          <a:noFill/>
-        </p:spPr>
-        <p:txBody>
-          <a:bodyPr wrap="square" anchor="ctr"/>
-          <a:lstStyle/>
-          <a:p>
-            <a:r>
-              <a:rPr sz="1500" b="0" i="0">
-                <a:solidFill>
-                  <a:srgbClr val="333333"/>
-                </a:solidFill>
-                <a:latin typeface="Calibri"/>
-              </a:rPr>
-              <a:t>□ El alcance evita scope infinito?</a:t>
-            </a:r>
-          </a:p>
-        </p:txBody>
-      </p:sp>
-      <p:sp>
-        <p:nvSpPr>
-          <p:cNvPr id="29" name="TextBox 28"/>
-          <p:cNvSpPr txBox="1"/>
-          <p:nvPr/>
-        </p:nvSpPr>
-        <p:spPr>
-          <a:xfrm>
-            <a:off x="11185855" y="6473952"/>
-            <a:ext cx="640080" cy="274320"/>
-          </a:xfrm>
-          <a:prstGeom prst="rect">
-            <a:avLst/>
-          </a:prstGeom>
-          <a:noFill/>
-        </p:spPr>
-        <p:txBody>
-          <a:bodyPr wrap="square">
-            <a:spAutoFit/>
-          </a:bodyPr>
-          <a:lstStyle/>
-          <a:p>
-            <a:pPr algn="r"/>
-            <a:r>
-              <a:rPr sz="1100" b="0" i="0">
-                <a:solidFill>
-                  <a:srgbClr val="666666"/>
-                </a:solidFill>
-                <a:latin typeface="Calibri"/>
-              </a:rPr>
-              <a:t>41</a:t>
-            </a:r>
-          </a:p>
-        </p:txBody>
-      </p:sp>
-    </p:spTree>
-  </p:cSld>
-  <p:clrMapOvr>
-    <a:masterClrMapping/>
-  </p:clrMapOvr>
-</p:sld>
-</file>
-
-<file path=ppt/slides/slide42.xml><?xml version="1.0" encoding="utf-8"?>
-<p:sld xmlns:a="http://schemas.openxmlformats.org/drawingml/2006/main" xmlns:p="http://schemas.openxmlformats.org/presentationml/2006/main" xmlns:r="http://schemas.openxmlformats.org/officeDocument/2006/relationships">
-  <p:cSld>
-    <p:bg>
-      <p:bgPr>
-        <a:solidFill>
-          <a:srgbClr val="FFFFFF"/>
-        </a:solidFill>
-        <a:effectLst/>
-      </p:bgPr>
-    </p:bg>
-    <p:spTree>
-      <p:nvGrpSpPr>
-        <p:cNvPr id="1" name=""/>
-        <p:cNvGrpSpPr/>
-        <p:nvPr/>
-      </p:nvGrpSpPr>
-      <p:grpSpPr/>
-      <p:sp>
-        <p:nvSpPr>
-          <p:cNvPr id="2" name="Rectangle 1"/>
-          <p:cNvSpPr/>
-          <p:nvPr/>
-        </p:nvSpPr>
-        <p:spPr>
-          <a:xfrm>
-            <a:off x="0" y="0"/>
-            <a:ext cx="12191695" cy="960120"/>
-          </a:xfrm>
-          <a:prstGeom prst="rect">
-            <a:avLst/>
-          </a:prstGeom>
-          <a:solidFill>
-            <a:srgbClr val="095292"/>
-          </a:solidFill>
-          <a:ln>
-            <a:noFill/>
-          </a:ln>
-        </p:spPr>
-        <p:style>
-          <a:lnRef idx="1">
-            <a:schemeClr val="accent1"/>
-          </a:lnRef>
-          <a:fillRef idx="3">
-            <a:schemeClr val="accent1"/>
-          </a:fillRef>
-          <a:effectRef idx="2">
-            <a:schemeClr val="accent1"/>
-          </a:effectRef>
-          <a:fontRef idx="minor">
-            <a:schemeClr val="lt1"/>
-          </a:fontRef>
-        </p:style>
-        <p:txBody>
-          <a:bodyPr rtlCol="0" anchor="ctr"/>
-          <a:lstStyle/>
-          <a:p>
-            <a:pPr algn="ctr"/>
-          </a:p>
-        </p:txBody>
-      </p:sp>
-      <p:sp>
-        <p:nvSpPr>
-          <p:cNvPr id="3" name="Rectangle 2"/>
-          <p:cNvSpPr/>
-          <p:nvPr/>
-        </p:nvSpPr>
-        <p:spPr>
-          <a:xfrm>
-            <a:off x="0" y="960120"/>
-            <a:ext cx="12191695" cy="41148"/>
-          </a:xfrm>
-          <a:prstGeom prst="rect">
-            <a:avLst/>
-          </a:prstGeom>
-          <a:solidFill>
-            <a:srgbClr val="FFD000"/>
-          </a:solidFill>
-          <a:ln>
-            <a:noFill/>
-          </a:ln>
-        </p:spPr>
-        <p:style>
-          <a:lnRef idx="1">
-            <a:schemeClr val="accent1"/>
-          </a:lnRef>
-          <a:fillRef idx="3">
-            <a:schemeClr val="accent1"/>
-          </a:fillRef>
-          <a:effectRef idx="2">
-            <a:schemeClr val="accent1"/>
-          </a:effectRef>
-          <a:fontRef idx="minor">
-            <a:schemeClr val="lt1"/>
-          </a:fontRef>
-        </p:style>
-        <p:txBody>
-          <a:bodyPr rtlCol="0" anchor="ctr"/>
-          <a:lstStyle/>
-          <a:p>
-            <a:pPr algn="ctr"/>
-          </a:p>
-        </p:txBody>
-      </p:sp>
-      <p:sp>
-        <p:nvSpPr>
-          <p:cNvPr id="4" name="TextBox 3"/>
-          <p:cNvSpPr txBox="1"/>
-          <p:nvPr/>
-        </p:nvSpPr>
-        <p:spPr>
-          <a:xfrm>
-            <a:off x="457200" y="164592"/>
-            <a:ext cx="11277295" cy="502920"/>
-          </a:xfrm>
-          <a:prstGeom prst="rect">
-            <a:avLst/>
-          </a:prstGeom>
-          <a:noFill/>
-        </p:spPr>
-        <p:txBody>
-          <a:bodyPr wrap="square">
-            <a:spAutoFit/>
-          </a:bodyPr>
-          <a:lstStyle/>
-          <a:p>
-            <a:r>
-              <a:rPr sz="2600" b="1" i="0">
-                <a:solidFill>
-                  <a:srgbClr val="FFFFFF"/>
-                </a:solidFill>
-                <a:latin typeface="Calibri"/>
-              </a:rPr>
-              <a:t>Criterios de exito / entregable</a:t>
-            </a:r>
-          </a:p>
-        </p:txBody>
-      </p:sp>
-      <p:sp>
-        <p:nvSpPr>
-          <p:cNvPr id="5" name="TextBox 4"/>
-          <p:cNvSpPr txBox="1"/>
-          <p:nvPr/>
-        </p:nvSpPr>
-        <p:spPr>
-          <a:xfrm>
-            <a:off x="457200" y="1170432"/>
-            <a:ext cx="11277295" cy="5230368"/>
-          </a:xfrm>
-          <a:prstGeom prst="rect">
-            <a:avLst/>
-          </a:prstGeom>
-          <a:noFill/>
-        </p:spPr>
-        <p:txBody>
-          <a:bodyPr wrap="square">
-            <a:spAutoFit/>
-          </a:bodyPr>
-          <a:lstStyle/>
-          <a:p>
-            <a:pPr>
-              <a:spcAft>
-                <a:spcPts val="800"/>
-              </a:spcAft>
-            </a:pPr>
-            <a:r>
-              <a:rPr sz="2000" b="0" i="0">
-                <a:solidFill>
-                  <a:srgbClr val="333333"/>
-                </a:solidFill>
-                <a:latin typeface="Calibri"/>
-              </a:rPr>
-              <a:t>–   </a:t>
-            </a:r>
-            <a:r>
-              <a:rPr sz="2000" b="1" i="0">
-                <a:solidFill>
-                  <a:srgbClr val="333333"/>
-                </a:solidFill>
-                <a:latin typeface="Calibri"/>
-              </a:rPr>
-              <a:t>Entregable:</a:t>
-            </a:r>
-            <a:r>
-              <a:rPr sz="2000" b="0" i="0">
-                <a:solidFill>
-                  <a:srgbClr val="333333"/>
-                </a:solidFill>
-                <a:latin typeface="Calibri"/>
-              </a:rPr>
-              <a:t> Ficha del PI (plantilla) + ER en Mermaid renderizado en la plataforma del curso (PNG para tu carpeta) + 3 reglas Condicion -&gt; Accion</a:t>
-            </a:r>
-          </a:p>
-          <a:p>
-            <a:pPr>
-              <a:spcAft>
-                <a:spcPts val="800"/>
-              </a:spcAft>
-            </a:pPr>
-            <a:r>
-              <a:rPr sz="2000" b="0" i="0">
-                <a:solidFill>
-                  <a:srgbClr val="333333"/>
-                </a:solidFill>
-                <a:latin typeface="Calibri"/>
-              </a:rPr>
-              <a:t>–   Evidencia: el SQL y su salida quedan guardados en cada pregunta de la plataforma del curso.</a:t>
-            </a:r>
-          </a:p>
-          <a:p>
-            <a:pPr>
-              <a:spcAft>
-                <a:spcPts val="800"/>
-              </a:spcAft>
-            </a:pPr>
-            <a:r>
-              <a:rPr sz="2000" b="0" i="0">
-                <a:solidFill>
-                  <a:srgbClr val="333333"/>
-                </a:solidFill>
-                <a:latin typeface="Calibri"/>
-              </a:rPr>
-              <a:t>–   Conserva copia en tu carpeta del PI (los .sql que pide el entregable).</a:t>
-            </a:r>
-          </a:p>
-          <a:p>
-            <a:pPr>
-              <a:spcAft>
-                <a:spcPts val="800"/>
-              </a:spcAft>
-            </a:pPr>
-            <a:r>
-              <a:rPr sz="2000" b="0" i="0">
-                <a:solidFill>
-                  <a:srgbClr val="333333"/>
-                </a:solidFill>
-                <a:latin typeface="Calibri"/>
-              </a:rPr>
-              <a:t>–   Actualizar checklist PI (que criterio de rubrica avanzo).</a:t>
-            </a:r>
-          </a:p>
-          <a:p>
-            <a:pPr>
-              <a:spcAft>
-                <a:spcPts val="800"/>
-              </a:spcAft>
-            </a:pPr>
-            <a:r>
-              <a:rPr sz="2000" b="0" i="0">
-                <a:solidFill>
-                  <a:srgbClr val="333333"/>
-                </a:solidFill>
-                <a:latin typeface="Calibri"/>
-              </a:rPr>
-              <a:t>–   </a:t>
-            </a:r>
-            <a:r>
-              <a:rPr sz="2000" b="1" i="0">
-                <a:solidFill>
-                  <a:srgbClr val="333333"/>
-                </a:solidFill>
-                <a:latin typeface="Calibri"/>
-              </a:rPr>
-              <a:t>Entrega en la plataforma del curso</a:t>
-            </a:r>
-            <a:r>
-              <a:rPr sz="2000" b="0" i="0">
-                <a:solidFill>
-                  <a:srgbClr val="333333"/>
-                </a:solidFill>
-                <a:latin typeface="Calibri"/>
-              </a:rPr>
-              <a:t> — en la fecha que indique el docente.</a:t>
-            </a:r>
-          </a:p>
-        </p:txBody>
-      </p:sp>
-      <p:sp>
-        <p:nvSpPr>
-          <p:cNvPr id="6" name="TextBox 5"/>
-          <p:cNvSpPr txBox="1"/>
-          <p:nvPr/>
-        </p:nvSpPr>
-        <p:spPr>
-          <a:xfrm>
-            <a:off x="11185855" y="6473952"/>
-            <a:ext cx="640080" cy="274320"/>
-          </a:xfrm>
-          <a:prstGeom prst="rect">
-            <a:avLst/>
-          </a:prstGeom>
-          <a:noFill/>
-        </p:spPr>
-        <p:txBody>
-          <a:bodyPr wrap="square">
-            <a:spAutoFit/>
-          </a:bodyPr>
-          <a:lstStyle/>
-          <a:p>
-            <a:pPr algn="r"/>
-            <a:r>
-              <a:rPr sz="1100" b="0" i="0">
-                <a:solidFill>
-                  <a:srgbClr val="666666"/>
-                </a:solidFill>
-                <a:latin typeface="Calibri"/>
-              </a:rPr>
-              <a:t>42</a:t>
-            </a:r>
-          </a:p>
-        </p:txBody>
-      </p:sp>
-    </p:spTree>
-  </p:cSld>
-  <p:clrMapOvr>
-    <a:masterClrMapping/>
-  </p:clrMapOvr>
-</p:sld>
-</file>
-
-<file path=ppt/slides/slide43.xml><?xml version="1.0" encoding="utf-8"?>
-<p:sld xmlns:a="http://schemas.openxmlformats.org/drawingml/2006/main" xmlns:p="http://schemas.openxmlformats.org/presentationml/2006/main" xmlns:r="http://schemas.openxmlformats.org/officeDocument/2006/relationships">
-  <p:cSld>
-    <p:bg>
-      <p:bgPr>
-        <a:solidFill>
-          <a:srgbClr val="FFFFFF"/>
-        </a:solidFill>
-        <a:effectLst/>
-      </p:bgPr>
-    </p:bg>
-    <p:spTree>
-      <p:nvGrpSpPr>
-        <p:cNvPr id="1" name=""/>
-        <p:cNvGrpSpPr/>
-        <p:nvPr/>
-      </p:nvGrpSpPr>
-      <p:grpSpPr/>
-      <p:sp>
-        <p:nvSpPr>
-          <p:cNvPr id="2" name="Rectangle 1"/>
-          <p:cNvSpPr/>
-          <p:nvPr/>
-        </p:nvSpPr>
-        <p:spPr>
-          <a:xfrm>
-            <a:off x="0" y="0"/>
-            <a:ext cx="12191695" cy="960120"/>
-          </a:xfrm>
-          <a:prstGeom prst="rect">
-            <a:avLst/>
-          </a:prstGeom>
-          <a:solidFill>
-            <a:srgbClr val="095292"/>
-          </a:solidFill>
-          <a:ln>
-            <a:noFill/>
-          </a:ln>
-        </p:spPr>
-        <p:style>
-          <a:lnRef idx="1">
-            <a:schemeClr val="accent1"/>
-          </a:lnRef>
-          <a:fillRef idx="3">
-            <a:schemeClr val="accent1"/>
-          </a:fillRef>
-          <a:effectRef idx="2">
-            <a:schemeClr val="accent1"/>
-          </a:effectRef>
-          <a:fontRef idx="minor">
-            <a:schemeClr val="lt1"/>
-          </a:fontRef>
-        </p:style>
-        <p:txBody>
-          <a:bodyPr rtlCol="0" anchor="ctr"/>
-          <a:lstStyle/>
-          <a:p>
-            <a:pPr algn="ctr"/>
-          </a:p>
-        </p:txBody>
-      </p:sp>
-      <p:sp>
-        <p:nvSpPr>
-          <p:cNvPr id="3" name="Rectangle 2"/>
-          <p:cNvSpPr/>
-          <p:nvPr/>
-        </p:nvSpPr>
-        <p:spPr>
-          <a:xfrm>
-            <a:off x="0" y="960120"/>
-            <a:ext cx="12191695" cy="41148"/>
-          </a:xfrm>
-          <a:prstGeom prst="rect">
-            <a:avLst/>
-          </a:prstGeom>
-          <a:solidFill>
-            <a:srgbClr val="FFD000"/>
-          </a:solidFill>
-          <a:ln>
-            <a:noFill/>
-          </a:ln>
-        </p:spPr>
-        <p:style>
-          <a:lnRef idx="1">
-            <a:schemeClr val="accent1"/>
-          </a:lnRef>
-          <a:fillRef idx="3">
-            <a:schemeClr val="accent1"/>
-          </a:fillRef>
-          <a:effectRef idx="2">
-            <a:schemeClr val="accent1"/>
-          </a:effectRef>
-          <a:fontRef idx="minor">
-            <a:schemeClr val="lt1"/>
-          </a:fontRef>
-        </p:style>
-        <p:txBody>
-          <a:bodyPr rtlCol="0" anchor="ctr"/>
-          <a:lstStyle/>
-          <a:p>
-            <a:pPr algn="ctr"/>
-          </a:p>
-        </p:txBody>
-      </p:sp>
-      <p:sp>
-        <p:nvSpPr>
-          <p:cNvPr id="4" name="TextBox 3"/>
-          <p:cNvSpPr txBox="1"/>
-          <p:nvPr/>
-        </p:nvSpPr>
-        <p:spPr>
-          <a:xfrm>
-            <a:off x="457200" y="164592"/>
-            <a:ext cx="11277295" cy="502920"/>
-          </a:xfrm>
-          <a:prstGeom prst="rect">
-            <a:avLst/>
-          </a:prstGeom>
-          <a:noFill/>
-        </p:spPr>
-        <p:txBody>
-          <a:bodyPr wrap="square">
-            <a:spAutoFit/>
-          </a:bodyPr>
-          <a:lstStyle/>
-          <a:p>
-            <a:r>
-              <a:rPr sz="2600" b="1" i="0">
-                <a:solidFill>
-                  <a:srgbClr val="FFFFFF"/>
-                </a:solidFill>
-                <a:latin typeface="Calibri"/>
-              </a:rPr>
-              <a:t>Para el PI esta semana</a:t>
-            </a:r>
-          </a:p>
-        </p:txBody>
-      </p:sp>
-      <p:sp>
-        <p:nvSpPr>
-          <p:cNvPr id="5" name="Rounded Rectangle 4"/>
-          <p:cNvSpPr/>
-          <p:nvPr/>
-        </p:nvSpPr>
-        <p:spPr>
-          <a:xfrm>
-            <a:off x="457200" y="1261872"/>
-            <a:ext cx="11277295" cy="1051560"/>
-          </a:xfrm>
-          <a:prstGeom prst="roundRect">
-            <a:avLst>
-              <a:gd name="adj" fmla="val 12000"/>
-            </a:avLst>
-          </a:prstGeom>
-          <a:solidFill>
-            <a:srgbClr val="E8F4FA"/>
-          </a:solidFill>
-          <a:ln>
-            <a:noFill/>
-          </a:ln>
-        </p:spPr>
-        <p:style>
-          <a:lnRef idx="1">
-            <a:schemeClr val="accent1"/>
-          </a:lnRef>
-          <a:fillRef idx="3">
-            <a:schemeClr val="accent1"/>
-          </a:fillRef>
-          <a:effectRef idx="2">
-            <a:schemeClr val="accent1"/>
-          </a:effectRef>
-          <a:fontRef idx="minor">
-            <a:schemeClr val="lt1"/>
-          </a:fontRef>
-        </p:style>
-        <p:txBody>
-          <a:bodyPr rtlCol="0" anchor="ctr"/>
-          <a:lstStyle/>
-          <a:p>
-            <a:pPr algn="ctr"/>
-          </a:p>
-        </p:txBody>
-      </p:sp>
-      <p:sp>
-        <p:nvSpPr>
-          <p:cNvPr id="6" name="Rectangle 5"/>
-          <p:cNvSpPr/>
-          <p:nvPr/>
-        </p:nvSpPr>
-        <p:spPr>
-          <a:xfrm>
-            <a:off x="457200" y="1261872"/>
-            <a:ext cx="128016" cy="1051560"/>
-          </a:xfrm>
-          <a:prstGeom prst="rect">
-            <a:avLst/>
-          </a:prstGeom>
-          <a:solidFill>
-            <a:srgbClr val="269CCB"/>
-          </a:solidFill>
-          <a:ln>
-            <a:noFill/>
-          </a:ln>
-        </p:spPr>
-        <p:style>
-          <a:lnRef idx="1">
-            <a:schemeClr val="accent1"/>
-          </a:lnRef>
-          <a:fillRef idx="3">
-            <a:schemeClr val="accent1"/>
-          </a:fillRef>
-          <a:effectRef idx="2">
-            <a:schemeClr val="accent1"/>
-          </a:effectRef>
-          <a:fontRef idx="minor">
-            <a:schemeClr val="lt1"/>
-          </a:fontRef>
-        </p:style>
-        <p:txBody>
-          <a:bodyPr rtlCol="0" anchor="ctr"/>
-          <a:lstStyle/>
-          <a:p>
-            <a:pPr algn="ctr"/>
-          </a:p>
-        </p:txBody>
-      </p:sp>
-      <p:sp>
-        <p:nvSpPr>
-          <p:cNvPr id="7" name="TextBox 6"/>
-          <p:cNvSpPr txBox="1"/>
-          <p:nvPr/>
-        </p:nvSpPr>
-        <p:spPr>
-          <a:xfrm>
-            <a:off x="777240" y="1399031"/>
-            <a:ext cx="10774375" cy="822959"/>
-          </a:xfrm>
-          <a:prstGeom prst="rect">
-            <a:avLst/>
-          </a:prstGeom>
-          <a:noFill/>
-        </p:spPr>
-        <p:txBody>
-          <a:bodyPr wrap="square">
-            <a:spAutoFit/>
-          </a:bodyPr>
-          <a:lstStyle/>
-          <a:p>
-            <a:r>
-              <a:rPr sz="1200" b="1" i="0">
-                <a:solidFill>
-                  <a:srgbClr val="269CCB"/>
-                </a:solidFill>
-                <a:latin typeface="Calibri"/>
-              </a:rPr>
-              <a:t>Info</a:t>
-            </a:r>
-          </a:p>
-          <a:p>
-            <a:pPr>
-              <a:spcBef>
-                <a:spcPts val="400"/>
-              </a:spcBef>
-            </a:pPr>
-            <a:r>
-              <a:rPr sz="1400" b="0" i="0">
-                <a:solidFill>
-                  <a:srgbClr val="333333"/>
-                </a:solidFill>
-                <a:latin typeface="Calibri"/>
-              </a:rPr>
-              <a:t>Hito: Arranque PI: dominio, alcance y borrador ER de VetCare DB</a:t>
-            </a:r>
-          </a:p>
-        </p:txBody>
-      </p:sp>
-      <p:sp>
-        <p:nvSpPr>
-          <p:cNvPr id="8" name="Rounded Rectangle 7"/>
-          <p:cNvSpPr/>
-          <p:nvPr/>
-        </p:nvSpPr>
-        <p:spPr>
-          <a:xfrm>
-            <a:off x="457200" y="2478024"/>
-            <a:ext cx="11277295" cy="1051560"/>
-          </a:xfrm>
-          <a:prstGeom prst="roundRect">
-            <a:avLst>
-              <a:gd name="adj" fmla="val 12000"/>
-            </a:avLst>
-          </a:prstGeom>
-          <a:solidFill>
-            <a:srgbClr val="FFF8E1"/>
-          </a:solidFill>
-          <a:ln>
-            <a:noFill/>
-          </a:ln>
-        </p:spPr>
-        <p:style>
-          <a:lnRef idx="1">
-            <a:schemeClr val="accent1"/>
-          </a:lnRef>
-          <a:fillRef idx="3">
-            <a:schemeClr val="accent1"/>
-          </a:fillRef>
-          <a:effectRef idx="2">
-            <a:schemeClr val="accent1"/>
-          </a:effectRef>
-          <a:fontRef idx="minor">
-            <a:schemeClr val="lt1"/>
-          </a:fontRef>
-        </p:style>
-        <p:txBody>
-          <a:bodyPr rtlCol="0" anchor="ctr"/>
-          <a:lstStyle/>
-          <a:p>
-            <a:pPr algn="ctr"/>
-          </a:p>
-        </p:txBody>
-      </p:sp>
-      <p:sp>
-        <p:nvSpPr>
-          <p:cNvPr id="9" name="Rectangle 8"/>
-          <p:cNvSpPr/>
-          <p:nvPr/>
-        </p:nvSpPr>
-        <p:spPr>
-          <a:xfrm>
-            <a:off x="457200" y="2478024"/>
-            <a:ext cx="128016" cy="1051560"/>
-          </a:xfrm>
-          <a:prstGeom prst="rect">
-            <a:avLst/>
-          </a:prstGeom>
-          <a:solidFill>
-            <a:srgbClr val="FFD000"/>
-          </a:solidFill>
-          <a:ln>
-            <a:noFill/>
-          </a:ln>
-        </p:spPr>
-        <p:style>
-          <a:lnRef idx="1">
-            <a:schemeClr val="accent1"/>
-          </a:lnRef>
-          <a:fillRef idx="3">
-            <a:schemeClr val="accent1"/>
-          </a:fillRef>
-          <a:effectRef idx="2">
-            <a:schemeClr val="accent1"/>
-          </a:effectRef>
-          <a:fontRef idx="minor">
-            <a:schemeClr val="lt1"/>
-          </a:fontRef>
-        </p:style>
-        <p:txBody>
-          <a:bodyPr rtlCol="0" anchor="ctr"/>
-          <a:lstStyle/>
-          <a:p>
-            <a:pPr algn="ctr"/>
-          </a:p>
-        </p:txBody>
-      </p:sp>
-      <p:sp>
-        <p:nvSpPr>
-          <p:cNvPr id="10" name="TextBox 9"/>
-          <p:cNvSpPr txBox="1"/>
-          <p:nvPr/>
-        </p:nvSpPr>
-        <p:spPr>
-          <a:xfrm>
-            <a:off x="777240" y="2615184"/>
-            <a:ext cx="10774375" cy="822959"/>
-          </a:xfrm>
-          <a:prstGeom prst="rect">
-            <a:avLst/>
-          </a:prstGeom>
-          <a:noFill/>
-        </p:spPr>
-        <p:txBody>
-          <a:bodyPr wrap="square">
-            <a:spAutoFit/>
-          </a:bodyPr>
-          <a:lstStyle/>
-          <a:p>
-            <a:r>
-              <a:rPr sz="1200" b="1" i="0">
-                <a:solidFill>
-                  <a:srgbClr val="FFD000"/>
-                </a:solidFill>
-                <a:latin typeface="Calibri"/>
-              </a:rPr>
-              <a:t>Aclaración</a:t>
-            </a:r>
-          </a:p>
-          <a:p>
-            <a:pPr>
-              <a:spcBef>
-                <a:spcPts val="400"/>
-              </a:spcBef>
-            </a:pPr>
-            <a:r>
-              <a:rPr sz="1400" b="0" i="0">
-                <a:solidFill>
-                  <a:srgbClr val="333333"/>
-                </a:solidFill>
-                <a:latin typeface="Calibri"/>
-              </a:rPr>
-              <a:t>Enunciado completo: Clases/Proyecto Integrador/ (VetCare DB).</a:t>
-            </a:r>
-          </a:p>
-        </p:txBody>
-      </p:sp>
-      <p:sp>
-        <p:nvSpPr>
-          <p:cNvPr id="11" name="Rounded Rectangle 10"/>
-          <p:cNvSpPr/>
-          <p:nvPr/>
-        </p:nvSpPr>
-        <p:spPr>
-          <a:xfrm>
-            <a:off x="457200" y="3694176"/>
-            <a:ext cx="11277295" cy="1051560"/>
-          </a:xfrm>
-          <a:prstGeom prst="roundRect">
-            <a:avLst>
-              <a:gd name="adj" fmla="val 12000"/>
-            </a:avLst>
-          </a:prstGeom>
-          <a:solidFill>
-            <a:srgbClr val="FBE4E4"/>
-          </a:solidFill>
-          <a:ln>
-            <a:noFill/>
-          </a:ln>
-        </p:spPr>
-        <p:style>
-          <a:lnRef idx="1">
-            <a:schemeClr val="accent1"/>
-          </a:lnRef>
-          <a:fillRef idx="3">
-            <a:schemeClr val="accent1"/>
-          </a:fillRef>
-          <a:effectRef idx="2">
-            <a:schemeClr val="accent1"/>
-          </a:effectRef>
-          <a:fontRef idx="minor">
-            <a:schemeClr val="lt1"/>
-          </a:fontRef>
-        </p:style>
-        <p:txBody>
-          <a:bodyPr rtlCol="0" anchor="ctr"/>
-          <a:lstStyle/>
-          <a:p>
-            <a:pPr algn="ctr"/>
-          </a:p>
-        </p:txBody>
-      </p:sp>
-      <p:sp>
-        <p:nvSpPr>
-          <p:cNvPr id="12" name="Rectangle 11"/>
-          <p:cNvSpPr/>
-          <p:nvPr/>
-        </p:nvSpPr>
-        <p:spPr>
-          <a:xfrm>
-            <a:off x="457200" y="3694176"/>
-            <a:ext cx="128016" cy="1051560"/>
-          </a:xfrm>
-          <a:prstGeom prst="rect">
-            <a:avLst/>
-          </a:prstGeom>
-          <a:solidFill>
-            <a:srgbClr val="A02030"/>
-          </a:solidFill>
-          <a:ln>
-            <a:noFill/>
-          </a:ln>
-        </p:spPr>
-        <p:style>
-          <a:lnRef idx="1">
-            <a:schemeClr val="accent1"/>
-          </a:lnRef>
-          <a:fillRef idx="3">
-            <a:schemeClr val="accent1"/>
-          </a:fillRef>
-          <a:effectRef idx="2">
-            <a:schemeClr val="accent1"/>
-          </a:effectRef>
-          <a:fontRef idx="minor">
-            <a:schemeClr val="lt1"/>
-          </a:fontRef>
-        </p:style>
-        <p:txBody>
-          <a:bodyPr rtlCol="0" anchor="ctr"/>
-          <a:lstStyle/>
-          <a:p>
-            <a:pPr algn="ctr"/>
-          </a:p>
-        </p:txBody>
-      </p:sp>
-      <p:sp>
-        <p:nvSpPr>
-          <p:cNvPr id="13" name="TextBox 12"/>
-          <p:cNvSpPr txBox="1"/>
-          <p:nvPr/>
-        </p:nvSpPr>
-        <p:spPr>
-          <a:xfrm>
-            <a:off x="777240" y="3831336"/>
-            <a:ext cx="10774375" cy="822959"/>
-          </a:xfrm>
-          <a:prstGeom prst="rect">
-            <a:avLst/>
-          </a:prstGeom>
-          <a:noFill/>
-        </p:spPr>
-        <p:txBody>
-          <a:bodyPr wrap="square">
-            <a:spAutoFit/>
-          </a:bodyPr>
-          <a:lstStyle/>
-          <a:p>
-            <a:r>
-              <a:rPr sz="1200" b="1" i="0">
-                <a:solidFill>
-                  <a:srgbClr val="A02030"/>
-                </a:solidFill>
-                <a:latin typeface="Calibri"/>
-              </a:rPr>
-              <a:t>Atención</a:t>
-            </a:r>
-          </a:p>
-          <a:p>
-            <a:pPr>
-              <a:spcBef>
-                <a:spcPts val="400"/>
-              </a:spcBef>
-            </a:pPr>
-            <a:r>
-              <a:rPr sz="1400" b="0" i="0">
-                <a:solidFill>
-                  <a:srgbClr val="333333"/>
-                </a:solidFill>
-                <a:latin typeface="Calibri"/>
-              </a:rPr>
-              <a:t>Si el docente asigna taller esta semana, él indica el canal y la fecha.</a:t>
-            </a:r>
-          </a:p>
-        </p:txBody>
-      </p:sp>
-      <p:sp>
-        <p:nvSpPr>
-          <p:cNvPr id="14" name="TextBox 13"/>
-          <p:cNvSpPr txBox="1"/>
-          <p:nvPr/>
-        </p:nvSpPr>
-        <p:spPr>
-          <a:xfrm>
-            <a:off x="11185855" y="6473952"/>
-            <a:ext cx="640080" cy="274320"/>
-          </a:xfrm>
-          <a:prstGeom prst="rect">
-            <a:avLst/>
-          </a:prstGeom>
-          <a:noFill/>
-        </p:spPr>
-        <p:txBody>
-          <a:bodyPr wrap="square">
-            <a:spAutoFit/>
-          </a:bodyPr>
-          <a:lstStyle/>
-          <a:p>
-            <a:pPr algn="r"/>
-            <a:r>
-              <a:rPr sz="1100" b="0" i="0">
-                <a:solidFill>
-                  <a:srgbClr val="666666"/>
-                </a:solidFill>
-                <a:latin typeface="Calibri"/>
-              </a:rPr>
-              <a:t>43</a:t>
-            </a:r>
-          </a:p>
-        </p:txBody>
-      </p:sp>
-    </p:spTree>
-  </p:cSld>
-  <p:clrMapOvr>
-    <a:masterClrMapping/>
-  </p:clrMapOvr>
-</p:sld>
-</file>
-
-<file path=ppt/slides/slide44.xml><?xml version="1.0" encoding="utf-8"?>
-<p:sld xmlns:a="http://schemas.openxmlformats.org/drawingml/2006/main" xmlns:p="http://schemas.openxmlformats.org/presentationml/2006/main" xmlns:r="http://schemas.openxmlformats.org/officeDocument/2006/relationships">
-  <p:cSld>
-    <p:bg>
-      <p:bgPr>
-        <a:solidFill>
-          <a:srgbClr val="FFFFFF"/>
-        </a:solidFill>
-        <a:effectLst/>
-      </p:bgPr>
-    </p:bg>
-    <p:spTree>
-      <p:nvGrpSpPr>
-        <p:cNvPr id="1" name=""/>
-        <p:cNvGrpSpPr/>
-        <p:nvPr/>
-      </p:nvGrpSpPr>
-      <p:grpSpPr/>
-      <p:sp>
-        <p:nvSpPr>
-          <p:cNvPr id="2" name="Rectangle 1"/>
-          <p:cNvSpPr/>
-          <p:nvPr/>
-        </p:nvSpPr>
-        <p:spPr>
-          <a:xfrm>
-            <a:off x="0" y="0"/>
-            <a:ext cx="12191695" cy="164592"/>
-          </a:xfrm>
-          <a:prstGeom prst="rect">
-            <a:avLst/>
-          </a:prstGeom>
-          <a:solidFill>
-            <a:srgbClr val="269CCB"/>
-          </a:solidFill>
-          <a:ln>
-            <a:noFill/>
-          </a:ln>
-        </p:spPr>
-        <p:style>
-          <a:lnRef idx="1">
-            <a:schemeClr val="accent1"/>
-          </a:lnRef>
-          <a:fillRef idx="3">
-            <a:schemeClr val="accent1"/>
-          </a:fillRef>
-          <a:effectRef idx="2">
-            <a:schemeClr val="accent1"/>
-          </a:effectRef>
-          <a:fontRef idx="minor">
-            <a:schemeClr val="lt1"/>
-          </a:fontRef>
-        </p:style>
-        <p:txBody>
-          <a:bodyPr rtlCol="0" anchor="ctr"/>
-          <a:lstStyle/>
-          <a:p>
-            <a:pPr algn="ctr"/>
-          </a:p>
-        </p:txBody>
-      </p:sp>
-      <p:pic>
-        <p:nvPicPr>
-          <p:cNvPr id="3" name="Picture 2" descr="logo_uniajc_color.png"/>
-          <p:cNvPicPr>
-            <a:picLocks noChangeAspect="1"/>
-          </p:cNvPicPr>
-          <p:nvPr/>
-        </p:nvPicPr>
-        <p:blipFill>
-          <a:blip r:embed="rId2"/>
-          <a:stretch>
-            <a:fillRect/>
-          </a:stretch>
-        </p:blipFill>
-        <p:spPr>
-          <a:xfrm>
-            <a:off x="10271455" y="5998464"/>
-            <a:ext cx="1463040" cy="643233"/>
-          </a:xfrm>
-          <a:prstGeom prst="rect">
-            <a:avLst/>
-          </a:prstGeom>
-        </p:spPr>
-      </p:pic>
-      <p:sp>
-        <p:nvSpPr>
-          <p:cNvPr id="4" name="TextBox 3"/>
-          <p:cNvSpPr txBox="1"/>
-          <p:nvPr/>
-        </p:nvSpPr>
-        <p:spPr>
-          <a:xfrm>
-            <a:off x="457200" y="1737360"/>
-            <a:ext cx="11277295" cy="1097280"/>
-          </a:xfrm>
-          <a:prstGeom prst="rect">
-            <a:avLst/>
-          </a:prstGeom>
-          <a:noFill/>
-        </p:spPr>
-        <p:txBody>
-          <a:bodyPr wrap="square" anchor="ctr"/>
-          <a:lstStyle/>
-          <a:p>
-            <a:pPr algn="ctr"/>
-            <a:r>
-              <a:rPr sz="3400" b="1" i="0">
-                <a:solidFill>
-                  <a:srgbClr val="095292"/>
-                </a:solidFill>
-                <a:latin typeface="Calibri"/>
-              </a:rPr>
-              <a:t>Clase 1 · VetCare avanza</a:t>
-            </a:r>
-          </a:p>
-        </p:txBody>
-      </p:sp>
-      <p:sp>
-        <p:nvSpPr>
-          <p:cNvPr id="5" name="TextBox 4"/>
-          <p:cNvSpPr txBox="1"/>
-          <p:nvPr/>
-        </p:nvSpPr>
-        <p:spPr>
-          <a:xfrm>
-            <a:off x="457200" y="3017520"/>
-            <a:ext cx="11277295" cy="1645920"/>
-          </a:xfrm>
-          <a:prstGeom prst="rect">
-            <a:avLst/>
-          </a:prstGeom>
-          <a:noFill/>
-        </p:spPr>
-        <p:txBody>
-          <a:bodyPr wrap="square">
-            <a:spAutoFit/>
-          </a:bodyPr>
-          <a:lstStyle/>
-          <a:p>
-            <a:pPr algn="ctr">
-              <a:spcAft>
-                <a:spcPts val="600"/>
-              </a:spcAft>
-            </a:pPr>
-            <a:r>
-              <a:rPr sz="1600" b="0" i="0">
-                <a:solidFill>
-                  <a:srgbClr val="333333"/>
-                </a:solidFill>
-                <a:latin typeface="Calibri"/>
-              </a:rPr>
-              <a:t>Arranque PI: dominio, alcance y borrador ER de VetCare DB</a:t>
-            </a:r>
-          </a:p>
-          <a:p>
-            <a:pPr algn="ctr">
-              <a:spcAft>
-                <a:spcPts val="600"/>
-              </a:spcAft>
-            </a:pPr>
-            <a:r>
-              <a:rPr sz="1600" b="0" i="0">
-                <a:solidFill>
-                  <a:srgbClr val="333333"/>
-                </a:solidFill>
-                <a:latin typeface="Calibri"/>
-              </a:rPr>
-              <a:t>Entregable: Ficha del PI (plantilla) + ER en Mermaid renderizado en la plataforma del curso (PNG para tu carpeta) + 3 reglas Condicion -&gt; Accion</a:t>
-            </a:r>
-          </a:p>
-          <a:p>
-            <a:pPr algn="ctr">
-              <a:spcAft>
-                <a:spcPts val="600"/>
-              </a:spcAft>
-            </a:pPr>
-            <a:r>
-              <a:rPr sz="1600" b="0" i="0">
-                <a:solidFill>
-                  <a:srgbClr val="333333"/>
-                </a:solidFill>
-                <a:latin typeface="Calibri"/>
-              </a:rPr>
-              <a:t>Siguiente clase: continuar el hilo del PI segun plan</a:t>
-            </a:r>
-          </a:p>
-        </p:txBody>
-      </p:sp>
-      <p:sp>
-        <p:nvSpPr>
-          <p:cNvPr id="6" name="TextBox 5"/>
-          <p:cNvSpPr txBox="1"/>
-          <p:nvPr/>
-        </p:nvSpPr>
-        <p:spPr>
-          <a:xfrm>
-            <a:off x="457200" y="4754880"/>
-            <a:ext cx="11277295" cy="640080"/>
-          </a:xfrm>
-          <a:prstGeom prst="rect">
-            <a:avLst/>
-          </a:prstGeom>
-          <a:noFill/>
-        </p:spPr>
-        <p:txBody>
-          <a:bodyPr wrap="square">
-            <a:spAutoFit/>
-          </a:bodyPr>
-          <a:lstStyle/>
-          <a:p>
-            <a:pPr algn="ctr"/>
-            <a:r>
-              <a:rPr sz="2000" b="1" i="0">
-                <a:solidFill>
-                  <a:srgbClr val="269CCB"/>
-                </a:solidFill>
-                <a:latin typeface="Calibri"/>
-              </a:rPr>
-              <a:t>Teoria breve · practica = PI</a:t>
             </a:r>
           </a:p>
         </p:txBody>
@@ -21927,4 +17964,324 @@
   </a:objectDefaults>
   <a:extraClrSchemeLst/>
 </a:theme>
+</file>
+
+<file path=ppt/theme/theme2.xml><?xml version="1.0" encoding="utf-8"?>
+<a:theme xmlns:a="http://schemas.openxmlformats.org/drawingml/2006/main" name="Office Theme">
+  <a:themeElements>
+    <a:clrScheme name="Office">
+      <a:dk1>
+        <a:sysClr val="windowText" lastClr="000000"/>
+      </a:dk1>
+      <a:lt1>
+        <a:sysClr val="window" lastClr="FFFFFF"/>
+      </a:lt1>
+      <a:dk2>
+        <a:srgbClr val="1F497D"/>
+      </a:dk2>
+      <a:lt2>
+        <a:srgbClr val="EEECE1"/>
+      </a:lt2>
+      <a:accent1>
+        <a:srgbClr val="4F81BD"/>
+      </a:accent1>
+      <a:accent2>
+        <a:srgbClr val="C0504D"/>
+      </a:accent2>
+      <a:accent3>
+        <a:srgbClr val="9BBB59"/>
+      </a:accent3>
+      <a:accent4>
+        <a:srgbClr val="8064A2"/>
+      </a:accent4>
+      <a:accent5>
+        <a:srgbClr val="4BACC6"/>
+      </a:accent5>
+      <a:accent6>
+        <a:srgbClr val="F79646"/>
+      </a:accent6>
+      <a:hlink>
+        <a:srgbClr val="0000FF"/>
+      </a:hlink>
+      <a:folHlink>
+        <a:srgbClr val="800080"/>
+      </a:folHlink>
+    </a:clrScheme>
+    <a:fontScheme name="Office">
+      <a:majorFont>
+        <a:latin typeface="Calibri"/>
+        <a:ea typeface=""/>
+        <a:cs typeface=""/>
+        <a:font script="Jpan" typeface="ＭＳ Ｐゴシック"/>
+        <a:font script="Hang" typeface="맑은 고딕"/>
+        <a:font script="Hans" typeface="宋体"/>
+        <a:font script="Hant" typeface="新細明體"/>
+        <a:font script="Arab" typeface="Times New Roman"/>
+        <a:font script="Hebr" typeface="Times New Roman"/>
+        <a:font script="Thai" typeface="Angsana New"/>
+        <a:font script="Ethi" typeface="Nyala"/>
+        <a:font script="Beng" typeface="Vrinda"/>
+        <a:font script="Gujr" typeface="Shruti"/>
+        <a:font script="Khmr" typeface="MoolBoran"/>
+        <a:font script="Knda" typeface="Tunga"/>
+        <a:font script="Guru" typeface="Raavi"/>
+        <a:font script="Cans" typeface="Euphemia"/>
+        <a:font script="Cher" typeface="Plantagenet Cherokee"/>
+        <a:font script="Yiii" typeface="Microsoft Yi Baiti"/>
+        <a:font script="Tibt" typeface="Microsoft Himalaya"/>
+        <a:font script="Thaa" typeface="MV Boli"/>
+        <a:font script="Deva" typeface="Mangal"/>
+        <a:font script="Telu" typeface="Gautami"/>
+        <a:font script="Taml" typeface="Latha"/>
+        <a:font script="Syrc" typeface="Estrangelo Edessa"/>
+        <a:font script="Orya" typeface="Kalinga"/>
+        <a:font script="Mlym" typeface="Kartika"/>
+        <a:font script="Laoo" typeface="DokChampa"/>
+        <a:font script="Sinh" typeface="Iskoola Pota"/>
+        <a:font script="Mong" typeface="Mongolian Baiti"/>
+        <a:font script="Viet" typeface="Times New Roman"/>
+        <a:font script="Uigh" typeface="Microsoft Uighur"/>
+        <a:font script="Geor" typeface="Sylfaen"/>
+      </a:majorFont>
+      <a:minorFont>
+        <a:latin typeface="Calibri"/>
+        <a:ea typeface=""/>
+        <a:cs typeface=""/>
+        <a:font script="Jpan" typeface="ＭＳ Ｐゴシック"/>
+        <a:font script="Hang" typeface="맑은 고딕"/>
+        <a:font script="Hans" typeface="宋体"/>
+        <a:font script="Hant" typeface="新細明體"/>
+        <a:font script="Arab" typeface="Arial"/>
+        <a:font script="Hebr" typeface="Arial"/>
+        <a:font script="Thai" typeface="Cordia New"/>
+        <a:font script="Ethi" typeface="Nyala"/>
+        <a:font script="Beng" typeface="Vrinda"/>
+        <a:font script="Gujr" typeface="Shruti"/>
+        <a:font script="Khmr" typeface="DaunPenh"/>
+        <a:font script="Knda" typeface="Tunga"/>
+        <a:font script="Guru" typeface="Raavi"/>
+        <a:font script="Cans" typeface="Euphemia"/>
+        <a:font script="Cher" typeface="Plantagenet Cherokee"/>
+        <a:font script="Yiii" typeface="Microsoft Yi Baiti"/>
+        <a:font script="Tibt" typeface="Microsoft Himalaya"/>
+        <a:font script="Thaa" typeface="MV Boli"/>
+        <a:font script="Deva" typeface="Mangal"/>
+        <a:font script="Telu" typeface="Gautami"/>
+        <a:font script="Taml" typeface="Latha"/>
+        <a:font script="Syrc" typeface="Estrangelo Edessa"/>
+        <a:font script="Orya" typeface="Kalinga"/>
+        <a:font script="Mlym" typeface="Kartika"/>
+        <a:font script="Laoo" typeface="DokChampa"/>
+        <a:font script="Sinh" typeface="Iskoola Pota"/>
+        <a:font script="Mong" typeface="Mongolian Baiti"/>
+        <a:font script="Viet" typeface="Arial"/>
+        <a:font script="Uigh" typeface="Microsoft Uighur"/>
+        <a:font script="Geor" typeface="Sylfaen"/>
+      </a:minorFont>
+    </a:fontScheme>
+    <a:fmtScheme name="Office">
+      <a:fillStyleLst>
+        <a:solidFill>
+          <a:schemeClr val="phClr"/>
+        </a:solidFill>
+        <a:gradFill rotWithShape="1">
+          <a:gsLst>
+            <a:gs pos="0">
+              <a:schemeClr val="phClr">
+                <a:tint val="50000"/>
+                <a:satMod val="300000"/>
+              </a:schemeClr>
+            </a:gs>
+            <a:gs pos="35000">
+              <a:schemeClr val="phClr">
+                <a:tint val="37000"/>
+                <a:satMod val="300000"/>
+              </a:schemeClr>
+            </a:gs>
+            <a:gs pos="100000">
+              <a:schemeClr val="phClr">
+                <a:tint val="15000"/>
+                <a:satMod val="350000"/>
+              </a:schemeClr>
+            </a:gs>
+          </a:gsLst>
+          <a:lin ang="16200000" scaled="1"/>
+        </a:gradFill>
+        <a:gradFill rotWithShape="1">
+          <a:gsLst>
+            <a:gs pos="0">
+              <a:schemeClr val="phClr">
+                <a:tint val="100000"/>
+                <a:shade val="100000"/>
+                <a:satMod val="130000"/>
+              </a:schemeClr>
+            </a:gs>
+            <a:gs pos="100000">
+              <a:schemeClr val="phClr">
+                <a:tint val="50000"/>
+                <a:shade val="100000"/>
+                <a:satMod val="350000"/>
+              </a:schemeClr>
+            </a:gs>
+          </a:gsLst>
+          <a:lin ang="16200000" scaled="0"/>
+        </a:gradFill>
+      </a:fillStyleLst>
+      <a:lnStyleLst>
+        <a:ln w="9525" cap="flat" cmpd="sng" algn="ctr">
+          <a:solidFill>
+            <a:schemeClr val="phClr">
+              <a:shade val="95000"/>
+              <a:satMod val="105000"/>
+            </a:schemeClr>
+          </a:solidFill>
+          <a:prstDash val="solid"/>
+        </a:ln>
+        <a:ln w="25400" cap="flat" cmpd="sng" algn="ctr">
+          <a:solidFill>
+            <a:schemeClr val="phClr"/>
+          </a:solidFill>
+          <a:prstDash val="solid"/>
+        </a:ln>
+        <a:ln w="38100" cap="flat" cmpd="sng" algn="ctr">
+          <a:solidFill>
+            <a:schemeClr val="phClr"/>
+          </a:solidFill>
+          <a:prstDash val="solid"/>
+        </a:ln>
+      </a:lnStyleLst>
+      <a:effectStyleLst>
+        <a:effectStyle>
+          <a:effectLst>
+            <a:outerShdw blurRad="40000" dist="20000" dir="5400000" rotWithShape="0">
+              <a:srgbClr val="000000">
+                <a:alpha val="38000"/>
+              </a:srgbClr>
+            </a:outerShdw>
+          </a:effectLst>
+        </a:effectStyle>
+        <a:effectStyle>
+          <a:effectLst>
+            <a:outerShdw blurRad="40000" dist="23000" dir="5400000" rotWithShape="0">
+              <a:srgbClr val="000000">
+                <a:alpha val="35000"/>
+              </a:srgbClr>
+            </a:outerShdw>
+          </a:effectLst>
+        </a:effectStyle>
+        <a:effectStyle>
+          <a:effectLst>
+            <a:outerShdw blurRad="40000" dist="23000" dir="5400000" rotWithShape="0">
+              <a:srgbClr val="000000">
+                <a:alpha val="35000"/>
+              </a:srgbClr>
+            </a:outerShdw>
+          </a:effectLst>
+          <a:scene3d>
+            <a:camera prst="orthographicFront">
+              <a:rot lat="0" lon="0" rev="0"/>
+            </a:camera>
+            <a:lightRig rig="threePt" dir="t">
+              <a:rot lat="0" lon="0" rev="1200000"/>
+            </a:lightRig>
+          </a:scene3d>
+          <a:sp3d>
+            <a:bevelT w="63500" h="25400"/>
+          </a:sp3d>
+        </a:effectStyle>
+      </a:effectStyleLst>
+      <a:bgFillStyleLst>
+        <a:solidFill>
+          <a:schemeClr val="phClr"/>
+        </a:solidFill>
+        <a:gradFill rotWithShape="1">
+          <a:gsLst>
+            <a:gs pos="0">
+              <a:schemeClr val="phClr">
+                <a:tint val="40000"/>
+                <a:satMod val="350000"/>
+              </a:schemeClr>
+            </a:gs>
+            <a:gs pos="40000">
+              <a:schemeClr val="phClr">
+                <a:tint val="45000"/>
+                <a:shade val="99000"/>
+                <a:satMod val="350000"/>
+              </a:schemeClr>
+            </a:gs>
+            <a:gs pos="100000">
+              <a:schemeClr val="phClr">
+                <a:shade val="20000"/>
+                <a:satMod val="255000"/>
+              </a:schemeClr>
+            </a:gs>
+          </a:gsLst>
+          <a:path path="circle">
+            <a:fillToRect l="50000" t="-80000" r="50000" b="180000"/>
+          </a:path>
+        </a:gradFill>
+        <a:gradFill rotWithShape="1">
+          <a:gsLst>
+            <a:gs pos="0">
+              <a:schemeClr val="phClr">
+                <a:tint val="80000"/>
+                <a:satMod val="300000"/>
+              </a:schemeClr>
+            </a:gs>
+            <a:gs pos="100000">
+              <a:schemeClr val="phClr">
+                <a:shade val="30000"/>
+                <a:satMod val="200000"/>
+              </a:schemeClr>
+            </a:gs>
+          </a:gsLst>
+          <a:path path="circle">
+            <a:fillToRect l="50000" t="50000" r="50000" b="50000"/>
+          </a:path>
+        </a:gradFill>
+      </a:bgFillStyleLst>
+    </a:fmtScheme>
+  </a:themeElements>
+  <a:objectDefaults>
+    <a:spDef>
+      <a:spPr/>
+      <a:bodyPr/>
+      <a:lstStyle/>
+      <a:style>
+        <a:lnRef idx="1">
+          <a:schemeClr val="accent1"/>
+        </a:lnRef>
+        <a:fillRef idx="3">
+          <a:schemeClr val="accent1"/>
+        </a:fillRef>
+        <a:effectRef idx="2">
+          <a:schemeClr val="accent1"/>
+        </a:effectRef>
+        <a:fontRef idx="minor">
+          <a:schemeClr val="lt1"/>
+        </a:fontRef>
+      </a:style>
+    </a:spDef>
+    <a:lnDef>
+      <a:spPr/>
+      <a:bodyPr/>
+      <a:lstStyle/>
+      <a:style>
+        <a:lnRef idx="2">
+          <a:schemeClr val="accent1"/>
+        </a:lnRef>
+        <a:fillRef idx="0">
+          <a:schemeClr val="accent1"/>
+        </a:fillRef>
+        <a:effectRef idx="1">
+          <a:schemeClr val="accent1"/>
+        </a:effectRef>
+        <a:fontRef idx="minor">
+          <a:schemeClr val="tx1"/>
+        </a:fontRef>
+      </a:style>
+    </a:lnDef>
+  </a:objectDefaults>
+  <a:extraClrSchemeLst/>
+</a:theme>
 </file>
--- a/Bases de Datos II/Clases/Clase 1 - Revision BD I y arranque VetCare/Presentacion.pptx
+++ b/Bases de Datos II/Clases/Clase 1 - Revision BD I y arranque VetCare/Presentacion.pptx
@@ -537,6 +537,17 @@
           <a:lstStyle/>
           <a:p>
             <a:r>
+              <a:t>Fuera de la lamina (habla de la practica, no del tema):</a:t>
+            </a:r>
+          </a:p>
+          <a:p>
+            <a:r>
+              <a:t>- Que es el motivo por el que en la Clase 7 se habla de indices y no como un tema abstracto de rendimiento; y no hay metricas, no saben cuantas especies atienden al mes, que es exactamente la consulta agregada que aparece en el taller de la Clase 6.</a:t>
+            </a:r>
+          </a:p>
+          <a:p/>
+          <a:p>
+            <a:r>
               <a:t>Antes de dibujar una sola tabla hay que decir para quien se dibuja, porque el taller de hoy y los enunciados de las quince clases en ExamLab estan escritos sobre un cliente concreto y con nombre.</a:t>
             </a:r>
           </a:p>
@@ -660,6 +671,17 @@
         <p:txBody>
           <a:bodyPr/>
           <a:lstStyle/>
+          <a:p>
+            <a:r>
+              <a:t>Fuera de la lamina (habla de la practica, no del tema):</a:t>
+            </a:r>
+          </a:p>
+          <a:p>
+            <a:r>
+              <a:t>- Sobre lo que se puede demostrar con herramientas gratuitas conviene ser preciso, porque de eso depende que el taller no se atore.</a:t>
+            </a:r>
+          </a:p>
+          <a:p/>
           <a:p>
             <a:r>
               <a:t>En DB Fiddle, sin cuenta y en menos de un minuto, se ejecuta el guion completo de CREATE TABLE con claves primarias, foraneas y CHECK, se insertan Ana Perez, Luna y su cita, se corre el JOIN de las tres tablas y, sobre todo, se provoca el error de integridad en vivo insertando una cita con id_mascota inexistente para que el grupo lea el mensaje real del motor.</a:t>
@@ -7472,7 +7494,7 @@
                 </a:solidFill>
                 <a:latin typeface="Calibri"/>
               </a:rPr>
-              <a:t>–   Hace falta distinguir un diagrama entidad-relacion de un dibujo, porque el entregable de hoy es un PNG y es facil entregar lo segundo creyendo que es lo primero.</a:t>
+              <a:t>–   Hace falta distinguir un diagrama entidad-relacion de un dibujo, porque es facil hacer lo segundo creyendo que es lo primero.</a:t>
             </a:r>
           </a:p>
           <a:p>
@@ -7521,6 +7543,22 @@
                 <a:latin typeface="Calibri"/>
               </a:rPr>
               <a:t>–   Cada clave foranea senalada indicando a que entidad apunta; cada relacion con cardinalidad en los dos extremos, con maximo y minimo; y cada relacion con nombre verbal legible, Dueno posee Mascota, Veterinario atiende Cita.</a:t>
+            </a:r>
+          </a:p>
+          <a:p>
+            <a:pPr>
+              <a:spcAft>
+                <a:spcPts val="800"/>
+              </a:spcAft>
+            </a:pPr>
+            <a:r>
+              <a:rPr sz="2000" b="0" i="0">
+                <a:solidFill>
+                  <a:srgbClr val="333333"/>
+                </a:solidFill>
+                <a:latin typeface="Calibri"/>
+              </a:rPr>
+              <a:t>–   El criterio de aceptacion que conviene entregar es operativo: el diagrama esta bien si otra persona puede escribir el CREATE TABLE completo mirandolo, sin preguntar nada.</a:t>
             </a:r>
           </a:p>
         </p:txBody>
@@ -7740,22 +7778,6 @@
                 </a:solidFill>
                 <a:latin typeface="Calibri"/>
               </a:rPr>
-              <a:t>–   El criterio de aceptacion que conviene entregar es operativo: el diagrama esta bien si otra persona puede escribir el CREATE TABLE completo mirandolo, sin preguntar nada.</a:t>
-            </a:r>
-          </a:p>
-          <a:p>
-            <a:pPr>
-              <a:spcAft>
-                <a:spcPts val="800"/>
-              </a:spcAft>
-            </a:pPr>
-            <a:r>
-              <a:rPr sz="2000" b="0" i="0">
-                <a:solidFill>
-                  <a:srgbClr val="333333"/>
-                </a:solidFill>
-                <a:latin typeface="Calibri"/>
-              </a:rPr>
               <a:t>–   La opcionalidad es la parte que siempre se omite y la que mas cuesta despues.</a:t>
             </a:r>
           </a:p>
@@ -9141,7 +9163,7 @@
                 </a:solidFill>
                 <a:latin typeface="Calibri"/>
               </a:rPr>
-              <a:t>–   Y la convencion que mas tiempo ahorra en el semestre: el mismo nombre en el diagrama, en el DDL y en el codigo Mermaid que se entrega; cuando los tres coinciden, revisar el taller de un estudiante es leer una sola vez.</a:t>
+              <a:t>–   Y la convencion que mas tiempo ahorra en el semestre: el mismo nombre en el diagrama, en el DDL y en el codigo Mermaid; cuando los tres coinciden, el modelo se lee una sola vez.</a:t>
             </a:r>
           </a:p>
         </p:txBody>
@@ -9361,7 +9383,7 @@
                 </a:solidFill>
                 <a:latin typeface="Calibri"/>
               </a:rPr>
-              <a:t>–   Sobre lo que se puede demostrar con herramientas gratuitas conviene ser preciso, porque de eso depende que el taller no se atore.</a:t>
+              <a:t>–   Sobre lo que se puede demostrar con herramientas gratuitas conviene ser preciso.</a:t>
             </a:r>
           </a:p>
           <a:p>
@@ -9558,7 +9580,7 @@
                 </a:solidFill>
                 <a:latin typeface="Calibri"/>
               </a:rPr>
-              <a:t>Del ER dibujado al codigo Mermaid que se entrega</a:t>
+              <a:t>Del ER dibujado al codigo Mermaid</a:t>
             </a:r>
           </a:p>
         </p:txBody>
@@ -9597,7 +9619,7 @@
                 </a:solidFill>
                 <a:latin typeface="Calibri"/>
               </a:rPr>
-              <a:t>–   El taller de hoy pide el modelo ER en la pregunta de tipo diagrama de la plataforma del curso, y esa pregunta NO recibe imagenes: recibe texto en sintaxis Mermaid (erDiagram) que la plataforma renderiza al instante.</a:t>
+              <a:t>–   Un modelo ER en Mermaid NO es una imagen: es texto en sintaxis Mermaid (erDiagram) que un visor renderiza al instante.</a:t>
             </a:r>
           </a:p>
           <a:p>
@@ -9629,7 +9651,7 @@
                 </a:solidFill>
                 <a:latin typeface="Calibri"/>
               </a:rPr>
-              <a:t>–   El paso que nadie se puede saltar es pegar el codigo en la pregunta y mirarlo renderizado dentro de la plataforma del curso antes de enviar, porque un diagrama que no renderiza no se puede calificar.</a:t>
+              <a:t>–   El paso que nadie se puede saltar es pegar el codigo en un visor Mermaid y mirarlo renderizado, porque un diagrama que no renderiza no comunica nada.</a:t>
             </a:r>
           </a:p>
         </p:txBody>
@@ -14679,7 +14701,7 @@
                 </a:solidFill>
                 <a:latin typeface="Calibri"/>
               </a:rPr>
-              <a:t> Boceto ER en draw.io (Dueno-Mascota-Cita) + CREATE TABLE minimo en DB Fiddle, y cierre pasando el boceto a Mermaid con IA para pegarlo renderizado en la plataforma del curso.</a:t>
+              <a:t> Boceto ER en draw.io (Dueno-Mascota-Cita) + CREATE TABLE minimo en DB Fiddle, y cierre pasando el boceto a Mermaid con IA para pegarlo renderizado.</a:t>
             </a:r>
           </a:p>
           <a:p>
@@ -14892,7 +14914,7 @@
                 </a:solidFill>
                 <a:latin typeface="Calibri"/>
               </a:rPr>
-              <a:t>Del boceto a la plataforma del curso (diagrama)</a:t>
+              <a:t>Del boceto al código Mermaid</a:t>
             </a:r>
           </a:p>
         </p:txBody>
@@ -14926,7 +14948,7 @@
                 </a:solidFill>
                 <a:latin typeface="Calibri"/>
               </a:rPr>
-              <a:t>El diagrama se entrega como codigo Mermaid dentro de la plataforma del curso, no como imagen</a:t>
+              <a:t>El diagrama es texto Mermaid: la imagen sale del codigo, no al reves</a:t>
             </a:r>
           </a:p>
         </p:txBody>
@@ -15268,7 +15290,7 @@
                 </a:solidFill>
                 <a:latin typeface="Calibri"/>
               </a:rPr>
-              <a:t>Copia o describe tu boceto a una IA y pidele el codigo Mermaid: «convierte este diagrama a Mermaid usando erDiagram». Revisa el resultado: la IA acierta la sintaxis, no tu modelo.</a:t>
+              <a:t>Copia o describe tu boceto a una IA y pidele el codigo Mermaid usando erDiagram. Revisa el resultado: la IA acierta la sintaxis, no tu modelo.</a:t>
             </a:r>
           </a:p>
         </p:txBody>
@@ -15423,7 +15445,7 @@
                 </a:solidFill>
                 <a:latin typeface="Calibri"/>
               </a:rPr>
-              <a:t>Pega y renderiza en la plataforma del curso</a:t>
+              <a:t>Renderiza y corrige</a:t>
             </a:r>
           </a:p>
           <a:p>
@@ -15439,7 +15461,7 @@
                 </a:solidFill>
                 <a:latin typeface="Calibri"/>
               </a:rPr>
-              <a:t>Pega ese codigo en la caja de texto de la pregunta y mira como lo dibuja la plataforma. Si no renderiza, corrige ahi mismo: lo que se califica es el diagrama renderizado dentro de la plataforma del curso.</a:t>
+              <a:t>Pega el codigo en un visor Mermaid (por ejemplo mermaid.live) y mira como lo dibuja. Si no renderiza, corrige ahi mismo: un diagrama que no renderiza no comunica nada.</a:t>
             </a:r>
           </a:p>
         </p:txBody>
@@ -15594,7 +15616,7 @@
                 </a:solidFill>
                 <a:latin typeface="Calibri"/>
               </a:rPr>
-              <a:t>Guarda el PNG para tu PI</a:t>
+              <a:t>Guarda codigo e imagen</a:t>
             </a:r>
           </a:p>
           <a:p>
@@ -15610,7 +15632,7 @@
                 </a:solidFill>
                 <a:latin typeface="Calibri"/>
               </a:rPr>
-              <a:t>Exporta tambien la imagen a la carpeta de tu Proyecto Integrador. Esa copia es para tu informe; no reemplaza la respuesta en la plataforma.</a:t>
+              <a:t>Conserva el texto Mermaid, que es la fuente, y exporta el PNG para tu informe del Proyecto Integrador.</a:t>
             </a:r>
           </a:p>
         </p:txBody>
@@ -16574,7 +16596,7 @@
                 </a:solidFill>
                 <a:latin typeface="Calibri"/>
               </a:rPr>
-              <a:t>–   Que es el motivo por el que en la Clase 7 se habla de indices y no como un tema abstracto de rendimiento; y no hay metricas, no saben cuantas especies atienden al mes, que es exactamente la consulta agregada que aparece en el taller de la Clase 6.</a:t>
+              <a:t>–   Que es el motivo por el que en la Clase 7 se habla de indices y no como un tema abstracto de rendimiento; y no hay metricas, no saben cuantas especies atienden al mes.</a:t>
             </a:r>
           </a:p>
         </p:txBody>
@@ -16826,7 +16848,7 @@
                 </a:solidFill>
                 <a:latin typeface="Calibri"/>
               </a:rPr>
-              <a:t>–   Y por eso el entregable del semestre es un esquema con integridad, roles, procedimientos y un plan de ejecucion, no una pantalla.</a:t>
+              <a:t>–   Y por eso el producto del semestre es un esquema con integridad, roles, procedimientos y un plan de ejecucion, no una pantalla.</a:t>
             </a:r>
           </a:p>
         </p:txBody>

--- a/Bases de Datos II/Clases/Clase 1 - Revision BD I y arranque VetCare/Presentacion.pptx
+++ b/Bases de Datos II/Clases/Clase 1 - Revision BD I y arranque VetCare/Presentacion.pptx
@@ -537,18 +537,7 @@
           <a:lstStyle/>
           <a:p>
             <a:r>
-              <a:t>Fuera de la lamina (habla de la practica, no del tema):</a:t>
-            </a:r>
-          </a:p>
-          <a:p>
-            <a:r>
-              <a:t>- Que es el motivo por el que en la Clase 7 se habla de indices y no como un tema abstracto de rendimiento; y no hay metricas, no saben cuantas especies atienden al mes, que es exactamente la consulta agregada que aparece en el taller de la Clase 6.</a:t>
-            </a:r>
-          </a:p>
-          <a:p/>
-          <a:p>
-            <a:r>
-              <a:t>Antes de dibujar una sola tabla hay que decir para quien se dibuja, porque el taller de hoy y los enunciados de las quince clases en ExamLab estan escritos sobre un cliente concreto y con nombre.</a:t>
+              <a:t>Antes de dibujar una sola tabla hay que decir para quien se dibuja.</a:t>
             </a:r>
           </a:p>
           <a:p>
@@ -558,11 +547,6 @@
           </a:p>
           <a:p>
             <a:r>
-              <a:t>Un curso de bases de datos que no nombra al cliente convierte cada taller en un ejercicio suelto; nombrarlo hace que el estudiante pueda decidir por si mismo si un dato sobra.</a:t>
-            </a:r>
-          </a:p>
-          <a:p>
-            <a:r>
               <a:t>Hay que fijar la nomenclatura en voz alta porque el material la usa con precision y el estudiante la mezcla: Huellitas es la CLINICA, es decir el cliente que tiene el problema</a:t>
             </a:r>
           </a:p>
@@ -603,7 +587,22 @@
           </a:p>
           <a:p>
             <a:r>
-              <a:t>Cuando en un taller un estudiante pregunte si una columna sobra, la respuesta del docente no deberia ser si o no sino otra pregunta: cual de los tres la necesita, y que pierde otro si la agregamos.</a:t>
+              <a:t>Fuera de la lamina (habla de la practica): Antes de dibujar una sola tabla hay que decir para quien se dibuja, porque el taller de hoy y los enunciados de las quince clases estan escritos sobre un cliente concreto y con nombre.</a:t>
+            </a:r>
+          </a:p>
+          <a:p>
+            <a:r>
+              <a:t>Fuera de la lamina (habla de la practica): La administracion reporta tres problemas y conviene enunciarlos tal cual, porque cada uno se traduce despues en una decision de esquema: se extravian fichas de pacientes, y esa es la razon de que el expediente tenga que vivir en una fila con clave primaria y no en un papel; buscar un historial en el archivo fisico genera filas en la sala de espera, que es el motivo por el que en la Clase 7 se habla de indices y no como un tema abstracto de rendimiento; y no hay metricas, no saben cuantas especies atienden al mes, que es exactamente la consulta agregada que aparece en el taller de la Clase 6.</a:t>
+            </a:r>
+          </a:p>
+          <a:p>
+            <a:r>
+              <a:t>Fuera de la lamina (habla de la practica): Un curso de bases de datos que no nombra al cliente convierte cada taller en un ejercicio suelto; nombrarlo hace que el estudiante pueda decidir por si mismo si un dato sobra.</a:t>
+            </a:r>
+          </a:p>
+          <a:p>
+            <a:r>
+              <a:t>Fuera de la lamina (habla de la practica): Cuando en un taller un estudiante pregunte si una columna sobra, la respuesta del docente no deberia ser si o no sino otra pregunta: cual de los tres la necesita, y que pierde otro si la agregamos.</a:t>
             </a:r>
           </a:p>
         </p:txBody>
@@ -673,15 +672,9 @@
           <a:lstStyle/>
           <a:p>
             <a:r>
-              <a:t>Fuera de la lamina (habla de la practica, no del tema):</a:t>
-            </a:r>
-          </a:p>
-          <a:p>
-            <a:r>
-              <a:t>- Sobre lo que se puede demostrar con herramientas gratuitas conviene ser preciso, porque de eso depende que el taller no se atore.</a:t>
-            </a:r>
-          </a:p>
-          <a:p/>
+              <a:t>Sobre lo que se puede demostrar con herramientas gratuitas conviene ser preciso.</a:t>
+            </a:r>
+          </a:p>
           <a:p>
             <a:r>
               <a:t>En DB Fiddle, sin cuenta y en menos de un minuto, se ejecuta el guion completo de CREATE TABLE con claves primarias, foraneas y CHECK, se insertan Ana Perez, Luna y su cita, se corre el JOIN de las tres tablas y, sobre todo, se provoca el error de integridad en vivo insertando una cita con id_mascota inexistente para que el grupo lea el mensaje real del motor.</a:t>
@@ -694,12 +687,17 @@
           </a:p>
           <a:p>
             <a:r>
-              <a:t>Oracle Live SQL exige cuenta gratuita pero conserva esquema y guiones entre sesiones y admite bloques PL/SQL, que es lo que se necesitara desde la Clase 3; conviene que el estudiante la cree hoy y no el dia que la necesite. draw.io corre en el navegador, no pide cuenta y exporta PNG, el formato que pide ExamLab.</a:t>
-            </a:r>
-          </a:p>
-          <a:p>
-            <a:r>
-              <a:t>De ahi sale la regla operativa del curso: la fuente de verdad es el archivo sql en la carpeta del proyecto, nunca la pestana del navegador, y el estudiante va bien si reconstruye el esquema completo en menos de cinco minutos pegando su propio guion.</a:t>
+              <a:t>Oracle Live SQL exige cuenta gratuita pero conserva esquema y guiones entre sesiones y admite bloques PL/SQL, que es lo que se necesitara desde la Clase 3; conviene que el estudiante la cree hoy y no el dia que la necesite. draw.io corre en el navegador, no pide cuenta y exporta PNG, el formato que pide PostgreSQL en el navegador.</a:t>
+            </a:r>
+          </a:p>
+          <a:p>
+            <a:r>
+              <a:t>De ahi sale la regla operativa del curso: la fuente de verdad es el archivo sql en la carpeta del proyecto, nunca la pestana del navegador, y el estudiante va bien si reconstruye el esquema completo en menos de cinco minutos pegando su propio guion. draw.io y Excalidraw: son pizarras para pensar el modelo a mano alzada, sin instalar nada.</a:t>
+            </a:r>
+          </a:p>
+          <a:p>
+            <a:r>
+              <a:t>Fuera de la lamina (habla de la practica): Sobre lo que se puede demostrar con herramientas gratuitas conviene ser preciso, porque de eso depende que el taller no se atore.</a:t>
             </a:r>
           </a:p>
         </p:txBody>
@@ -769,7 +767,7 @@
           <a:lstStyle/>
           <a:p>
             <a:r>
-              <a:t>Ultimo tramo, y es el que decide si el taller se entrega o no: como pasa el estudiante del dibujo a lo que la plataforma califica.</a:t>
+              <a:t>Ultimo tramo.</a:t>
             </a:r>
           </a:p>
           <a:p>
@@ -785,6 +783,11 @@
           <a:p>
             <a:r>
               <a:t>La demo debe terminar exactamente ahi, y deja los cuatro pasos proyectados mientras el grupo trabaja.</a:t>
+            </a:r>
+          </a:p>
+          <a:p>
+            <a:r>
+              <a:t>Fuera de la lamina (habla de la practica): Ultimo tramo, y es el que decide si el taller se entrega o no: como pasa el estudiante del dibujo a lo que la plataforma califica.</a:t>
             </a:r>
           </a:p>
         </p:txBody>
@@ -1272,6 +1275,11 @@
               <a:t>Esa baja logica es la que obliga a validar en la Clase 3 que una mascota inactiva no agende, porque la clave foranea la sigue aceptando: el identificador existe, el negocio no lo quiere.</a:t>
             </a:r>
           </a:p>
+          <a:p>
+            <a:r>
+              <a:t>ON DELETE SET NULL deja la fila huerfana con la columna en nulo.</a:t>
+            </a:r>
+          </a:p>
         </p:txBody>
       </p:sp>
       <p:sp>
@@ -1494,12 +1502,17 @@
           <a:lstStyle/>
           <a:p>
             <a:r>
-              <a:t>Convenciones de nombres del curso, y hay que exigirlas desde hoy porque el taller se corrige ejecutando el guion en el PostgreSQL que ExamLab trae en el navegador.</a:t>
+              <a:t>Convenciones de nombres del curso.</a:t>
             </a:r>
           </a:p>
           <a:p>
             <a:r>
               <a:t>Identificadores sustitutos uniformes con el patron id_&lt;entidad&gt;, el mismo nombre en la tabla propia y en la que la referencia, para que el JOIN se escriba sin buscar como se llamo la columna alla.</a:t>
+            </a:r>
+          </a:p>
+          <a:p>
+            <a:r>
+              <a:t>Fuera de la lamina (habla de la practica): Convenciones de nombres del curso, y hay que exigirlas desde hoy porque el taller se corrige ejecutando el guion en el PostgreSQL que PostgreSQL en el navegador trae en el navegador.</a:t>
             </a:r>
           </a:p>
         </p:txBody>
@@ -6417,6 +6430,22 @@
               <a:t>–   En VetCare se decide entidad por entidad: mascota hacia dueno restrictivo, porque borrar un dueno no debe evaporar el historial clinico; consulta hacia cita restrictivo</a:t>
             </a:r>
           </a:p>
+          <a:p>
+            <a:pPr>
+              <a:spcAft>
+                <a:spcPts val="800"/>
+              </a:spcAft>
+            </a:pPr>
+            <a:r>
+              <a:rPr sz="2000" b="0" i="0">
+                <a:solidFill>
+                  <a:srgbClr val="333333"/>
+                </a:solidFill>
+                <a:latin typeface="Calibri"/>
+              </a:rPr>
+              <a:t>–   Porque la consulta es el registro medico; detalle_factura hacia factura en cascada, porque una linea de detalle no significa nada sin su factura; detalle_factura hacia insumo restrictivo, porque no se puede borrar un insumo ya facturado.</a:t>
+            </a:r>
+          </a:p>
         </p:txBody>
       </p:sp>
       <p:sp>
@@ -6634,7 +6663,7 @@
                 </a:solidFill>
                 <a:latin typeface="Calibri"/>
               </a:rPr>
-              <a:t>–   Porque la consulta es el registro medico; detalle_factura hacia factura en cascada, porque una linea de detalle no significa nada sin su factura; detalle_factura hacia insumo restrictivo, porque no se puede borrar un insumo ya facturado.</a:t>
+              <a:t>–   La conclusion honesta es que en produccion casi nada se borra: se marca inactivo con activa CHAR(1) DEFAULT 'S' CHECK (activa IN ('S','N')).</a:t>
             </a:r>
           </a:p>
           <a:p>
@@ -6650,7 +6679,39 @@
                 </a:solidFill>
                 <a:latin typeface="Calibri"/>
               </a:rPr>
-              <a:t>–   La conclusion honesta es que en produccion casi nada se borra: se marca inactivo con activa CHAR(1) DEFAULT 'S' CHECK (activa IN ('S','N')).</a:t>
+              <a:t>–   La accion ante el borrado del padre se declara en la propia FK: ON DELETE RESTRICT, o NO ACTION, que es la opcion por omision, impide borrar un dueno con mascotas</a:t>
+            </a:r>
+          </a:p>
+          <a:p>
+            <a:pPr>
+              <a:spcAft>
+                <a:spcPts val="800"/>
+              </a:spcAft>
+            </a:pPr>
+            <a:r>
+              <a:rPr sz="2000" b="0" i="0">
+                <a:solidFill>
+                  <a:srgbClr val="333333"/>
+                </a:solidFill>
+                <a:latin typeface="Calibri"/>
+              </a:rPr>
+              <a:t>–   ON DELETE CASCADE borraria tambien sus mascotas y citas, que en una clinica es perder historia clinica</a:t>
+            </a:r>
+          </a:p>
+          <a:p>
+            <a:pPr>
+              <a:spcAft>
+                <a:spcPts val="800"/>
+              </a:spcAft>
+            </a:pPr>
+            <a:r>
+              <a:rPr sz="2000" b="0" i="0">
+                <a:solidFill>
+                  <a:srgbClr val="333333"/>
+                </a:solidFill>
+                <a:latin typeface="Calibri"/>
+              </a:rPr>
+              <a:t>–   En VetCare la eleccion razonable es RESTRICT mas baja logica.</a:t>
             </a:r>
           </a:p>
         </p:txBody>
@@ -8142,6 +8203,40 @@
               <a:t>–   Cada lámina se sostiene sola: sirve para repasar aunque hayas faltado.</a:t>
             </a:r>
           </a:p>
+          <a:p>
+            <a:pPr>
+              <a:spcAft>
+                <a:spcPts val="800"/>
+              </a:spcAft>
+            </a:pPr>
+            <a:r>
+              <a:rPr sz="2000" b="0" i="0">
+                <a:solidFill>
+                  <a:srgbClr val="333333"/>
+                </a:solidFill>
+                <a:latin typeface="Calibri"/>
+              </a:rPr>
+              <a:t>–   </a:t>
+            </a:r>
+            <a:r>
+              <a:rPr sz="2000" b="1" i="0">
+                <a:solidFill>
+                  <a:srgbClr val="333333"/>
+                </a:solidFill>
+                <a:latin typeface="Calibri"/>
+              </a:rPr>
+              <a:t>Conceptos de hoy:</a:t>
+            </a:r>
+            <a:r>
+              <a:rPr sz="2000" b="0" i="0">
+                <a:solidFill>
+                  <a:srgbClr val="333333"/>
+                </a:solidFill>
+                <a:latin typeface="Calibri"/>
+              </a:rPr>
+              <a:t> El cliente · Por que esto no es Bases de Datos I, y el vocabulario minimo · Nivel conceptual y nivel fisico · Clave primaria.</a:t>
+            </a:r>
+          </a:p>
         </p:txBody>
       </p:sp>
       <p:sp>
@@ -9166,6 +9261,38 @@
               <a:t>–   Y la convencion que mas tiempo ahorra en el semestre: el mismo nombre en el diagrama, en el DDL y en el codigo Mermaid; cuando los tres coinciden, el modelo se lee una sola vez.</a:t>
             </a:r>
           </a:p>
+          <a:p>
+            <a:pPr>
+              <a:spcAft>
+                <a:spcPts val="800"/>
+              </a:spcAft>
+            </a:pPr>
+            <a:r>
+              <a:rPr sz="2000" b="0" i="0">
+                <a:solidFill>
+                  <a:srgbClr val="333333"/>
+                </a:solidFill>
+                <a:latin typeface="Calibri"/>
+              </a:rPr>
+              <a:t>–   Ejemplo del error mas comun: CREATE TABLE "Mascota" con comillas crea un nombre sensible a mayusculas, y despues SELECT * FROM mascota responde relation "mascota" does not exist.</a:t>
+            </a:r>
+          </a:p>
+          <a:p>
+            <a:pPr>
+              <a:spcAft>
+                <a:spcPts val="800"/>
+              </a:spcAft>
+            </a:pPr>
+            <a:r>
+              <a:rPr sz="2000" b="0" i="0">
+                <a:solidFill>
+                  <a:srgbClr val="333333"/>
+                </a:solidFill>
+                <a:latin typeface="Calibri"/>
+              </a:rPr>
+              <a:t>–   Sin comillas, Mascota, MASCOTA y mascota son el mismo objeto.</a:t>
+            </a:r>
+          </a:p>
         </p:txBody>
       </p:sp>
       <p:sp>
@@ -9383,7 +9510,7 @@
                 </a:solidFill>
                 <a:latin typeface="Calibri"/>
               </a:rPr>
-              <a:t>–   Sobre lo que se puede demostrar con herramientas gratuitas conviene ser preciso.</a:t>
+              <a:t>–   Tambien se demuestra el borrado en cascada: DELETE FROM factura WHERE id_factura = 1 y verificar con SELECT COUNT(*) FROM detalle_factura que las lineas hijas desaparecieron.</a:t>
             </a:r>
           </a:p>
           <a:p>
@@ -9399,7 +9526,23 @@
                 </a:solidFill>
                 <a:latin typeface="Calibri"/>
               </a:rPr>
-              <a:t>–   Tambien se demuestra el borrado en cascada: DELETE FROM factura WHERE id_factura = 1 y verificar con SELECT COUNT(*) FROM detalle_factura que las lineas hijas desaparecieron.</a:t>
+              <a:t>–   DB Fiddle: es un PostgreSQL real en el navegador que ejecuta el DDL y muestra el error exacto si algo no compila.</a:t>
+            </a:r>
+          </a:p>
+          <a:p>
+            <a:pPr>
+              <a:spcAft>
+                <a:spcPts val="800"/>
+              </a:spcAft>
+            </a:pPr>
+            <a:r>
+              <a:rPr sz="2000" b="0" i="0">
+                <a:solidFill>
+                  <a:srgbClr val="333333"/>
+                </a:solidFill>
+                <a:latin typeface="Calibri"/>
+              </a:rPr>
+              <a:t>–   Un visor Mermaid: convierte el texto erDiagram en el diagrama, y ese texto es la fuente que se versiona junto al DDL.</a:t>
             </a:r>
           </a:p>
         </p:txBody>
@@ -12482,7 +12625,7 @@
         <p:spPr>
           <a:xfrm>
             <a:off x="457200" y="1261872"/>
-            <a:ext cx="11277295" cy="5093208"/>
+            <a:ext cx="11277295" cy="4773168"/>
           </a:xfrm>
           <a:prstGeom prst="roundRect">
             <a:avLst>
@@ -12602,7 +12745,7 @@
         <p:spPr>
           <a:xfrm>
             <a:off x="777240" y="1719072"/>
-            <a:ext cx="10637215" cy="4453128"/>
+            <a:ext cx="10637215" cy="4133087"/>
           </a:xfrm>
           <a:prstGeom prst="rect">
             <a:avLst/>
@@ -12779,6 +12922,41 @@
       <p:sp>
         <p:nvSpPr>
           <p:cNvPr id="9" name="TextBox 8"/>
+          <p:cNvSpPr txBox="1"/>
+          <p:nvPr/>
+        </p:nvSpPr>
+        <p:spPr>
+          <a:xfrm>
+            <a:off x="457200" y="6080760"/>
+            <a:ext cx="11277295" cy="320040"/>
+          </a:xfrm>
+          <a:prstGeom prst="rect">
+            <a:avLst/>
+          </a:prstGeom>
+          <a:noFill/>
+        </p:spPr>
+        <p:txBody>
+          <a:bodyPr wrap="square">
+            <a:spAutoFit/>
+          </a:bodyPr>
+          <a:lstStyle/>
+          <a:p>
+            <a:pPr algn="ctr"/>
+            <a:r>
+              <a:rPr sz="1200" b="0" i="1">
+                <a:solidFill>
+                  <a:srgbClr val="666666"/>
+                </a:solidFill>
+                <a:latin typeface="Calibri"/>
+              </a:rPr>
+              <a:t>Cada JOIN sigue una FK: cita llega a mascota por id_mascota, y mascota a dueno por id_dueno. El WHERE filtra despues de unir; si falta una condicion ON, el resultado no es un error sino un producto cartesiano.</a:t>
+            </a:r>
+          </a:p>
+        </p:txBody>
+      </p:sp>
+      <p:sp>
+        <p:nvSpPr>
+          <p:cNvPr id="10" name="TextBox 9"/>
           <p:cNvSpPr txBox="1"/>
           <p:nvPr/>
         </p:nvSpPr>
@@ -13942,7 +14120,7 @@
                 </a:solidFill>
                 <a:latin typeface="Calibri"/>
               </a:rPr>
-              <a:t>“Un dueño tiene N mascotas”, “una mascota tiene N citas”. La PK identifica cada fila; la FK materializa la relación y la BD la hace cumplir.</a:t>
+              <a:t>“Un dueño tiene N mascotas”, “una mascota tiene N citas”, “un veterinario atiende N citas”. La PK identifica cada fila; la FK materializa la relación y la BD la hace cumplir: una cita con id_mascota 999 que no existe se rechaza con violación de clave foránea.</a:t>
             </a:r>
           </a:p>
         </p:txBody>
@@ -14733,7 +14911,59 @@
                 </a:solidFill>
                 <a:latin typeface="Calibri"/>
               </a:rPr>
-              <a:t>–   Al final de la demo: dejar enlace/script compartible al grupo.</a:t>
+              <a:t>–   </a:t>
+            </a:r>
+            <a:r>
+              <a:rPr sz="2000" b="1" i="0">
+                <a:solidFill>
+                  <a:srgbClr val="333333"/>
+                </a:solidFill>
+                <a:latin typeface="Calibri"/>
+              </a:rPr>
+              <a:t>Qué observar:</a:t>
+            </a:r>
+            <a:r>
+              <a:rPr sz="2000" b="0" i="0">
+                <a:solidFill>
+                  <a:srgbClr val="333333"/>
+                </a:solidFill>
+                <a:latin typeface="Calibri"/>
+              </a:rPr>
+              <a:t> la FK rechaza una cita para una mascota que no existe: el motor responde con violacion de clave foranea y no inserta nada.</a:t>
+            </a:r>
+          </a:p>
+          <a:p>
+            <a:pPr>
+              <a:spcAft>
+                <a:spcPts val="800"/>
+              </a:spcAft>
+            </a:pPr>
+            <a:r>
+              <a:rPr sz="2000" b="0" i="0">
+                <a:solidFill>
+                  <a:srgbClr val="333333"/>
+                </a:solidFill>
+                <a:latin typeface="Calibri"/>
+              </a:rPr>
+              <a:t>–   </a:t>
+            </a:r>
+            <a:r>
+              <a:rPr sz="2000" b="1" i="0">
+                <a:solidFill>
+                  <a:srgbClr val="333333"/>
+                </a:solidFill>
+                <a:latin typeface="Calibri"/>
+              </a:rPr>
+              <a:t>Qué observar:</a:t>
+            </a:r>
+            <a:r>
+              <a:rPr sz="2000" b="0" i="0">
+                <a:solidFill>
+                  <a:srgbClr val="333333"/>
+                </a:solidFill>
+                <a:latin typeface="Calibri"/>
+              </a:rPr>
+              <a:t> el mismo modelo en tres formas que deben coincidir: el boceto, el DDL que compila y el texto erDiagram.</a:t>
             </a:r>
           </a:p>
         </p:txBody>

--- a/Bases de Datos II/Clases/Clase 1 - Revision BD I y arranque VetCare/Presentacion.pptx
+++ b/Bases de Datos II/Clases/Clase 1 - Revision BD I y arranque VetCare/Presentacion.pptx
@@ -40,7 +40,6 @@
     <p:sldId id="288" r:id="rId40"/>
     <p:sldId id="289" r:id="rId41"/>
     <p:sldId id="290" r:id="rId42"/>
-    <p:sldId id="291" r:id="rId43"/>
   </p:sldIdLst>
   <p:sldSz cx="12191695" cy="6858000" type="screen4x3"/>
   <p:notesSz cx="6858000" cy="9144000"/>
@@ -542,12 +541,7 @@
           </a:p>
           <a:p>
             <a:r>
-              <a:t>La Clinica Veterinaria Huellitas atiende un alto volumen de pacientes y lleva toda su gestion en carpetas de papel.</a:t>
-            </a:r>
-          </a:p>
-          <a:p>
-            <a:r>
-              <a:t>Hay que fijar la nomenclatura en voz alta porque el material la usa con precision y el estudiante la mezcla: Huellitas es la CLINICA, es decir el cliente que tiene el problema</a:t>
+              <a:t>Hay que fijar la nomenclatura en voz alta porque el material la usa con precision y el estudiante la mezcla: la clínica es la CLINICA, es decir el cliente que tiene el problema; la clínica es el SISTEMA que se le construye, y la base de la clínica es concretamente la base de datos de ese sistema, que es lo que se hace en esta asignatura.</a:t>
             </a:r>
           </a:p>
           <a:p>
@@ -587,7 +581,7 @@
           </a:p>
           <a:p>
             <a:r>
-              <a:t>Fuera de la lamina (habla de la practica): Antes de dibujar una sola tabla hay que decir para quien se dibuja, porque el taller de hoy y los enunciados de las quince clases estan escritos sobre un cliente concreto y con nombre.</a:t>
+              <a:t>Fuera de la lamina (habla de la practica): Antes de dibujar una sola tabla hay que decir para quien se dibuja, porque el taller de hoy y los enunciados de las quince clases estan escritos sobre un cliente concreto y con nombre. la clínica Veterinaria atiende un alto volumen de pacientes y lleva toda su gestion en carpetas de papel.</a:t>
             </a:r>
           </a:p>
           <a:p>
@@ -777,7 +771,7 @@
           </a:p>
           <a:p>
             <a:r>
-              <a:t>El PNG exportado se conserva en la carpeta del PI para el informe, pero no reemplaza la respuesta en la plataforma.</a:t>
+              <a:t>El PNG exportado se conserva en la carpeta del proyecto para el informe, pero no reemplaza la respuesta en la plataforma.</a:t>
             </a:r>
           </a:p>
           <a:p>
@@ -947,7 +941,7 @@
           </a:p>
           <a:p>
             <a:r>
-              <a:t>Conviene desactivar una trampa de vocabulario: la palabra dominio se usara hoy con dos sentidos, el de un atributo y el del proyecto, que es la clinica Huellitas.</a:t>
+              <a:t>Conviene desactivar una trampa de vocabulario: la palabra dominio se usara hoy con dos sentidos, el de un atributo y el del proyecto, que es la clínica.</a:t>
             </a:r>
           </a:p>
         </p:txBody>
@@ -4771,13 +4765,13 @@
           <a:p>
             <a:pPr algn="ctr"/>
             <a:r>
-              <a:rPr sz="4000" b="1" i="0">
+              <a:rPr sz="3400" b="1" i="0">
                 <a:solidFill>
                   <a:srgbClr val="FFFFFF"/>
                 </a:solidFill>
                 <a:latin typeface="Calibri"/>
               </a:rPr>
-              <a:t>Revision BD I · Arranque VetCare DB</a:t>
+              <a:t>Revision BD I · Arranque la base de la clínica</a:t>
             </a:r>
           </a:p>
         </p:txBody>
@@ -4855,7 +4849,7 @@
                 </a:solidFill>
                 <a:latin typeface="Calibri"/>
               </a:rPr>
-              <a:t>Diagnostico · dominio PI · primer modelo</a:t>
+              <a:t>Diagnostico · dominio proyecto · primer modelo</a:t>
             </a:r>
           </a:p>
         </p:txBody>
@@ -5036,21 +5030,141 @@
                 </a:solidFill>
                 <a:latin typeface="Calibri"/>
               </a:rPr>
-              <a:t>Clave primaria: natural o sustituta</a:t>
-            </a:r>
-          </a:p>
-        </p:txBody>
-      </p:sp>
-      <p:sp>
-        <p:nvSpPr>
-          <p:cNvPr id="5" name="TextBox 4"/>
+              <a:t>Clave primaria: natural o sustituta — sintaxis</a:t>
+            </a:r>
+          </a:p>
+        </p:txBody>
+      </p:sp>
+      <p:sp>
+        <p:nvSpPr>
+          <p:cNvPr id="5" name="Rounded Rectangle 4"/>
+          <p:cNvSpPr/>
+          <p:nvPr/>
+        </p:nvSpPr>
+        <p:spPr>
+          <a:xfrm>
+            <a:off x="457200" y="1261872"/>
+            <a:ext cx="11277295" cy="5093208"/>
+          </a:xfrm>
+          <a:prstGeom prst="roundRect">
+            <a:avLst>
+              <a:gd name="adj" fmla="val 12000"/>
+            </a:avLst>
+          </a:prstGeom>
+          <a:solidFill>
+            <a:srgbClr val="1E2A38"/>
+          </a:solidFill>
+          <a:ln>
+            <a:noFill/>
+          </a:ln>
+        </p:spPr>
+        <p:style>
+          <a:lnRef idx="1">
+            <a:schemeClr val="accent1"/>
+          </a:lnRef>
+          <a:fillRef idx="3">
+            <a:schemeClr val="accent1"/>
+          </a:fillRef>
+          <a:effectRef idx="2">
+            <a:schemeClr val="accent1"/>
+          </a:effectRef>
+          <a:fontRef idx="minor">
+            <a:schemeClr val="lt1"/>
+          </a:fontRef>
+        </p:style>
+        <p:txBody>
+          <a:bodyPr rtlCol="0" anchor="ctr"/>
+          <a:lstStyle/>
+          <a:p>
+            <a:pPr algn="ctr"/>
+          </a:p>
+        </p:txBody>
+      </p:sp>
+      <p:sp>
+        <p:nvSpPr>
+          <p:cNvPr id="6" name="Rectangle 5"/>
+          <p:cNvSpPr/>
+          <p:nvPr/>
+        </p:nvSpPr>
+        <p:spPr>
+          <a:xfrm>
+            <a:off x="457200" y="1261872"/>
+            <a:ext cx="11277295" cy="320040"/>
+          </a:xfrm>
+          <a:prstGeom prst="rect">
+            <a:avLst/>
+          </a:prstGeom>
+          <a:solidFill>
+            <a:srgbClr val="095292"/>
+          </a:solidFill>
+          <a:ln>
+            <a:noFill/>
+          </a:ln>
+        </p:spPr>
+        <p:style>
+          <a:lnRef idx="1">
+            <a:schemeClr val="accent1"/>
+          </a:lnRef>
+          <a:fillRef idx="3">
+            <a:schemeClr val="accent1"/>
+          </a:fillRef>
+          <a:effectRef idx="2">
+            <a:schemeClr val="accent1"/>
+          </a:effectRef>
+          <a:fontRef idx="minor">
+            <a:schemeClr val="lt1"/>
+          </a:fontRef>
+        </p:style>
+        <p:txBody>
+          <a:bodyPr rtlCol="0" anchor="ctr"/>
+          <a:lstStyle/>
+          <a:p>
+            <a:pPr algn="ctr"/>
+          </a:p>
+        </p:txBody>
+      </p:sp>
+      <p:sp>
+        <p:nvSpPr>
+          <p:cNvPr id="7" name="TextBox 6"/>
           <p:cNvSpPr txBox="1"/>
           <p:nvPr/>
         </p:nvSpPr>
         <p:spPr>
           <a:xfrm>
-            <a:off x="457200" y="1170432"/>
-            <a:ext cx="11277295" cy="5230368"/>
+            <a:off x="685800" y="1307592"/>
+            <a:ext cx="10820095" cy="256032"/>
+          </a:xfrm>
+          <a:prstGeom prst="rect">
+            <a:avLst/>
+          </a:prstGeom>
+          <a:noFill/>
+        </p:spPr>
+        <p:txBody>
+          <a:bodyPr wrap="square" anchor="ctr"/>
+          <a:lstStyle/>
+          <a:p>
+            <a:r>
+              <a:rPr sz="1000" b="1" i="0">
+                <a:solidFill>
+                  <a:srgbClr val="269CCB"/>
+                </a:solidFill>
+                <a:latin typeface="Calibri"/>
+              </a:rPr>
+              <a:t>● ● ●</a:t>
+            </a:r>
+          </a:p>
+        </p:txBody>
+      </p:sp>
+      <p:sp>
+        <p:nvSpPr>
+          <p:cNvPr id="8" name="TextBox 7"/>
+          <p:cNvSpPr txBox="1"/>
+          <p:nvPr/>
+        </p:nvSpPr>
+        <p:spPr>
+          <a:xfrm>
+            <a:off x="777240" y="1719072"/>
+            <a:ext cx="10637215" cy="4453128"/>
           </a:xfrm>
           <a:prstGeom prst="rect">
             <a:avLst/>
@@ -5065,104 +5179,120 @@
           <a:p>
             <a:pPr>
               <a:spcAft>
-                <a:spcPts val="800"/>
+                <a:spcPts val="400"/>
               </a:spcAft>
             </a:pPr>
             <a:r>
-              <a:rPr sz="2000" b="0" i="0">
-                <a:solidFill>
-                  <a:srgbClr val="333333"/>
-                </a:solidFill>
-                <a:latin typeface="Calibri"/>
-              </a:rPr>
-              <a:t>–   La clave primaria es la columna, o el conjunto de columnas, que identifica una fila sin ambiguedad: no se repite y no admite nulos.</a:t>
+              <a:rPr sz="1400" b="0" i="0">
+                <a:solidFill>
+                  <a:srgbClr val="FFFFFF"/>
+                </a:solidFill>
+                <a:latin typeface="Calibri"/>
+              </a:rPr>
+              <a:t>CREATE TABLE dueno (</a:t>
             </a:r>
           </a:p>
           <a:p>
             <a:pPr>
               <a:spcAft>
-                <a:spcPts val="800"/>
+                <a:spcPts val="400"/>
               </a:spcAft>
             </a:pPr>
             <a:r>
-              <a:rPr sz="2000" b="0" i="0">
-                <a:solidFill>
-                  <a:srgbClr val="333333"/>
-                </a:solidFill>
-                <a:latin typeface="Calibri"/>
-              </a:rPr>
-              <a:t>–   La pregunta de diseno real no es si poner clave primaria, sino cual.</a:t>
+              <a:rPr sz="1400" b="0" i="0">
+                <a:solidFill>
+                  <a:srgbClr val="FFFFFF"/>
+                </a:solidFill>
+                <a:latin typeface="Calibri"/>
+              </a:rPr>
+              <a:t>  id_dueno INT PRIMARY KEY,</a:t>
             </a:r>
           </a:p>
           <a:p>
             <a:pPr>
               <a:spcAft>
-                <a:spcPts val="800"/>
+                <a:spcPts val="400"/>
               </a:spcAft>
             </a:pPr>
             <a:r>
-              <a:rPr sz="2000" b="0" i="0">
-                <a:solidFill>
-                  <a:srgbClr val="333333"/>
-                </a:solidFill>
-                <a:latin typeface="Calibri"/>
-              </a:rPr>
-              <a:t>–   Una clave natural es un atributo del mundo real que ya identifica la entidad: la cedula del dueno, el microchip de la mascota.</a:t>
+              <a:rPr sz="1400" b="0" i="0">
+                <a:solidFill>
+                  <a:srgbClr val="FFFFFF"/>
+                </a:solidFill>
+                <a:latin typeface="Calibri"/>
+              </a:rPr>
+              <a:t>  cedula VARCHAR(20) UNIQUE,</a:t>
             </a:r>
           </a:p>
           <a:p>
             <a:pPr>
               <a:spcAft>
-                <a:spcPts val="800"/>
+                <a:spcPts val="400"/>
               </a:spcAft>
             </a:pPr>
             <a:r>
-              <a:rPr sz="2000" b="0" i="0">
-                <a:solidFill>
-                  <a:srgbClr val="333333"/>
-                </a:solidFill>
-                <a:latin typeface="Calibri"/>
-              </a:rPr>
-              <a:t>–   Una clave sustituta, o surrogate, es un numero sin significado de negocio que la base genera: id_dueno 1, 2, 3.</a:t>
+              <a:rPr sz="1400" b="0" i="0">
+                <a:solidFill>
+                  <a:srgbClr val="FFFFFF"/>
+                </a:solidFill>
+                <a:latin typeface="Calibri"/>
+              </a:rPr>
+              <a:t>  nombre VARCHAR(80) NOT NULL,</a:t>
             </a:r>
           </a:p>
           <a:p>
             <a:pPr>
               <a:spcAft>
-                <a:spcPts val="800"/>
+                <a:spcPts val="400"/>
               </a:spcAft>
             </a:pPr>
             <a:r>
-              <a:rPr sz="2000" b="0" i="0">
-                <a:solidFill>
-                  <a:srgbClr val="333333"/>
-                </a:solidFill>
-                <a:latin typeface="Calibri"/>
-              </a:rPr>
-              <a:t>–   En VetCare pasan las tres cosas: el dueno llega sin cedula a la mano, un microchip se digita mal y hay que corregirlo, y una mascota rescatada no tiene microchip.</a:t>
+              <a:rPr sz="1400" b="0" i="0">
+                <a:solidFill>
+                  <a:srgbClr val="FFFFFF"/>
+                </a:solidFill>
+                <a:latin typeface="Calibri"/>
+              </a:rPr>
+              <a:t>  telefono VARCHAR(30),</a:t>
             </a:r>
           </a:p>
           <a:p>
             <a:pPr>
               <a:spcAft>
-                <a:spcPts val="800"/>
+                <a:spcPts val="400"/>
               </a:spcAft>
             </a:pPr>
             <a:r>
-              <a:rPr sz="2000" b="0" i="0">
-                <a:solidFill>
-                  <a:srgbClr val="333333"/>
-                </a:solidFill>
-                <a:latin typeface="Calibri"/>
-              </a:rPr>
-              <a:t>–   Regla citable, y es convencion de oficio, no regla dura: si el valor lo controla un tercero, el Estado o un fabricante, no lo use como clave primaria.</a:t>
-            </a:r>
-          </a:p>
-        </p:txBody>
-      </p:sp>
-      <p:sp>
-        <p:nvSpPr>
-          <p:cNvPr id="6" name="TextBox 5"/>
+              <a:rPr sz="1400" b="0" i="0">
+                <a:solidFill>
+                  <a:srgbClr val="FFFFFF"/>
+                </a:solidFill>
+                <a:latin typeface="Calibri"/>
+              </a:rPr>
+              <a:t>  email VARCHAR(120)</a:t>
+            </a:r>
+          </a:p>
+          <a:p>
+            <a:pPr>
+              <a:spcAft>
+                <a:spcPts val="400"/>
+              </a:spcAft>
+            </a:pPr>
+            <a:r>
+              <a:rPr sz="1400" b="0" i="0">
+                <a:solidFill>
+                  <a:srgbClr val="FFFFFF"/>
+                </a:solidFill>
+                <a:latin typeface="Calibri"/>
+              </a:rPr>
+              <a:t>);</a:t>
+            </a:r>
+          </a:p>
+        </p:txBody>
+      </p:sp>
+      <p:sp>
+        <p:nvSpPr>
+          <p:cNvPr id="9" name="TextBox 8"/>
           <p:cNvSpPr txBox="1"/>
           <p:nvPr/>
         </p:nvSpPr>
@@ -5336,141 +5466,21 @@
                 </a:solidFill>
                 <a:latin typeface="Calibri"/>
               </a:rPr>
-              <a:t>Clave primaria: natural o sustituta — sintaxis</a:t>
-            </a:r>
-          </a:p>
-        </p:txBody>
-      </p:sp>
-      <p:sp>
-        <p:nvSpPr>
-          <p:cNvPr id="5" name="Rounded Rectangle 4"/>
-          <p:cNvSpPr/>
-          <p:nvPr/>
-        </p:nvSpPr>
-        <p:spPr>
-          <a:xfrm>
-            <a:off x="457200" y="1261872"/>
-            <a:ext cx="11277295" cy="5093208"/>
-          </a:xfrm>
-          <a:prstGeom prst="roundRect">
-            <a:avLst>
-              <a:gd name="adj" fmla="val 12000"/>
-            </a:avLst>
-          </a:prstGeom>
-          <a:solidFill>
-            <a:srgbClr val="1E2A38"/>
-          </a:solidFill>
-          <a:ln>
-            <a:noFill/>
-          </a:ln>
-        </p:spPr>
-        <p:style>
-          <a:lnRef idx="1">
-            <a:schemeClr val="accent1"/>
-          </a:lnRef>
-          <a:fillRef idx="3">
-            <a:schemeClr val="accent1"/>
-          </a:fillRef>
-          <a:effectRef idx="2">
-            <a:schemeClr val="accent1"/>
-          </a:effectRef>
-          <a:fontRef idx="minor">
-            <a:schemeClr val="lt1"/>
-          </a:fontRef>
-        </p:style>
-        <p:txBody>
-          <a:bodyPr rtlCol="0" anchor="ctr"/>
-          <a:lstStyle/>
-          <a:p>
-            <a:pPr algn="ctr"/>
-          </a:p>
-        </p:txBody>
-      </p:sp>
-      <p:sp>
-        <p:nvSpPr>
-          <p:cNvPr id="6" name="Rectangle 5"/>
-          <p:cNvSpPr/>
-          <p:nvPr/>
-        </p:nvSpPr>
-        <p:spPr>
-          <a:xfrm>
-            <a:off x="457200" y="1261872"/>
-            <a:ext cx="11277295" cy="320040"/>
-          </a:xfrm>
-          <a:prstGeom prst="rect">
-            <a:avLst/>
-          </a:prstGeom>
-          <a:solidFill>
-            <a:srgbClr val="095292"/>
-          </a:solidFill>
-          <a:ln>
-            <a:noFill/>
-          </a:ln>
-        </p:spPr>
-        <p:style>
-          <a:lnRef idx="1">
-            <a:schemeClr val="accent1"/>
-          </a:lnRef>
-          <a:fillRef idx="3">
-            <a:schemeClr val="accent1"/>
-          </a:fillRef>
-          <a:effectRef idx="2">
-            <a:schemeClr val="accent1"/>
-          </a:effectRef>
-          <a:fontRef idx="minor">
-            <a:schemeClr val="lt1"/>
-          </a:fontRef>
-        </p:style>
-        <p:txBody>
-          <a:bodyPr rtlCol="0" anchor="ctr"/>
-          <a:lstStyle/>
-          <a:p>
-            <a:pPr algn="ctr"/>
-          </a:p>
-        </p:txBody>
-      </p:sp>
-      <p:sp>
-        <p:nvSpPr>
-          <p:cNvPr id="7" name="TextBox 6"/>
+              <a:t>Normalizacion 1FN-3FN: primero la enfermedad (1/2)</a:t>
+            </a:r>
+          </a:p>
+        </p:txBody>
+      </p:sp>
+      <p:sp>
+        <p:nvSpPr>
+          <p:cNvPr id="5" name="TextBox 4"/>
           <p:cNvSpPr txBox="1"/>
           <p:nvPr/>
         </p:nvSpPr>
         <p:spPr>
           <a:xfrm>
-            <a:off x="685800" y="1307592"/>
-            <a:ext cx="10820095" cy="256032"/>
-          </a:xfrm>
-          <a:prstGeom prst="rect">
-            <a:avLst/>
-          </a:prstGeom>
-          <a:noFill/>
-        </p:spPr>
-        <p:txBody>
-          <a:bodyPr wrap="square" anchor="ctr"/>
-          <a:lstStyle/>
-          <a:p>
-            <a:r>
-              <a:rPr sz="1000" b="1" i="0">
-                <a:solidFill>
-                  <a:srgbClr val="269CCB"/>
-                </a:solidFill>
-                <a:latin typeface="Calibri"/>
-              </a:rPr>
-              <a:t>● ● ●</a:t>
-            </a:r>
-          </a:p>
-        </p:txBody>
-      </p:sp>
-      <p:sp>
-        <p:nvSpPr>
-          <p:cNvPr id="8" name="TextBox 7"/>
-          <p:cNvSpPr txBox="1"/>
-          <p:nvPr/>
-        </p:nvSpPr>
-        <p:spPr>
-          <a:xfrm>
-            <a:off x="777240" y="1719072"/>
-            <a:ext cx="10637215" cy="4453128"/>
+            <a:off x="457200" y="1170432"/>
+            <a:ext cx="11277295" cy="5230368"/>
           </a:xfrm>
           <a:prstGeom prst="rect">
             <a:avLst/>
@@ -5485,120 +5495,104 @@
           <a:p>
             <a:pPr>
               <a:spcAft>
-                <a:spcPts val="400"/>
+                <a:spcPts val="800"/>
               </a:spcAft>
             </a:pPr>
             <a:r>
-              <a:rPr sz="1400" b="0" i="0">
-                <a:solidFill>
-                  <a:srgbClr val="FFFFFF"/>
-                </a:solidFill>
-                <a:latin typeface="Calibri"/>
-              </a:rPr>
-              <a:t>CREATE TABLE dueno (</a:t>
+              <a:rPr sz="2000" b="0" i="0">
+                <a:solidFill>
+                  <a:srgbClr val="333333"/>
+                </a:solidFill>
+                <a:latin typeface="Calibri"/>
+              </a:rPr>
+              <a:t>–   La normalizacion se dicta mejor al reves de como se suele dictar: primero la enfermedad.</a:t>
             </a:r>
           </a:p>
           <a:p>
             <a:pPr>
               <a:spcAft>
-                <a:spcPts val="400"/>
+                <a:spcPts val="800"/>
               </a:spcAft>
             </a:pPr>
             <a:r>
-              <a:rPr sz="1400" b="0" i="0">
-                <a:solidFill>
-                  <a:srgbClr val="FFFFFF"/>
-                </a:solidFill>
-                <a:latin typeface="Calibri"/>
-              </a:rPr>
-              <a:t>  id_dueno INT PRIMARY KEY,</a:t>
+              <a:rPr sz="2000" b="0" i="0">
+                <a:solidFill>
+                  <a:srgbClr val="333333"/>
+                </a:solidFill>
+                <a:latin typeface="Calibri"/>
+              </a:rPr>
+              <a:t>–   De actualizacion: cuando Ana Perez cambia de telefono hay que actualizar todas sus citas, y si una queda sin actualizar la base contiene dos verdades contradictorias.</a:t>
             </a:r>
           </a:p>
           <a:p>
             <a:pPr>
               <a:spcAft>
-                <a:spcPts val="400"/>
+                <a:spcPts val="800"/>
               </a:spcAft>
             </a:pPr>
             <a:r>
-              <a:rPr sz="1400" b="0" i="0">
-                <a:solidFill>
-                  <a:srgbClr val="FFFFFF"/>
-                </a:solidFill>
-                <a:latin typeface="Calibri"/>
-              </a:rPr>
-              <a:t>  cedula VARCHAR(20) UNIQUE,</a:t>
+              <a:rPr sz="2000" b="0" i="0">
+                <a:solidFill>
+                  <a:srgbClr val="333333"/>
+                </a:solidFill>
+                <a:latin typeface="Calibri"/>
+              </a:rPr>
+              <a:t>–   De insercion: no se puede registrar un dueno nuevo hasta que tenga una cita, porque el dato solo vive en cita.</a:t>
             </a:r>
           </a:p>
           <a:p>
             <a:pPr>
               <a:spcAft>
-                <a:spcPts val="400"/>
+                <a:spcPts val="800"/>
               </a:spcAft>
             </a:pPr>
             <a:r>
-              <a:rPr sz="1400" b="0" i="0">
-                <a:solidFill>
-                  <a:srgbClr val="FFFFFF"/>
-                </a:solidFill>
-                <a:latin typeface="Calibri"/>
-              </a:rPr>
-              <a:t>  nombre VARCHAR(80) NOT NULL,</a:t>
+              <a:rPr sz="2000" b="0" i="0">
+                <a:solidFill>
+                  <a:srgbClr val="333333"/>
+                </a:solidFill>
+                <a:latin typeface="Calibri"/>
+              </a:rPr>
+              <a:t>–   De borrado: al eliminar la ultima cita desaparece el telefono.</a:t>
             </a:r>
           </a:p>
           <a:p>
             <a:pPr>
               <a:spcAft>
-                <a:spcPts val="400"/>
+                <a:spcPts val="800"/>
               </a:spcAft>
             </a:pPr>
             <a:r>
-              <a:rPr sz="1400" b="0" i="0">
-                <a:solidFill>
-                  <a:srgbClr val="FFFFFF"/>
-                </a:solidFill>
-                <a:latin typeface="Calibri"/>
-              </a:rPr>
-              <a:t>  telefono VARCHAR(30),</a:t>
+              <a:rPr sz="2000" b="0" i="0">
+                <a:solidFill>
+                  <a:srgbClr val="333333"/>
+                </a:solidFill>
+                <a:latin typeface="Calibri"/>
+              </a:rPr>
+              <a:t>–   Primera: nada de listas en una celda; guardar 3001112233 y 3159998877 juntos obliga a buscar con SUBSTR, no se puede indexar y no se sabe cual esta vigente, luego se crea telefono_dueno.</a:t>
             </a:r>
           </a:p>
           <a:p>
             <a:pPr>
               <a:spcAft>
-                <a:spcPts val="400"/>
+                <a:spcPts val="800"/>
               </a:spcAft>
             </a:pPr>
             <a:r>
-              <a:rPr sz="1400" b="0" i="0">
-                <a:solidFill>
-                  <a:srgbClr val="FFFFFF"/>
-                </a:solidFill>
-                <a:latin typeface="Calibri"/>
-              </a:rPr>
-              <a:t>  email VARCHAR(120)</a:t>
-            </a:r>
-          </a:p>
-          <a:p>
-            <a:pPr>
-              <a:spcAft>
-                <a:spcPts val="400"/>
-              </a:spcAft>
-            </a:pPr>
-            <a:r>
-              <a:rPr sz="1400" b="0" i="0">
-                <a:solidFill>
-                  <a:srgbClr val="FFFFFF"/>
-                </a:solidFill>
-                <a:latin typeface="Calibri"/>
-              </a:rPr>
-              <a:t>);</a:t>
-            </a:r>
-          </a:p>
-        </p:txBody>
-      </p:sp>
-      <p:sp>
-        <p:nvSpPr>
-          <p:cNvPr id="9" name="TextBox 8"/>
+              <a:rPr sz="2000" b="0" i="0">
+                <a:solidFill>
+                  <a:srgbClr val="333333"/>
+                </a:solidFill>
+                <a:latin typeface="Calibri"/>
+              </a:rPr>
+              <a:t>–   Segunda: en detalle_factura, con clave compuesta (id_factura, id_insumo), un atributo como nombre_insumo depende solo de id_insumo y sale hacia insumo; en cambio precio_unitario se queda</a:t>
+            </a:r>
+          </a:p>
+        </p:txBody>
+      </p:sp>
+      <p:sp>
+        <p:nvSpPr>
+          <p:cNvPr id="6" name="TextBox 5"/>
           <p:cNvSpPr txBox="1"/>
           <p:nvPr/>
         </p:nvSpPr>
@@ -5772,7 +5766,7 @@
                 </a:solidFill>
                 <a:latin typeface="Calibri"/>
               </a:rPr>
-              <a:t>Normalizacion 1FN-3FN: primero la enfermedad (1/2)</a:t>
+              <a:t>Normalizacion 1FN-3FN: primero la enfermedad (2/2)</a:t>
             </a:r>
           </a:p>
         </p:txBody>
@@ -5811,7 +5805,7 @@
                 </a:solidFill>
                 <a:latin typeface="Calibri"/>
               </a:rPr>
-              <a:t>–   La normalizacion se dicta mejor al reves de como se suele dictar: primero la enfermedad.</a:t>
+              <a:t>–   Y este matiz separa a quien entendio de quien memorizo, porque no es redundancia sino el precio historico del momento de la venta: si el total se recalcula con el precio actual, reimprimir una factura de hace seis meses da otra cifra.</a:t>
             </a:r>
           </a:p>
           <a:p>
@@ -5827,7 +5821,7 @@
                 </a:solidFill>
                 <a:latin typeface="Calibri"/>
               </a:rPr>
-              <a:t>–   De actualizacion: cuando Ana Perez cambia de telefono hay que actualizar todas sus citas, y si una queda sin actualizar la base contiene dos verdades contradictorias.</a:t>
+              <a:t>–   Tercera: si cita guardara especialidad_veterinario, ese atributo depende de id_veterinario y no de id_cita, luego sale hacia veterinario.</a:t>
             </a:r>
           </a:p>
           <a:p>
@@ -5843,7 +5837,7 @@
                 </a:solidFill>
                 <a:latin typeface="Calibri"/>
               </a:rPr>
-              <a:t>–   De insercion: no se puede registrar un dueno nuevo hasta que tenga una cita, porque el dato solo vive en cita.</a:t>
+              <a:t>–   La tercera forma normal es el punto de parada practico en casi todo sistema transaccional</a:t>
             </a:r>
           </a:p>
           <a:p>
@@ -5859,39 +5853,7 @@
                 </a:solidFill>
                 <a:latin typeface="Calibri"/>
               </a:rPr>
-              <a:t>–   De borrado: al eliminar la ultima cita desaparece el telefono.</a:t>
-            </a:r>
-          </a:p>
-          <a:p>
-            <a:pPr>
-              <a:spcAft>
-                <a:spcPts val="800"/>
-              </a:spcAft>
-            </a:pPr>
-            <a:r>
-              <a:rPr sz="2000" b="0" i="0">
-                <a:solidFill>
-                  <a:srgbClr val="333333"/>
-                </a:solidFill>
-                <a:latin typeface="Calibri"/>
-              </a:rPr>
-              <a:t>–   Primera: nada de listas en una celda; guardar 3001112233 y 3159998877 juntos obliga a buscar con SUBSTR, no se puede indexar y no se sabe cual esta vigente, luego se crea telefono_dueno.</a:t>
-            </a:r>
-          </a:p>
-          <a:p>
-            <a:pPr>
-              <a:spcAft>
-                <a:spcPts val="800"/>
-              </a:spcAft>
-            </a:pPr>
-            <a:r>
-              <a:rPr sz="2000" b="0" i="0">
-                <a:solidFill>
-                  <a:srgbClr val="333333"/>
-                </a:solidFill>
-                <a:latin typeface="Calibri"/>
-              </a:rPr>
-              <a:t>–   Segunda: en detalle_factura, con clave compuesta (id_factura, id_insumo), un atributo como nombre_insumo depende solo de id_insumo y sale hacia insumo; en cambio precio_unitario se queda</a:t>
+              <a:t>–   Y eso es convencion; se rompe a proposito cuando conviene, por ejemplo guardando el total ya calculado en factura, decision que se sostiene con un disparador de la Clase 4 y se justifica con planes de ejecucion en las Clases 6 y 7.</a:t>
             </a:r>
           </a:p>
         </p:txBody>
@@ -6072,7 +6034,7 @@
                 </a:solidFill>
                 <a:latin typeface="Calibri"/>
               </a:rPr>
-              <a:t>Normalizacion 1FN-3FN: primero la enfermedad (2/2)</a:t>
+              <a:t>Clave foranea, borrado y por que la FK no basta (1/2)</a:t>
             </a:r>
           </a:p>
         </p:txBody>
@@ -6111,7 +6073,7 @@
                 </a:solidFill>
                 <a:latin typeface="Calibri"/>
               </a:rPr>
-              <a:t>–   Y este matiz separa a quien entendio de quien memorizo, porque no es redundancia sino el precio historico del momento de la venta: si el total se recalcula con el precio actual, reimprimir una factura de hace seis meses da otra cifra.</a:t>
+              <a:t>–   La clave foranea apunta a la clave primaria de otra tabla y su efecto practico es que el motor se niega a guardar una referencia inventada.</a:t>
             </a:r>
           </a:p>
           <a:p>
@@ -6127,7 +6089,7 @@
                 </a:solidFill>
                 <a:latin typeface="Calibri"/>
               </a:rPr>
-              <a:t>–   Tercera: si cita guardara especialidad_veterinario, ese atributo depende de id_veterinario y no de id_cita, luego sale hacia veterinario.</a:t>
+              <a:t>–   Si se intenta y la mascota 999 no existe, la sentencia falla y nombra la restriccion violada: eso es integridad referencial.</a:t>
             </a:r>
           </a:p>
           <a:p>
@@ -6143,7 +6105,7 @@
                 </a:solidFill>
                 <a:latin typeface="Calibri"/>
               </a:rPr>
-              <a:t>–   La tercera forma normal es el punto de parada practico en casi todo sistema transaccional</a:t>
+              <a:t>–   Si no se especifica nada, Oracle y PostgreSQL asumen el comportamiento restrictivo, y esa es regla dura del estandar, no convencion.</a:t>
             </a:r>
           </a:p>
           <a:p>
@@ -6159,7 +6121,23 @@
                 </a:solidFill>
                 <a:latin typeface="Calibri"/>
               </a:rPr>
-              <a:t>–   Y eso es convencion; se rompe a proposito cuando conviene, por ejemplo guardando el total ya calculado en factura, decision que se sostiene con un disparador de la Clase 4 y se justifica con planes de ejecucion en las Clases 6 y 7.</a:t>
+              <a:t>–   En la clínica se decide entidad por entidad: mascota hacia dueno restrictivo, porque borrar un dueno no debe evaporar el historial clinico; consulta hacia cita restrictivo</a:t>
+            </a:r>
+          </a:p>
+          <a:p>
+            <a:pPr>
+              <a:spcAft>
+                <a:spcPts val="800"/>
+              </a:spcAft>
+            </a:pPr>
+            <a:r>
+              <a:rPr sz="2000" b="0" i="0">
+                <a:solidFill>
+                  <a:srgbClr val="333333"/>
+                </a:solidFill>
+                <a:latin typeface="Calibri"/>
+              </a:rPr>
+              <a:t>–   Porque la consulta es el registro medico; detalle_factura hacia factura en cascada, porque una linea de detalle no significa nada sin su factura; detalle_factura hacia insumo restrictivo, porque no se puede borrar un insumo ya facturado.</a:t>
             </a:r>
           </a:p>
         </p:txBody>
@@ -6340,7 +6318,7 @@
                 </a:solidFill>
                 <a:latin typeface="Calibri"/>
               </a:rPr>
-              <a:t>Clave foranea, borrado y por que la FK no basta (1/2)</a:t>
+              <a:t>Clave foranea, borrado y por que la FK no basta (2/2)</a:t>
             </a:r>
           </a:p>
         </p:txBody>
@@ -6379,7 +6357,7 @@
                 </a:solidFill>
                 <a:latin typeface="Calibri"/>
               </a:rPr>
-              <a:t>–   La clave foranea apunta a la clave primaria de otra tabla y su efecto practico es que el motor se niega a guardar una referencia inventada.</a:t>
+              <a:t>–   La conclusion honesta es que en produccion casi nada se borra: se marca inactivo con activa CHAR(1) DEFAULT 'S' CHECK (activa IN ('S','N')).</a:t>
             </a:r>
           </a:p>
           <a:p>
@@ -6395,7 +6373,7 @@
                 </a:solidFill>
                 <a:latin typeface="Calibri"/>
               </a:rPr>
-              <a:t>–   Si se intenta y la mascota 999 no existe, la sentencia falla y nombra la restriccion violada: eso es integridad referencial.</a:t>
+              <a:t>–   La accion ante el borrado del padre se declara en la propia FK: ON DELETE RESTRICT, o NO ACTION, que es la opcion por omision, impide borrar un dueno con mascotas</a:t>
             </a:r>
           </a:p>
           <a:p>
@@ -6411,7 +6389,7 @@
                 </a:solidFill>
                 <a:latin typeface="Calibri"/>
               </a:rPr>
-              <a:t>–   Si no se especifica nada, Oracle y PostgreSQL asumen el comportamiento restrictivo, y esa es regla dura del estandar, no convencion.</a:t>
+              <a:t>–   ON DELETE CASCADE borraria tambien sus mascotas y citas, que en una clinica es perder historia clinica</a:t>
             </a:r>
           </a:p>
           <a:p>
@@ -6427,23 +6405,7 @@
                 </a:solidFill>
                 <a:latin typeface="Calibri"/>
               </a:rPr>
-              <a:t>–   En VetCare se decide entidad por entidad: mascota hacia dueno restrictivo, porque borrar un dueno no debe evaporar el historial clinico; consulta hacia cita restrictivo</a:t>
-            </a:r>
-          </a:p>
-          <a:p>
-            <a:pPr>
-              <a:spcAft>
-                <a:spcPts val="800"/>
-              </a:spcAft>
-            </a:pPr>
-            <a:r>
-              <a:rPr sz="2000" b="0" i="0">
-                <a:solidFill>
-                  <a:srgbClr val="333333"/>
-                </a:solidFill>
-                <a:latin typeface="Calibri"/>
-              </a:rPr>
-              <a:t>–   Porque la consulta es el registro medico; detalle_factura hacia factura en cascada, porque una linea de detalle no significa nada sin su factura; detalle_factura hacia insumo restrictivo, porque no se puede borrar un insumo ya facturado.</a:t>
+              <a:t>–   En la clínica la eleccion razonable es RESTRICT mas baja logica.</a:t>
             </a:r>
           </a:p>
         </p:txBody>
@@ -6624,21 +6586,141 @@
                 </a:solidFill>
                 <a:latin typeface="Calibri"/>
               </a:rPr>
-              <a:t>Clave foranea, borrado y por que la FK no basta (2/2)</a:t>
-            </a:r>
-          </a:p>
-        </p:txBody>
-      </p:sp>
-      <p:sp>
-        <p:nvSpPr>
-          <p:cNvPr id="5" name="TextBox 4"/>
+              <a:t>Clave foranea, borrado y por que la FK no... — sintaxis</a:t>
+            </a:r>
+          </a:p>
+        </p:txBody>
+      </p:sp>
+      <p:sp>
+        <p:nvSpPr>
+          <p:cNvPr id="5" name="Rounded Rectangle 4"/>
+          <p:cNvSpPr/>
+          <p:nvPr/>
+        </p:nvSpPr>
+        <p:spPr>
+          <a:xfrm>
+            <a:off x="457200" y="1261872"/>
+            <a:ext cx="11277295" cy="5093208"/>
+          </a:xfrm>
+          <a:prstGeom prst="roundRect">
+            <a:avLst>
+              <a:gd name="adj" fmla="val 12000"/>
+            </a:avLst>
+          </a:prstGeom>
+          <a:solidFill>
+            <a:srgbClr val="1E2A38"/>
+          </a:solidFill>
+          <a:ln>
+            <a:noFill/>
+          </a:ln>
+        </p:spPr>
+        <p:style>
+          <a:lnRef idx="1">
+            <a:schemeClr val="accent1"/>
+          </a:lnRef>
+          <a:fillRef idx="3">
+            <a:schemeClr val="accent1"/>
+          </a:fillRef>
+          <a:effectRef idx="2">
+            <a:schemeClr val="accent1"/>
+          </a:effectRef>
+          <a:fontRef idx="minor">
+            <a:schemeClr val="lt1"/>
+          </a:fontRef>
+        </p:style>
+        <p:txBody>
+          <a:bodyPr rtlCol="0" anchor="ctr"/>
+          <a:lstStyle/>
+          <a:p>
+            <a:pPr algn="ctr"/>
+          </a:p>
+        </p:txBody>
+      </p:sp>
+      <p:sp>
+        <p:nvSpPr>
+          <p:cNvPr id="6" name="Rectangle 5"/>
+          <p:cNvSpPr/>
+          <p:nvPr/>
+        </p:nvSpPr>
+        <p:spPr>
+          <a:xfrm>
+            <a:off x="457200" y="1261872"/>
+            <a:ext cx="11277295" cy="320040"/>
+          </a:xfrm>
+          <a:prstGeom prst="rect">
+            <a:avLst/>
+          </a:prstGeom>
+          <a:solidFill>
+            <a:srgbClr val="095292"/>
+          </a:solidFill>
+          <a:ln>
+            <a:noFill/>
+          </a:ln>
+        </p:spPr>
+        <p:style>
+          <a:lnRef idx="1">
+            <a:schemeClr val="accent1"/>
+          </a:lnRef>
+          <a:fillRef idx="3">
+            <a:schemeClr val="accent1"/>
+          </a:fillRef>
+          <a:effectRef idx="2">
+            <a:schemeClr val="accent1"/>
+          </a:effectRef>
+          <a:fontRef idx="minor">
+            <a:schemeClr val="lt1"/>
+          </a:fontRef>
+        </p:style>
+        <p:txBody>
+          <a:bodyPr rtlCol="0" anchor="ctr"/>
+          <a:lstStyle/>
+          <a:p>
+            <a:pPr algn="ctr"/>
+          </a:p>
+        </p:txBody>
+      </p:sp>
+      <p:sp>
+        <p:nvSpPr>
+          <p:cNvPr id="7" name="TextBox 6"/>
           <p:cNvSpPr txBox="1"/>
           <p:nvPr/>
         </p:nvSpPr>
         <p:spPr>
           <a:xfrm>
-            <a:off x="457200" y="1170432"/>
-            <a:ext cx="11277295" cy="5230368"/>
+            <a:off x="685800" y="1307592"/>
+            <a:ext cx="10820095" cy="256032"/>
+          </a:xfrm>
+          <a:prstGeom prst="rect">
+            <a:avLst/>
+          </a:prstGeom>
+          <a:noFill/>
+        </p:spPr>
+        <p:txBody>
+          <a:bodyPr wrap="square" anchor="ctr"/>
+          <a:lstStyle/>
+          <a:p>
+            <a:r>
+              <a:rPr sz="1000" b="1" i="0">
+                <a:solidFill>
+                  <a:srgbClr val="269CCB"/>
+                </a:solidFill>
+                <a:latin typeface="Calibri"/>
+              </a:rPr>
+              <a:t>● ● ●</a:t>
+            </a:r>
+          </a:p>
+        </p:txBody>
+      </p:sp>
+      <p:sp>
+        <p:nvSpPr>
+          <p:cNvPr id="8" name="TextBox 7"/>
+          <p:cNvSpPr txBox="1"/>
+          <p:nvPr/>
+        </p:nvSpPr>
+        <p:spPr>
+          <a:xfrm>
+            <a:off x="777240" y="1719072"/>
+            <a:ext cx="10637215" cy="4453128"/>
           </a:xfrm>
           <a:prstGeom prst="rect">
             <a:avLst/>
@@ -6653,72 +6735,40 @@
           <a:p>
             <a:pPr>
               <a:spcAft>
-                <a:spcPts val="800"/>
+                <a:spcPts val="400"/>
               </a:spcAft>
             </a:pPr>
             <a:r>
-              <a:rPr sz="2000" b="0" i="0">
-                <a:solidFill>
-                  <a:srgbClr val="333333"/>
-                </a:solidFill>
-                <a:latin typeface="Calibri"/>
-              </a:rPr>
-              <a:t>–   La conclusion honesta es que en produccion casi nada se borra: se marca inactivo con activa CHAR(1) DEFAULT 'S' CHECK (activa IN ('S','N')).</a:t>
+              <a:rPr sz="1400" b="0" i="0">
+                <a:solidFill>
+                  <a:srgbClr val="FFFFFF"/>
+                </a:solidFill>
+                <a:latin typeface="Calibri"/>
+              </a:rPr>
+              <a:t>INSERT INTO cita (id_cita, id_mascota, fecha_hora, estado)</a:t>
             </a:r>
           </a:p>
           <a:p>
             <a:pPr>
               <a:spcAft>
-                <a:spcPts val="800"/>
+                <a:spcPts val="400"/>
               </a:spcAft>
             </a:pPr>
             <a:r>
-              <a:rPr sz="2000" b="0" i="0">
-                <a:solidFill>
-                  <a:srgbClr val="333333"/>
-                </a:solidFill>
-                <a:latin typeface="Calibri"/>
-              </a:rPr>
-              <a:t>–   La accion ante el borrado del padre se declara en la propia FK: ON DELETE RESTRICT, o NO ACTION, que es la opcion por omision, impide borrar un dueno con mascotas</a:t>
-            </a:r>
-          </a:p>
-          <a:p>
-            <a:pPr>
-              <a:spcAft>
-                <a:spcPts val="800"/>
-              </a:spcAft>
-            </a:pPr>
-            <a:r>
-              <a:rPr sz="2000" b="0" i="0">
-                <a:solidFill>
-                  <a:srgbClr val="333333"/>
-                </a:solidFill>
-                <a:latin typeface="Calibri"/>
-              </a:rPr>
-              <a:t>–   ON DELETE CASCADE borraria tambien sus mascotas y citas, que en una clinica es perder historia clinica</a:t>
-            </a:r>
-          </a:p>
-          <a:p>
-            <a:pPr>
-              <a:spcAft>
-                <a:spcPts val="800"/>
-              </a:spcAft>
-            </a:pPr>
-            <a:r>
-              <a:rPr sz="2000" b="0" i="0">
-                <a:solidFill>
-                  <a:srgbClr val="333333"/>
-                </a:solidFill>
-                <a:latin typeface="Calibri"/>
-              </a:rPr>
-              <a:t>–   En VetCare la eleccion razonable es RESTRICT mas baja logica.</a:t>
-            </a:r>
-          </a:p>
-        </p:txBody>
-      </p:sp>
-      <p:sp>
-        <p:nvSpPr>
-          <p:cNvPr id="6" name="TextBox 5"/>
+              <a:rPr sz="1400" b="0" i="0">
+                <a:solidFill>
+                  <a:srgbClr val="FFFFFF"/>
+                </a:solidFill>
+                <a:latin typeface="Calibri"/>
+              </a:rPr>
+              <a:t>VALUES (101, 999, TIMESTAMP '2026-09-01 09:00:00', 'PROGRAMADA')</a:t>
+            </a:r>
+          </a:p>
+        </p:txBody>
+      </p:sp>
+      <p:sp>
+        <p:nvSpPr>
+          <p:cNvPr id="9" name="TextBox 8"/>
           <p:cNvSpPr txBox="1"/>
           <p:nvPr/>
         </p:nvSpPr>
@@ -6892,141 +6942,21 @@
                 </a:solidFill>
                 <a:latin typeface="Calibri"/>
               </a:rPr>
-              <a:t>Clave foranea, borrado y por que la FK no... — sintaxis</a:t>
-            </a:r>
-          </a:p>
-        </p:txBody>
-      </p:sp>
-      <p:sp>
-        <p:nvSpPr>
-          <p:cNvPr id="5" name="Rounded Rectangle 4"/>
-          <p:cNvSpPr/>
-          <p:nvPr/>
-        </p:nvSpPr>
-        <p:spPr>
-          <a:xfrm>
-            <a:off x="457200" y="1261872"/>
-            <a:ext cx="11277295" cy="5093208"/>
-          </a:xfrm>
-          <a:prstGeom prst="roundRect">
-            <a:avLst>
-              <a:gd name="adj" fmla="val 12000"/>
-            </a:avLst>
-          </a:prstGeom>
-          <a:solidFill>
-            <a:srgbClr val="1E2A38"/>
-          </a:solidFill>
-          <a:ln>
-            <a:noFill/>
-          </a:ln>
-        </p:spPr>
-        <p:style>
-          <a:lnRef idx="1">
-            <a:schemeClr val="accent1"/>
-          </a:lnRef>
-          <a:fillRef idx="3">
-            <a:schemeClr val="accent1"/>
-          </a:fillRef>
-          <a:effectRef idx="2">
-            <a:schemeClr val="accent1"/>
-          </a:effectRef>
-          <a:fontRef idx="minor">
-            <a:schemeClr val="lt1"/>
-          </a:fontRef>
-        </p:style>
-        <p:txBody>
-          <a:bodyPr rtlCol="0" anchor="ctr"/>
-          <a:lstStyle/>
-          <a:p>
-            <a:pPr algn="ctr"/>
-          </a:p>
-        </p:txBody>
-      </p:sp>
-      <p:sp>
-        <p:nvSpPr>
-          <p:cNvPr id="6" name="Rectangle 5"/>
-          <p:cNvSpPr/>
-          <p:nvPr/>
-        </p:nvSpPr>
-        <p:spPr>
-          <a:xfrm>
-            <a:off x="457200" y="1261872"/>
-            <a:ext cx="11277295" cy="320040"/>
-          </a:xfrm>
-          <a:prstGeom prst="rect">
-            <a:avLst/>
-          </a:prstGeom>
-          <a:solidFill>
-            <a:srgbClr val="095292"/>
-          </a:solidFill>
-          <a:ln>
-            <a:noFill/>
-          </a:ln>
-        </p:spPr>
-        <p:style>
-          <a:lnRef idx="1">
-            <a:schemeClr val="accent1"/>
-          </a:lnRef>
-          <a:fillRef idx="3">
-            <a:schemeClr val="accent1"/>
-          </a:fillRef>
-          <a:effectRef idx="2">
-            <a:schemeClr val="accent1"/>
-          </a:effectRef>
-          <a:fontRef idx="minor">
-            <a:schemeClr val="lt1"/>
-          </a:fontRef>
-        </p:style>
-        <p:txBody>
-          <a:bodyPr rtlCol="0" anchor="ctr"/>
-          <a:lstStyle/>
-          <a:p>
-            <a:pPr algn="ctr"/>
-          </a:p>
-        </p:txBody>
-      </p:sp>
-      <p:sp>
-        <p:nvSpPr>
-          <p:cNvPr id="7" name="TextBox 6"/>
+              <a:t>Baja logica: activa CHAR(1) en vez de DELETE</a:t>
+            </a:r>
+          </a:p>
+        </p:txBody>
+      </p:sp>
+      <p:sp>
+        <p:nvSpPr>
+          <p:cNvPr id="5" name="TextBox 4"/>
           <p:cNvSpPr txBox="1"/>
           <p:nvPr/>
         </p:nvSpPr>
         <p:spPr>
           <a:xfrm>
-            <a:off x="685800" y="1307592"/>
-            <a:ext cx="10820095" cy="256032"/>
-          </a:xfrm>
-          <a:prstGeom prst="rect">
-            <a:avLst/>
-          </a:prstGeom>
-          <a:noFill/>
-        </p:spPr>
-        <p:txBody>
-          <a:bodyPr wrap="square" anchor="ctr"/>
-          <a:lstStyle/>
-          <a:p>
-            <a:r>
-              <a:rPr sz="1000" b="1" i="0">
-                <a:solidFill>
-                  <a:srgbClr val="269CCB"/>
-                </a:solidFill>
-                <a:latin typeface="Calibri"/>
-              </a:rPr>
-              <a:t>● ● ●</a:t>
-            </a:r>
-          </a:p>
-        </p:txBody>
-      </p:sp>
-      <p:sp>
-        <p:nvSpPr>
-          <p:cNvPr id="8" name="TextBox 7"/>
-          <p:cNvSpPr txBox="1"/>
-          <p:nvPr/>
-        </p:nvSpPr>
-        <p:spPr>
-          <a:xfrm>
-            <a:off x="777240" y="1719072"/>
-            <a:ext cx="10637215" cy="4453128"/>
+            <a:off x="457200" y="1170432"/>
+            <a:ext cx="11277295" cy="5230368"/>
           </a:xfrm>
           <a:prstGeom prst="rect">
             <a:avLst/>
@@ -7041,40 +6971,72 @@
           <a:p>
             <a:pPr>
               <a:spcAft>
-                <a:spcPts val="400"/>
+                <a:spcPts val="800"/>
               </a:spcAft>
             </a:pPr>
             <a:r>
-              <a:rPr sz="1400" b="0" i="0">
-                <a:solidFill>
-                  <a:srgbClr val="FFFFFF"/>
-                </a:solidFill>
-                <a:latin typeface="Calibri"/>
-              </a:rPr>
-              <a:t>INSERT INTO cita (id_cita, id_mascota, fecha_hora, estado)</a:t>
+              <a:rPr sz="2000" b="0" i="0">
+                <a:solidFill>
+                  <a:srgbClr val="333333"/>
+                </a:solidFill>
+                <a:latin typeface="Calibri"/>
+              </a:rPr>
+              <a:t>–   En un sistema real no se borran clientes ni pacientes: no se hace DELETE FROM mascota.</a:t>
             </a:r>
           </a:p>
           <a:p>
             <a:pPr>
               <a:spcAft>
-                <a:spcPts val="400"/>
+                <a:spcPts val="800"/>
               </a:spcAft>
             </a:pPr>
             <a:r>
-              <a:rPr sz="1400" b="0" i="0">
-                <a:solidFill>
-                  <a:srgbClr val="FFFFFF"/>
-                </a:solidFill>
-                <a:latin typeface="Calibri"/>
-              </a:rPr>
-              <a:t>VALUES (101, 999, TIMESTAMP '2026-09-01 09:00:00', 'PROGRAMADA')</a:t>
-            </a:r>
-          </a:p>
-        </p:txBody>
-      </p:sp>
-      <p:sp>
-        <p:nvSpPr>
-          <p:cNvPr id="9" name="TextBox 8"/>
+              <a:rPr sz="2000" b="0" i="0">
+                <a:solidFill>
+                  <a:srgbClr val="333333"/>
+                </a:solidFill>
+                <a:latin typeface="Calibri"/>
+              </a:rPr>
+              <a:t>–   Primero por integridad, porque la fila esta referenciada por citas, consultas y facturas y el motor lo va a impedir; segundo por trazabilidad</a:t>
+            </a:r>
+          </a:p>
+          <a:p>
+            <a:pPr>
+              <a:spcAft>
+                <a:spcPts val="800"/>
+              </a:spcAft>
+            </a:pPr>
+            <a:r>
+              <a:rPr sz="2000" b="0" i="0">
+                <a:solidFill>
+                  <a:srgbClr val="333333"/>
+                </a:solidFill>
+                <a:latin typeface="Calibri"/>
+              </a:rPr>
+              <a:t>–   Porque el historial clinico y la facturacion de esa mascota tienen que seguir existiendo aunque la mascota ya no venga; y tercero porque un borrado es irreversible y una equivocacion de digitacion no deberia serlo.</a:t>
+            </a:r>
+          </a:p>
+          <a:p>
+            <a:pPr>
+              <a:spcAft>
+                <a:spcPts val="800"/>
+              </a:spcAft>
+            </a:pPr>
+            <a:r>
+              <a:rPr sz="2000" b="0" i="0">
+                <a:solidFill>
+                  <a:srgbClr val="333333"/>
+                </a:solidFill>
+                <a:latin typeface="Calibri"/>
+              </a:rPr>
+              <a:t>–   La regla vive en otra capa: un CHECK si solo mira columnas de la misma fila, un procedimiento almacenado si necesita consultar otra tabla (Clase 3), o un disparador si debe aplicarse aunque nadie llame al procedimiento (Clase 4).</a:t>
+            </a:r>
+          </a:p>
+        </p:txBody>
+      </p:sp>
+      <p:sp>
+        <p:nvSpPr>
+          <p:cNvPr id="6" name="TextBox 5"/>
           <p:cNvSpPr txBox="1"/>
           <p:nvPr/>
         </p:nvSpPr>
@@ -7248,7 +7210,7 @@
                 </a:solidFill>
                 <a:latin typeface="Calibri"/>
               </a:rPr>
-              <a:t>Baja logica: activa CHAR(1) en vez de DELETE</a:t>
+              <a:t>Que separa un diagrama ER de un dibujo (1/2)</a:t>
             </a:r>
           </a:p>
         </p:txBody>
@@ -7287,7 +7249,7 @@
                 </a:solidFill>
                 <a:latin typeface="Calibri"/>
               </a:rPr>
-              <a:t>–   En un sistema real no se borran clientes ni pacientes: no se hace DELETE FROM mascota.</a:t>
+              <a:t>–   Hace falta distinguir un diagrama entidad-relacion de un dibujo, porque es facil hacer lo segundo creyendo que es lo primero.</a:t>
             </a:r>
           </a:p>
           <a:p>
@@ -7303,7 +7265,7 @@
                 </a:solidFill>
                 <a:latin typeface="Calibri"/>
               </a:rPr>
-              <a:t>–   Primero por integridad, porque la fila esta referenciada por citas, consultas y facturas y el motor lo va a impedir; segundo por trazabilidad</a:t>
+              <a:t>–   Un dibujo son cajas con nombres unidas por lineas.</a:t>
             </a:r>
           </a:p>
           <a:p>
@@ -7319,7 +7281,7 @@
                 </a:solidFill>
                 <a:latin typeface="Calibri"/>
               </a:rPr>
-              <a:t>–   Porque el historial clinico y la facturacion de esa mascota tienen que seguir existiendo aunque la mascota ya no venga; y tercero porque un borrado es irreversible y una equivocacion de digitacion no deberia serlo.</a:t>
+              <a:t>–   Un diagrama bien hecho cumple cinco condiciones verificables: entidades en singular con su clave primaria marcada; cada atributo con tipo y longitud, no solo nombre</a:t>
             </a:r>
           </a:p>
           <a:p>
@@ -7335,7 +7297,23 @@
                 </a:solidFill>
                 <a:latin typeface="Calibri"/>
               </a:rPr>
-              <a:t>–   La regla vive en otra capa: un CHECK si solo mira columnas de la misma fila, un procedimiento almacenado si necesita consultar otra tabla (Clase 3), o un disparador si debe aplicarse aunque nadie llame al procedimiento (Clase 4).</a:t>
+              <a:t>–   Cada clave foranea senalada indicando a que entidad apunta; cada relacion con cardinalidad en los dos extremos, con maximo y minimo; y cada relacion con nombre verbal legible, Dueno posee Mascota, Veterinario atiende Cita.</a:t>
+            </a:r>
+          </a:p>
+          <a:p>
+            <a:pPr>
+              <a:spcAft>
+                <a:spcPts val="800"/>
+              </a:spcAft>
+            </a:pPr>
+            <a:r>
+              <a:rPr sz="2000" b="0" i="0">
+                <a:solidFill>
+                  <a:srgbClr val="333333"/>
+                </a:solidFill>
+                <a:latin typeface="Calibri"/>
+              </a:rPr>
+              <a:t>–   El criterio de aceptacion que conviene entregar es operativo: el diagrama esta bien si otra persona puede escribir el CREATE TABLE completo mirandolo, sin preguntar nada.</a:t>
             </a:r>
           </a:p>
         </p:txBody>
@@ -7516,7 +7494,7 @@
                 </a:solidFill>
                 <a:latin typeface="Calibri"/>
               </a:rPr>
-              <a:t>Que separa un diagrama ER de un dibujo (1/2)</a:t>
+              <a:t>Que separa un diagrama ER de un dibujo (2/2)</a:t>
             </a:r>
           </a:p>
         </p:txBody>
@@ -7555,7 +7533,7 @@
                 </a:solidFill>
                 <a:latin typeface="Calibri"/>
               </a:rPr>
-              <a:t>–   Hace falta distinguir un diagrama entidad-relacion de un dibujo, porque es facil hacer lo segundo creyendo que es lo primero.</a:t>
+              <a:t>–   La opcionalidad es la parte que siempre se omite y la que mas cuesta despues.</a:t>
             </a:r>
           </a:p>
           <a:p>
@@ -7571,7 +7549,7 @@
                 </a:solidFill>
                 <a:latin typeface="Calibri"/>
               </a:rPr>
-              <a:t>–   Un dibujo son cajas con nombres unidas por lineas.</a:t>
+              <a:t>–   En la clínica, Consulta y Cita estan en relacion uno a uno pero no simetrica: una cita programada aun no tiene consulta, y una consulta no existe sin su cita.</a:t>
             </a:r>
           </a:p>
           <a:p>
@@ -7587,39 +7565,7 @@
                 </a:solidFill>
                 <a:latin typeface="Calibri"/>
               </a:rPr>
-              <a:t>–   Un diagrama bien hecho cumple cinco condiciones verificables: entidades en singular con su clave primaria marcada; cada atributo con tipo y longitud, no solo nombre</a:t>
-            </a:r>
-          </a:p>
-          <a:p>
-            <a:pPr>
-              <a:spcAft>
-                <a:spcPts val="800"/>
-              </a:spcAft>
-            </a:pPr>
-            <a:r>
-              <a:rPr sz="2000" b="0" i="0">
-                <a:solidFill>
-                  <a:srgbClr val="333333"/>
-                </a:solidFill>
-                <a:latin typeface="Calibri"/>
-              </a:rPr>
-              <a:t>–   Cada clave foranea senalada indicando a que entidad apunta; cada relacion con cardinalidad en los dos extremos, con maximo y minimo; y cada relacion con nombre verbal legible, Dueno posee Mascota, Veterinario atiende Cita.</a:t>
-            </a:r>
-          </a:p>
-          <a:p>
-            <a:pPr>
-              <a:spcAft>
-                <a:spcPts val="800"/>
-              </a:spcAft>
-            </a:pPr>
-            <a:r>
-              <a:rPr sz="2000" b="0" i="0">
-                <a:solidFill>
-                  <a:srgbClr val="333333"/>
-                </a:solidFill>
-                <a:latin typeface="Calibri"/>
-              </a:rPr>
-              <a:t>–   El criterio de aceptacion que conviene entregar es operativo: el diagrama esta bien si otra persona puede escribir el CREATE TABLE completo mirandolo, sin preguntar nada.</a:t>
+              <a:t>–   Como referencia de tamano, el modelo tiene ocho entidades y siete relaciones y debe caber legible en una hoja; si no cabe, se divide en vistas por subsistema, y eso es convencion, no norma.</a:t>
             </a:r>
           </a:p>
         </p:txBody>
@@ -7800,7 +7746,7 @@
                 </a:solidFill>
                 <a:latin typeface="Calibri"/>
               </a:rPr>
-              <a:t>Que separa un diagrama ER de un dibujo (2/2)</a:t>
+              <a:t>Tipos de datos: donde se pagan las facturas mas caras (1/2)</a:t>
             </a:r>
           </a:p>
         </p:txBody>
@@ -7839,7 +7785,7 @@
                 </a:solidFill>
                 <a:latin typeface="Calibri"/>
               </a:rPr>
-              <a:t>–   La opcionalidad es la parte que siempre se omite y la que mas cuesta despues.</a:t>
+              <a:t>–   Elegir tipos parece trivial y es donde se pagan las facturas mas caras del semestre.</a:t>
             </a:r>
           </a:p>
           <a:p>
@@ -7855,7 +7801,7 @@
                 </a:solidFill>
                 <a:latin typeface="Calibri"/>
               </a:rPr>
-              <a:t>–   En VetCare, Consulta y Cita estan en relacion uno a uno pero no simetrica: una cita programada aun no tiene consulta, y una consulta no existe sin su cita.</a:t>
+              <a:t>–   Un telefono no es un numero: como NUMBER se pierden los ceros iniciales, no cabe el prefijo internacional ni una extension, asi que va VARCHAR(30).</a:t>
             </a:r>
           </a:p>
           <a:p>
@@ -7871,7 +7817,23 @@
                 </a:solidFill>
                 <a:latin typeface="Calibri"/>
               </a:rPr>
-              <a:t>–   Como referencia de tamano, el modelo tiene ocho entidades y siete relaciones y debe caber legible en una hoja; si no cabe, se divide en vistas por subsistema, y eso es convencion, no norma.</a:t>
+              <a:t>–   Una fecha no es texto: si fecha_hora fuera VARCHAR(20), el ORDER BY seria alfabetico y no cronologico, no se podrian sumar treinta minutos para calcular el fin de la cita y el indice de la Clase 7 serviria de poco; va TIMESTAMP.</a:t>
+            </a:r>
+          </a:p>
+          <a:p>
+            <a:pPr>
+              <a:spcAft>
+                <a:spcPts val="800"/>
+              </a:spcAft>
+            </a:pPr>
+            <a:r>
+              <a:rPr sz="2000" b="0" i="0">
+                <a:solidFill>
+                  <a:srgbClr val="333333"/>
+                </a:solidFill>
+                <a:latin typeface="Calibri"/>
+              </a:rPr>
+              <a:t>–   El dinero no es flotante: FLOAT representa decimales en binario y arrastra errores que, sumados en cientos de lineas de detalle_factura, hacen que el total no cuadre con sus partes; va NUMBER(12,2) en Oracle o DECIMAL(12,2) en PostgreSQL.</a:t>
             </a:r>
           </a:p>
         </p:txBody>
@@ -8109,7 +8071,7 @@
                 </a:solidFill>
                 <a:latin typeface="Calibri"/>
               </a:rPr>
-              <a:t> Revision BD I · Arranque VetCare DB</a:t>
+              <a:t> Revision BD I · Arranque la base de la clínica</a:t>
             </a:r>
           </a:p>
           <a:p>
@@ -8184,7 +8146,7 @@
                 </a:solidFill>
                 <a:latin typeface="Calibri"/>
               </a:rPr>
-              <a:t>–   Recorrido: teoría del tema, una lámina por concepto, y demo del docente sobre VetCare DB.</a:t>
+              <a:t>–   Recorrido: teoría del tema, una lámina por concepto, y demo del docente sobre la base de la clínica.</a:t>
             </a:r>
           </a:p>
           <a:p>
@@ -8415,7 +8377,7 @@
                 </a:solidFill>
                 <a:latin typeface="Calibri"/>
               </a:rPr>
-              <a:t>Tipos de datos: donde se pagan las facturas mas caras (1/2)</a:t>
+              <a:t>Tipos de datos: donde se pagan las facturas mas caras (2/2)</a:t>
             </a:r>
           </a:p>
         </p:txBody>
@@ -8454,7 +8416,7 @@
                 </a:solidFill>
                 <a:latin typeface="Calibri"/>
               </a:rPr>
-              <a:t>–   Elegir tipos parece trivial y es donde se pagan las facturas mas caras del semestre.</a:t>
+              <a:t>–   La tentacion contraria, declarar todo VARCHAR(4000) por comodidad, renuncia a que la base valide algo y traslada la validacion entera a quien programe cada pantalla.</a:t>
             </a:r>
           </a:p>
           <a:p>
@@ -8470,7 +8432,7 @@
                 </a:solidFill>
                 <a:latin typeface="Calibri"/>
               </a:rPr>
-              <a:t>–   Un telefono no es un numero: como NUMBER se pierden los ceros iniciales, no cabe el prefijo internacional ni una extension, asi que va VARCHAR(30).</a:t>
+              <a:t>–   Numeros de referencia como convencion del curso: nombre VARCHAR(80), email VARCHAR(120) porque el estandar de correo admite hasta 254 caracteres, telefono VARCHAR(30), especie VARCHAR(40).</a:t>
             </a:r>
           </a:p>
           <a:p>
@@ -8486,23 +8448,7 @@
                 </a:solidFill>
                 <a:latin typeface="Calibri"/>
               </a:rPr>
-              <a:t>–   Una fecha no es texto: si fecha_hora fuera VARCHAR(20), el ORDER BY seria alfabetico y no cronologico, no se podrian sumar treinta minutos para calcular el fin de la cita y el indice de la Clase 7 serviria de poco; va TIMESTAMP.</a:t>
-            </a:r>
-          </a:p>
-          <a:p>
-            <a:pPr>
-              <a:spcAft>
-                <a:spcPts val="800"/>
-              </a:spcAft>
-            </a:pPr>
-            <a:r>
-              <a:rPr sz="2000" b="0" i="0">
-                <a:solidFill>
-                  <a:srgbClr val="333333"/>
-                </a:solidFill>
-                <a:latin typeface="Calibri"/>
-              </a:rPr>
-              <a:t>–   El dinero no es flotante: FLOAT representa decimales en binario y arrastra errores que, sumados en cientos de lineas de detalle_factura, hacen que el total no cuadre con sus partes; va NUMBER(12,2) en Oracle o DECIMAL(12,2) en PostgreSQL.</a:t>
+              <a:t>–   El costo de equivocarse no es reescribir una linea: la tabla ya tiene datos, el ALTER TABLE debe convertir cada valor, puede fallar por una sola fila invalida, bloquea la tabla mientras dura, y los procedimientos de las Clases 3 y 4 ya asumen el tipo antiguo.</a:t>
             </a:r>
           </a:p>
         </p:txBody>
@@ -8683,7 +8629,7 @@
                 </a:solidFill>
                 <a:latin typeface="Calibri"/>
               </a:rPr>
-              <a:t>Tipos de datos: donde se pagan las facturas mas caras (2/2)</a:t>
+              <a:t>Convenciones de nombres para que el DDL corra a la primera (1/2)</a:t>
             </a:r>
           </a:p>
         </p:txBody>
@@ -8722,7 +8668,7 @@
                 </a:solidFill>
                 <a:latin typeface="Calibri"/>
               </a:rPr>
-              <a:t>–   La tentacion contraria, declarar todo VARCHAR(4000) por comodidad, renuncia a que la base valide algo y traslada la validacion entera a quien programe cada pantalla.</a:t>
+              <a:t>–   Todo en minusculas: PostgreSQL pliega a minuscula cualquier identificador sin comillas</a:t>
             </a:r>
           </a:p>
           <a:p>
@@ -8738,7 +8684,7 @@
                 </a:solidFill>
                 <a:latin typeface="Calibri"/>
               </a:rPr>
-              <a:t>–   Numeros de referencia como convencion del curso: nombre VARCHAR(80), email VARCHAR(120) porque el estandar de correo admite hasta 254 caracteres, telefono VARCHAR(30), especie VARCHAR(40).</a:t>
+              <a:t>–   Asi que escribir CREATE TABLE Mascota y despues consultarlo entrecomillado produce un error de tabla inexistente que cuesta veinte minutos de clase encontrar; la regla practica es no usar nunca comillas dobles en identificadores.</a:t>
             </a:r>
           </a:p>
           <a:p>
@@ -8754,7 +8700,23 @@
                 </a:solidFill>
                 <a:latin typeface="Calibri"/>
               </a:rPr>
-              <a:t>–   El costo de equivocarse no es reescribir una linea: la tabla ya tiene datos, el ALTER TABLE debe convertir cada valor, puede fallar por una sola fila invalida, bloquea la tabla mientras dura, y los procedimientos de las Clases 3 y 4 ya asumen el tipo antiguo.</a:t>
+              <a:t>–   Nombres de tabla en singular y sin tildes ni enes: dueno, mascota, cita, veterinario, consulta, insumo, factura, detalle_factura.</a:t>
+            </a:r>
+          </a:p>
+          <a:p>
+            <a:pPr>
+              <a:spcAft>
+                <a:spcPts val="800"/>
+              </a:spcAft>
+            </a:pPr>
+            <a:r>
+              <a:rPr sz="2000" b="0" i="0">
+                <a:solidFill>
+                  <a:srgbClr val="333333"/>
+                </a:solidFill>
+                <a:latin typeface="Calibri"/>
+              </a:rPr>
+              <a:t>–   Una tabla es un conjunto de entidades del mismo tipo, pero se nombra por lo que guarda cada fila, y el singular hace que la clave foranea se lea sola: cita.id_mascota apunta a mascota.id_mascota.</a:t>
             </a:r>
           </a:p>
         </p:txBody>
@@ -8935,7 +8897,7 @@
                 </a:solidFill>
                 <a:latin typeface="Calibri"/>
               </a:rPr>
-              <a:t>Convenciones de nombres para que el DDL corra a la primera (1/2)</a:t>
+              <a:t>Convenciones de nombres para que el DDL corra a la primera (2/2)</a:t>
             </a:r>
           </a:p>
         </p:txBody>
@@ -8974,7 +8936,7 @@
                 </a:solidFill>
                 <a:latin typeface="Calibri"/>
               </a:rPr>
-              <a:t>–   Todo en minusculas: PostgreSQL pliega a minuscula cualquier identificador sin comillas</a:t>
+              <a:t>–   Palabras compuestas con guion bajo (detalle_factura, fecha_hora), nunca camelCase.</a:t>
             </a:r>
           </a:p>
           <a:p>
@@ -8990,7 +8952,7 @@
                 </a:solidFill>
                 <a:latin typeface="Calibri"/>
               </a:rPr>
-              <a:t>–   Asi que escribir CREATE TABLE Mascota y despues consultarlo entrecomillado produce un error de tabla inexistente que cuesta veinte minutos de clase encontrar; la regla practica es no usar nunca comillas dobles en identificadores.</a:t>
+              <a:t>–   Y la convencion que mas tiempo ahorra en el semestre: el mismo nombre en el diagrama, en el DDL y en el codigo Mermaid; cuando los tres coinciden, el modelo se lee una sola vez.</a:t>
             </a:r>
           </a:p>
           <a:p>
@@ -9006,7 +8968,7 @@
                 </a:solidFill>
                 <a:latin typeface="Calibri"/>
               </a:rPr>
-              <a:t>–   Nombres de tabla en singular y sin tildes ni enes: dueno, mascota, cita, veterinario, consulta, insumo, factura, detalle_factura.</a:t>
+              <a:t>–   Ejemplo del error mas comun: CREATE TABLE "Mascota" con comillas crea un nombre sensible a mayusculas, y despues SELECT * FROM mascota responde relation "mascota" does not exist.</a:t>
             </a:r>
           </a:p>
           <a:p>
@@ -9022,7 +8984,7 @@
                 </a:solidFill>
                 <a:latin typeface="Calibri"/>
               </a:rPr>
-              <a:t>–   Una tabla es un conjunto de entidades del mismo tipo, pero se nombra por lo que guarda cada fila, y el singular hace que la clave foranea se lea sola: cita.id_mascota apunta a mascota.id_mascota.</a:t>
+              <a:t>–   Sin comillas, Mascota, MASCOTA y mascota son el mismo objeto.</a:t>
             </a:r>
           </a:p>
         </p:txBody>
@@ -9203,7 +9165,7 @@
                 </a:solidFill>
                 <a:latin typeface="Calibri"/>
               </a:rPr>
-              <a:t>Convenciones de nombres para que el DDL corra a la primera (2/2)</a:t>
+              <a:t>Herramientas del dia y que se puede demostrar con cada una</a:t>
             </a:r>
           </a:p>
         </p:txBody>
@@ -9242,7 +9204,7 @@
                 </a:solidFill>
                 <a:latin typeface="Calibri"/>
               </a:rPr>
-              <a:t>–   Palabras compuestas con guion bajo (detalle_factura, fecha_hora), nunca camelCase.</a:t>
+              <a:t>–   Tambien se demuestra el borrado en cascada: DELETE FROM factura WHERE id_factura = 1 y verificar con SELECT COUNT(*) FROM detalle_factura que las lineas hijas desaparecieron.</a:t>
             </a:r>
           </a:p>
           <a:p>
@@ -9258,7 +9220,7 @@
                 </a:solidFill>
                 <a:latin typeface="Calibri"/>
               </a:rPr>
-              <a:t>–   Y la convencion que mas tiempo ahorra en el semestre: el mismo nombre en el diagrama, en el DDL y en el codigo Mermaid; cuando los tres coinciden, el modelo se lee una sola vez.</a:t>
+              <a:t>–   DB Fiddle: es un PostgreSQL real en el navegador que ejecuta el DDL y muestra el error exacto si algo no compila.</a:t>
             </a:r>
           </a:p>
           <a:p>
@@ -9274,23 +9236,7 @@
                 </a:solidFill>
                 <a:latin typeface="Calibri"/>
               </a:rPr>
-              <a:t>–   Ejemplo del error mas comun: CREATE TABLE "Mascota" con comillas crea un nombre sensible a mayusculas, y despues SELECT * FROM mascota responde relation "mascota" does not exist.</a:t>
-            </a:r>
-          </a:p>
-          <a:p>
-            <a:pPr>
-              <a:spcAft>
-                <a:spcPts val="800"/>
-              </a:spcAft>
-            </a:pPr>
-            <a:r>
-              <a:rPr sz="2000" b="0" i="0">
-                <a:solidFill>
-                  <a:srgbClr val="333333"/>
-                </a:solidFill>
-                <a:latin typeface="Calibri"/>
-              </a:rPr>
-              <a:t>–   Sin comillas, Mascota, MASCOTA y mascota son el mismo objeto.</a:t>
+              <a:t>–   Un visor Mermaid: convierte el texto erDiagram en el diagrama, y ese texto es la fuente que se versiona junto al DDL.</a:t>
             </a:r>
           </a:p>
         </p:txBody>
@@ -9471,7 +9417,7 @@
                 </a:solidFill>
                 <a:latin typeface="Calibri"/>
               </a:rPr>
-              <a:t>Herramientas del dia y que se puede demostrar con cada una</a:t>
+              <a:t>Del ER dibujado al codigo Mermaid</a:t>
             </a:r>
           </a:p>
         </p:txBody>
@@ -9510,7 +9456,7 @@
                 </a:solidFill>
                 <a:latin typeface="Calibri"/>
               </a:rPr>
-              <a:t>–   Tambien se demuestra el borrado en cascada: DELETE FROM factura WHERE id_factura = 1 y verificar con SELECT COUNT(*) FROM detalle_factura que las lineas hijas desaparecieron.</a:t>
+              <a:t>–   Un modelo ER en Mermaid NO es una imagen: es texto en sintaxis Mermaid (erDiagram) que un visor renderiza al instante.</a:t>
             </a:r>
           </a:p>
           <a:p>
@@ -9526,7 +9472,7 @@
                 </a:solidFill>
                 <a:latin typeface="Calibri"/>
               </a:rPr>
-              <a:t>–   DB Fiddle: es un PostgreSQL real en el navegador que ejecuta el DDL y muestra el error exacto si algo no compila.</a:t>
+              <a:t>–   La IA acierta la sintaxis; el modelo sigue siendo del estudiante, y por eso hay que revisar lo que devuelve: entidades completas, cardinalidades en el sentido correcto, PK y FK marcadas.</a:t>
             </a:r>
           </a:p>
           <a:p>
@@ -9542,7 +9488,7 @@
                 </a:solidFill>
                 <a:latin typeface="Calibri"/>
               </a:rPr>
-              <a:t>–   Un visor Mermaid: convierte el texto erDiagram en el diagrama, y ese texto es la fuente que se versiona junto al DDL.</a:t>
+              <a:t>–   El paso que nadie se puede saltar es pegar el codigo en un visor Mermaid y mirarlo renderizado, porque un diagrama que no renderiza no comunica nada.</a:t>
             </a:r>
           </a:p>
         </p:txBody>
@@ -9723,7 +9669,7 @@
                 </a:solidFill>
                 <a:latin typeface="Calibri"/>
               </a:rPr>
-              <a:t>Del ER dibujado al codigo Mermaid</a:t>
+              <a:t>Preguntas frecuentes del grupo</a:t>
             </a:r>
           </a:p>
         </p:txBody>
@@ -9762,7 +9708,7 @@
                 </a:solidFill>
                 <a:latin typeface="Calibri"/>
               </a:rPr>
-              <a:t>–   Un modelo ER en Mermaid NO es una imagen: es texto en sintaxis Mermaid (erDiagram) que un visor renderiza al instante.</a:t>
+              <a:t>–   Primera: si la pantalla muestra todo junto, por que no una sola tabla con todo.</a:t>
             </a:r>
           </a:p>
           <a:p>
@@ -9778,7 +9724,7 @@
                 </a:solidFill>
                 <a:latin typeface="Calibri"/>
               </a:rPr>
-              <a:t>–   La IA acierta la sintaxis; el modelo sigue siendo del estudiante, y por eso hay que revisar lo que devuelve: entidades completas, cardinalidades en el sentido correcto, PK y FK marcadas.</a:t>
+              <a:t>–   Segunda: la clave primaria tiene que ser el primer campo y autoincremental.</a:t>
             </a:r>
           </a:p>
           <a:p>
@@ -9794,7 +9740,39 @@
                 </a:solidFill>
                 <a:latin typeface="Calibri"/>
               </a:rPr>
-              <a:t>–   El paso que nadie se puede saltar es pegar el codigo en un visor Mermaid y mirarlo renderizado, porque un diagrama que no renderiza no comunica nada.</a:t>
+              <a:t>–   No: el orden fisico de las columnas es irrelevante para el motor, la clave primaria es una restriccion y no una posicion, y el autoincremento es solo una forma comoda de generar valores sustitutos.</a:t>
+            </a:r>
+          </a:p>
+          <a:p>
+            <a:pPr>
+              <a:spcAft>
+                <a:spcPts val="800"/>
+              </a:spcAft>
+            </a:pPr>
+            <a:r>
+              <a:rPr sz="2000" b="0" i="0">
+                <a:solidFill>
+                  <a:srgbClr val="333333"/>
+                </a:solidFill>
+                <a:latin typeface="Calibri"/>
+              </a:rPr>
+              <a:t>–   Tercera, la mas valiosa porque abre las clases siguientes: si pongo la clave foranea, ya no necesito validar en la aplicacion.</a:t>
+            </a:r>
+          </a:p>
+          <a:p>
+            <a:pPr>
+              <a:spcAft>
+                <a:spcPts val="800"/>
+              </a:spcAft>
+            </a:pPr>
+            <a:r>
+              <a:rPr sz="2000" b="0" i="0">
+                <a:solidFill>
+                  <a:srgbClr val="333333"/>
+                </a:solidFill>
+                <a:latin typeface="Calibri"/>
+              </a:rPr>
+              <a:t>–   La clave foranea garantiza que el identificador exista, no que la regla de negocio se cumpla; la mascota inactiva tiene un identificador valido y la clave foranea la acepta sin chistar.</a:t>
             </a:r>
           </a:p>
         </p:txBody>
@@ -9975,21 +9953,141 @@
                 </a:solidFill>
                 <a:latin typeface="Calibri"/>
               </a:rPr>
-              <a:t>Preguntas frecuentes del grupo</a:t>
-            </a:r>
-          </a:p>
-        </p:txBody>
-      </p:sp>
-      <p:sp>
-        <p:nvSpPr>
-          <p:cNvPr id="5" name="TextBox 4"/>
+              <a:t>El patron de tabla: PK, obligatorios y dominio cerrado</a:t>
+            </a:r>
+          </a:p>
+        </p:txBody>
+      </p:sp>
+      <p:sp>
+        <p:nvSpPr>
+          <p:cNvPr id="5" name="Rounded Rectangle 4"/>
+          <p:cNvSpPr/>
+          <p:nvPr/>
+        </p:nvSpPr>
+        <p:spPr>
+          <a:xfrm>
+            <a:off x="457200" y="1261872"/>
+            <a:ext cx="11277295" cy="5093208"/>
+          </a:xfrm>
+          <a:prstGeom prst="roundRect">
+            <a:avLst>
+              <a:gd name="adj" fmla="val 12000"/>
+            </a:avLst>
+          </a:prstGeom>
+          <a:solidFill>
+            <a:srgbClr val="1E2A38"/>
+          </a:solidFill>
+          <a:ln>
+            <a:noFill/>
+          </a:ln>
+        </p:spPr>
+        <p:style>
+          <a:lnRef idx="1">
+            <a:schemeClr val="accent1"/>
+          </a:lnRef>
+          <a:fillRef idx="3">
+            <a:schemeClr val="accent1"/>
+          </a:fillRef>
+          <a:effectRef idx="2">
+            <a:schemeClr val="accent1"/>
+          </a:effectRef>
+          <a:fontRef idx="minor">
+            <a:schemeClr val="lt1"/>
+          </a:fontRef>
+        </p:style>
+        <p:txBody>
+          <a:bodyPr rtlCol="0" anchor="ctr"/>
+          <a:lstStyle/>
+          <a:p>
+            <a:pPr algn="ctr"/>
+          </a:p>
+        </p:txBody>
+      </p:sp>
+      <p:sp>
+        <p:nvSpPr>
+          <p:cNvPr id="6" name="Rectangle 5"/>
+          <p:cNvSpPr/>
+          <p:nvPr/>
+        </p:nvSpPr>
+        <p:spPr>
+          <a:xfrm>
+            <a:off x="457200" y="1261872"/>
+            <a:ext cx="11277295" cy="320040"/>
+          </a:xfrm>
+          <a:prstGeom prst="rect">
+            <a:avLst/>
+          </a:prstGeom>
+          <a:solidFill>
+            <a:srgbClr val="095292"/>
+          </a:solidFill>
+          <a:ln>
+            <a:noFill/>
+          </a:ln>
+        </p:spPr>
+        <p:style>
+          <a:lnRef idx="1">
+            <a:schemeClr val="accent1"/>
+          </a:lnRef>
+          <a:fillRef idx="3">
+            <a:schemeClr val="accent1"/>
+          </a:fillRef>
+          <a:effectRef idx="2">
+            <a:schemeClr val="accent1"/>
+          </a:effectRef>
+          <a:fontRef idx="minor">
+            <a:schemeClr val="lt1"/>
+          </a:fontRef>
+        </p:style>
+        <p:txBody>
+          <a:bodyPr rtlCol="0" anchor="ctr"/>
+          <a:lstStyle/>
+          <a:p>
+            <a:pPr algn="ctr"/>
+          </a:p>
+        </p:txBody>
+      </p:sp>
+      <p:sp>
+        <p:nvSpPr>
+          <p:cNvPr id="7" name="TextBox 6"/>
           <p:cNvSpPr txBox="1"/>
           <p:nvPr/>
         </p:nvSpPr>
         <p:spPr>
           <a:xfrm>
-            <a:off x="457200" y="1170432"/>
-            <a:ext cx="11277295" cy="5230368"/>
+            <a:off x="685800" y="1307592"/>
+            <a:ext cx="10820095" cy="256032"/>
+          </a:xfrm>
+          <a:prstGeom prst="rect">
+            <a:avLst/>
+          </a:prstGeom>
+          <a:noFill/>
+        </p:spPr>
+        <p:txBody>
+          <a:bodyPr wrap="square" anchor="ctr"/>
+          <a:lstStyle/>
+          <a:p>
+            <a:r>
+              <a:rPr sz="1000" b="1" i="0">
+                <a:solidFill>
+                  <a:srgbClr val="269CCB"/>
+                </a:solidFill>
+                <a:latin typeface="Calibri"/>
+              </a:rPr>
+              <a:t>● ● ●</a:t>
+            </a:r>
+          </a:p>
+        </p:txBody>
+      </p:sp>
+      <p:sp>
+        <p:nvSpPr>
+          <p:cNvPr id="8" name="TextBox 7"/>
+          <p:cNvSpPr txBox="1"/>
+          <p:nvPr/>
+        </p:nvSpPr>
+        <p:spPr>
+          <a:xfrm>
+            <a:off x="777240" y="1719072"/>
+            <a:ext cx="10637215" cy="4453128"/>
           </a:xfrm>
           <a:prstGeom prst="rect">
             <a:avLst/>
@@ -10004,88 +10102,168 @@
           <a:p>
             <a:pPr>
               <a:spcAft>
-                <a:spcPts val="800"/>
+                <a:spcPts val="400"/>
               </a:spcAft>
             </a:pPr>
             <a:r>
-              <a:rPr sz="2000" b="0" i="0">
-                <a:solidFill>
-                  <a:srgbClr val="333333"/>
-                </a:solidFill>
-                <a:latin typeface="Calibri"/>
-              </a:rPr>
-              <a:t>–   Primera: si la pantalla muestra todo junto, por que no una sola tabla con todo.</a:t>
+              <a:rPr sz="1400" b="0" i="0">
+                <a:solidFill>
+                  <a:srgbClr val="FFFFFF"/>
+                </a:solidFill>
+                <a:latin typeface="Calibri"/>
+              </a:rPr>
+              <a:t>-- Mismo patron que pedira su DDL, sobre otra tabla del modelo.</a:t>
             </a:r>
           </a:p>
           <a:p>
             <a:pPr>
               <a:spcAft>
-                <a:spcPts val="800"/>
+                <a:spcPts val="400"/>
               </a:spcAft>
             </a:pPr>
             <a:r>
-              <a:rPr sz="2000" b="0" i="0">
-                <a:solidFill>
-                  <a:srgbClr val="333333"/>
-                </a:solidFill>
-                <a:latin typeface="Calibri"/>
-              </a:rPr>
-              <a:t>–   Segunda: la clave primaria tiene que ser el primer campo y autoincremental.</a:t>
+              <a:rPr sz="1400" b="0" i="0">
+                <a:solidFill>
+                  <a:srgbClr val="FFFFFF"/>
+                </a:solidFill>
+                <a:latin typeface="Calibri"/>
+              </a:rPr>
+              <a:t>CREATE TABLE veterinario (</a:t>
             </a:r>
           </a:p>
           <a:p>
             <a:pPr>
               <a:spcAft>
-                <a:spcPts val="800"/>
+                <a:spcPts val="400"/>
               </a:spcAft>
             </a:pPr>
             <a:r>
-              <a:rPr sz="2000" b="0" i="0">
-                <a:solidFill>
-                  <a:srgbClr val="333333"/>
-                </a:solidFill>
-                <a:latin typeface="Calibri"/>
-              </a:rPr>
-              <a:t>–   No: el orden fisico de las columnas es irrelevante para el motor, la clave primaria es una restriccion y no una posicion, y el autoincremento es solo una forma comoda de generar valores sustitutos.</a:t>
+              <a:rPr sz="1400" b="0" i="0">
+                <a:solidFill>
+                  <a:srgbClr val="FFFFFF"/>
+                </a:solidFill>
+                <a:latin typeface="Calibri"/>
+              </a:rPr>
+              <a:t>  id_veterinario SERIAL PRIMARY KEY,      -- sustituta: la genera la base</a:t>
             </a:r>
           </a:p>
           <a:p>
             <a:pPr>
               <a:spcAft>
-                <a:spcPts val="800"/>
+                <a:spcPts val="400"/>
               </a:spcAft>
             </a:pPr>
             <a:r>
-              <a:rPr sz="2000" b="0" i="0">
-                <a:solidFill>
-                  <a:srgbClr val="333333"/>
-                </a:solidFill>
-                <a:latin typeface="Calibri"/>
-              </a:rPr>
-              <a:t>–   Tercera, la mas valiosa porque abre las clases siguientes: si pongo la clave foranea, ya no necesito validar en la aplicacion.</a:t>
+              <a:rPr sz="1400" b="0" i="0">
+                <a:solidFill>
+                  <a:srgbClr val="FFFFFF"/>
+                </a:solidFill>
+                <a:latin typeface="Calibri"/>
+              </a:rPr>
+              <a:t>  tarjeta_prof   VARCHAR(30) UNIQUE,      -- natural: unica, pero puede faltar</a:t>
             </a:r>
           </a:p>
           <a:p>
             <a:pPr>
               <a:spcAft>
-                <a:spcPts val="800"/>
+                <a:spcPts val="400"/>
               </a:spcAft>
             </a:pPr>
             <a:r>
-              <a:rPr sz="2000" b="0" i="0">
-                <a:solidFill>
-                  <a:srgbClr val="333333"/>
-                </a:solidFill>
-                <a:latin typeface="Calibri"/>
-              </a:rPr>
-              <a:t>–   La clave foranea garantiza que el identificador exista, no que la regla de negocio se cumpla; la mascota inactiva tiene un identificador valido y la clave foranea la acepta sin chistar.</a:t>
-            </a:r>
-          </a:p>
-        </p:txBody>
-      </p:sp>
-      <p:sp>
-        <p:nvSpPr>
-          <p:cNvPr id="6" name="TextBox 5"/>
+              <a:rPr sz="1400" b="0" i="0">
+                <a:solidFill>
+                  <a:srgbClr val="FFFFFF"/>
+                </a:solidFill>
+                <a:latin typeface="Calibri"/>
+              </a:rPr>
+              <a:t>  nombre         VARCHAR(80) NOT NULL,    -- obligatorio</a:t>
+            </a:r>
+          </a:p>
+          <a:p>
+            <a:pPr>
+              <a:spcAft>
+                <a:spcPts val="400"/>
+              </a:spcAft>
+            </a:pPr>
+            <a:r>
+              <a:rPr sz="1400" b="0" i="0">
+                <a:solidFill>
+                  <a:srgbClr val="FFFFFF"/>
+                </a:solidFill>
+                <a:latin typeface="Calibri"/>
+              </a:rPr>
+              <a:t>  especialidad   VARCHAR(40) NOT NULL</a:t>
+            </a:r>
+          </a:p>
+          <a:p>
+            <a:pPr>
+              <a:spcAft>
+                <a:spcPts val="400"/>
+              </a:spcAft>
+            </a:pPr>
+            <a:r>
+              <a:rPr sz="1400" b="0" i="0">
+                <a:solidFill>
+                  <a:srgbClr val="FFFFFF"/>
+                </a:solidFill>
+                <a:latin typeface="Calibri"/>
+              </a:rPr>
+              <a:t>    CHECK (especialidad IN ('GENERAL','CIRUGIA','DERMATOLOGIA')),</a:t>
+            </a:r>
+          </a:p>
+          <a:p>
+            <a:pPr>
+              <a:spcAft>
+                <a:spcPts val="400"/>
+              </a:spcAft>
+            </a:pPr>
+            <a:r>
+              <a:rPr sz="1400" b="0" i="0">
+                <a:solidFill>
+                  <a:srgbClr val="FFFFFF"/>
+                </a:solidFill>
+                <a:latin typeface="Calibri"/>
+              </a:rPr>
+              <a:t>  activo         CHAR(1) DEFAULT 'S'      -- baja logica, no DELETE</a:t>
+            </a:r>
+          </a:p>
+          <a:p>
+            <a:pPr>
+              <a:spcAft>
+                <a:spcPts val="400"/>
+              </a:spcAft>
+            </a:pPr>
+            <a:r>
+              <a:rPr sz="1400" b="0" i="0">
+                <a:solidFill>
+                  <a:srgbClr val="FFFFFF"/>
+                </a:solidFill>
+                <a:latin typeface="Calibri"/>
+              </a:rPr>
+              <a:t>    CHECK (activo IN ('S','N'))</a:t>
+            </a:r>
+          </a:p>
+          <a:p>
+            <a:pPr>
+              <a:spcAft>
+                <a:spcPts val="400"/>
+              </a:spcAft>
+            </a:pPr>
+            <a:r>
+              <a:rPr sz="1400" b="0" i="0">
+                <a:solidFill>
+                  <a:srgbClr val="FFFFFF"/>
+                </a:solidFill>
+                <a:latin typeface="Calibri"/>
+              </a:rPr>
+              <a:t>);</a:t>
+            </a:r>
+          </a:p>
+        </p:txBody>
+      </p:sp>
+      <p:sp>
+        <p:nvSpPr>
+          <p:cNvPr id="9" name="TextBox 8"/>
           <p:cNvSpPr txBox="1"/>
           <p:nvPr/>
         </p:nvSpPr>
@@ -10259,7 +10437,7 @@
                 </a:solidFill>
                 <a:latin typeface="Calibri"/>
               </a:rPr>
-              <a:t>El patron de tabla: PK, obligatorios y dominio cerrado</a:t>
+              <a:t>La clave foranea y que pasa al borrar el padre</a:t>
             </a:r>
           </a:p>
         </p:txBody>
@@ -10418,7 +10596,7 @@
                 </a:solidFill>
                 <a:latin typeface="Calibri"/>
               </a:rPr>
-              <a:t>-- Mismo patron que pedira su DDL, sobre otra tabla del modelo.</a:t>
+              <a:t>CREATE TABLE insumo (</a:t>
             </a:r>
           </a:p>
           <a:p>
@@ -10434,7 +10612,7 @@
                 </a:solidFill>
                 <a:latin typeface="Calibri"/>
               </a:rPr>
-              <a:t>CREATE TABLE veterinario (</a:t>
+              <a:t>  id_insumo  SERIAL PRIMARY KEY,</a:t>
             </a:r>
           </a:p>
           <a:p>
@@ -10450,7 +10628,7 @@
                 </a:solidFill>
                 <a:latin typeface="Calibri"/>
               </a:rPr>
-              <a:t>  id_veterinario SERIAL PRIMARY KEY,      -- sustituta: la genera la base</a:t>
+              <a:t>  nombre     VARCHAR(80) NOT NULL,</a:t>
             </a:r>
           </a:p>
           <a:p>
@@ -10466,7 +10644,7 @@
                 </a:solidFill>
                 <a:latin typeface="Calibri"/>
               </a:rPr>
-              <a:t>  tarjeta_prof   VARCHAR(30) UNIQUE,      -- natural: unica, pero puede faltar</a:t>
+              <a:t>  stock      INT NOT NULL DEFAULT 0 CHECK (stock &gt;= 0),</a:t>
             </a:r>
           </a:p>
           <a:p>
@@ -10482,7 +10660,7 @@
                 </a:solidFill>
                 <a:latin typeface="Calibri"/>
               </a:rPr>
-              <a:t>  nombre         VARCHAR(80) NOT NULL,    -- obligatorio</a:t>
+              <a:t>  precio     DECIMAL(12,2) NOT NULL CHECK (precio &gt; 0)</a:t>
             </a:r>
           </a:p>
           <a:p>
@@ -10498,7 +10676,7 @@
                 </a:solidFill>
                 <a:latin typeface="Calibri"/>
               </a:rPr>
-              <a:t>  especialidad   VARCHAR(40) NOT NULL</a:t>
+              <a:t>);</a:t>
             </a:r>
           </a:p>
           <a:p>
@@ -10514,7 +10692,7 @@
                 </a:solidFill>
                 <a:latin typeface="Calibri"/>
               </a:rPr>
-              <a:t>    CHECK (especialidad IN ('GENERAL','CIRUGIA','DERMATOLOGIA')),</a:t>
+              <a:t/>
             </a:r>
           </a:p>
           <a:p>
@@ -10530,7 +10708,7 @@
                 </a:solidFill>
                 <a:latin typeface="Calibri"/>
               </a:rPr>
-              <a:t>  activo         CHAR(1) DEFAULT 'S'      -- baja logica, no DELETE</a:t>
+              <a:t>-- El comportamiento al borrar el padre SE ELIGE. Si no se declara,</a:t>
             </a:r>
           </a:p>
           <a:p>
@@ -10546,7 +10724,7 @@
                 </a:solidFill>
                 <a:latin typeface="Calibri"/>
               </a:rPr>
-              <a:t>    CHECK (activo IN ('S','N'))</a:t>
+              <a:t>-- PostgreSQL asume NO ACTION: se niega a borrar. Eso es del estandar.</a:t>
             </a:r>
           </a:p>
           <a:p>
@@ -10562,7 +10740,55 @@
                 </a:solidFill>
                 <a:latin typeface="Calibri"/>
               </a:rPr>
-              <a:t>);</a:t>
+              <a:t>ALTER TABLE detalle_factura</a:t>
+            </a:r>
+          </a:p>
+          <a:p>
+            <a:pPr>
+              <a:spcAft>
+                <a:spcPts val="400"/>
+              </a:spcAft>
+            </a:pPr>
+            <a:r>
+              <a:rPr sz="1400" b="0" i="0">
+                <a:solidFill>
+                  <a:srgbClr val="FFFFFF"/>
+                </a:solidFill>
+                <a:latin typeface="Calibri"/>
+              </a:rPr>
+              <a:t>  ADD CONSTRAINT fk_detalle_insumo</a:t>
+            </a:r>
+          </a:p>
+          <a:p>
+            <a:pPr>
+              <a:spcAft>
+                <a:spcPts val="400"/>
+              </a:spcAft>
+            </a:pPr>
+            <a:r>
+              <a:rPr sz="1400" b="0" i="0">
+                <a:solidFill>
+                  <a:srgbClr val="FFFFFF"/>
+                </a:solidFill>
+                <a:latin typeface="Calibri"/>
+              </a:rPr>
+              <a:t>  FOREIGN KEY (id_insumo) REFERENCES insumo (id_insumo)</a:t>
+            </a:r>
+          </a:p>
+          <a:p>
+            <a:pPr>
+              <a:spcAft>
+                <a:spcPts val="400"/>
+              </a:spcAft>
+            </a:pPr>
+            <a:r>
+              <a:rPr sz="1400" b="0" i="0">
+                <a:solidFill>
+                  <a:srgbClr val="FFFFFF"/>
+                </a:solidFill>
+                <a:latin typeface="Calibri"/>
+              </a:rPr>
+              <a:t>  ON DELETE RESTRICT;   -- no se borra un insumo ya facturado</a:t>
             </a:r>
           </a:p>
         </p:txBody>
@@ -10743,7 +10969,7 @@
                 </a:solidFill>
                 <a:latin typeface="Calibri"/>
               </a:rPr>
-              <a:t>La clave foranea y que pasa al borrar el padre</a:t>
+              <a:t>Integridad referencial: el error que devuelve el motor</a:t>
             </a:r>
           </a:p>
         </p:txBody>
@@ -10902,7 +11128,7 @@
                 </a:solidFill>
                 <a:latin typeface="Calibri"/>
               </a:rPr>
-              <a:t>CREATE TABLE insumo (</a:t>
+              <a:t>-- Existe la mascota 1, no existe la 999.</a:t>
             </a:r>
           </a:p>
           <a:p>
@@ -10918,7 +11144,7 @@
                 </a:solidFill>
                 <a:latin typeface="Calibri"/>
               </a:rPr>
-              <a:t>  id_insumo  SERIAL PRIMARY KEY,</a:t>
+              <a:t>INSERT INTO cita (id_mascota, fecha_hora, estado)</a:t>
             </a:r>
           </a:p>
           <a:p>
@@ -10934,7 +11160,7 @@
                 </a:solidFill>
                 <a:latin typeface="Calibri"/>
               </a:rPr>
-              <a:t>  nombre     VARCHAR(80) NOT NULL,</a:t>
+              <a:t>VALUES (1, TIMESTAMP '2026-09-01 09:00:00', 'PROGRAMADA');</a:t>
             </a:r>
           </a:p>
           <a:p>
@@ -10950,7 +11176,7 @@
                 </a:solidFill>
                 <a:latin typeface="Calibri"/>
               </a:rPr>
-              <a:t>  stock      INT NOT NULL DEFAULT 0 CHECK (stock &gt;= 0),</a:t>
+              <a:t>-- INSERT 0 1</a:t>
             </a:r>
           </a:p>
           <a:p>
@@ -10966,7 +11192,7 @@
                 </a:solidFill>
                 <a:latin typeface="Calibri"/>
               </a:rPr>
-              <a:t>  precio     DECIMAL(12,2) NOT NULL CHECK (precio &gt; 0)</a:t>
+              <a:t/>
             </a:r>
           </a:p>
           <a:p>
@@ -10982,7 +11208,7 @@
                 </a:solidFill>
                 <a:latin typeface="Calibri"/>
               </a:rPr>
-              <a:t>);</a:t>
+              <a:t>INSERT INTO cita (id_mascota, fecha_hora, estado)</a:t>
             </a:r>
           </a:p>
           <a:p>
@@ -10998,7 +11224,7 @@
                 </a:solidFill>
                 <a:latin typeface="Calibri"/>
               </a:rPr>
-              <a:t/>
+              <a:t>VALUES (999, TIMESTAMP '2026-09-01 10:00:00', 'PROGRAMADA');</a:t>
             </a:r>
           </a:p>
           <a:p>
@@ -11014,7 +11240,7 @@
                 </a:solidFill>
                 <a:latin typeface="Calibri"/>
               </a:rPr>
-              <a:t>-- El comportamiento al borrar el padre SE ELIGE. Si no se declara,</a:t>
+              <a:t>-- ERROR:  insert or update on table "cita" violates foreign key</a:t>
             </a:r>
           </a:p>
           <a:p>
@@ -11030,7 +11256,7 @@
                 </a:solidFill>
                 <a:latin typeface="Calibri"/>
               </a:rPr>
-              <a:t>-- PostgreSQL asume NO ACTION: se niega a borrar. Eso es del estandar.</a:t>
+              <a:t>--         constraint "cita_id_mascota_fkey"</a:t>
             </a:r>
           </a:p>
           <a:p>
@@ -11046,55 +11272,7 @@
                 </a:solidFill>
                 <a:latin typeface="Calibri"/>
               </a:rPr>
-              <a:t>ALTER TABLE detalle_factura</a:t>
-            </a:r>
-          </a:p>
-          <a:p>
-            <a:pPr>
-              <a:spcAft>
-                <a:spcPts val="400"/>
-              </a:spcAft>
-            </a:pPr>
-            <a:r>
-              <a:rPr sz="1400" b="0" i="0">
-                <a:solidFill>
-                  <a:srgbClr val="FFFFFF"/>
-                </a:solidFill>
-                <a:latin typeface="Calibri"/>
-              </a:rPr>
-              <a:t>  ADD CONSTRAINT fk_detalle_insumo</a:t>
-            </a:r>
-          </a:p>
-          <a:p>
-            <a:pPr>
-              <a:spcAft>
-                <a:spcPts val="400"/>
-              </a:spcAft>
-            </a:pPr>
-            <a:r>
-              <a:rPr sz="1400" b="0" i="0">
-                <a:solidFill>
-                  <a:srgbClr val="FFFFFF"/>
-                </a:solidFill>
-                <a:latin typeface="Calibri"/>
-              </a:rPr>
-              <a:t>  FOREIGN KEY (id_insumo) REFERENCES insumo (id_insumo)</a:t>
-            </a:r>
-          </a:p>
-          <a:p>
-            <a:pPr>
-              <a:spcAft>
-                <a:spcPts val="400"/>
-              </a:spcAft>
-            </a:pPr>
-            <a:r>
-              <a:rPr sz="1400" b="0" i="0">
-                <a:solidFill>
-                  <a:srgbClr val="FFFFFF"/>
-                </a:solidFill>
-                <a:latin typeface="Calibri"/>
-              </a:rPr>
-              <a:t>  ON DELETE RESTRICT;   -- no se borra un insumo ya facturado</a:t>
+              <a:t>-- DETAIL:  Key (id_mascota)=(999) is not present in table "mascota".</a:t>
             </a:r>
           </a:p>
         </p:txBody>
@@ -11275,7 +11453,7 @@
                 </a:solidFill>
                 <a:latin typeface="Calibri"/>
               </a:rPr>
-              <a:t>Integridad referencial: el error que devuelve el motor</a:t>
+              <a:t>El JOIN de tres tablas</a:t>
             </a:r>
           </a:p>
         </p:txBody>
@@ -11289,7 +11467,7 @@
         <p:spPr>
           <a:xfrm>
             <a:off x="457200" y="1261872"/>
-            <a:ext cx="11277295" cy="5093208"/>
+            <a:ext cx="11277295" cy="4773168"/>
           </a:xfrm>
           <a:prstGeom prst="roundRect">
             <a:avLst>
@@ -11409,7 +11587,7 @@
         <p:spPr>
           <a:xfrm>
             <a:off x="777240" y="1719072"/>
-            <a:ext cx="10637215" cy="4453128"/>
+            <a:ext cx="10637215" cy="4133087"/>
           </a:xfrm>
           <a:prstGeom prst="rect">
             <a:avLst/>
@@ -11434,7 +11612,7 @@
                 </a:solidFill>
                 <a:latin typeface="Calibri"/>
               </a:rPr>
-              <a:t>-- Existe la mascota 1, no existe la 999.</a:t>
+              <a:t>SELECT m.nombre    AS mascota,</a:t>
             </a:r>
           </a:p>
           <a:p>
@@ -11450,7 +11628,7 @@
                 </a:solidFill>
                 <a:latin typeface="Calibri"/>
               </a:rPr>
-              <a:t>INSERT INTO cita (id_mascota, fecha_hora, estado)</a:t>
+              <a:t>       d.nombre    AS dueno,</a:t>
             </a:r>
           </a:p>
           <a:p>
@@ -11466,7 +11644,7 @@
                 </a:solidFill>
                 <a:latin typeface="Calibri"/>
               </a:rPr>
-              <a:t>VALUES (1, TIMESTAMP '2026-09-01 09:00:00', 'PROGRAMADA');</a:t>
+              <a:t>       c.fecha_hora,</a:t>
             </a:r>
           </a:p>
           <a:p>
@@ -11482,7 +11660,7 @@
                 </a:solidFill>
                 <a:latin typeface="Calibri"/>
               </a:rPr>
-              <a:t>-- INSERT 0 1</a:t>
+              <a:t>       c.estado</a:t>
             </a:r>
           </a:p>
           <a:p>
@@ -11498,7 +11676,7 @@
                 </a:solidFill>
                 <a:latin typeface="Calibri"/>
               </a:rPr>
-              <a:t/>
+              <a:t>FROM cita c</a:t>
             </a:r>
           </a:p>
           <a:p>
@@ -11514,7 +11692,7 @@
                 </a:solidFill>
                 <a:latin typeface="Calibri"/>
               </a:rPr>
-              <a:t>INSERT INTO cita (id_mascota, fecha_hora, estado)</a:t>
+              <a:t>JOIN mascota m ON m.id_mascota = c.id_mascota</a:t>
             </a:r>
           </a:p>
           <a:p>
@@ -11530,7 +11708,7 @@
                 </a:solidFill>
                 <a:latin typeface="Calibri"/>
               </a:rPr>
-              <a:t>VALUES (999, TIMESTAMP '2026-09-01 10:00:00', 'PROGRAMADA');</a:t>
+              <a:t>JOIN dueno   d ON d.id_dueno   = m.id_dueno</a:t>
             </a:r>
           </a:p>
           <a:p>
@@ -11546,7 +11724,7 @@
                 </a:solidFill>
                 <a:latin typeface="Calibri"/>
               </a:rPr>
-              <a:t>-- ERROR:  insert or update on table "cita" violates foreign key</a:t>
+              <a:t>WHERE c.fecha_hora &gt;= DATE '2026-09-01'</a:t>
             </a:r>
           </a:p>
           <a:p>
@@ -11562,7 +11740,7 @@
                 </a:solidFill>
                 <a:latin typeface="Calibri"/>
               </a:rPr>
-              <a:t>--         constraint "cita_id_mascota_fkey"</a:t>
+              <a:t>  AND m.activa = 'S'</a:t>
             </a:r>
           </a:p>
           <a:p>
@@ -11578,7 +11756,7 @@
                 </a:solidFill>
                 <a:latin typeface="Calibri"/>
               </a:rPr>
-              <a:t>-- DETAIL:  Key (id_mascota)=(999) is not present in table "mascota".</a:t>
+              <a:t>ORDER BY c.fecha_hora;</a:t>
             </a:r>
           </a:p>
         </p:txBody>
@@ -11586,6 +11764,41 @@
       <p:sp>
         <p:nvSpPr>
           <p:cNvPr id="9" name="TextBox 8"/>
+          <p:cNvSpPr txBox="1"/>
+          <p:nvPr/>
+        </p:nvSpPr>
+        <p:spPr>
+          <a:xfrm>
+            <a:off x="457200" y="6080760"/>
+            <a:ext cx="11277295" cy="320040"/>
+          </a:xfrm>
+          <a:prstGeom prst="rect">
+            <a:avLst/>
+          </a:prstGeom>
+          <a:noFill/>
+        </p:spPr>
+        <p:txBody>
+          <a:bodyPr wrap="square">
+            <a:spAutoFit/>
+          </a:bodyPr>
+          <a:lstStyle/>
+          <a:p>
+            <a:pPr algn="ctr"/>
+            <a:r>
+              <a:rPr sz="1200" b="0" i="1">
+                <a:solidFill>
+                  <a:srgbClr val="666666"/>
+                </a:solidFill>
+                <a:latin typeface="Calibri"/>
+              </a:rPr>
+              <a:t>Cada JOIN sigue una FK: cita llega a mascota por id_mascota, y mascota a dueno por id_dueno. El WHERE filtra despues de unir; si falta una condicion ON, el resultado no es un error sino un producto cartesiano.</a:t>
+            </a:r>
+          </a:p>
+        </p:txBody>
+      </p:sp>
+      <p:sp>
+        <p:nvSpPr>
+          <p:cNvPr id="10" name="TextBox 9"/>
           <p:cNvSpPr txBox="1"/>
           <p:nvPr/>
         </p:nvSpPr>
@@ -11917,7 +12130,7 @@
                 </a:solidFill>
                 <a:latin typeface="Calibri"/>
               </a:rPr>
-              <a:t>Encuadre · clase regular · VetCare</a:t>
+              <a:t>Encuadre · clase regular · la clínica</a:t>
             </a:r>
           </a:p>
         </p:txBody>
@@ -12032,7 +12245,7 @@
                 </a:solidFill>
                 <a:latin typeface="Calibri"/>
               </a:rPr>
-              <a:t>Teoría Core breve (al servicio del PI)</a:t>
+              <a:t>Teoría Core breve (al servicio del proyecto)</a:t>
             </a:r>
           </a:p>
         </p:txBody>
@@ -12611,7 +12824,7 @@
                 </a:solidFill>
                 <a:latin typeface="Calibri"/>
               </a:rPr>
-              <a:t>El JOIN de tres tablas</a:t>
+              <a:t>Lo que el DDL NO puede defender solo</a:t>
             </a:r>
           </a:p>
         </p:txBody>
@@ -12625,7 +12838,7 @@
         <p:spPr>
           <a:xfrm>
             <a:off x="457200" y="1261872"/>
-            <a:ext cx="11277295" cy="4773168"/>
+            <a:ext cx="11277295" cy="5093208"/>
           </a:xfrm>
           <a:prstGeom prst="roundRect">
             <a:avLst>
@@ -12745,7 +12958,7 @@
         <p:spPr>
           <a:xfrm>
             <a:off x="777240" y="1719072"/>
-            <a:ext cx="10637215" cy="4133087"/>
+            <a:ext cx="10637215" cy="4453128"/>
           </a:xfrm>
           <a:prstGeom prst="rect">
             <a:avLst/>
@@ -12770,7 +12983,7 @@
                 </a:solidFill>
                 <a:latin typeface="Calibri"/>
               </a:rPr>
-              <a:t>SELECT m.nombre    AS mascota,</a:t>
+              <a:t>-- La FK garantiza que el identificador EXISTA. No que el negocio lo quiera.</a:t>
             </a:r>
           </a:p>
           <a:p>
@@ -12786,7 +12999,7 @@
                 </a:solidFill>
                 <a:latin typeface="Calibri"/>
               </a:rPr>
-              <a:t>       d.nombre    AS dueno,</a:t>
+              <a:t>UPDATE mascota SET activa = 'N' WHERE id_mascota = 1;   -- baja logica</a:t>
             </a:r>
           </a:p>
           <a:p>
@@ -12802,7 +13015,7 @@
                 </a:solidFill>
                 <a:latin typeface="Calibri"/>
               </a:rPr>
-              <a:t>       c.fecha_hora,</a:t>
+              <a:t/>
             </a:r>
           </a:p>
           <a:p>
@@ -12818,7 +13031,7 @@
                 </a:solidFill>
                 <a:latin typeface="Calibri"/>
               </a:rPr>
-              <a:t>       c.estado</a:t>
+              <a:t>INSERT INTO cita (id_mascota, fecha_hora, estado)</a:t>
             </a:r>
           </a:p>
           <a:p>
@@ -12834,7 +13047,7 @@
                 </a:solidFill>
                 <a:latin typeface="Calibri"/>
               </a:rPr>
-              <a:t>FROM cita c</a:t>
+              <a:t>VALUES (1, TIMESTAMP '2026-09-02 08:00:00', 'PROGRAMADA');</a:t>
             </a:r>
           </a:p>
           <a:p>
@@ -12850,7 +13063,7 @@
                 </a:solidFill>
                 <a:latin typeface="Calibri"/>
               </a:rPr>
-              <a:t>JOIN mascota m ON m.id_mascota = c.id_mascota</a:t>
+              <a:t>-- INSERT 0 1   &lt;-- la acepta: para el motor la mascota 1 existe</a:t>
             </a:r>
           </a:p>
           <a:p>
@@ -12866,7 +13079,7 @@
                 </a:solidFill>
                 <a:latin typeface="Calibri"/>
               </a:rPr>
-              <a:t>JOIN dueno   d ON d.id_dueno   = m.id_dueno</a:t>
+              <a:t/>
             </a:r>
           </a:p>
           <a:p>
@@ -12882,7 +13095,7 @@
                 </a:solidFill>
                 <a:latin typeface="Calibri"/>
               </a:rPr>
-              <a:t>WHERE c.fecha_hora &gt;= DATE '2026-09-01'</a:t>
+              <a:t>-- Un CHECK tampoco: solo mira columnas de SU propia fila.</a:t>
             </a:r>
           </a:p>
           <a:p>
@@ -12898,7 +13111,7 @@
                 </a:solidFill>
                 <a:latin typeface="Calibri"/>
               </a:rPr>
-              <a:t>  AND m.activa = 'S'</a:t>
+              <a:t>-- La regla «una mascota inactiva no agenda» necesita consultar OTRA tabla,</a:t>
             </a:r>
           </a:p>
           <a:p>
@@ -12914,7 +13127,7 @@
                 </a:solidFill>
                 <a:latin typeface="Calibri"/>
               </a:rPr>
-              <a:t>ORDER BY c.fecha_hora;</a:t>
+              <a:t>-- y eso es un procedimiento (Clase 3) o un trigger (Clase 4).</a:t>
             </a:r>
           </a:p>
         </p:txBody>
@@ -12922,41 +13135,6 @@
       <p:sp>
         <p:nvSpPr>
           <p:cNvPr id="9" name="TextBox 8"/>
-          <p:cNvSpPr txBox="1"/>
-          <p:nvPr/>
-        </p:nvSpPr>
-        <p:spPr>
-          <a:xfrm>
-            <a:off x="457200" y="6080760"/>
-            <a:ext cx="11277295" cy="320040"/>
-          </a:xfrm>
-          <a:prstGeom prst="rect">
-            <a:avLst/>
-          </a:prstGeom>
-          <a:noFill/>
-        </p:spPr>
-        <p:txBody>
-          <a:bodyPr wrap="square">
-            <a:spAutoFit/>
-          </a:bodyPr>
-          <a:lstStyle/>
-          <a:p>
-            <a:pPr algn="ctr"/>
-            <a:r>
-              <a:rPr sz="1200" b="0" i="1">
-                <a:solidFill>
-                  <a:srgbClr val="666666"/>
-                </a:solidFill>
-                <a:latin typeface="Calibri"/>
-              </a:rPr>
-              <a:t>Cada JOIN sigue una FK: cita llega a mascota por id_mascota, y mascota a dueno por id_dueno. El WHERE filtra despues de unir; si falta una condicion ON, el resultado no es un error sino un producto cartesiano.</a:t>
-            </a:r>
-          </a:p>
-        </p:txBody>
-      </p:sp>
-      <p:sp>
-        <p:nvSpPr>
-          <p:cNvPr id="10" name="TextBox 9"/>
           <p:cNvSpPr txBox="1"/>
           <p:nvPr/>
         </p:nvSpPr>
@@ -13024,7 +13202,7 @@
         <p:spPr>
           <a:xfrm>
             <a:off x="0" y="0"/>
-            <a:ext cx="12191695" cy="960120"/>
+            <a:ext cx="12191695" cy="1170432"/>
           </a:xfrm>
           <a:prstGeom prst="rect">
             <a:avLst/>
@@ -13066,7 +13244,7 @@
         </p:nvSpPr>
         <p:spPr>
           <a:xfrm>
-            <a:off x="0" y="960120"/>
+            <a:off x="0" y="1170432"/>
             <a:ext cx="12191695" cy="41148"/>
           </a:xfrm>
           <a:prstGeom prst="rect">
@@ -13110,7 +13288,7 @@
         <p:spPr>
           <a:xfrm>
             <a:off x="457200" y="164592"/>
-            <a:ext cx="11277295" cy="502920"/>
+            <a:ext cx="11277295" cy="384048"/>
           </a:xfrm>
           <a:prstGeom prst="rect">
             <a:avLst/>
@@ -13130,69 +13308,60 @@
                 </a:solidFill>
                 <a:latin typeface="Calibri"/>
               </a:rPr>
-              <a:t>Lo que el DDL NO puede defender solo</a:t>
-            </a:r>
-          </a:p>
-        </p:txBody>
-      </p:sp>
-      <p:sp>
-        <p:nvSpPr>
-          <p:cNvPr id="5" name="Rounded Rectangle 4"/>
+              <a:t>ER minimo la clínica (con cardinalidad)</a:t>
+            </a:r>
+          </a:p>
+        </p:txBody>
+      </p:sp>
+      <p:sp>
+        <p:nvSpPr>
+          <p:cNvPr id="5" name="TextBox 4"/>
+          <p:cNvSpPr txBox="1"/>
+          <p:nvPr/>
+        </p:nvSpPr>
+        <p:spPr>
+          <a:xfrm>
+            <a:off x="457200" y="566928"/>
+            <a:ext cx="11277295" cy="411480"/>
+          </a:xfrm>
+          <a:prstGeom prst="rect">
+            <a:avLst/>
+          </a:prstGeom>
+          <a:noFill/>
+        </p:spPr>
+        <p:txBody>
+          <a:bodyPr wrap="square">
+            <a:spAutoFit/>
+          </a:bodyPr>
+          <a:lstStyle/>
+          <a:p>
+            <a:r>
+              <a:rPr sz="1400" b="0" i="0">
+                <a:solidFill>
+                  <a:srgbClr val="B8D8EE"/>
+                </a:solidFill>
+                <a:latin typeface="Calibri"/>
+              </a:rPr>
+              <a:t>La FK siempre vive en la tabla del lado “N” de la relacion</a:t>
+            </a:r>
+          </a:p>
+        </p:txBody>
+      </p:sp>
+      <p:sp>
+        <p:nvSpPr>
+          <p:cNvPr id="6" name="Rounded Rectangle 5"/>
           <p:cNvSpPr/>
           <p:nvPr/>
         </p:nvSpPr>
         <p:spPr>
           <a:xfrm>
-            <a:off x="457200" y="1261872"/>
-            <a:ext cx="11277295" cy="5093208"/>
+            <a:off x="548640" y="2011680"/>
+            <a:ext cx="2468880" cy="1463040"/>
           </a:xfrm>
           <a:prstGeom prst="roundRect">
             <a:avLst>
               <a:gd name="adj" fmla="val 12000"/>
             </a:avLst>
-          </a:prstGeom>
-          <a:solidFill>
-            <a:srgbClr val="1E2A38"/>
-          </a:solidFill>
-          <a:ln>
-            <a:noFill/>
-          </a:ln>
-        </p:spPr>
-        <p:style>
-          <a:lnRef idx="1">
-            <a:schemeClr val="accent1"/>
-          </a:lnRef>
-          <a:fillRef idx="3">
-            <a:schemeClr val="accent1"/>
-          </a:fillRef>
-          <a:effectRef idx="2">
-            <a:schemeClr val="accent1"/>
-          </a:effectRef>
-          <a:fontRef idx="minor">
-            <a:schemeClr val="lt1"/>
-          </a:fontRef>
-        </p:style>
-        <p:txBody>
-          <a:bodyPr rtlCol="0" anchor="ctr"/>
-          <a:lstStyle/>
-          <a:p>
-            <a:pPr algn="ctr"/>
-          </a:p>
-        </p:txBody>
-      </p:sp>
-      <p:sp>
-        <p:nvSpPr>
-          <p:cNvPr id="6" name="Rectangle 5"/>
-          <p:cNvSpPr/>
-          <p:nvPr/>
-        </p:nvSpPr>
-        <p:spPr>
-          <a:xfrm>
-            <a:off x="457200" y="1261872"/>
-            <a:ext cx="11277295" cy="320040"/>
-          </a:xfrm>
-          <a:prstGeom prst="rect">
-            <a:avLst/>
           </a:prstGeom>
           <a:solidFill>
             <a:srgbClr val="095292"/>
@@ -13216,55 +13385,239 @@
           </a:fontRef>
         </p:style>
         <p:txBody>
-          <a:bodyPr rtlCol="0" anchor="ctr"/>
+          <a:bodyPr rtlCol="0" anchor="ctr" wrap="square"/>
           <a:lstStyle/>
           <a:p>
             <a:pPr algn="ctr"/>
-          </a:p>
-        </p:txBody>
-      </p:sp>
-      <p:sp>
-        <p:nvSpPr>
-          <p:cNvPr id="7" name="TextBox 6"/>
+            <a:r>
+              <a:rPr sz="1300" b="1" i="0">
+                <a:solidFill>
+                  <a:srgbClr val="FFFFFF"/>
+                </a:solidFill>
+                <a:latin typeface="Calibri"/>
+              </a:rPr>
+              <a:t>Dueño
+id_dueno (PK)
+nombre, telefono</a:t>
+            </a:r>
+          </a:p>
+        </p:txBody>
+      </p:sp>
+      <p:sp>
+        <p:nvSpPr>
+          <p:cNvPr id="7" name="Rounded Rectangle 6"/>
+          <p:cNvSpPr/>
+          <p:nvPr/>
+        </p:nvSpPr>
+        <p:spPr>
+          <a:xfrm>
+            <a:off x="3749039" y="2011680"/>
+            <a:ext cx="2468880" cy="1463040"/>
+          </a:xfrm>
+          <a:prstGeom prst="roundRect">
+            <a:avLst>
+              <a:gd name="adj" fmla="val 12000"/>
+            </a:avLst>
+          </a:prstGeom>
+          <a:solidFill>
+            <a:srgbClr val="269CCB"/>
+          </a:solidFill>
+          <a:ln>
+            <a:noFill/>
+          </a:ln>
+        </p:spPr>
+        <p:style>
+          <a:lnRef idx="1">
+            <a:schemeClr val="accent1"/>
+          </a:lnRef>
+          <a:fillRef idx="3">
+            <a:schemeClr val="accent1"/>
+          </a:fillRef>
+          <a:effectRef idx="2">
+            <a:schemeClr val="accent1"/>
+          </a:effectRef>
+          <a:fontRef idx="minor">
+            <a:schemeClr val="lt1"/>
+          </a:fontRef>
+        </p:style>
+        <p:txBody>
+          <a:bodyPr rtlCol="0" anchor="ctr" wrap="square"/>
+          <a:lstStyle/>
+          <a:p>
+            <a:pPr algn="ctr"/>
+            <a:r>
+              <a:rPr sz="1300" b="1" i="0">
+                <a:solidFill>
+                  <a:srgbClr val="FFFFFF"/>
+                </a:solidFill>
+                <a:latin typeface="Calibri"/>
+              </a:rPr>
+              <a:t>Mascota
+id_mascota (PK)
+id_dueno (FK)
+activa</a:t>
+            </a:r>
+          </a:p>
+        </p:txBody>
+      </p:sp>
+      <p:sp>
+        <p:nvSpPr>
+          <p:cNvPr id="8" name="Rounded Rectangle 7"/>
+          <p:cNvSpPr/>
+          <p:nvPr/>
+        </p:nvSpPr>
+        <p:spPr>
+          <a:xfrm>
+            <a:off x="6949440" y="2011680"/>
+            <a:ext cx="2468880" cy="1463040"/>
+          </a:xfrm>
+          <a:prstGeom prst="roundRect">
+            <a:avLst>
+              <a:gd name="adj" fmla="val 12000"/>
+            </a:avLst>
+          </a:prstGeom>
+          <a:solidFill>
+            <a:srgbClr val="095292"/>
+          </a:solidFill>
+          <a:ln>
+            <a:noFill/>
+          </a:ln>
+        </p:spPr>
+        <p:style>
+          <a:lnRef idx="1">
+            <a:schemeClr val="accent1"/>
+          </a:lnRef>
+          <a:fillRef idx="3">
+            <a:schemeClr val="accent1"/>
+          </a:fillRef>
+          <a:effectRef idx="2">
+            <a:schemeClr val="accent1"/>
+          </a:effectRef>
+          <a:fontRef idx="minor">
+            <a:schemeClr val="lt1"/>
+          </a:fontRef>
+        </p:style>
+        <p:txBody>
+          <a:bodyPr rtlCol="0" anchor="ctr" wrap="square"/>
+          <a:lstStyle/>
+          <a:p>
+            <a:pPr algn="ctr"/>
+            <a:r>
+              <a:rPr sz="1300" b="1" i="0">
+                <a:solidFill>
+                  <a:srgbClr val="FFFFFF"/>
+                </a:solidFill>
+                <a:latin typeface="Calibri"/>
+              </a:rPr>
+              <a:t>Cita
+id_cita (PK)
+id_mascota (FK)
+fecha_hora</a:t>
+            </a:r>
+          </a:p>
+        </p:txBody>
+      </p:sp>
+      <p:sp>
+        <p:nvSpPr>
+          <p:cNvPr id="9" name="Rounded Rectangle 8"/>
+          <p:cNvSpPr/>
+          <p:nvPr/>
+        </p:nvSpPr>
+        <p:spPr>
+          <a:xfrm>
+            <a:off x="6949440" y="4023360"/>
+            <a:ext cx="2468880" cy="1005840"/>
+          </a:xfrm>
+          <a:prstGeom prst="roundRect">
+            <a:avLst>
+              <a:gd name="adj" fmla="val 12000"/>
+            </a:avLst>
+          </a:prstGeom>
+          <a:solidFill>
+            <a:srgbClr val="269CCB"/>
+          </a:solidFill>
+          <a:ln>
+            <a:noFill/>
+          </a:ln>
+        </p:spPr>
+        <p:style>
+          <a:lnRef idx="1">
+            <a:schemeClr val="accent1"/>
+          </a:lnRef>
+          <a:fillRef idx="3">
+            <a:schemeClr val="accent1"/>
+          </a:fillRef>
+          <a:effectRef idx="2">
+            <a:schemeClr val="accent1"/>
+          </a:effectRef>
+          <a:fontRef idx="minor">
+            <a:schemeClr val="lt1"/>
+          </a:fontRef>
+        </p:style>
+        <p:txBody>
+          <a:bodyPr rtlCol="0" anchor="ctr" wrap="square"/>
+          <a:lstStyle/>
+          <a:p>
+            <a:pPr algn="ctr"/>
+            <a:r>
+              <a:rPr sz="1300" b="1" i="0">
+                <a:solidFill>
+                  <a:srgbClr val="FFFFFF"/>
+                </a:solidFill>
+                <a:latin typeface="Calibri"/>
+              </a:rPr>
+              <a:t>Veterinario
+id_veterinario (PK)</a:t>
+            </a:r>
+          </a:p>
+        </p:txBody>
+      </p:sp>
+      <p:cxnSp>
+        <p:nvCxnSpPr>
+          <p:cNvPr id="10" name="Connector 9"/>
+          <p:cNvCxnSpPr/>
+          <p:nvPr/>
+        </p:nvCxnSpPr>
+        <p:spPr>
+          <a:xfrm>
+            <a:off x="3017520" y="2743200"/>
+            <a:ext cx="731519" cy="0"/>
+          </a:xfrm>
+          <a:prstGeom prst="line">
+            <a:avLst/>
+          </a:prstGeom>
+          <a:ln w="22225">
+            <a:solidFill>
+              <a:srgbClr val="666666"/>
+            </a:solidFill>
+            <a:tailEnd type="triangle" w="med" len="med"/>
+          </a:ln>
+        </p:spPr>
+        <p:style>
+          <a:lnRef idx="2">
+            <a:schemeClr val="accent1"/>
+          </a:lnRef>
+          <a:fillRef idx="0">
+            <a:schemeClr val="accent1"/>
+          </a:fillRef>
+          <a:effectRef idx="1">
+            <a:schemeClr val="accent1"/>
+          </a:effectRef>
+          <a:fontRef idx="minor">
+            <a:schemeClr val="tx1"/>
+          </a:fontRef>
+        </p:style>
+      </p:cxnSp>
+      <p:sp>
+        <p:nvSpPr>
+          <p:cNvPr id="11" name="TextBox 10"/>
           <p:cNvSpPr txBox="1"/>
           <p:nvPr/>
         </p:nvSpPr>
         <p:spPr>
           <a:xfrm>
-            <a:off x="685800" y="1307592"/>
-            <a:ext cx="10820095" cy="256032"/>
-          </a:xfrm>
-          <a:prstGeom prst="rect">
-            <a:avLst/>
-          </a:prstGeom>
-          <a:noFill/>
-        </p:spPr>
-        <p:txBody>
-          <a:bodyPr wrap="square" anchor="ctr"/>
-          <a:lstStyle/>
-          <a:p>
-            <a:r>
-              <a:rPr sz="1000" b="1" i="0">
-                <a:solidFill>
-                  <a:srgbClr val="269CCB"/>
-                </a:solidFill>
-                <a:latin typeface="Calibri"/>
-              </a:rPr>
-              <a:t>● ● ●</a:t>
-            </a:r>
-          </a:p>
-        </p:txBody>
-      </p:sp>
-      <p:sp>
-        <p:nvSpPr>
-          <p:cNvPr id="8" name="TextBox 7"/>
-          <p:cNvSpPr txBox="1"/>
-          <p:nvPr/>
-        </p:nvSpPr>
-        <p:spPr>
-          <a:xfrm>
-            <a:off x="777240" y="1719072"/>
-            <a:ext cx="10637215" cy="4453128"/>
+            <a:off x="2560320" y="2542032"/>
+            <a:ext cx="1645920" cy="320040"/>
           </a:xfrm>
           <a:prstGeom prst="rect">
             <a:avLst/>
@@ -13277,170 +13630,198 @@
           </a:bodyPr>
           <a:lstStyle/>
           <a:p>
-            <a:pPr>
-              <a:spcAft>
-                <a:spcPts val="400"/>
-              </a:spcAft>
-            </a:pPr>
-            <a:r>
-              <a:rPr sz="1400" b="0" i="0">
-                <a:solidFill>
-                  <a:srgbClr val="FFFFFF"/>
-                </a:solidFill>
-                <a:latin typeface="Calibri"/>
-              </a:rPr>
-              <a:t>-- La FK garantiza que el identificador EXISTA. No que el negocio lo quiera.</a:t>
-            </a:r>
-          </a:p>
-          <a:p>
-            <a:pPr>
-              <a:spcAft>
-                <a:spcPts val="400"/>
-              </a:spcAft>
-            </a:pPr>
-            <a:r>
-              <a:rPr sz="1400" b="0" i="0">
-                <a:solidFill>
-                  <a:srgbClr val="FFFFFF"/>
-                </a:solidFill>
-                <a:latin typeface="Calibri"/>
-              </a:rPr>
-              <a:t>UPDATE mascota SET activa = 'N' WHERE id_mascota = 1;   -- baja logica</a:t>
-            </a:r>
-          </a:p>
-          <a:p>
-            <a:pPr>
-              <a:spcAft>
-                <a:spcPts val="400"/>
-              </a:spcAft>
-            </a:pPr>
-            <a:r>
-              <a:rPr sz="1400" b="0" i="0">
-                <a:solidFill>
-                  <a:srgbClr val="FFFFFF"/>
-                </a:solidFill>
-                <a:latin typeface="Calibri"/>
-              </a:rPr>
-              <a:t/>
-            </a:r>
-          </a:p>
-          <a:p>
-            <a:pPr>
-              <a:spcAft>
-                <a:spcPts val="400"/>
-              </a:spcAft>
-            </a:pPr>
-            <a:r>
-              <a:rPr sz="1400" b="0" i="0">
-                <a:solidFill>
-                  <a:srgbClr val="FFFFFF"/>
-                </a:solidFill>
-                <a:latin typeface="Calibri"/>
-              </a:rPr>
-              <a:t>INSERT INTO cita (id_mascota, fecha_hora, estado)</a:t>
-            </a:r>
-          </a:p>
-          <a:p>
-            <a:pPr>
-              <a:spcAft>
-                <a:spcPts val="400"/>
-              </a:spcAft>
-            </a:pPr>
-            <a:r>
-              <a:rPr sz="1400" b="0" i="0">
-                <a:solidFill>
-                  <a:srgbClr val="FFFFFF"/>
-                </a:solidFill>
-                <a:latin typeface="Calibri"/>
-              </a:rPr>
-              <a:t>VALUES (1, TIMESTAMP '2026-09-02 08:00:00', 'PROGRAMADA');</a:t>
-            </a:r>
-          </a:p>
-          <a:p>
-            <a:pPr>
-              <a:spcAft>
-                <a:spcPts val="400"/>
-              </a:spcAft>
-            </a:pPr>
-            <a:r>
-              <a:rPr sz="1400" b="0" i="0">
-                <a:solidFill>
-                  <a:srgbClr val="FFFFFF"/>
-                </a:solidFill>
-                <a:latin typeface="Calibri"/>
-              </a:rPr>
-              <a:t>-- INSERT 0 1   &lt;-- la acepta: para el motor la mascota 1 existe</a:t>
-            </a:r>
-          </a:p>
-          <a:p>
-            <a:pPr>
-              <a:spcAft>
-                <a:spcPts val="400"/>
-              </a:spcAft>
-            </a:pPr>
-            <a:r>
-              <a:rPr sz="1400" b="0" i="0">
-                <a:solidFill>
-                  <a:srgbClr val="FFFFFF"/>
-                </a:solidFill>
-                <a:latin typeface="Calibri"/>
-              </a:rPr>
-              <a:t/>
-            </a:r>
-          </a:p>
-          <a:p>
-            <a:pPr>
-              <a:spcAft>
-                <a:spcPts val="400"/>
-              </a:spcAft>
-            </a:pPr>
-            <a:r>
-              <a:rPr sz="1400" b="0" i="0">
-                <a:solidFill>
-                  <a:srgbClr val="FFFFFF"/>
-                </a:solidFill>
-                <a:latin typeface="Calibri"/>
-              </a:rPr>
-              <a:t>-- Un CHECK tampoco: solo mira columnas de SU propia fila.</a:t>
-            </a:r>
-          </a:p>
-          <a:p>
-            <a:pPr>
-              <a:spcAft>
-                <a:spcPts val="400"/>
-              </a:spcAft>
-            </a:pPr>
-            <a:r>
-              <a:rPr sz="1400" b="0" i="0">
-                <a:solidFill>
-                  <a:srgbClr val="FFFFFF"/>
-                </a:solidFill>
-                <a:latin typeface="Calibri"/>
-              </a:rPr>
-              <a:t>-- La regla «una mascota inactiva no agenda» necesita consultar OTRA tabla,</a:t>
-            </a:r>
-          </a:p>
-          <a:p>
-            <a:pPr>
-              <a:spcAft>
-                <a:spcPts val="400"/>
-              </a:spcAft>
-            </a:pPr>
-            <a:r>
-              <a:rPr sz="1400" b="0" i="0">
-                <a:solidFill>
-                  <a:srgbClr val="FFFFFF"/>
-                </a:solidFill>
-                <a:latin typeface="Calibri"/>
-              </a:rPr>
-              <a:t>-- y eso es un procedimiento (Clase 3) o un trigger (Clase 4).</a:t>
-            </a:r>
-          </a:p>
-        </p:txBody>
-      </p:sp>
-      <p:sp>
-        <p:nvSpPr>
-          <p:cNvPr id="9" name="TextBox 8"/>
+            <a:pPr algn="ctr"/>
+            <a:r>
+              <a:rPr sz="1000" b="0" i="1">
+                <a:solidFill>
+                  <a:srgbClr val="666666"/>
+                </a:solidFill>
+                <a:latin typeface="Calibri"/>
+              </a:rPr>
+              <a:t>1: N</a:t>
+            </a:r>
+          </a:p>
+        </p:txBody>
+      </p:sp>
+      <p:cxnSp>
+        <p:nvCxnSpPr>
+          <p:cNvPr id="12" name="Connector 11"/>
+          <p:cNvCxnSpPr/>
+          <p:nvPr/>
+        </p:nvCxnSpPr>
+        <p:spPr>
+          <a:xfrm>
+            <a:off x="6217920" y="2743200"/>
+            <a:ext cx="731520" cy="0"/>
+          </a:xfrm>
+          <a:prstGeom prst="line">
+            <a:avLst/>
+          </a:prstGeom>
+          <a:ln w="22225">
+            <a:solidFill>
+              <a:srgbClr val="666666"/>
+            </a:solidFill>
+            <a:tailEnd type="triangle" w="med" len="med"/>
+          </a:ln>
+        </p:spPr>
+        <p:style>
+          <a:lnRef idx="2">
+            <a:schemeClr val="accent1"/>
+          </a:lnRef>
+          <a:fillRef idx="0">
+            <a:schemeClr val="accent1"/>
+          </a:fillRef>
+          <a:effectRef idx="1">
+            <a:schemeClr val="accent1"/>
+          </a:effectRef>
+          <a:fontRef idx="minor">
+            <a:schemeClr val="tx1"/>
+          </a:fontRef>
+        </p:style>
+      </p:cxnSp>
+      <p:sp>
+        <p:nvSpPr>
+          <p:cNvPr id="13" name="TextBox 12"/>
+          <p:cNvSpPr txBox="1"/>
+          <p:nvPr/>
+        </p:nvSpPr>
+        <p:spPr>
+          <a:xfrm>
+            <a:off x="5760719" y="2542032"/>
+            <a:ext cx="1645920" cy="320040"/>
+          </a:xfrm>
+          <a:prstGeom prst="rect">
+            <a:avLst/>
+          </a:prstGeom>
+          <a:noFill/>
+        </p:spPr>
+        <p:txBody>
+          <a:bodyPr wrap="square">
+            <a:spAutoFit/>
+          </a:bodyPr>
+          <a:lstStyle/>
+          <a:p>
+            <a:pPr algn="ctr"/>
+            <a:r>
+              <a:rPr sz="1000" b="0" i="1">
+                <a:solidFill>
+                  <a:srgbClr val="666666"/>
+                </a:solidFill>
+                <a:latin typeface="Calibri"/>
+              </a:rPr>
+              <a:t>1: N</a:t>
+            </a:r>
+          </a:p>
+        </p:txBody>
+      </p:sp>
+      <p:cxnSp>
+        <p:nvCxnSpPr>
+          <p:cNvPr id="14" name="Connector 13"/>
+          <p:cNvCxnSpPr/>
+          <p:nvPr/>
+        </p:nvCxnSpPr>
+        <p:spPr>
+          <a:xfrm flipV="1">
+            <a:off x="8183879" y="3474720"/>
+            <a:ext cx="0" cy="548640"/>
+          </a:xfrm>
+          <a:prstGeom prst="line">
+            <a:avLst/>
+          </a:prstGeom>
+          <a:ln w="22225">
+            <a:solidFill>
+              <a:srgbClr val="666666"/>
+            </a:solidFill>
+            <a:tailEnd type="triangle" w="med" len="med"/>
+          </a:ln>
+        </p:spPr>
+        <p:style>
+          <a:lnRef idx="2">
+            <a:schemeClr val="accent1"/>
+          </a:lnRef>
+          <a:fillRef idx="0">
+            <a:schemeClr val="accent1"/>
+          </a:fillRef>
+          <a:effectRef idx="1">
+            <a:schemeClr val="accent1"/>
+          </a:effectRef>
+          <a:fontRef idx="minor">
+            <a:schemeClr val="tx1"/>
+          </a:fontRef>
+        </p:style>
+      </p:cxnSp>
+      <p:sp>
+        <p:nvSpPr>
+          <p:cNvPr id="15" name="TextBox 14"/>
+          <p:cNvSpPr txBox="1"/>
+          <p:nvPr/>
+        </p:nvSpPr>
+        <p:spPr>
+          <a:xfrm>
+            <a:off x="8293607" y="3547872"/>
+            <a:ext cx="1645920" cy="320040"/>
+          </a:xfrm>
+          <a:prstGeom prst="rect">
+            <a:avLst/>
+          </a:prstGeom>
+          <a:noFill/>
+        </p:spPr>
+        <p:txBody>
+          <a:bodyPr wrap="square">
+            <a:spAutoFit/>
+          </a:bodyPr>
+          <a:lstStyle/>
+          <a:p>
+            <a:pPr algn="l"/>
+            <a:r>
+              <a:rPr sz="1000" b="0" i="1">
+                <a:solidFill>
+                  <a:srgbClr val="666666"/>
+                </a:solidFill>
+                <a:latin typeface="Calibri"/>
+              </a:rPr>
+              <a:t>1: N</a:t>
+            </a:r>
+          </a:p>
+        </p:txBody>
+      </p:sp>
+      <p:sp>
+        <p:nvSpPr>
+          <p:cNvPr id="16" name="TextBox 15"/>
+          <p:cNvSpPr txBox="1"/>
+          <p:nvPr/>
+        </p:nvSpPr>
+        <p:spPr>
+          <a:xfrm>
+            <a:off x="457200" y="6263640"/>
+            <a:ext cx="11277295" cy="411480"/>
+          </a:xfrm>
+          <a:prstGeom prst="rect">
+            <a:avLst/>
+          </a:prstGeom>
+          <a:noFill/>
+        </p:spPr>
+        <p:txBody>
+          <a:bodyPr wrap="square">
+            <a:spAutoFit/>
+          </a:bodyPr>
+          <a:lstStyle/>
+          <a:p>
+            <a:r>
+              <a:rPr sz="1100" b="0" i="1">
+                <a:solidFill>
+                  <a:srgbClr val="666666"/>
+                </a:solidFill>
+                <a:latin typeface="Calibri"/>
+              </a:rPr>
+              <a:t>“Un dueño tiene N mascotas”, “una mascota tiene N citas”, “un veterinario atiende N citas”. La PK identifica cada fila; la FK materializa la relación y la BD la hace cumplir: una cita con id_mascota 999 que no existe se rechaza con violación de clave foránea.</a:t>
+            </a:r>
+          </a:p>
+        </p:txBody>
+      </p:sp>
+      <p:sp>
+        <p:nvSpPr>
+          <p:cNvPr id="17" name="TextBox 16"/>
           <p:cNvSpPr txBox="1"/>
           <p:nvPr/>
         </p:nvSpPr>
@@ -13508,7 +13889,7 @@
         <p:spPr>
           <a:xfrm>
             <a:off x="0" y="0"/>
-            <a:ext cx="12191695" cy="1170432"/>
+            <a:ext cx="12191695" cy="960120"/>
           </a:xfrm>
           <a:prstGeom prst="rect">
             <a:avLst/>
@@ -13550,7 +13931,7 @@
         </p:nvSpPr>
         <p:spPr>
           <a:xfrm>
-            <a:off x="0" y="1170432"/>
+            <a:off x="0" y="960120"/>
             <a:ext cx="12191695" cy="41148"/>
           </a:xfrm>
           <a:prstGeom prst="rect">
@@ -13594,7 +13975,7 @@
         <p:spPr>
           <a:xfrm>
             <a:off x="457200" y="164592"/>
-            <a:ext cx="11277295" cy="384048"/>
+            <a:ext cx="11277295" cy="502920"/>
           </a:xfrm>
           <a:prstGeom prst="rect">
             <a:avLst/>
@@ -13614,60 +13995,69 @@
                 </a:solidFill>
                 <a:latin typeface="Calibri"/>
               </a:rPr>
-              <a:t>ER minimo VetCare (con cardinalidad)</a:t>
-            </a:r>
-          </a:p>
-        </p:txBody>
-      </p:sp>
-      <p:sp>
-        <p:nvSpPr>
-          <p:cNvPr id="5" name="TextBox 4"/>
-          <p:cNvSpPr txBox="1"/>
-          <p:nvPr/>
-        </p:nvSpPr>
-        <p:spPr>
-          <a:xfrm>
-            <a:off x="457200" y="566928"/>
-            <a:ext cx="11277295" cy="411480"/>
-          </a:xfrm>
-          <a:prstGeom prst="rect">
-            <a:avLst/>
-          </a:prstGeom>
-          <a:noFill/>
-        </p:spPr>
-        <p:txBody>
-          <a:bodyPr wrap="square">
-            <a:spAutoFit/>
-          </a:bodyPr>
-          <a:lstStyle/>
-          <a:p>
-            <a:r>
-              <a:rPr sz="1400" b="0" i="0">
-                <a:solidFill>
-                  <a:srgbClr val="B8D8EE"/>
-                </a:solidFill>
-                <a:latin typeface="Calibri"/>
-              </a:rPr>
-              <a:t>La FK siempre vive en la tabla del lado “N” de la relacion</a:t>
-            </a:r>
-          </a:p>
-        </p:txBody>
-      </p:sp>
-      <p:sp>
-        <p:nvSpPr>
-          <p:cNvPr id="6" name="Rounded Rectangle 5"/>
+              <a:t>El DDL minimo que sostiene el ER</a:t>
+            </a:r>
+          </a:p>
+        </p:txBody>
+      </p:sp>
+      <p:sp>
+        <p:nvSpPr>
+          <p:cNvPr id="5" name="Rounded Rectangle 4"/>
           <p:cNvSpPr/>
           <p:nvPr/>
         </p:nvSpPr>
         <p:spPr>
           <a:xfrm>
-            <a:off x="548640" y="2011680"/>
-            <a:ext cx="2468880" cy="1463040"/>
+            <a:off x="457200" y="1261872"/>
+            <a:ext cx="11277295" cy="4773168"/>
           </a:xfrm>
           <a:prstGeom prst="roundRect">
             <a:avLst>
               <a:gd name="adj" fmla="val 12000"/>
             </a:avLst>
+          </a:prstGeom>
+          <a:solidFill>
+            <a:srgbClr val="1E2A38"/>
+          </a:solidFill>
+          <a:ln>
+            <a:noFill/>
+          </a:ln>
+        </p:spPr>
+        <p:style>
+          <a:lnRef idx="1">
+            <a:schemeClr val="accent1"/>
+          </a:lnRef>
+          <a:fillRef idx="3">
+            <a:schemeClr val="accent1"/>
+          </a:fillRef>
+          <a:effectRef idx="2">
+            <a:schemeClr val="accent1"/>
+          </a:effectRef>
+          <a:fontRef idx="minor">
+            <a:schemeClr val="lt1"/>
+          </a:fontRef>
+        </p:style>
+        <p:txBody>
+          <a:bodyPr rtlCol="0" anchor="ctr"/>
+          <a:lstStyle/>
+          <a:p>
+            <a:pPr algn="ctr"/>
+          </a:p>
+        </p:txBody>
+      </p:sp>
+      <p:sp>
+        <p:nvSpPr>
+          <p:cNvPr id="6" name="Rectangle 5"/>
+          <p:cNvSpPr/>
+          <p:nvPr/>
+        </p:nvSpPr>
+        <p:spPr>
+          <a:xfrm>
+            <a:off x="457200" y="1261872"/>
+            <a:ext cx="11277295" cy="320040"/>
+          </a:xfrm>
+          <a:prstGeom prst="rect">
+            <a:avLst/>
           </a:prstGeom>
           <a:solidFill>
             <a:srgbClr val="095292"/>
@@ -13691,239 +14081,55 @@
           </a:fontRef>
         </p:style>
         <p:txBody>
-          <a:bodyPr rtlCol="0" anchor="ctr" wrap="square"/>
+          <a:bodyPr rtlCol="0" anchor="ctr"/>
           <a:lstStyle/>
           <a:p>
             <a:pPr algn="ctr"/>
-            <a:r>
-              <a:rPr sz="1300" b="1" i="0">
-                <a:solidFill>
-                  <a:srgbClr val="FFFFFF"/>
-                </a:solidFill>
-                <a:latin typeface="Calibri"/>
-              </a:rPr>
-              <a:t>Dueño
-id_dueno (PK)
-nombre, telefono</a:t>
-            </a:r>
-          </a:p>
-        </p:txBody>
-      </p:sp>
-      <p:sp>
-        <p:nvSpPr>
-          <p:cNvPr id="7" name="Rounded Rectangle 6"/>
-          <p:cNvSpPr/>
-          <p:nvPr/>
-        </p:nvSpPr>
-        <p:spPr>
-          <a:xfrm>
-            <a:off x="3749039" y="2011680"/>
-            <a:ext cx="2468880" cy="1463040"/>
-          </a:xfrm>
-          <a:prstGeom prst="roundRect">
-            <a:avLst>
-              <a:gd name="adj" fmla="val 12000"/>
-            </a:avLst>
-          </a:prstGeom>
-          <a:solidFill>
-            <a:srgbClr val="269CCB"/>
-          </a:solidFill>
-          <a:ln>
-            <a:noFill/>
-          </a:ln>
-        </p:spPr>
-        <p:style>
-          <a:lnRef idx="1">
-            <a:schemeClr val="accent1"/>
-          </a:lnRef>
-          <a:fillRef idx="3">
-            <a:schemeClr val="accent1"/>
-          </a:fillRef>
-          <a:effectRef idx="2">
-            <a:schemeClr val="accent1"/>
-          </a:effectRef>
-          <a:fontRef idx="minor">
-            <a:schemeClr val="lt1"/>
-          </a:fontRef>
-        </p:style>
-        <p:txBody>
-          <a:bodyPr rtlCol="0" anchor="ctr" wrap="square"/>
-          <a:lstStyle/>
-          <a:p>
-            <a:pPr algn="ctr"/>
-            <a:r>
-              <a:rPr sz="1300" b="1" i="0">
-                <a:solidFill>
-                  <a:srgbClr val="FFFFFF"/>
-                </a:solidFill>
-                <a:latin typeface="Calibri"/>
-              </a:rPr>
-              <a:t>Mascota
-id_mascota (PK)
-id_dueno (FK)
-activa</a:t>
-            </a:r>
-          </a:p>
-        </p:txBody>
-      </p:sp>
-      <p:sp>
-        <p:nvSpPr>
-          <p:cNvPr id="8" name="Rounded Rectangle 7"/>
-          <p:cNvSpPr/>
-          <p:nvPr/>
-        </p:nvSpPr>
-        <p:spPr>
-          <a:xfrm>
-            <a:off x="6949440" y="2011680"/>
-            <a:ext cx="2468880" cy="1463040"/>
-          </a:xfrm>
-          <a:prstGeom prst="roundRect">
-            <a:avLst>
-              <a:gd name="adj" fmla="val 12000"/>
-            </a:avLst>
-          </a:prstGeom>
-          <a:solidFill>
-            <a:srgbClr val="095292"/>
-          </a:solidFill>
-          <a:ln>
-            <a:noFill/>
-          </a:ln>
-        </p:spPr>
-        <p:style>
-          <a:lnRef idx="1">
-            <a:schemeClr val="accent1"/>
-          </a:lnRef>
-          <a:fillRef idx="3">
-            <a:schemeClr val="accent1"/>
-          </a:fillRef>
-          <a:effectRef idx="2">
-            <a:schemeClr val="accent1"/>
-          </a:effectRef>
-          <a:fontRef idx="minor">
-            <a:schemeClr val="lt1"/>
-          </a:fontRef>
-        </p:style>
-        <p:txBody>
-          <a:bodyPr rtlCol="0" anchor="ctr" wrap="square"/>
-          <a:lstStyle/>
-          <a:p>
-            <a:pPr algn="ctr"/>
-            <a:r>
-              <a:rPr sz="1300" b="1" i="0">
-                <a:solidFill>
-                  <a:srgbClr val="FFFFFF"/>
-                </a:solidFill>
-                <a:latin typeface="Calibri"/>
-              </a:rPr>
-              <a:t>Cita
-id_cita (PK)
-id_mascota (FK)
-fecha_hora</a:t>
-            </a:r>
-          </a:p>
-        </p:txBody>
-      </p:sp>
-      <p:sp>
-        <p:nvSpPr>
-          <p:cNvPr id="9" name="Rounded Rectangle 8"/>
-          <p:cNvSpPr/>
-          <p:nvPr/>
-        </p:nvSpPr>
-        <p:spPr>
-          <a:xfrm>
-            <a:off x="6949440" y="4023360"/>
-            <a:ext cx="2468880" cy="1005840"/>
-          </a:xfrm>
-          <a:prstGeom prst="roundRect">
-            <a:avLst>
-              <a:gd name="adj" fmla="val 12000"/>
-            </a:avLst>
-          </a:prstGeom>
-          <a:solidFill>
-            <a:srgbClr val="269CCB"/>
-          </a:solidFill>
-          <a:ln>
-            <a:noFill/>
-          </a:ln>
-        </p:spPr>
-        <p:style>
-          <a:lnRef idx="1">
-            <a:schemeClr val="accent1"/>
-          </a:lnRef>
-          <a:fillRef idx="3">
-            <a:schemeClr val="accent1"/>
-          </a:fillRef>
-          <a:effectRef idx="2">
-            <a:schemeClr val="accent1"/>
-          </a:effectRef>
-          <a:fontRef idx="minor">
-            <a:schemeClr val="lt1"/>
-          </a:fontRef>
-        </p:style>
-        <p:txBody>
-          <a:bodyPr rtlCol="0" anchor="ctr" wrap="square"/>
-          <a:lstStyle/>
-          <a:p>
-            <a:pPr algn="ctr"/>
-            <a:r>
-              <a:rPr sz="1300" b="1" i="0">
-                <a:solidFill>
-                  <a:srgbClr val="FFFFFF"/>
-                </a:solidFill>
-                <a:latin typeface="Calibri"/>
-              </a:rPr>
-              <a:t>Veterinario
-id_veterinario (PK)</a:t>
-            </a:r>
-          </a:p>
-        </p:txBody>
-      </p:sp>
-      <p:cxnSp>
-        <p:nvCxnSpPr>
-          <p:cNvPr id="10" name="Connector 9"/>
-          <p:cNvCxnSpPr/>
-          <p:nvPr/>
-        </p:nvCxnSpPr>
-        <p:spPr>
-          <a:xfrm>
-            <a:off x="3017520" y="2743200"/>
-            <a:ext cx="731519" cy="0"/>
-          </a:xfrm>
-          <a:prstGeom prst="line">
-            <a:avLst/>
-          </a:prstGeom>
-          <a:ln w="22225">
-            <a:solidFill>
-              <a:srgbClr val="666666"/>
-            </a:solidFill>
-            <a:tailEnd type="triangle" w="med" len="med"/>
-          </a:ln>
-        </p:spPr>
-        <p:style>
-          <a:lnRef idx="2">
-            <a:schemeClr val="accent1"/>
-          </a:lnRef>
-          <a:fillRef idx="0">
-            <a:schemeClr val="accent1"/>
-          </a:fillRef>
-          <a:effectRef idx="1">
-            <a:schemeClr val="accent1"/>
-          </a:effectRef>
-          <a:fontRef idx="minor">
-            <a:schemeClr val="tx1"/>
-          </a:fontRef>
-        </p:style>
-      </p:cxnSp>
-      <p:sp>
-        <p:nvSpPr>
-          <p:cNvPr id="11" name="TextBox 10"/>
+          </a:p>
+        </p:txBody>
+      </p:sp>
+      <p:sp>
+        <p:nvSpPr>
+          <p:cNvPr id="7" name="TextBox 6"/>
           <p:cNvSpPr txBox="1"/>
           <p:nvPr/>
         </p:nvSpPr>
         <p:spPr>
           <a:xfrm>
-            <a:off x="2560320" y="2542032"/>
-            <a:ext cx="1645920" cy="320040"/>
+            <a:off x="685800" y="1307592"/>
+            <a:ext cx="10820095" cy="256032"/>
+          </a:xfrm>
+          <a:prstGeom prst="rect">
+            <a:avLst/>
+          </a:prstGeom>
+          <a:noFill/>
+        </p:spPr>
+        <p:txBody>
+          <a:bodyPr wrap="square" anchor="ctr"/>
+          <a:lstStyle/>
+          <a:p>
+            <a:r>
+              <a:rPr sz="1000" b="1" i="0">
+                <a:solidFill>
+                  <a:srgbClr val="269CCB"/>
+                </a:solidFill>
+                <a:latin typeface="Calibri"/>
+              </a:rPr>
+              <a:t>● ● ●</a:t>
+            </a:r>
+          </a:p>
+        </p:txBody>
+      </p:sp>
+      <p:sp>
+        <p:nvSpPr>
+          <p:cNvPr id="8" name="TextBox 7"/>
+          <p:cNvSpPr txBox="1"/>
+          <p:nvPr/>
+        </p:nvSpPr>
+        <p:spPr>
+          <a:xfrm>
+            <a:off x="777240" y="1719072"/>
+            <a:ext cx="10637215" cy="4133087"/>
           </a:xfrm>
           <a:prstGeom prst="rect">
             <a:avLst/>
@@ -13936,65 +14142,145 @@
           </a:bodyPr>
           <a:lstStyle/>
           <a:p>
-            <a:pPr algn="ctr"/>
-            <a:r>
-              <a:rPr sz="1000" b="0" i="1">
-                <a:solidFill>
-                  <a:srgbClr val="666666"/>
-                </a:solidFill>
-                <a:latin typeface="Calibri"/>
-              </a:rPr>
-              <a:t>1: N</a:t>
-            </a:r>
-          </a:p>
-        </p:txBody>
-      </p:sp>
-      <p:cxnSp>
-        <p:nvCxnSpPr>
-          <p:cNvPr id="12" name="Connector 11"/>
-          <p:cNvCxnSpPr/>
-          <p:nvPr/>
-        </p:nvCxnSpPr>
-        <p:spPr>
-          <a:xfrm>
-            <a:off x="6217920" y="2743200"/>
-            <a:ext cx="731520" cy="0"/>
-          </a:xfrm>
-          <a:prstGeom prst="line">
-            <a:avLst/>
-          </a:prstGeom>
-          <a:ln w="22225">
-            <a:solidFill>
-              <a:srgbClr val="666666"/>
-            </a:solidFill>
-            <a:tailEnd type="triangle" w="med" len="med"/>
-          </a:ln>
-        </p:spPr>
-        <p:style>
-          <a:lnRef idx="2">
-            <a:schemeClr val="accent1"/>
-          </a:lnRef>
-          <a:fillRef idx="0">
-            <a:schemeClr val="accent1"/>
-          </a:fillRef>
-          <a:effectRef idx="1">
-            <a:schemeClr val="accent1"/>
-          </a:effectRef>
-          <a:fontRef idx="minor">
-            <a:schemeClr val="tx1"/>
-          </a:fontRef>
-        </p:style>
-      </p:cxnSp>
-      <p:sp>
-        <p:nvSpPr>
-          <p:cNvPr id="13" name="TextBox 12"/>
+            <a:pPr>
+              <a:spcAft>
+                <a:spcPts val="400"/>
+              </a:spcAft>
+            </a:pPr>
+            <a:r>
+              <a:rPr sz="1400" b="0" i="0">
+                <a:solidFill>
+                  <a:srgbClr val="FFFFFF"/>
+                </a:solidFill>
+                <a:latin typeface="Calibri"/>
+              </a:rPr>
+              <a:t>CREATE TABLE mascota (</a:t>
+            </a:r>
+          </a:p>
+          <a:p>
+            <a:pPr>
+              <a:spcAft>
+                <a:spcPts val="400"/>
+              </a:spcAft>
+            </a:pPr>
+            <a:r>
+              <a:rPr sz="1400" b="0" i="0">
+                <a:solidFill>
+                  <a:srgbClr val="FFFFFF"/>
+                </a:solidFill>
+                <a:latin typeface="Calibri"/>
+              </a:rPr>
+              <a:t>  id_mascota INT PRIMARY KEY,               -- PK: identifica la fila</a:t>
+            </a:r>
+          </a:p>
+          <a:p>
+            <a:pPr>
+              <a:spcAft>
+                <a:spcPts val="400"/>
+              </a:spcAft>
+            </a:pPr>
+            <a:r>
+              <a:rPr sz="1400" b="0" i="0">
+                <a:solidFill>
+                  <a:srgbClr val="FFFFFF"/>
+                </a:solidFill>
+                <a:latin typeface="Calibri"/>
+              </a:rPr>
+              <a:t>  id_dueno   INT NOT NULL</a:t>
+            </a:r>
+          </a:p>
+          <a:p>
+            <a:pPr>
+              <a:spcAft>
+                <a:spcPts val="400"/>
+              </a:spcAft>
+            </a:pPr>
+            <a:r>
+              <a:rPr sz="1400" b="0" i="0">
+                <a:solidFill>
+                  <a:srgbClr val="FFFFFF"/>
+                </a:solidFill>
+                <a:latin typeface="Calibri"/>
+              </a:rPr>
+              <a:t>             REFERENCES dueno(id_dueno),    -- FK: materializa la relacion</a:t>
+            </a:r>
+          </a:p>
+          <a:p>
+            <a:pPr>
+              <a:spcAft>
+                <a:spcPts val="400"/>
+              </a:spcAft>
+            </a:pPr>
+            <a:r>
+              <a:rPr sz="1400" b="0" i="0">
+                <a:solidFill>
+                  <a:srgbClr val="FFFFFF"/>
+                </a:solidFill>
+                <a:latin typeface="Calibri"/>
+              </a:rPr>
+              <a:t>  nombre     VARCHAR(60) NOT NULL,</a:t>
+            </a:r>
+          </a:p>
+          <a:p>
+            <a:pPr>
+              <a:spcAft>
+                <a:spcPts val="400"/>
+              </a:spcAft>
+            </a:pPr>
+            <a:r>
+              <a:rPr sz="1400" b="0" i="0">
+                <a:solidFill>
+                  <a:srgbClr val="FFFFFF"/>
+                </a:solidFill>
+                <a:latin typeface="Calibri"/>
+              </a:rPr>
+              <a:t>  activa     CHAR(1) DEFAULT 'S'</a:t>
+            </a:r>
+          </a:p>
+          <a:p>
+            <a:pPr>
+              <a:spcAft>
+                <a:spcPts val="400"/>
+              </a:spcAft>
+            </a:pPr>
+            <a:r>
+              <a:rPr sz="1400" b="0" i="0">
+                <a:solidFill>
+                  <a:srgbClr val="FFFFFF"/>
+                </a:solidFill>
+                <a:latin typeface="Calibri"/>
+              </a:rPr>
+              <a:t>             CHECK (activa IN ('S','N'))    -- regla de negocio en la BD</a:t>
+            </a:r>
+          </a:p>
+          <a:p>
+            <a:pPr>
+              <a:spcAft>
+                <a:spcPts val="400"/>
+              </a:spcAft>
+            </a:pPr>
+            <a:r>
+              <a:rPr sz="1400" b="0" i="0">
+                <a:solidFill>
+                  <a:srgbClr val="FFFFFF"/>
+                </a:solidFill>
+                <a:latin typeface="Calibri"/>
+              </a:rPr>
+              <a:t>);</a:t>
+            </a:r>
+          </a:p>
+        </p:txBody>
+      </p:sp>
+      <p:sp>
+        <p:nvSpPr>
+          <p:cNvPr id="9" name="TextBox 8"/>
           <p:cNvSpPr txBox="1"/>
           <p:nvPr/>
         </p:nvSpPr>
         <p:spPr>
           <a:xfrm>
-            <a:off x="5760719" y="2542032"/>
-            <a:ext cx="1645920" cy="320040"/>
+            <a:off x="457200" y="6080760"/>
+            <a:ext cx="11277295" cy="320040"/>
           </a:xfrm>
           <a:prstGeom prst="rect">
             <a:avLst/>
@@ -14009,125 +14295,20 @@
           <a:p>
             <a:pPr algn="ctr"/>
             <a:r>
-              <a:rPr sz="1000" b="0" i="1">
+              <a:rPr sz="1200" b="0" i="1">
                 <a:solidFill>
                   <a:srgbClr val="666666"/>
                 </a:solidFill>
                 <a:latin typeface="Calibri"/>
               </a:rPr>
-              <a:t>1: N</a:t>
-            </a:r>
-          </a:p>
-        </p:txBody>
-      </p:sp>
-      <p:cxnSp>
-        <p:nvCxnSpPr>
-          <p:cNvPr id="14" name="Connector 13"/>
-          <p:cNvCxnSpPr/>
-          <p:nvPr/>
-        </p:nvCxnSpPr>
-        <p:spPr>
-          <a:xfrm flipV="1">
-            <a:off x="8183879" y="3474720"/>
-            <a:ext cx="0" cy="548640"/>
-          </a:xfrm>
-          <a:prstGeom prst="line">
-            <a:avLst/>
-          </a:prstGeom>
-          <a:ln w="22225">
-            <a:solidFill>
-              <a:srgbClr val="666666"/>
-            </a:solidFill>
-            <a:tailEnd type="triangle" w="med" len="med"/>
-          </a:ln>
-        </p:spPr>
-        <p:style>
-          <a:lnRef idx="2">
-            <a:schemeClr val="accent1"/>
-          </a:lnRef>
-          <a:fillRef idx="0">
-            <a:schemeClr val="accent1"/>
-          </a:fillRef>
-          <a:effectRef idx="1">
-            <a:schemeClr val="accent1"/>
-          </a:effectRef>
-          <a:fontRef idx="minor">
-            <a:schemeClr val="tx1"/>
-          </a:fontRef>
-        </p:style>
-      </p:cxnSp>
-      <p:sp>
-        <p:nvSpPr>
-          <p:cNvPr id="15" name="TextBox 14"/>
-          <p:cNvSpPr txBox="1"/>
-          <p:nvPr/>
-        </p:nvSpPr>
-        <p:spPr>
-          <a:xfrm>
-            <a:off x="8293607" y="3547872"/>
-            <a:ext cx="1645920" cy="320040"/>
-          </a:xfrm>
-          <a:prstGeom prst="rect">
-            <a:avLst/>
-          </a:prstGeom>
-          <a:noFill/>
-        </p:spPr>
-        <p:txBody>
-          <a:bodyPr wrap="square">
-            <a:spAutoFit/>
-          </a:bodyPr>
-          <a:lstStyle/>
-          <a:p>
-            <a:pPr algn="l"/>
-            <a:r>
-              <a:rPr sz="1000" b="0" i="1">
-                <a:solidFill>
-                  <a:srgbClr val="666666"/>
-                </a:solidFill>
-                <a:latin typeface="Calibri"/>
-              </a:rPr>
-              <a:t>1: N</a:t>
-            </a:r>
-          </a:p>
-        </p:txBody>
-      </p:sp>
-      <p:sp>
-        <p:nvSpPr>
-          <p:cNvPr id="16" name="TextBox 15"/>
-          <p:cNvSpPr txBox="1"/>
-          <p:nvPr/>
-        </p:nvSpPr>
-        <p:spPr>
-          <a:xfrm>
-            <a:off x="457200" y="6263640"/>
-            <a:ext cx="11277295" cy="411480"/>
-          </a:xfrm>
-          <a:prstGeom prst="rect">
-            <a:avLst/>
-          </a:prstGeom>
-          <a:noFill/>
-        </p:spPr>
-        <p:txBody>
-          <a:bodyPr wrap="square">
-            <a:spAutoFit/>
-          </a:bodyPr>
-          <a:lstStyle/>
-          <a:p>
-            <a:r>
-              <a:rPr sz="1100" b="0" i="1">
-                <a:solidFill>
-                  <a:srgbClr val="666666"/>
-                </a:solidFill>
-                <a:latin typeface="Calibri"/>
-              </a:rPr>
-              <a:t>“Un dueño tiene N mascotas”, “una mascota tiene N citas”, “un veterinario atiende N citas”. La PK identifica cada fila; la FK materializa la relación y la BD la hace cumplir: una cita con id_mascota 999 que no existe se rechaza con violación de clave foránea.</a:t>
-            </a:r>
-          </a:p>
-        </p:txBody>
-      </p:sp>
-      <p:sp>
-        <p:nvSpPr>
-          <p:cNvPr id="17" name="TextBox 16"/>
+              <a:t>La FK vive en el lado 'N' de la relacion. El CHECK ya es una regla de negocio.</a:t>
+            </a:r>
+          </a:p>
+        </p:txBody>
+      </p:sp>
+      <p:sp>
+        <p:nvSpPr>
+          <p:cNvPr id="10" name="TextBox 9"/>
           <p:cNvSpPr txBox="1"/>
           <p:nvPr/>
         </p:nvSpPr>
@@ -14301,141 +14482,21 @@
                 </a:solidFill>
                 <a:latin typeface="Calibri"/>
               </a:rPr>
-              <a:t>El DDL minimo que sostiene el ER</a:t>
-            </a:r>
-          </a:p>
-        </p:txBody>
-      </p:sp>
-      <p:sp>
-        <p:nvSpPr>
-          <p:cNvPr id="5" name="Rounded Rectangle 4"/>
-          <p:cNvSpPr/>
-          <p:nvPr/>
-        </p:nvSpPr>
-        <p:spPr>
-          <a:xfrm>
-            <a:off x="457200" y="1261872"/>
-            <a:ext cx="11277295" cy="4773168"/>
-          </a:xfrm>
-          <a:prstGeom prst="roundRect">
-            <a:avLst>
-              <a:gd name="adj" fmla="val 12000"/>
-            </a:avLst>
-          </a:prstGeom>
-          <a:solidFill>
-            <a:srgbClr val="1E2A38"/>
-          </a:solidFill>
-          <a:ln>
-            <a:noFill/>
-          </a:ln>
-        </p:spPr>
-        <p:style>
-          <a:lnRef idx="1">
-            <a:schemeClr val="accent1"/>
-          </a:lnRef>
-          <a:fillRef idx="3">
-            <a:schemeClr val="accent1"/>
-          </a:fillRef>
-          <a:effectRef idx="2">
-            <a:schemeClr val="accent1"/>
-          </a:effectRef>
-          <a:fontRef idx="minor">
-            <a:schemeClr val="lt1"/>
-          </a:fontRef>
-        </p:style>
-        <p:txBody>
-          <a:bodyPr rtlCol="0" anchor="ctr"/>
-          <a:lstStyle/>
-          <a:p>
-            <a:pPr algn="ctr"/>
-          </a:p>
-        </p:txBody>
-      </p:sp>
-      <p:sp>
-        <p:nvSpPr>
-          <p:cNvPr id="6" name="Rectangle 5"/>
-          <p:cNvSpPr/>
-          <p:nvPr/>
-        </p:nvSpPr>
-        <p:spPr>
-          <a:xfrm>
-            <a:off x="457200" y="1261872"/>
-            <a:ext cx="11277295" cy="320040"/>
-          </a:xfrm>
-          <a:prstGeom prst="rect">
-            <a:avLst/>
-          </a:prstGeom>
-          <a:solidFill>
-            <a:srgbClr val="095292"/>
-          </a:solidFill>
-          <a:ln>
-            <a:noFill/>
-          </a:ln>
-        </p:spPr>
-        <p:style>
-          <a:lnRef idx="1">
-            <a:schemeClr val="accent1"/>
-          </a:lnRef>
-          <a:fillRef idx="3">
-            <a:schemeClr val="accent1"/>
-          </a:fillRef>
-          <a:effectRef idx="2">
-            <a:schemeClr val="accent1"/>
-          </a:effectRef>
-          <a:fontRef idx="minor">
-            <a:schemeClr val="lt1"/>
-          </a:fontRef>
-        </p:style>
-        <p:txBody>
-          <a:bodyPr rtlCol="0" anchor="ctr"/>
-          <a:lstStyle/>
-          <a:p>
-            <a:pPr algn="ctr"/>
-          </a:p>
-        </p:txBody>
-      </p:sp>
-      <p:sp>
-        <p:nvSpPr>
-          <p:cNvPr id="7" name="TextBox 6"/>
+              <a:t>Demo del dia</a:t>
+            </a:r>
+          </a:p>
+        </p:txBody>
+      </p:sp>
+      <p:sp>
+        <p:nvSpPr>
+          <p:cNvPr id="5" name="TextBox 4"/>
           <p:cNvSpPr txBox="1"/>
           <p:nvPr/>
         </p:nvSpPr>
         <p:spPr>
           <a:xfrm>
-            <a:off x="685800" y="1307592"/>
-            <a:ext cx="10820095" cy="256032"/>
-          </a:xfrm>
-          <a:prstGeom prst="rect">
-            <a:avLst/>
-          </a:prstGeom>
-          <a:noFill/>
-        </p:spPr>
-        <p:txBody>
-          <a:bodyPr wrap="square" anchor="ctr"/>
-          <a:lstStyle/>
-          <a:p>
-            <a:r>
-              <a:rPr sz="1000" b="1" i="0">
-                <a:solidFill>
-                  <a:srgbClr val="269CCB"/>
-                </a:solidFill>
-                <a:latin typeface="Calibri"/>
-              </a:rPr>
-              <a:t>● ● ●</a:t>
-            </a:r>
-          </a:p>
-        </p:txBody>
-      </p:sp>
-      <p:sp>
-        <p:nvSpPr>
-          <p:cNvPr id="8" name="TextBox 7"/>
-          <p:cNvSpPr txBox="1"/>
-          <p:nvPr/>
-        </p:nvSpPr>
-        <p:spPr>
-          <a:xfrm>
-            <a:off x="777240" y="1719072"/>
-            <a:ext cx="10637215" cy="4133087"/>
+            <a:off x="457200" y="1170432"/>
+            <a:ext cx="11277295" cy="5230368"/>
           </a:xfrm>
           <a:prstGeom prst="rect">
             <a:avLst/>
@@ -14450,171 +14511,160 @@
           <a:p>
             <a:pPr>
               <a:spcAft>
-                <a:spcPts val="400"/>
+                <a:spcPts val="800"/>
               </a:spcAft>
             </a:pPr>
             <a:r>
-              <a:rPr sz="1400" b="0" i="0">
-                <a:solidFill>
-                  <a:srgbClr val="FFFFFF"/>
-                </a:solidFill>
-                <a:latin typeface="Calibri"/>
-              </a:rPr>
-              <a:t>CREATE TABLE mascota (</a:t>
+              <a:rPr sz="2000" b="0" i="0">
+                <a:solidFill>
+                  <a:srgbClr val="333333"/>
+                </a:solidFill>
+                <a:latin typeface="Calibri"/>
+              </a:rPr>
+              <a:t>–   </a:t>
+            </a:r>
+            <a:r>
+              <a:rPr sz="2000" b="1" i="0">
+                <a:solidFill>
+                  <a:srgbClr val="333333"/>
+                </a:solidFill>
+                <a:latin typeface="Calibri"/>
+              </a:rPr>
+              <a:t>Herramienta:</a:t>
+            </a:r>
+            <a:r>
+              <a:rPr sz="2000" b="0" i="0">
+                <a:solidFill>
+                  <a:srgbClr val="333333"/>
+                </a:solidFill>
+                <a:latin typeface="Calibri"/>
+              </a:rPr>
+              <a:t> draw.io + DB Fiddle</a:t>
             </a:r>
           </a:p>
           <a:p>
             <a:pPr>
               <a:spcAft>
-                <a:spcPts val="400"/>
+                <a:spcPts val="800"/>
               </a:spcAft>
             </a:pPr>
             <a:r>
-              <a:rPr sz="1400" b="0" i="0">
-                <a:solidFill>
-                  <a:srgbClr val="FFFFFF"/>
-                </a:solidFill>
-                <a:latin typeface="Calibri"/>
-              </a:rPr>
-              <a:t>  id_mascota INT PRIMARY KEY,               -- PK: identifica la fila</a:t>
+              <a:rPr sz="2000" b="0" i="0">
+                <a:solidFill>
+                  <a:srgbClr val="333333"/>
+                </a:solidFill>
+                <a:latin typeface="Calibri"/>
+              </a:rPr>
+              <a:t>–   </a:t>
+            </a:r>
+            <a:r>
+              <a:rPr sz="2000" b="1" i="0">
+                <a:solidFill>
+                  <a:srgbClr val="333333"/>
+                </a:solidFill>
+                <a:latin typeface="Calibri"/>
+              </a:rPr>
+              <a:t>Demo:</a:t>
+            </a:r>
+            <a:r>
+              <a:rPr sz="2000" b="0" i="0">
+                <a:solidFill>
+                  <a:srgbClr val="333333"/>
+                </a:solidFill>
+                <a:latin typeface="Calibri"/>
+              </a:rPr>
+              <a:t> Boceto ER en draw.io (Dueno-Mascota-Cita) + CREATE TABLE minimo en DB Fiddle, y cierre pasando el boceto a Mermaid con IA para pegarlo renderizado.</a:t>
             </a:r>
           </a:p>
           <a:p>
             <a:pPr>
               <a:spcAft>
-                <a:spcPts val="400"/>
+                <a:spcPts val="800"/>
               </a:spcAft>
             </a:pPr>
             <a:r>
-              <a:rPr sz="1400" b="0" i="0">
-                <a:solidFill>
-                  <a:srgbClr val="FFFFFF"/>
-                </a:solidFill>
-                <a:latin typeface="Calibri"/>
-              </a:rPr>
-              <a:t>  id_dueno   INT NOT NULL</a:t>
+              <a:rPr sz="2000" b="0" i="0">
+                <a:solidFill>
+                  <a:srgbClr val="333333"/>
+                </a:solidFill>
+                <a:latin typeface="Calibri"/>
+              </a:rPr>
+              <a:t>–   Sigan el mismo dominio de la clínica (no inventen otro caso).</a:t>
             </a:r>
           </a:p>
           <a:p>
             <a:pPr>
               <a:spcAft>
-                <a:spcPts val="400"/>
+                <a:spcPts val="800"/>
               </a:spcAft>
             </a:pPr>
             <a:r>
-              <a:rPr sz="1400" b="0" i="0">
-                <a:solidFill>
-                  <a:srgbClr val="FFFFFF"/>
-                </a:solidFill>
-                <a:latin typeface="Calibri"/>
-              </a:rPr>
-              <a:t>             REFERENCES dueno(id_dueno),    -- FK: materializa la relacion</a:t>
+              <a:rPr sz="2000" b="0" i="0">
+                <a:solidFill>
+                  <a:srgbClr val="333333"/>
+                </a:solidFill>
+                <a:latin typeface="Calibri"/>
+              </a:rPr>
+              <a:t>–   </a:t>
+            </a:r>
+            <a:r>
+              <a:rPr sz="2000" b="1" i="0">
+                <a:solidFill>
+                  <a:srgbClr val="333333"/>
+                </a:solidFill>
+                <a:latin typeface="Calibri"/>
+              </a:rPr>
+              <a:t>Qué observar:</a:t>
+            </a:r>
+            <a:r>
+              <a:rPr sz="2000" b="0" i="0">
+                <a:solidFill>
+                  <a:srgbClr val="333333"/>
+                </a:solidFill>
+                <a:latin typeface="Calibri"/>
+              </a:rPr>
+              <a:t> la FK rechaza una cita para una mascota que no existe: el motor responde con violacion de clave foranea y no inserta nada.</a:t>
             </a:r>
           </a:p>
           <a:p>
             <a:pPr>
               <a:spcAft>
-                <a:spcPts val="400"/>
+                <a:spcPts val="800"/>
               </a:spcAft>
             </a:pPr>
             <a:r>
-              <a:rPr sz="1400" b="0" i="0">
-                <a:solidFill>
-                  <a:srgbClr val="FFFFFF"/>
-                </a:solidFill>
-                <a:latin typeface="Calibri"/>
-              </a:rPr>
-              <a:t>  nombre     VARCHAR(60) NOT NULL,</a:t>
-            </a:r>
-          </a:p>
-          <a:p>
-            <a:pPr>
-              <a:spcAft>
-                <a:spcPts val="400"/>
-              </a:spcAft>
-            </a:pPr>
-            <a:r>
-              <a:rPr sz="1400" b="0" i="0">
-                <a:solidFill>
-                  <a:srgbClr val="FFFFFF"/>
-                </a:solidFill>
-                <a:latin typeface="Calibri"/>
-              </a:rPr>
-              <a:t>  activa     CHAR(1) DEFAULT 'S'</a:t>
-            </a:r>
-          </a:p>
-          <a:p>
-            <a:pPr>
-              <a:spcAft>
-                <a:spcPts val="400"/>
-              </a:spcAft>
-            </a:pPr>
-            <a:r>
-              <a:rPr sz="1400" b="0" i="0">
-                <a:solidFill>
-                  <a:srgbClr val="FFFFFF"/>
-                </a:solidFill>
-                <a:latin typeface="Calibri"/>
-              </a:rPr>
-              <a:t>             CHECK (activa IN ('S','N'))    -- regla de negocio en la BD</a:t>
-            </a:r>
-          </a:p>
-          <a:p>
-            <a:pPr>
-              <a:spcAft>
-                <a:spcPts val="400"/>
-              </a:spcAft>
-            </a:pPr>
-            <a:r>
-              <a:rPr sz="1400" b="0" i="0">
-                <a:solidFill>
-                  <a:srgbClr val="FFFFFF"/>
-                </a:solidFill>
-                <a:latin typeface="Calibri"/>
-              </a:rPr>
-              <a:t>);</a:t>
-            </a:r>
-          </a:p>
-        </p:txBody>
-      </p:sp>
-      <p:sp>
-        <p:nvSpPr>
-          <p:cNvPr id="9" name="TextBox 8"/>
-          <p:cNvSpPr txBox="1"/>
-          <p:nvPr/>
-        </p:nvSpPr>
-        <p:spPr>
-          <a:xfrm>
-            <a:off x="457200" y="6080760"/>
-            <a:ext cx="11277295" cy="320040"/>
-          </a:xfrm>
-          <a:prstGeom prst="rect">
-            <a:avLst/>
-          </a:prstGeom>
-          <a:noFill/>
-        </p:spPr>
-        <p:txBody>
-          <a:bodyPr wrap="square">
-            <a:spAutoFit/>
-          </a:bodyPr>
-          <a:lstStyle/>
-          <a:p>
-            <a:pPr algn="ctr"/>
-            <a:r>
-              <a:rPr sz="1200" b="0" i="1">
-                <a:solidFill>
-                  <a:srgbClr val="666666"/>
-                </a:solidFill>
-                <a:latin typeface="Calibri"/>
-              </a:rPr>
-              <a:t>La FK vive en el lado 'N' de la relacion. El CHECK ya es una regla de negocio.</a:t>
-            </a:r>
-          </a:p>
-        </p:txBody>
-      </p:sp>
-      <p:sp>
-        <p:nvSpPr>
-          <p:cNvPr id="10" name="TextBox 9"/>
+              <a:rPr sz="2000" b="0" i="0">
+                <a:solidFill>
+                  <a:srgbClr val="333333"/>
+                </a:solidFill>
+                <a:latin typeface="Calibri"/>
+              </a:rPr>
+              <a:t>–   </a:t>
+            </a:r>
+            <a:r>
+              <a:rPr sz="2000" b="1" i="0">
+                <a:solidFill>
+                  <a:srgbClr val="333333"/>
+                </a:solidFill>
+                <a:latin typeface="Calibri"/>
+              </a:rPr>
+              <a:t>Qué observar:</a:t>
+            </a:r>
+            <a:r>
+              <a:rPr sz="2000" b="0" i="0">
+                <a:solidFill>
+                  <a:srgbClr val="333333"/>
+                </a:solidFill>
+                <a:latin typeface="Calibri"/>
+              </a:rPr>
+              <a:t> el mismo modelo en tres formas que deben coincidir: el boceto, el DDL que compila y el texto erDiagram.</a:t>
+            </a:r>
+          </a:p>
+        </p:txBody>
+      </p:sp>
+      <p:sp>
+        <p:nvSpPr>
+          <p:cNvPr id="6" name="TextBox 5"/>
           <p:cNvSpPr txBox="1"/>
           <p:nvPr/>
         </p:nvSpPr>
@@ -14682,7 +14732,7 @@
         <p:spPr>
           <a:xfrm>
             <a:off x="0" y="0"/>
-            <a:ext cx="12191695" cy="960120"/>
+            <a:ext cx="12191695" cy="1170432"/>
           </a:xfrm>
           <a:prstGeom prst="rect">
             <a:avLst/>
@@ -14724,7 +14774,7 @@
         </p:nvSpPr>
         <p:spPr>
           <a:xfrm>
-            <a:off x="0" y="960120"/>
+            <a:off x="0" y="1170432"/>
             <a:ext cx="12191695" cy="41148"/>
           </a:xfrm>
           <a:prstGeom prst="rect">
@@ -14768,7 +14818,7 @@
         <p:spPr>
           <a:xfrm>
             <a:off x="457200" y="164592"/>
-            <a:ext cx="11277295" cy="502920"/>
+            <a:ext cx="11277295" cy="384048"/>
           </a:xfrm>
           <a:prstGeom prst="rect">
             <a:avLst/>
@@ -14788,7 +14838,7 @@
                 </a:solidFill>
                 <a:latin typeface="Calibri"/>
               </a:rPr>
-              <a:t>Demo del dia</a:t>
+              <a:t>Del boceto al código Mermaid</a:t>
             </a:r>
           </a:p>
         </p:txBody>
@@ -14801,8 +14851,8 @@
         </p:nvSpPr>
         <p:spPr>
           <a:xfrm>
-            <a:off x="457200" y="1170432"/>
-            <a:ext cx="11277295" cy="5230368"/>
+            <a:off x="457200" y="566928"/>
+            <a:ext cx="11277295" cy="411480"/>
           </a:xfrm>
           <a:prstGeom prst="rect">
             <a:avLst/>
@@ -14815,162 +14865,705 @@
           </a:bodyPr>
           <a:lstStyle/>
           <a:p>
+            <a:r>
+              <a:rPr sz="1400" b="0" i="0">
+                <a:solidFill>
+                  <a:srgbClr val="B8D8EE"/>
+                </a:solidFill>
+                <a:latin typeface="Calibri"/>
+              </a:rPr>
+              <a:t>El diagrama es texto Mermaid: la imagen sale del codigo, no al reves</a:t>
+            </a:r>
+          </a:p>
+        </p:txBody>
+      </p:sp>
+      <p:sp>
+        <p:nvSpPr>
+          <p:cNvPr id="6" name="Rounded Rectangle 5"/>
+          <p:cNvSpPr/>
+          <p:nvPr/>
+        </p:nvSpPr>
+        <p:spPr>
+          <a:xfrm>
+            <a:off x="457200" y="1659636"/>
+            <a:ext cx="11277295" cy="1051560"/>
+          </a:xfrm>
+          <a:prstGeom prst="roundRect">
+            <a:avLst>
+              <a:gd name="adj" fmla="val 12000"/>
+            </a:avLst>
+          </a:prstGeom>
+          <a:solidFill>
+            <a:srgbClr val="F2F2F2"/>
+          </a:solidFill>
+          <a:ln>
+            <a:noFill/>
+          </a:ln>
+        </p:spPr>
+        <p:style>
+          <a:lnRef idx="1">
+            <a:schemeClr val="accent1"/>
+          </a:lnRef>
+          <a:fillRef idx="3">
+            <a:schemeClr val="accent1"/>
+          </a:fillRef>
+          <a:effectRef idx="2">
+            <a:schemeClr val="accent1"/>
+          </a:effectRef>
+          <a:fontRef idx="minor">
+            <a:schemeClr val="lt1"/>
+          </a:fontRef>
+        </p:style>
+        <p:txBody>
+          <a:bodyPr rtlCol="0" anchor="ctr"/>
+          <a:lstStyle/>
+          <a:p>
+            <a:pPr algn="ctr"/>
+          </a:p>
+        </p:txBody>
+      </p:sp>
+      <p:sp>
+        <p:nvSpPr>
+          <p:cNvPr id="7" name="Rounded Rectangle 6"/>
+          <p:cNvSpPr/>
+          <p:nvPr/>
+        </p:nvSpPr>
+        <p:spPr>
+          <a:xfrm>
+            <a:off x="594360" y="1965960"/>
+            <a:ext cx="438912" cy="438912"/>
+          </a:xfrm>
+          <a:prstGeom prst="roundRect">
+            <a:avLst>
+              <a:gd name="adj" fmla="val 12000"/>
+            </a:avLst>
+          </a:prstGeom>
+          <a:solidFill>
+            <a:srgbClr val="095292"/>
+          </a:solidFill>
+          <a:ln>
+            <a:noFill/>
+          </a:ln>
+        </p:spPr>
+        <p:style>
+          <a:lnRef idx="1">
+            <a:schemeClr val="accent1"/>
+          </a:lnRef>
+          <a:fillRef idx="3">
+            <a:schemeClr val="accent1"/>
+          </a:fillRef>
+          <a:effectRef idx="2">
+            <a:schemeClr val="accent1"/>
+          </a:effectRef>
+          <a:fontRef idx="minor">
+            <a:schemeClr val="lt1"/>
+          </a:fontRef>
+        </p:style>
+        <p:txBody>
+          <a:bodyPr rtlCol="0" anchor="ctr"/>
+          <a:lstStyle/>
+          <a:p>
+            <a:pPr algn="ctr"/>
+          </a:p>
+        </p:txBody>
+      </p:sp>
+      <p:sp>
+        <p:nvSpPr>
+          <p:cNvPr id="8" name="TextBox 7"/>
+          <p:cNvSpPr txBox="1"/>
+          <p:nvPr/>
+        </p:nvSpPr>
+        <p:spPr>
+          <a:xfrm>
+            <a:off x="594360" y="1965960"/>
+            <a:ext cx="438912" cy="438912"/>
+          </a:xfrm>
+          <a:prstGeom prst="rect">
+            <a:avLst/>
+          </a:prstGeom>
+          <a:noFill/>
+        </p:spPr>
+        <p:txBody>
+          <a:bodyPr wrap="square" anchor="ctr"/>
+          <a:lstStyle/>
+          <a:p>
+            <a:pPr algn="ctr"/>
+            <a:r>
+              <a:rPr sz="1600" b="1" i="0">
+                <a:solidFill>
+                  <a:srgbClr val="FFFFFF"/>
+                </a:solidFill>
+                <a:latin typeface="Calibri"/>
+              </a:rPr>
+              <a:t>1</a:t>
+            </a:r>
+          </a:p>
+        </p:txBody>
+      </p:sp>
+      <p:sp>
+        <p:nvSpPr>
+          <p:cNvPr id="9" name="TextBox 8"/>
+          <p:cNvSpPr txBox="1"/>
+          <p:nvPr/>
+        </p:nvSpPr>
+        <p:spPr>
+          <a:xfrm>
+            <a:off x="1188720" y="1751076"/>
+            <a:ext cx="10271455" cy="886968"/>
+          </a:xfrm>
+          <a:prstGeom prst="rect">
+            <a:avLst/>
+          </a:prstGeom>
+          <a:noFill/>
+        </p:spPr>
+        <p:txBody>
+          <a:bodyPr wrap="square" anchor="ctr"/>
+          <a:lstStyle/>
+          <a:p>
+            <a:r>
+              <a:rPr sz="1500" b="1" i="0">
+                <a:solidFill>
+                  <a:srgbClr val="095292"/>
+                </a:solidFill>
+                <a:latin typeface="Calibri"/>
+              </a:rPr>
+              <a:t>Disena visual</a:t>
+            </a:r>
+          </a:p>
+          <a:p>
             <a:pPr>
-              <a:spcAft>
-                <a:spcPts val="800"/>
-              </a:spcAft>
+              <a:spcBef>
+                <a:spcPts val="200"/>
+              </a:spcBef>
             </a:pPr>
             <a:r>
-              <a:rPr sz="2000" b="0" i="0">
+              <a:rPr sz="1300" b="0" i="0">
                 <a:solidFill>
                   <a:srgbClr val="333333"/>
                 </a:solidFill>
                 <a:latin typeface="Calibri"/>
               </a:rPr>
-              <a:t>–   </a:t>
-            </a:r>
-            <a:r>
-              <a:rPr sz="2000" b="1" i="0">
+              <a:t>Dibuja el diagrama como quieras en Excalidraw o draw.io: es mas rapido arrastrar cajas que escribir codigo, y ahi es donde piensas el modelo.</a:t>
+            </a:r>
+          </a:p>
+        </p:txBody>
+      </p:sp>
+      <p:sp>
+        <p:nvSpPr>
+          <p:cNvPr id="10" name="Rounded Rectangle 9"/>
+          <p:cNvSpPr/>
+          <p:nvPr/>
+        </p:nvSpPr>
+        <p:spPr>
+          <a:xfrm>
+            <a:off x="457200" y="2802636"/>
+            <a:ext cx="11277295" cy="1051560"/>
+          </a:xfrm>
+          <a:prstGeom prst="roundRect">
+            <a:avLst>
+              <a:gd name="adj" fmla="val 12000"/>
+            </a:avLst>
+          </a:prstGeom>
+          <a:solidFill>
+            <a:srgbClr val="E8F4FA"/>
+          </a:solidFill>
+          <a:ln>
+            <a:noFill/>
+          </a:ln>
+        </p:spPr>
+        <p:style>
+          <a:lnRef idx="1">
+            <a:schemeClr val="accent1"/>
+          </a:lnRef>
+          <a:fillRef idx="3">
+            <a:schemeClr val="accent1"/>
+          </a:fillRef>
+          <a:effectRef idx="2">
+            <a:schemeClr val="accent1"/>
+          </a:effectRef>
+          <a:fontRef idx="minor">
+            <a:schemeClr val="lt1"/>
+          </a:fontRef>
+        </p:style>
+        <p:txBody>
+          <a:bodyPr rtlCol="0" anchor="ctr"/>
+          <a:lstStyle/>
+          <a:p>
+            <a:pPr algn="ctr"/>
+          </a:p>
+        </p:txBody>
+      </p:sp>
+      <p:sp>
+        <p:nvSpPr>
+          <p:cNvPr id="11" name="Rounded Rectangle 10"/>
+          <p:cNvSpPr/>
+          <p:nvPr/>
+        </p:nvSpPr>
+        <p:spPr>
+          <a:xfrm>
+            <a:off x="594360" y="3108960"/>
+            <a:ext cx="438912" cy="438912"/>
+          </a:xfrm>
+          <a:prstGeom prst="roundRect">
+            <a:avLst>
+              <a:gd name="adj" fmla="val 12000"/>
+            </a:avLst>
+          </a:prstGeom>
+          <a:solidFill>
+            <a:srgbClr val="095292"/>
+          </a:solidFill>
+          <a:ln>
+            <a:noFill/>
+          </a:ln>
+        </p:spPr>
+        <p:style>
+          <a:lnRef idx="1">
+            <a:schemeClr val="accent1"/>
+          </a:lnRef>
+          <a:fillRef idx="3">
+            <a:schemeClr val="accent1"/>
+          </a:fillRef>
+          <a:effectRef idx="2">
+            <a:schemeClr val="accent1"/>
+          </a:effectRef>
+          <a:fontRef idx="minor">
+            <a:schemeClr val="lt1"/>
+          </a:fontRef>
+        </p:style>
+        <p:txBody>
+          <a:bodyPr rtlCol="0" anchor="ctr"/>
+          <a:lstStyle/>
+          <a:p>
+            <a:pPr algn="ctr"/>
+          </a:p>
+        </p:txBody>
+      </p:sp>
+      <p:sp>
+        <p:nvSpPr>
+          <p:cNvPr id="12" name="TextBox 11"/>
+          <p:cNvSpPr txBox="1"/>
+          <p:nvPr/>
+        </p:nvSpPr>
+        <p:spPr>
+          <a:xfrm>
+            <a:off x="594360" y="3108960"/>
+            <a:ext cx="438912" cy="438912"/>
+          </a:xfrm>
+          <a:prstGeom prst="rect">
+            <a:avLst/>
+          </a:prstGeom>
+          <a:noFill/>
+        </p:spPr>
+        <p:txBody>
+          <a:bodyPr wrap="square" anchor="ctr"/>
+          <a:lstStyle/>
+          <a:p>
+            <a:pPr algn="ctr"/>
+            <a:r>
+              <a:rPr sz="1600" b="1" i="0">
+                <a:solidFill>
+                  <a:srgbClr val="FFFFFF"/>
+                </a:solidFill>
+                <a:latin typeface="Calibri"/>
+              </a:rPr>
+              <a:t>2</a:t>
+            </a:r>
+          </a:p>
+        </p:txBody>
+      </p:sp>
+      <p:sp>
+        <p:nvSpPr>
+          <p:cNvPr id="13" name="TextBox 12"/>
+          <p:cNvSpPr txBox="1"/>
+          <p:nvPr/>
+        </p:nvSpPr>
+        <p:spPr>
+          <a:xfrm>
+            <a:off x="1188720" y="2894076"/>
+            <a:ext cx="10271455" cy="886968"/>
+          </a:xfrm>
+          <a:prstGeom prst="rect">
+            <a:avLst/>
+          </a:prstGeom>
+          <a:noFill/>
+        </p:spPr>
+        <p:txBody>
+          <a:bodyPr wrap="square" anchor="ctr"/>
+          <a:lstStyle/>
+          <a:p>
+            <a:r>
+              <a:rPr sz="1500" b="1" i="0">
+                <a:solidFill>
+                  <a:srgbClr val="095292"/>
+                </a:solidFill>
+                <a:latin typeface="Calibri"/>
+              </a:rPr>
+              <a:t>Traduce con IA</a:t>
+            </a:r>
+          </a:p>
+          <a:p>
+            <a:pPr>
+              <a:spcBef>
+                <a:spcPts val="200"/>
+              </a:spcBef>
+            </a:pPr>
+            <a:r>
+              <a:rPr sz="1300" b="0" i="0">
                 <a:solidFill>
                   <a:srgbClr val="333333"/>
                 </a:solidFill>
                 <a:latin typeface="Calibri"/>
               </a:rPr>
-              <a:t>Herramienta:</a:t>
-            </a:r>
-            <a:r>
-              <a:rPr sz="2000" b="0" i="0">
+              <a:t>Copia o describe tu boceto a una IA y pidele el codigo Mermaid usando erDiagram. Revisa el resultado: la IA acierta la sintaxis, no tu modelo.</a:t>
+            </a:r>
+          </a:p>
+        </p:txBody>
+      </p:sp>
+      <p:sp>
+        <p:nvSpPr>
+          <p:cNvPr id="14" name="Rounded Rectangle 13"/>
+          <p:cNvSpPr/>
+          <p:nvPr/>
+        </p:nvSpPr>
+        <p:spPr>
+          <a:xfrm>
+            <a:off x="457200" y="3945636"/>
+            <a:ext cx="11277295" cy="1051560"/>
+          </a:xfrm>
+          <a:prstGeom prst="roundRect">
+            <a:avLst>
+              <a:gd name="adj" fmla="val 12000"/>
+            </a:avLst>
+          </a:prstGeom>
+          <a:solidFill>
+            <a:srgbClr val="F2F2F2"/>
+          </a:solidFill>
+          <a:ln>
+            <a:noFill/>
+          </a:ln>
+        </p:spPr>
+        <p:style>
+          <a:lnRef idx="1">
+            <a:schemeClr val="accent1"/>
+          </a:lnRef>
+          <a:fillRef idx="3">
+            <a:schemeClr val="accent1"/>
+          </a:fillRef>
+          <a:effectRef idx="2">
+            <a:schemeClr val="accent1"/>
+          </a:effectRef>
+          <a:fontRef idx="minor">
+            <a:schemeClr val="lt1"/>
+          </a:fontRef>
+        </p:style>
+        <p:txBody>
+          <a:bodyPr rtlCol="0" anchor="ctr"/>
+          <a:lstStyle/>
+          <a:p>
+            <a:pPr algn="ctr"/>
+          </a:p>
+        </p:txBody>
+      </p:sp>
+      <p:sp>
+        <p:nvSpPr>
+          <p:cNvPr id="15" name="Rounded Rectangle 14"/>
+          <p:cNvSpPr/>
+          <p:nvPr/>
+        </p:nvSpPr>
+        <p:spPr>
+          <a:xfrm>
+            <a:off x="594360" y="4251960"/>
+            <a:ext cx="438912" cy="438912"/>
+          </a:xfrm>
+          <a:prstGeom prst="roundRect">
+            <a:avLst>
+              <a:gd name="adj" fmla="val 12000"/>
+            </a:avLst>
+          </a:prstGeom>
+          <a:solidFill>
+            <a:srgbClr val="095292"/>
+          </a:solidFill>
+          <a:ln>
+            <a:noFill/>
+          </a:ln>
+        </p:spPr>
+        <p:style>
+          <a:lnRef idx="1">
+            <a:schemeClr val="accent1"/>
+          </a:lnRef>
+          <a:fillRef idx="3">
+            <a:schemeClr val="accent1"/>
+          </a:fillRef>
+          <a:effectRef idx="2">
+            <a:schemeClr val="accent1"/>
+          </a:effectRef>
+          <a:fontRef idx="minor">
+            <a:schemeClr val="lt1"/>
+          </a:fontRef>
+        </p:style>
+        <p:txBody>
+          <a:bodyPr rtlCol="0" anchor="ctr"/>
+          <a:lstStyle/>
+          <a:p>
+            <a:pPr algn="ctr"/>
+          </a:p>
+        </p:txBody>
+      </p:sp>
+      <p:sp>
+        <p:nvSpPr>
+          <p:cNvPr id="16" name="TextBox 15"/>
+          <p:cNvSpPr txBox="1"/>
+          <p:nvPr/>
+        </p:nvSpPr>
+        <p:spPr>
+          <a:xfrm>
+            <a:off x="594360" y="4251960"/>
+            <a:ext cx="438912" cy="438912"/>
+          </a:xfrm>
+          <a:prstGeom prst="rect">
+            <a:avLst/>
+          </a:prstGeom>
+          <a:noFill/>
+        </p:spPr>
+        <p:txBody>
+          <a:bodyPr wrap="square" anchor="ctr"/>
+          <a:lstStyle/>
+          <a:p>
+            <a:pPr algn="ctr"/>
+            <a:r>
+              <a:rPr sz="1600" b="1" i="0">
+                <a:solidFill>
+                  <a:srgbClr val="FFFFFF"/>
+                </a:solidFill>
+                <a:latin typeface="Calibri"/>
+              </a:rPr>
+              <a:t>3</a:t>
+            </a:r>
+          </a:p>
+        </p:txBody>
+      </p:sp>
+      <p:sp>
+        <p:nvSpPr>
+          <p:cNvPr id="17" name="TextBox 16"/>
+          <p:cNvSpPr txBox="1"/>
+          <p:nvPr/>
+        </p:nvSpPr>
+        <p:spPr>
+          <a:xfrm>
+            <a:off x="1188720" y="4037076"/>
+            <a:ext cx="10271455" cy="886968"/>
+          </a:xfrm>
+          <a:prstGeom prst="rect">
+            <a:avLst/>
+          </a:prstGeom>
+          <a:noFill/>
+        </p:spPr>
+        <p:txBody>
+          <a:bodyPr wrap="square" anchor="ctr"/>
+          <a:lstStyle/>
+          <a:p>
+            <a:r>
+              <a:rPr sz="1500" b="1" i="0">
+                <a:solidFill>
+                  <a:srgbClr val="095292"/>
+                </a:solidFill>
+                <a:latin typeface="Calibri"/>
+              </a:rPr>
+              <a:t>Renderiza y corrige</a:t>
+            </a:r>
+          </a:p>
+          <a:p>
+            <a:pPr>
+              <a:spcBef>
+                <a:spcPts val="200"/>
+              </a:spcBef>
+            </a:pPr>
+            <a:r>
+              <a:rPr sz="1300" b="0" i="0">
                 <a:solidFill>
                   <a:srgbClr val="333333"/>
                 </a:solidFill>
                 <a:latin typeface="Calibri"/>
               </a:rPr>
-              <a:t> draw.io + DB Fiddle</a:t>
+              <a:t>Pega el codigo en un visor Mermaid (por ejemplo mermaid.live) y mira como lo dibuja. Si no renderiza, corrige ahi mismo: un diagrama que no renderiza no comunica nada.</a:t>
+            </a:r>
+          </a:p>
+        </p:txBody>
+      </p:sp>
+      <p:sp>
+        <p:nvSpPr>
+          <p:cNvPr id="18" name="Rounded Rectangle 17"/>
+          <p:cNvSpPr/>
+          <p:nvPr/>
+        </p:nvSpPr>
+        <p:spPr>
+          <a:xfrm>
+            <a:off x="457200" y="5088636"/>
+            <a:ext cx="11277295" cy="1051560"/>
+          </a:xfrm>
+          <a:prstGeom prst="roundRect">
+            <a:avLst>
+              <a:gd name="adj" fmla="val 12000"/>
+            </a:avLst>
+          </a:prstGeom>
+          <a:solidFill>
+            <a:srgbClr val="E8F4FA"/>
+          </a:solidFill>
+          <a:ln>
+            <a:noFill/>
+          </a:ln>
+        </p:spPr>
+        <p:style>
+          <a:lnRef idx="1">
+            <a:schemeClr val="accent1"/>
+          </a:lnRef>
+          <a:fillRef idx="3">
+            <a:schemeClr val="accent1"/>
+          </a:fillRef>
+          <a:effectRef idx="2">
+            <a:schemeClr val="accent1"/>
+          </a:effectRef>
+          <a:fontRef idx="minor">
+            <a:schemeClr val="lt1"/>
+          </a:fontRef>
+        </p:style>
+        <p:txBody>
+          <a:bodyPr rtlCol="0" anchor="ctr"/>
+          <a:lstStyle/>
+          <a:p>
+            <a:pPr algn="ctr"/>
+          </a:p>
+        </p:txBody>
+      </p:sp>
+      <p:sp>
+        <p:nvSpPr>
+          <p:cNvPr id="19" name="Rounded Rectangle 18"/>
+          <p:cNvSpPr/>
+          <p:nvPr/>
+        </p:nvSpPr>
+        <p:spPr>
+          <a:xfrm>
+            <a:off x="594360" y="5394960"/>
+            <a:ext cx="438912" cy="438912"/>
+          </a:xfrm>
+          <a:prstGeom prst="roundRect">
+            <a:avLst>
+              <a:gd name="adj" fmla="val 12000"/>
+            </a:avLst>
+          </a:prstGeom>
+          <a:solidFill>
+            <a:srgbClr val="095292"/>
+          </a:solidFill>
+          <a:ln>
+            <a:noFill/>
+          </a:ln>
+        </p:spPr>
+        <p:style>
+          <a:lnRef idx="1">
+            <a:schemeClr val="accent1"/>
+          </a:lnRef>
+          <a:fillRef idx="3">
+            <a:schemeClr val="accent1"/>
+          </a:fillRef>
+          <a:effectRef idx="2">
+            <a:schemeClr val="accent1"/>
+          </a:effectRef>
+          <a:fontRef idx="minor">
+            <a:schemeClr val="lt1"/>
+          </a:fontRef>
+        </p:style>
+        <p:txBody>
+          <a:bodyPr rtlCol="0" anchor="ctr"/>
+          <a:lstStyle/>
+          <a:p>
+            <a:pPr algn="ctr"/>
+          </a:p>
+        </p:txBody>
+      </p:sp>
+      <p:sp>
+        <p:nvSpPr>
+          <p:cNvPr id="20" name="TextBox 19"/>
+          <p:cNvSpPr txBox="1"/>
+          <p:nvPr/>
+        </p:nvSpPr>
+        <p:spPr>
+          <a:xfrm>
+            <a:off x="594360" y="5394960"/>
+            <a:ext cx="438912" cy="438912"/>
+          </a:xfrm>
+          <a:prstGeom prst="rect">
+            <a:avLst/>
+          </a:prstGeom>
+          <a:noFill/>
+        </p:spPr>
+        <p:txBody>
+          <a:bodyPr wrap="square" anchor="ctr"/>
+          <a:lstStyle/>
+          <a:p>
+            <a:pPr algn="ctr"/>
+            <a:r>
+              <a:rPr sz="1600" b="1" i="0">
+                <a:solidFill>
+                  <a:srgbClr val="FFFFFF"/>
+                </a:solidFill>
+                <a:latin typeface="Calibri"/>
+              </a:rPr>
+              <a:t>4</a:t>
+            </a:r>
+          </a:p>
+        </p:txBody>
+      </p:sp>
+      <p:sp>
+        <p:nvSpPr>
+          <p:cNvPr id="21" name="TextBox 20"/>
+          <p:cNvSpPr txBox="1"/>
+          <p:nvPr/>
+        </p:nvSpPr>
+        <p:spPr>
+          <a:xfrm>
+            <a:off x="1188720" y="5180076"/>
+            <a:ext cx="10271455" cy="886968"/>
+          </a:xfrm>
+          <a:prstGeom prst="rect">
+            <a:avLst/>
+          </a:prstGeom>
+          <a:noFill/>
+        </p:spPr>
+        <p:txBody>
+          <a:bodyPr wrap="square" anchor="ctr"/>
+          <a:lstStyle/>
+          <a:p>
+            <a:r>
+              <a:rPr sz="1500" b="1" i="0">
+                <a:solidFill>
+                  <a:srgbClr val="095292"/>
+                </a:solidFill>
+                <a:latin typeface="Calibri"/>
+              </a:rPr>
+              <a:t>Guarda codigo e imagen</a:t>
             </a:r>
           </a:p>
           <a:p>
             <a:pPr>
-              <a:spcAft>
-                <a:spcPts val="800"/>
-              </a:spcAft>
+              <a:spcBef>
+                <a:spcPts val="200"/>
+              </a:spcBef>
             </a:pPr>
             <a:r>
-              <a:rPr sz="2000" b="0" i="0">
+              <a:rPr sz="1300" b="0" i="0">
                 <a:solidFill>
                   <a:srgbClr val="333333"/>
                 </a:solidFill>
                 <a:latin typeface="Calibri"/>
               </a:rPr>
-              <a:t>–   </a:t>
-            </a:r>
-            <a:r>
-              <a:rPr sz="2000" b="1" i="0">
-                <a:solidFill>
-                  <a:srgbClr val="333333"/>
-                </a:solidFill>
-                <a:latin typeface="Calibri"/>
-              </a:rPr>
-              <a:t>Demo:</a:t>
-            </a:r>
-            <a:r>
-              <a:rPr sz="2000" b="0" i="0">
-                <a:solidFill>
-                  <a:srgbClr val="333333"/>
-                </a:solidFill>
-                <a:latin typeface="Calibri"/>
-              </a:rPr>
-              <a:t> Boceto ER en draw.io (Dueno-Mascota-Cita) + CREATE TABLE minimo en DB Fiddle, y cierre pasando el boceto a Mermaid con IA para pegarlo renderizado.</a:t>
-            </a:r>
-          </a:p>
-          <a:p>
-            <a:pPr>
-              <a:spcAft>
-                <a:spcPts val="800"/>
-              </a:spcAft>
-            </a:pPr>
-            <a:r>
-              <a:rPr sz="2000" b="0" i="0">
-                <a:solidFill>
-                  <a:srgbClr val="333333"/>
-                </a:solidFill>
-                <a:latin typeface="Calibri"/>
-              </a:rPr>
-              <a:t>–   Sigan el mismo dominio VetCare (no inventen otro caso).</a:t>
-            </a:r>
-          </a:p>
-          <a:p>
-            <a:pPr>
-              <a:spcAft>
-                <a:spcPts val="800"/>
-              </a:spcAft>
-            </a:pPr>
-            <a:r>
-              <a:rPr sz="2000" b="0" i="0">
-                <a:solidFill>
-                  <a:srgbClr val="333333"/>
-                </a:solidFill>
-                <a:latin typeface="Calibri"/>
-              </a:rPr>
-              <a:t>–   </a:t>
-            </a:r>
-            <a:r>
-              <a:rPr sz="2000" b="1" i="0">
-                <a:solidFill>
-                  <a:srgbClr val="333333"/>
-                </a:solidFill>
-                <a:latin typeface="Calibri"/>
-              </a:rPr>
-              <a:t>Qué observar:</a:t>
-            </a:r>
-            <a:r>
-              <a:rPr sz="2000" b="0" i="0">
-                <a:solidFill>
-                  <a:srgbClr val="333333"/>
-                </a:solidFill>
-                <a:latin typeface="Calibri"/>
-              </a:rPr>
-              <a:t> la FK rechaza una cita para una mascota que no existe: el motor responde con violacion de clave foranea y no inserta nada.</a:t>
-            </a:r>
-          </a:p>
-          <a:p>
-            <a:pPr>
-              <a:spcAft>
-                <a:spcPts val="800"/>
-              </a:spcAft>
-            </a:pPr>
-            <a:r>
-              <a:rPr sz="2000" b="0" i="0">
-                <a:solidFill>
-                  <a:srgbClr val="333333"/>
-                </a:solidFill>
-                <a:latin typeface="Calibri"/>
-              </a:rPr>
-              <a:t>–   </a:t>
-            </a:r>
-            <a:r>
-              <a:rPr sz="2000" b="1" i="0">
-                <a:solidFill>
-                  <a:srgbClr val="333333"/>
-                </a:solidFill>
-                <a:latin typeface="Calibri"/>
-              </a:rPr>
-              <a:t>Qué observar:</a:t>
-            </a:r>
-            <a:r>
-              <a:rPr sz="2000" b="0" i="0">
-                <a:solidFill>
-                  <a:srgbClr val="333333"/>
-                </a:solidFill>
-                <a:latin typeface="Calibri"/>
-              </a:rPr>
-              <a:t> el mismo modelo en tres formas que deben coincidir: el boceto, el DDL que compila y el texto erDiagram.</a:t>
-            </a:r>
-          </a:p>
-        </p:txBody>
-      </p:sp>
-      <p:sp>
-        <p:nvSpPr>
-          <p:cNvPr id="6" name="TextBox 5"/>
+              <a:t>Conserva el texto Mermaid, que es la fuente, y exporta el PNG para tu informe.</a:t>
+            </a:r>
+          </a:p>
+        </p:txBody>
+      </p:sp>
+      <p:sp>
+        <p:nvSpPr>
+          <p:cNvPr id="22" name="TextBox 21"/>
           <p:cNvSpPr txBox="1"/>
           <p:nvPr/>
         </p:nvSpPr>
@@ -15038,905 +15631,6 @@
         <p:spPr>
           <a:xfrm>
             <a:off x="0" y="0"/>
-            <a:ext cx="12191695" cy="1170432"/>
-          </a:xfrm>
-          <a:prstGeom prst="rect">
-            <a:avLst/>
-          </a:prstGeom>
-          <a:solidFill>
-            <a:srgbClr val="095292"/>
-          </a:solidFill>
-          <a:ln>
-            <a:noFill/>
-          </a:ln>
-        </p:spPr>
-        <p:style>
-          <a:lnRef idx="1">
-            <a:schemeClr val="accent1"/>
-          </a:lnRef>
-          <a:fillRef idx="3">
-            <a:schemeClr val="accent1"/>
-          </a:fillRef>
-          <a:effectRef idx="2">
-            <a:schemeClr val="accent1"/>
-          </a:effectRef>
-          <a:fontRef idx="minor">
-            <a:schemeClr val="lt1"/>
-          </a:fontRef>
-        </p:style>
-        <p:txBody>
-          <a:bodyPr rtlCol="0" anchor="ctr"/>
-          <a:lstStyle/>
-          <a:p>
-            <a:pPr algn="ctr"/>
-          </a:p>
-        </p:txBody>
-      </p:sp>
-      <p:sp>
-        <p:nvSpPr>
-          <p:cNvPr id="3" name="Rectangle 2"/>
-          <p:cNvSpPr/>
-          <p:nvPr/>
-        </p:nvSpPr>
-        <p:spPr>
-          <a:xfrm>
-            <a:off x="0" y="1170432"/>
-            <a:ext cx="12191695" cy="41148"/>
-          </a:xfrm>
-          <a:prstGeom prst="rect">
-            <a:avLst/>
-          </a:prstGeom>
-          <a:solidFill>
-            <a:srgbClr val="FFD000"/>
-          </a:solidFill>
-          <a:ln>
-            <a:noFill/>
-          </a:ln>
-        </p:spPr>
-        <p:style>
-          <a:lnRef idx="1">
-            <a:schemeClr val="accent1"/>
-          </a:lnRef>
-          <a:fillRef idx="3">
-            <a:schemeClr val="accent1"/>
-          </a:fillRef>
-          <a:effectRef idx="2">
-            <a:schemeClr val="accent1"/>
-          </a:effectRef>
-          <a:fontRef idx="minor">
-            <a:schemeClr val="lt1"/>
-          </a:fontRef>
-        </p:style>
-        <p:txBody>
-          <a:bodyPr rtlCol="0" anchor="ctr"/>
-          <a:lstStyle/>
-          <a:p>
-            <a:pPr algn="ctr"/>
-          </a:p>
-        </p:txBody>
-      </p:sp>
-      <p:sp>
-        <p:nvSpPr>
-          <p:cNvPr id="4" name="TextBox 3"/>
-          <p:cNvSpPr txBox="1"/>
-          <p:nvPr/>
-        </p:nvSpPr>
-        <p:spPr>
-          <a:xfrm>
-            <a:off x="457200" y="164592"/>
-            <a:ext cx="11277295" cy="384048"/>
-          </a:xfrm>
-          <a:prstGeom prst="rect">
-            <a:avLst/>
-          </a:prstGeom>
-          <a:noFill/>
-        </p:spPr>
-        <p:txBody>
-          <a:bodyPr wrap="square">
-            <a:spAutoFit/>
-          </a:bodyPr>
-          <a:lstStyle/>
-          <a:p>
-            <a:r>
-              <a:rPr sz="2600" b="1" i="0">
-                <a:solidFill>
-                  <a:srgbClr val="FFFFFF"/>
-                </a:solidFill>
-                <a:latin typeface="Calibri"/>
-              </a:rPr>
-              <a:t>Del boceto al código Mermaid</a:t>
-            </a:r>
-          </a:p>
-        </p:txBody>
-      </p:sp>
-      <p:sp>
-        <p:nvSpPr>
-          <p:cNvPr id="5" name="TextBox 4"/>
-          <p:cNvSpPr txBox="1"/>
-          <p:nvPr/>
-        </p:nvSpPr>
-        <p:spPr>
-          <a:xfrm>
-            <a:off x="457200" y="566928"/>
-            <a:ext cx="11277295" cy="411480"/>
-          </a:xfrm>
-          <a:prstGeom prst="rect">
-            <a:avLst/>
-          </a:prstGeom>
-          <a:noFill/>
-        </p:spPr>
-        <p:txBody>
-          <a:bodyPr wrap="square">
-            <a:spAutoFit/>
-          </a:bodyPr>
-          <a:lstStyle/>
-          <a:p>
-            <a:r>
-              <a:rPr sz="1400" b="0" i="0">
-                <a:solidFill>
-                  <a:srgbClr val="B8D8EE"/>
-                </a:solidFill>
-                <a:latin typeface="Calibri"/>
-              </a:rPr>
-              <a:t>El diagrama es texto Mermaid: la imagen sale del codigo, no al reves</a:t>
-            </a:r>
-          </a:p>
-        </p:txBody>
-      </p:sp>
-      <p:sp>
-        <p:nvSpPr>
-          <p:cNvPr id="6" name="Rounded Rectangle 5"/>
-          <p:cNvSpPr/>
-          <p:nvPr/>
-        </p:nvSpPr>
-        <p:spPr>
-          <a:xfrm>
-            <a:off x="457200" y="1659636"/>
-            <a:ext cx="11277295" cy="1051560"/>
-          </a:xfrm>
-          <a:prstGeom prst="roundRect">
-            <a:avLst>
-              <a:gd name="adj" fmla="val 12000"/>
-            </a:avLst>
-          </a:prstGeom>
-          <a:solidFill>
-            <a:srgbClr val="F2F2F2"/>
-          </a:solidFill>
-          <a:ln>
-            <a:noFill/>
-          </a:ln>
-        </p:spPr>
-        <p:style>
-          <a:lnRef idx="1">
-            <a:schemeClr val="accent1"/>
-          </a:lnRef>
-          <a:fillRef idx="3">
-            <a:schemeClr val="accent1"/>
-          </a:fillRef>
-          <a:effectRef idx="2">
-            <a:schemeClr val="accent1"/>
-          </a:effectRef>
-          <a:fontRef idx="minor">
-            <a:schemeClr val="lt1"/>
-          </a:fontRef>
-        </p:style>
-        <p:txBody>
-          <a:bodyPr rtlCol="0" anchor="ctr"/>
-          <a:lstStyle/>
-          <a:p>
-            <a:pPr algn="ctr"/>
-          </a:p>
-        </p:txBody>
-      </p:sp>
-      <p:sp>
-        <p:nvSpPr>
-          <p:cNvPr id="7" name="Rounded Rectangle 6"/>
-          <p:cNvSpPr/>
-          <p:nvPr/>
-        </p:nvSpPr>
-        <p:spPr>
-          <a:xfrm>
-            <a:off x="594360" y="1965960"/>
-            <a:ext cx="438912" cy="438912"/>
-          </a:xfrm>
-          <a:prstGeom prst="roundRect">
-            <a:avLst>
-              <a:gd name="adj" fmla="val 12000"/>
-            </a:avLst>
-          </a:prstGeom>
-          <a:solidFill>
-            <a:srgbClr val="095292"/>
-          </a:solidFill>
-          <a:ln>
-            <a:noFill/>
-          </a:ln>
-        </p:spPr>
-        <p:style>
-          <a:lnRef idx="1">
-            <a:schemeClr val="accent1"/>
-          </a:lnRef>
-          <a:fillRef idx="3">
-            <a:schemeClr val="accent1"/>
-          </a:fillRef>
-          <a:effectRef idx="2">
-            <a:schemeClr val="accent1"/>
-          </a:effectRef>
-          <a:fontRef idx="minor">
-            <a:schemeClr val="lt1"/>
-          </a:fontRef>
-        </p:style>
-        <p:txBody>
-          <a:bodyPr rtlCol="0" anchor="ctr"/>
-          <a:lstStyle/>
-          <a:p>
-            <a:pPr algn="ctr"/>
-          </a:p>
-        </p:txBody>
-      </p:sp>
-      <p:sp>
-        <p:nvSpPr>
-          <p:cNvPr id="8" name="TextBox 7"/>
-          <p:cNvSpPr txBox="1"/>
-          <p:nvPr/>
-        </p:nvSpPr>
-        <p:spPr>
-          <a:xfrm>
-            <a:off x="594360" y="1965960"/>
-            <a:ext cx="438912" cy="438912"/>
-          </a:xfrm>
-          <a:prstGeom prst="rect">
-            <a:avLst/>
-          </a:prstGeom>
-          <a:noFill/>
-        </p:spPr>
-        <p:txBody>
-          <a:bodyPr wrap="square" anchor="ctr"/>
-          <a:lstStyle/>
-          <a:p>
-            <a:pPr algn="ctr"/>
-            <a:r>
-              <a:rPr sz="1600" b="1" i="0">
-                <a:solidFill>
-                  <a:srgbClr val="FFFFFF"/>
-                </a:solidFill>
-                <a:latin typeface="Calibri"/>
-              </a:rPr>
-              <a:t>1</a:t>
-            </a:r>
-          </a:p>
-        </p:txBody>
-      </p:sp>
-      <p:sp>
-        <p:nvSpPr>
-          <p:cNvPr id="9" name="TextBox 8"/>
-          <p:cNvSpPr txBox="1"/>
-          <p:nvPr/>
-        </p:nvSpPr>
-        <p:spPr>
-          <a:xfrm>
-            <a:off x="1188720" y="1751076"/>
-            <a:ext cx="10271455" cy="886968"/>
-          </a:xfrm>
-          <a:prstGeom prst="rect">
-            <a:avLst/>
-          </a:prstGeom>
-          <a:noFill/>
-        </p:spPr>
-        <p:txBody>
-          <a:bodyPr wrap="square" anchor="ctr"/>
-          <a:lstStyle/>
-          <a:p>
-            <a:r>
-              <a:rPr sz="1500" b="1" i="0">
-                <a:solidFill>
-                  <a:srgbClr val="095292"/>
-                </a:solidFill>
-                <a:latin typeface="Calibri"/>
-              </a:rPr>
-              <a:t>Disena visual</a:t>
-            </a:r>
-          </a:p>
-          <a:p>
-            <a:pPr>
-              <a:spcBef>
-                <a:spcPts val="200"/>
-              </a:spcBef>
-            </a:pPr>
-            <a:r>
-              <a:rPr sz="1300" b="0" i="0">
-                <a:solidFill>
-                  <a:srgbClr val="333333"/>
-                </a:solidFill>
-                <a:latin typeface="Calibri"/>
-              </a:rPr>
-              <a:t>Dibuja el diagrama como quieras en Excalidraw o draw.io: es mas rapido arrastrar cajas que escribir codigo, y ahi es donde piensas el modelo.</a:t>
-            </a:r>
-          </a:p>
-        </p:txBody>
-      </p:sp>
-      <p:sp>
-        <p:nvSpPr>
-          <p:cNvPr id="10" name="Rounded Rectangle 9"/>
-          <p:cNvSpPr/>
-          <p:nvPr/>
-        </p:nvSpPr>
-        <p:spPr>
-          <a:xfrm>
-            <a:off x="457200" y="2802636"/>
-            <a:ext cx="11277295" cy="1051560"/>
-          </a:xfrm>
-          <a:prstGeom prst="roundRect">
-            <a:avLst>
-              <a:gd name="adj" fmla="val 12000"/>
-            </a:avLst>
-          </a:prstGeom>
-          <a:solidFill>
-            <a:srgbClr val="E8F4FA"/>
-          </a:solidFill>
-          <a:ln>
-            <a:noFill/>
-          </a:ln>
-        </p:spPr>
-        <p:style>
-          <a:lnRef idx="1">
-            <a:schemeClr val="accent1"/>
-          </a:lnRef>
-          <a:fillRef idx="3">
-            <a:schemeClr val="accent1"/>
-          </a:fillRef>
-          <a:effectRef idx="2">
-            <a:schemeClr val="accent1"/>
-          </a:effectRef>
-          <a:fontRef idx="minor">
-            <a:schemeClr val="lt1"/>
-          </a:fontRef>
-        </p:style>
-        <p:txBody>
-          <a:bodyPr rtlCol="0" anchor="ctr"/>
-          <a:lstStyle/>
-          <a:p>
-            <a:pPr algn="ctr"/>
-          </a:p>
-        </p:txBody>
-      </p:sp>
-      <p:sp>
-        <p:nvSpPr>
-          <p:cNvPr id="11" name="Rounded Rectangle 10"/>
-          <p:cNvSpPr/>
-          <p:nvPr/>
-        </p:nvSpPr>
-        <p:spPr>
-          <a:xfrm>
-            <a:off x="594360" y="3108960"/>
-            <a:ext cx="438912" cy="438912"/>
-          </a:xfrm>
-          <a:prstGeom prst="roundRect">
-            <a:avLst>
-              <a:gd name="adj" fmla="val 12000"/>
-            </a:avLst>
-          </a:prstGeom>
-          <a:solidFill>
-            <a:srgbClr val="095292"/>
-          </a:solidFill>
-          <a:ln>
-            <a:noFill/>
-          </a:ln>
-        </p:spPr>
-        <p:style>
-          <a:lnRef idx="1">
-            <a:schemeClr val="accent1"/>
-          </a:lnRef>
-          <a:fillRef idx="3">
-            <a:schemeClr val="accent1"/>
-          </a:fillRef>
-          <a:effectRef idx="2">
-            <a:schemeClr val="accent1"/>
-          </a:effectRef>
-          <a:fontRef idx="minor">
-            <a:schemeClr val="lt1"/>
-          </a:fontRef>
-        </p:style>
-        <p:txBody>
-          <a:bodyPr rtlCol="0" anchor="ctr"/>
-          <a:lstStyle/>
-          <a:p>
-            <a:pPr algn="ctr"/>
-          </a:p>
-        </p:txBody>
-      </p:sp>
-      <p:sp>
-        <p:nvSpPr>
-          <p:cNvPr id="12" name="TextBox 11"/>
-          <p:cNvSpPr txBox="1"/>
-          <p:nvPr/>
-        </p:nvSpPr>
-        <p:spPr>
-          <a:xfrm>
-            <a:off x="594360" y="3108960"/>
-            <a:ext cx="438912" cy="438912"/>
-          </a:xfrm>
-          <a:prstGeom prst="rect">
-            <a:avLst/>
-          </a:prstGeom>
-          <a:noFill/>
-        </p:spPr>
-        <p:txBody>
-          <a:bodyPr wrap="square" anchor="ctr"/>
-          <a:lstStyle/>
-          <a:p>
-            <a:pPr algn="ctr"/>
-            <a:r>
-              <a:rPr sz="1600" b="1" i="0">
-                <a:solidFill>
-                  <a:srgbClr val="FFFFFF"/>
-                </a:solidFill>
-                <a:latin typeface="Calibri"/>
-              </a:rPr>
-              <a:t>2</a:t>
-            </a:r>
-          </a:p>
-        </p:txBody>
-      </p:sp>
-      <p:sp>
-        <p:nvSpPr>
-          <p:cNvPr id="13" name="TextBox 12"/>
-          <p:cNvSpPr txBox="1"/>
-          <p:nvPr/>
-        </p:nvSpPr>
-        <p:spPr>
-          <a:xfrm>
-            <a:off x="1188720" y="2894076"/>
-            <a:ext cx="10271455" cy="886968"/>
-          </a:xfrm>
-          <a:prstGeom prst="rect">
-            <a:avLst/>
-          </a:prstGeom>
-          <a:noFill/>
-        </p:spPr>
-        <p:txBody>
-          <a:bodyPr wrap="square" anchor="ctr"/>
-          <a:lstStyle/>
-          <a:p>
-            <a:r>
-              <a:rPr sz="1500" b="1" i="0">
-                <a:solidFill>
-                  <a:srgbClr val="095292"/>
-                </a:solidFill>
-                <a:latin typeface="Calibri"/>
-              </a:rPr>
-              <a:t>Traduce con IA</a:t>
-            </a:r>
-          </a:p>
-          <a:p>
-            <a:pPr>
-              <a:spcBef>
-                <a:spcPts val="200"/>
-              </a:spcBef>
-            </a:pPr>
-            <a:r>
-              <a:rPr sz="1300" b="0" i="0">
-                <a:solidFill>
-                  <a:srgbClr val="333333"/>
-                </a:solidFill>
-                <a:latin typeface="Calibri"/>
-              </a:rPr>
-              <a:t>Copia o describe tu boceto a una IA y pidele el codigo Mermaid usando erDiagram. Revisa el resultado: la IA acierta la sintaxis, no tu modelo.</a:t>
-            </a:r>
-          </a:p>
-        </p:txBody>
-      </p:sp>
-      <p:sp>
-        <p:nvSpPr>
-          <p:cNvPr id="14" name="Rounded Rectangle 13"/>
-          <p:cNvSpPr/>
-          <p:nvPr/>
-        </p:nvSpPr>
-        <p:spPr>
-          <a:xfrm>
-            <a:off x="457200" y="3945636"/>
-            <a:ext cx="11277295" cy="1051560"/>
-          </a:xfrm>
-          <a:prstGeom prst="roundRect">
-            <a:avLst>
-              <a:gd name="adj" fmla="val 12000"/>
-            </a:avLst>
-          </a:prstGeom>
-          <a:solidFill>
-            <a:srgbClr val="F2F2F2"/>
-          </a:solidFill>
-          <a:ln>
-            <a:noFill/>
-          </a:ln>
-        </p:spPr>
-        <p:style>
-          <a:lnRef idx="1">
-            <a:schemeClr val="accent1"/>
-          </a:lnRef>
-          <a:fillRef idx="3">
-            <a:schemeClr val="accent1"/>
-          </a:fillRef>
-          <a:effectRef idx="2">
-            <a:schemeClr val="accent1"/>
-          </a:effectRef>
-          <a:fontRef idx="minor">
-            <a:schemeClr val="lt1"/>
-          </a:fontRef>
-        </p:style>
-        <p:txBody>
-          <a:bodyPr rtlCol="0" anchor="ctr"/>
-          <a:lstStyle/>
-          <a:p>
-            <a:pPr algn="ctr"/>
-          </a:p>
-        </p:txBody>
-      </p:sp>
-      <p:sp>
-        <p:nvSpPr>
-          <p:cNvPr id="15" name="Rounded Rectangle 14"/>
-          <p:cNvSpPr/>
-          <p:nvPr/>
-        </p:nvSpPr>
-        <p:spPr>
-          <a:xfrm>
-            <a:off x="594360" y="4251960"/>
-            <a:ext cx="438912" cy="438912"/>
-          </a:xfrm>
-          <a:prstGeom prst="roundRect">
-            <a:avLst>
-              <a:gd name="adj" fmla="val 12000"/>
-            </a:avLst>
-          </a:prstGeom>
-          <a:solidFill>
-            <a:srgbClr val="095292"/>
-          </a:solidFill>
-          <a:ln>
-            <a:noFill/>
-          </a:ln>
-        </p:spPr>
-        <p:style>
-          <a:lnRef idx="1">
-            <a:schemeClr val="accent1"/>
-          </a:lnRef>
-          <a:fillRef idx="3">
-            <a:schemeClr val="accent1"/>
-          </a:fillRef>
-          <a:effectRef idx="2">
-            <a:schemeClr val="accent1"/>
-          </a:effectRef>
-          <a:fontRef idx="minor">
-            <a:schemeClr val="lt1"/>
-          </a:fontRef>
-        </p:style>
-        <p:txBody>
-          <a:bodyPr rtlCol="0" anchor="ctr"/>
-          <a:lstStyle/>
-          <a:p>
-            <a:pPr algn="ctr"/>
-          </a:p>
-        </p:txBody>
-      </p:sp>
-      <p:sp>
-        <p:nvSpPr>
-          <p:cNvPr id="16" name="TextBox 15"/>
-          <p:cNvSpPr txBox="1"/>
-          <p:nvPr/>
-        </p:nvSpPr>
-        <p:spPr>
-          <a:xfrm>
-            <a:off x="594360" y="4251960"/>
-            <a:ext cx="438912" cy="438912"/>
-          </a:xfrm>
-          <a:prstGeom prst="rect">
-            <a:avLst/>
-          </a:prstGeom>
-          <a:noFill/>
-        </p:spPr>
-        <p:txBody>
-          <a:bodyPr wrap="square" anchor="ctr"/>
-          <a:lstStyle/>
-          <a:p>
-            <a:pPr algn="ctr"/>
-            <a:r>
-              <a:rPr sz="1600" b="1" i="0">
-                <a:solidFill>
-                  <a:srgbClr val="FFFFFF"/>
-                </a:solidFill>
-                <a:latin typeface="Calibri"/>
-              </a:rPr>
-              <a:t>3</a:t>
-            </a:r>
-          </a:p>
-        </p:txBody>
-      </p:sp>
-      <p:sp>
-        <p:nvSpPr>
-          <p:cNvPr id="17" name="TextBox 16"/>
-          <p:cNvSpPr txBox="1"/>
-          <p:nvPr/>
-        </p:nvSpPr>
-        <p:spPr>
-          <a:xfrm>
-            <a:off x="1188720" y="4037076"/>
-            <a:ext cx="10271455" cy="886968"/>
-          </a:xfrm>
-          <a:prstGeom prst="rect">
-            <a:avLst/>
-          </a:prstGeom>
-          <a:noFill/>
-        </p:spPr>
-        <p:txBody>
-          <a:bodyPr wrap="square" anchor="ctr"/>
-          <a:lstStyle/>
-          <a:p>
-            <a:r>
-              <a:rPr sz="1500" b="1" i="0">
-                <a:solidFill>
-                  <a:srgbClr val="095292"/>
-                </a:solidFill>
-                <a:latin typeface="Calibri"/>
-              </a:rPr>
-              <a:t>Renderiza y corrige</a:t>
-            </a:r>
-          </a:p>
-          <a:p>
-            <a:pPr>
-              <a:spcBef>
-                <a:spcPts val="200"/>
-              </a:spcBef>
-            </a:pPr>
-            <a:r>
-              <a:rPr sz="1300" b="0" i="0">
-                <a:solidFill>
-                  <a:srgbClr val="333333"/>
-                </a:solidFill>
-                <a:latin typeface="Calibri"/>
-              </a:rPr>
-              <a:t>Pega el codigo en un visor Mermaid (por ejemplo mermaid.live) y mira como lo dibuja. Si no renderiza, corrige ahi mismo: un diagrama que no renderiza no comunica nada.</a:t>
-            </a:r>
-          </a:p>
-        </p:txBody>
-      </p:sp>
-      <p:sp>
-        <p:nvSpPr>
-          <p:cNvPr id="18" name="Rounded Rectangle 17"/>
-          <p:cNvSpPr/>
-          <p:nvPr/>
-        </p:nvSpPr>
-        <p:spPr>
-          <a:xfrm>
-            <a:off x="457200" y="5088636"/>
-            <a:ext cx="11277295" cy="1051560"/>
-          </a:xfrm>
-          <a:prstGeom prst="roundRect">
-            <a:avLst>
-              <a:gd name="adj" fmla="val 12000"/>
-            </a:avLst>
-          </a:prstGeom>
-          <a:solidFill>
-            <a:srgbClr val="E8F4FA"/>
-          </a:solidFill>
-          <a:ln>
-            <a:noFill/>
-          </a:ln>
-        </p:spPr>
-        <p:style>
-          <a:lnRef idx="1">
-            <a:schemeClr val="accent1"/>
-          </a:lnRef>
-          <a:fillRef idx="3">
-            <a:schemeClr val="accent1"/>
-          </a:fillRef>
-          <a:effectRef idx="2">
-            <a:schemeClr val="accent1"/>
-          </a:effectRef>
-          <a:fontRef idx="minor">
-            <a:schemeClr val="lt1"/>
-          </a:fontRef>
-        </p:style>
-        <p:txBody>
-          <a:bodyPr rtlCol="0" anchor="ctr"/>
-          <a:lstStyle/>
-          <a:p>
-            <a:pPr algn="ctr"/>
-          </a:p>
-        </p:txBody>
-      </p:sp>
-      <p:sp>
-        <p:nvSpPr>
-          <p:cNvPr id="19" name="Rounded Rectangle 18"/>
-          <p:cNvSpPr/>
-          <p:nvPr/>
-        </p:nvSpPr>
-        <p:spPr>
-          <a:xfrm>
-            <a:off x="594360" y="5394960"/>
-            <a:ext cx="438912" cy="438912"/>
-          </a:xfrm>
-          <a:prstGeom prst="roundRect">
-            <a:avLst>
-              <a:gd name="adj" fmla="val 12000"/>
-            </a:avLst>
-          </a:prstGeom>
-          <a:solidFill>
-            <a:srgbClr val="095292"/>
-          </a:solidFill>
-          <a:ln>
-            <a:noFill/>
-          </a:ln>
-        </p:spPr>
-        <p:style>
-          <a:lnRef idx="1">
-            <a:schemeClr val="accent1"/>
-          </a:lnRef>
-          <a:fillRef idx="3">
-            <a:schemeClr val="accent1"/>
-          </a:fillRef>
-          <a:effectRef idx="2">
-            <a:schemeClr val="accent1"/>
-          </a:effectRef>
-          <a:fontRef idx="minor">
-            <a:schemeClr val="lt1"/>
-          </a:fontRef>
-        </p:style>
-        <p:txBody>
-          <a:bodyPr rtlCol="0" anchor="ctr"/>
-          <a:lstStyle/>
-          <a:p>
-            <a:pPr algn="ctr"/>
-          </a:p>
-        </p:txBody>
-      </p:sp>
-      <p:sp>
-        <p:nvSpPr>
-          <p:cNvPr id="20" name="TextBox 19"/>
-          <p:cNvSpPr txBox="1"/>
-          <p:nvPr/>
-        </p:nvSpPr>
-        <p:spPr>
-          <a:xfrm>
-            <a:off x="594360" y="5394960"/>
-            <a:ext cx="438912" cy="438912"/>
-          </a:xfrm>
-          <a:prstGeom prst="rect">
-            <a:avLst/>
-          </a:prstGeom>
-          <a:noFill/>
-        </p:spPr>
-        <p:txBody>
-          <a:bodyPr wrap="square" anchor="ctr"/>
-          <a:lstStyle/>
-          <a:p>
-            <a:pPr algn="ctr"/>
-            <a:r>
-              <a:rPr sz="1600" b="1" i="0">
-                <a:solidFill>
-                  <a:srgbClr val="FFFFFF"/>
-                </a:solidFill>
-                <a:latin typeface="Calibri"/>
-              </a:rPr>
-              <a:t>4</a:t>
-            </a:r>
-          </a:p>
-        </p:txBody>
-      </p:sp>
-      <p:sp>
-        <p:nvSpPr>
-          <p:cNvPr id="21" name="TextBox 20"/>
-          <p:cNvSpPr txBox="1"/>
-          <p:nvPr/>
-        </p:nvSpPr>
-        <p:spPr>
-          <a:xfrm>
-            <a:off x="1188720" y="5180076"/>
-            <a:ext cx="10271455" cy="886968"/>
-          </a:xfrm>
-          <a:prstGeom prst="rect">
-            <a:avLst/>
-          </a:prstGeom>
-          <a:noFill/>
-        </p:spPr>
-        <p:txBody>
-          <a:bodyPr wrap="square" anchor="ctr"/>
-          <a:lstStyle/>
-          <a:p>
-            <a:r>
-              <a:rPr sz="1500" b="1" i="0">
-                <a:solidFill>
-                  <a:srgbClr val="095292"/>
-                </a:solidFill>
-                <a:latin typeface="Calibri"/>
-              </a:rPr>
-              <a:t>Guarda codigo e imagen</a:t>
-            </a:r>
-          </a:p>
-          <a:p>
-            <a:pPr>
-              <a:spcBef>
-                <a:spcPts val="200"/>
-              </a:spcBef>
-            </a:pPr>
-            <a:r>
-              <a:rPr sz="1300" b="0" i="0">
-                <a:solidFill>
-                  <a:srgbClr val="333333"/>
-                </a:solidFill>
-                <a:latin typeface="Calibri"/>
-              </a:rPr>
-              <a:t>Conserva el texto Mermaid, que es la fuente, y exporta el PNG para tu informe del Proyecto Integrador.</a:t>
-            </a:r>
-          </a:p>
-        </p:txBody>
-      </p:sp>
-      <p:sp>
-        <p:nvSpPr>
-          <p:cNvPr id="22" name="TextBox 21"/>
-          <p:cNvSpPr txBox="1"/>
-          <p:nvPr/>
-        </p:nvSpPr>
-        <p:spPr>
-          <a:xfrm>
-            <a:off x="11185855" y="6473952"/>
-            <a:ext cx="640080" cy="274320"/>
-          </a:xfrm>
-          <a:prstGeom prst="rect">
-            <a:avLst/>
-          </a:prstGeom>
-          <a:noFill/>
-        </p:spPr>
-        <p:txBody>
-          <a:bodyPr wrap="square">
-            <a:spAutoFit/>
-          </a:bodyPr>
-          <a:lstStyle/>
-          <a:p>
-            <a:pPr algn="r"/>
-            <a:r>
-              <a:rPr sz="1100" b="0" i="0">
-                <a:solidFill>
-                  <a:srgbClr val="666666"/>
-                </a:solidFill>
-                <a:latin typeface="Calibri"/>
-              </a:rPr>
-              <a:t>35</a:t>
-            </a:r>
-          </a:p>
-        </p:txBody>
-      </p:sp>
-    </p:spTree>
-  </p:cSld>
-  <p:clrMapOvr>
-    <a:masterClrMapping/>
-  </p:clrMapOvr>
-</p:sld>
-</file>
-
-<file path=ppt/slides/slide36.xml><?xml version="1.0" encoding="utf-8"?>
-<p:sld xmlns:a="http://schemas.openxmlformats.org/drawingml/2006/main" xmlns:p="http://schemas.openxmlformats.org/presentationml/2006/main" xmlns:r="http://schemas.openxmlformats.org/officeDocument/2006/relationships">
-  <p:cSld>
-    <p:bg>
-      <p:bgPr>
-        <a:solidFill>
-          <a:srgbClr val="FFFFFF"/>
-        </a:solidFill>
-        <a:effectLst/>
-      </p:bgPr>
-    </p:bg>
-    <p:spTree>
-      <p:nvGrpSpPr>
-        <p:cNvPr id="1" name=""/>
-        <p:cNvGrpSpPr/>
-        <p:nvPr/>
-      </p:nvGrpSpPr>
-      <p:grpSpPr/>
-      <p:sp>
-        <p:nvSpPr>
-          <p:cNvPr id="2" name="Rectangle 1"/>
-          <p:cNvSpPr/>
-          <p:nvPr/>
-        </p:nvSpPr>
-        <p:spPr>
-          <a:xfrm>
-            <a:off x="0" y="0"/>
             <a:ext cx="12191695" cy="164592"/>
           </a:xfrm>
           <a:prstGeom prst="rect">
@@ -16023,7 +15717,7 @@
                 </a:solidFill>
                 <a:latin typeface="Calibri"/>
               </a:rPr>
-              <a:t>Clase 1 · Revision BD I · Arranque VetCare DB</a:t>
+              <a:t>Clase 1 · Revision BD I · Arranque la base de la clínica</a:t>
             </a:r>
           </a:p>
         </p:txBody>
@@ -16275,7 +15969,7 @@
                 </a:solidFill>
                 <a:latin typeface="Calibri"/>
               </a:rPr>
-              <a:t>El cliente · Clínica Veterinaria «Huellitas»</a:t>
+              <a:t>El cliente · la clínica Veterinaria</a:t>
             </a:r>
           </a:p>
         </p:txBody>
@@ -16309,7 +16003,7 @@
                 </a:solidFill>
                 <a:latin typeface="Calibri"/>
               </a:rPr>
-              <a:t>Huellitas es la clínica (el cliente); VetCare DB es la base de datos que usted construye para ella.</a:t>
+              <a:t>la clínica es la clínica (el cliente); la base de la clínica es la base de datos que usted construye para ella.</a:t>
             </a:r>
           </a:p>
         </p:txBody>
@@ -16357,7 +16051,7 @@
                 </a:solidFill>
                 <a:latin typeface="Calibri"/>
               </a:rPr>
-              <a:t>Clínica Veterinaria «Huellitas»</a:t>
+              <a:t>la clínica Veterinaria</a:t>
             </a:r>
             <a:r>
               <a:rPr sz="2000" b="0" i="0">
@@ -16556,7 +16250,7 @@
                 </a:solidFill>
                 <a:latin typeface="Calibri"/>
               </a:rPr>
-              <a:t>–   </a:t>
+              <a:t>–   El modelo de la clínica tiene </a:t>
             </a:r>
             <a:r>
               <a:rPr sz="2000" b="1" i="0">
@@ -16565,7 +16259,7 @@
                 </a:solidFill>
                 <a:latin typeface="Calibri"/>
               </a:rPr>
-              <a:t>Caso completo:</a:t>
+              <a:t>8 entidades</a:t>
             </a:r>
             <a:r>
               <a:rPr sz="2000" b="0" i="0">
@@ -16574,7 +16268,25 @@
                 </a:solidFill>
                 <a:latin typeface="Calibri"/>
               </a:rPr>
-              <a:t> anexo «Caso de estudio Clínica Huellitas» en Clases/Proyecto Integrador — 8 entidades, 3 reglas y el elenco de nombres.</a:t>
+              <a:t> y </a:t>
+            </a:r>
+            <a:r>
+              <a:rPr sz="2000" b="1" i="0">
+                <a:solidFill>
+                  <a:srgbClr val="333333"/>
+                </a:solidFill>
+                <a:latin typeface="Calibri"/>
+              </a:rPr>
+              <a:t>3 reglas de negocio</a:t>
+            </a:r>
+            <a:r>
+              <a:rPr sz="2000" b="0" i="0">
+                <a:solidFill>
+                  <a:srgbClr val="333333"/>
+                </a:solidFill>
+                <a:latin typeface="Calibri"/>
+              </a:rPr>
+              <a:t>: dueño, mascota, veterinario, cita, consulta, insumo, factura y detalle de factura.</a:t>
             </a:r>
           </a:p>
         </p:txBody>
@@ -16755,7 +16467,7 @@
                 </a:solidFill>
                 <a:latin typeface="Calibri"/>
               </a:rPr>
-              <a:t>El cliente: la clinica Huellitas (1/2)</a:t>
+              <a:t>El cliente: la clínica</a:t>
             </a:r>
           </a:p>
         </p:txBody>
@@ -16827,6 +16539,38 @@
                 <a:latin typeface="Calibri"/>
               </a:rPr>
               <a:t>–   Que es el motivo por el que en la Clase 7 se habla de indices y no como un tema abstracto de rendimiento; y no hay metricas, no saben cuantas especies atienden al mes.</a:t>
+            </a:r>
+          </a:p>
+          <a:p>
+            <a:pPr>
+              <a:spcAft>
+                <a:spcPts val="800"/>
+              </a:spcAft>
+            </a:pPr>
+            <a:r>
+              <a:rPr sz="2000" b="0" i="0">
+                <a:solidFill>
+                  <a:srgbClr val="333333"/>
+                </a:solidFill>
+                <a:latin typeface="Calibri"/>
+              </a:rPr>
+              <a:t>–   La frontera de hoy conviene decirla de forma explicita para cortar la ansiedad: aqui no se pide la aplicacion ni la interfaz, se pide la capa de datos</a:t>
+            </a:r>
+          </a:p>
+          <a:p>
+            <a:pPr>
+              <a:spcAft>
+                <a:spcPts val="800"/>
+              </a:spcAft>
+            </a:pPr>
+            <a:r>
+              <a:rPr sz="2000" b="0" i="0">
+                <a:solidFill>
+                  <a:srgbClr val="333333"/>
+                </a:solidFill>
+                <a:latin typeface="Calibri"/>
+              </a:rPr>
+              <a:t>–   Y por eso el producto del semestre es un esquema con integridad, roles, procedimientos y un plan de ejecucion, no una pantalla.</a:t>
             </a:r>
           </a:p>
         </p:txBody>
@@ -17007,7 +16751,7 @@
                 </a:solidFill>
                 <a:latin typeface="Calibri"/>
               </a:rPr>
-              <a:t>El cliente: la clinica Huellitas (2/2)</a:t>
+              <a:t>Por que esto no es Bases de Datos I, y el vocabulario minimo (1/2)</a:t>
             </a:r>
           </a:p>
         </p:txBody>
@@ -17046,7 +16790,7 @@
                 </a:solidFill>
                 <a:latin typeface="Calibri"/>
               </a:rPr>
-              <a:t>–   VetCare es el SISTEMA que se le construye, y VetCare DB es concretamente la base de datos de ese sistema, que es lo que se hace en esta asignatura.</a:t>
+              <a:t>–   Alla el objetivo era escribir consultas que devolvieran el resultado correcto</a:t>
             </a:r>
           </a:p>
           <a:p>
@@ -17062,7 +16806,7 @@
                 </a:solidFill>
                 <a:latin typeface="Calibri"/>
               </a:rPr>
-              <a:t>–   La frontera de hoy conviene decirla de forma explicita para cortar la ansiedad: aqui no se pide la aplicacion ni la interfaz, se pide la capa de datos</a:t>
+              <a:t>–   Aqui es disenar un esquema que siga siendo correcto cuando lo usen tres personas distintas, cuando tenga cien mil filas y cuando alguien meta datos malos, a veces por error y a veces a proposito.</a:t>
             </a:r>
           </a:p>
           <a:p>
@@ -17078,7 +16822,23 @@
                 </a:solidFill>
                 <a:latin typeface="Calibri"/>
               </a:rPr>
-              <a:t>–   Y por eso el producto del semestre es un esquema con integridad, roles, procedimientos y un plan de ejecucion, no una pantalla.</a:t>
+              <a:t>–   Una tabla, o relacion, es un conjunto de entidades del mismo tipo: mascota guarda mascotas y nada mas.</a:t>
+            </a:r>
+          </a:p>
+          <a:p>
+            <a:pPr>
+              <a:spcAft>
+                <a:spcPts val="800"/>
+              </a:spcAft>
+            </a:pPr>
+            <a:r>
+              <a:rPr sz="2000" b="0" i="0">
+                <a:solidFill>
+                  <a:srgbClr val="333333"/>
+                </a:solidFill>
+                <a:latin typeface="Calibri"/>
+              </a:rPr>
+              <a:t>–   Una fila es una instancia concreta e irrepetible: la perra Luna de la duena Ana Perez.</a:t>
             </a:r>
           </a:p>
         </p:txBody>
@@ -17259,7 +17019,7 @@
                 </a:solidFill>
                 <a:latin typeface="Calibri"/>
               </a:rPr>
-              <a:t>Por que esto no es Bases de Datos I, y el vocabulario minimo (1/2)</a:t>
+              <a:t>Por que esto no es Bases de Datos I, y el vocabulario minimo (2/2)</a:t>
             </a:r>
           </a:p>
         </p:txBody>
@@ -17298,7 +17058,7 @@
                 </a:solidFill>
                 <a:latin typeface="Calibri"/>
               </a:rPr>
-              <a:t>–   Alla el objetivo era escribir consultas que devolvieran el resultado correcto</a:t>
+              <a:t>–   Una columna es un atributo, y todo atributo tiene un dominio, el conjunto de valores que el motor considera legales: especie no acepta cualquier texto, acepta Canino, Felino, Ave u Otro.</a:t>
             </a:r>
           </a:p>
           <a:p>
@@ -17314,39 +17074,7 @@
                 </a:solidFill>
                 <a:latin typeface="Calibri"/>
               </a:rPr>
-              <a:t>–   Aqui es disenar un esquema que siga siendo correcto cuando lo usen tres personas distintas, cuando tenga cien mil filas y cuando alguien meta datos malos, a veces por error y a veces a proposito.</a:t>
-            </a:r>
-          </a:p>
-          <a:p>
-            <a:pPr>
-              <a:spcAft>
-                <a:spcPts val="800"/>
-              </a:spcAft>
-            </a:pPr>
-            <a:r>
-              <a:rPr sz="2000" b="0" i="0">
-                <a:solidFill>
-                  <a:srgbClr val="333333"/>
-                </a:solidFill>
-                <a:latin typeface="Calibri"/>
-              </a:rPr>
-              <a:t>–   Una tabla, o relacion, es un conjunto de entidades del mismo tipo: mascota guarda mascotas y nada mas.</a:t>
-            </a:r>
-          </a:p>
-          <a:p>
-            <a:pPr>
-              <a:spcAft>
-                <a:spcPts val="800"/>
-              </a:spcAft>
-            </a:pPr>
-            <a:r>
-              <a:rPr sz="2000" b="0" i="0">
-                <a:solidFill>
-                  <a:srgbClr val="333333"/>
-                </a:solidFill>
-                <a:latin typeface="Calibri"/>
-              </a:rPr>
-              <a:t>–   Una fila es una instancia concreta e irrepetible: la perra Luna de la duena Ana Perez.</a:t>
+              <a:t>–   Sobre estas tres nociones se monta el semestre: los roles de la Clase 2 se otorgan sobre tablas, los procedimientos de la Clase 3 validan columnas y los indices de la Clase 7 se crean sobre columnas concretas.</a:t>
             </a:r>
           </a:p>
         </p:txBody>
@@ -17527,7 +17255,7 @@
                 </a:solidFill>
                 <a:latin typeface="Calibri"/>
               </a:rPr>
-              <a:t>Por que esto no es Bases de Datos I, y el vocabulario minimo (2/2)</a:t>
+              <a:t>Nivel conceptual y nivel fisico: dos vistas del mismo modelo</a:t>
             </a:r>
           </a:p>
         </p:txBody>
@@ -17566,7 +17294,7 @@
                 </a:solidFill>
                 <a:latin typeface="Calibri"/>
               </a:rPr>
-              <a:t>–   Una columna es un atributo, y todo atributo tiene un dominio, el conjunto de valores que el motor considera legales: especie no acepta cualquier texto, acepta Canino, Felino, Ave u Otro.</a:t>
+              <a:t>–   El nivel conceptual nombra entidades y relaciones con vocabulario de negocio y sin comprometerse con ningun motor: Dueno posee Mascota, Veterinario atiende Cita.</a:t>
             </a:r>
           </a:p>
           <a:p>
@@ -17582,7 +17310,39 @@
                 </a:solidFill>
                 <a:latin typeface="Calibri"/>
               </a:rPr>
-              <a:t>–   Sobre estas tres nociones se monta el semestre: los roles de la Clase 2 se otorgan sobre tablas, los procedimientos de la Clase 3 validan columnas y los indices de la Clase 7 se crean sobre columnas concretas.</a:t>
+              <a:t>–   El nivel fisico convierte esas entidades en tablas con columnas tipadas, longitudes, restricciones y claves: dueno.telefono VARCHAR(30) NOT NULL.</a:t>
+            </a:r>
+          </a:p>
+          <a:p>
+            <a:pPr>
+              <a:spcAft>
+                <a:spcPts val="800"/>
+              </a:spcAft>
+            </a:pPr>
+            <a:r>
+              <a:rPr sz="2000" b="0" i="0">
+                <a:solidFill>
+                  <a:srgbClr val="333333"/>
+                </a:solidFill>
+                <a:latin typeface="Calibri"/>
+              </a:rPr>
+              <a:t>–   Son dos vistas del MISMO modelo, no dos modelos distintos, y esa es la razon de que la clase produzca dos artefactos: el diagrama ER es la vista conceptual, y el guion CREATE TABLE es la misma informacion en fisico.</a:t>
+            </a:r>
+          </a:p>
+          <a:p>
+            <a:pPr>
+              <a:spcAft>
+                <a:spcPts val="800"/>
+              </a:spcAft>
+            </a:pPr>
+            <a:r>
+              <a:rPr sz="2000" b="0" i="0">
+                <a:solidFill>
+                  <a:srgbClr val="333333"/>
+                </a:solidFill>
+                <a:latin typeface="Calibri"/>
+              </a:rPr>
+              <a:t>–   El criterio operativo para saber si el conceptual esta completo es exactamente ese: si otra persona puede escribir el fisico mirandolo, sin preguntar nada, esta completo.</a:t>
             </a:r>
           </a:p>
         </p:txBody>
@@ -17763,7 +17523,7 @@
                 </a:solidFill>
                 <a:latin typeface="Calibri"/>
               </a:rPr>
-              <a:t>Nivel conceptual y nivel fisico: dos vistas del mismo modelo</a:t>
+              <a:t>Clave primaria: natural o sustituta</a:t>
             </a:r>
           </a:p>
         </p:txBody>
@@ -17802,7 +17562,7 @@
                 </a:solidFill>
                 <a:latin typeface="Calibri"/>
               </a:rPr>
-              <a:t>–   El nivel conceptual nombra entidades y relaciones con vocabulario de negocio y sin comprometerse con ningun motor: Dueno posee Mascota, Veterinario atiende Cita.</a:t>
+              <a:t>–   La clave primaria es la columna, o el conjunto de columnas, que identifica una fila sin ambiguedad: no se repite y no admite nulos.</a:t>
             </a:r>
           </a:p>
           <a:p>
@@ -17818,7 +17578,7 @@
                 </a:solidFill>
                 <a:latin typeface="Calibri"/>
               </a:rPr>
-              <a:t>–   El nivel fisico convierte esas entidades en tablas con columnas tipadas, longitudes, restricciones y claves: dueno.telefono VARCHAR(30) NOT NULL.</a:t>
+              <a:t>–   La pregunta de diseno real no es si poner clave primaria, sino cual.</a:t>
             </a:r>
           </a:p>
           <a:p>
@@ -17834,7 +17594,7 @@
                 </a:solidFill>
                 <a:latin typeface="Calibri"/>
               </a:rPr>
-              <a:t>–   Son dos vistas del MISMO modelo, no dos modelos distintos, y esa es la razon de que la clase produzca dos artefactos: el diagrama ER es la vista conceptual, y el guion CREATE TABLE es la misma informacion en fisico.</a:t>
+              <a:t>–   Una clave natural es un atributo del mundo real que ya identifica la entidad: la cedula del dueno, el microchip de la mascota.</a:t>
             </a:r>
           </a:p>
           <a:p>
@@ -17850,7 +17610,39 @@
                 </a:solidFill>
                 <a:latin typeface="Calibri"/>
               </a:rPr>
-              <a:t>–   El criterio operativo para saber si el conceptual esta completo es exactamente ese: si otra persona puede escribir el fisico mirandolo, sin preguntar nada, esta completo.</a:t>
+              <a:t>–   Una clave sustituta, o surrogate, es un numero sin significado de negocio que la base genera: id_dueno 1, 2, 3.</a:t>
+            </a:r>
+          </a:p>
+          <a:p>
+            <a:pPr>
+              <a:spcAft>
+                <a:spcPts val="800"/>
+              </a:spcAft>
+            </a:pPr>
+            <a:r>
+              <a:rPr sz="2000" b="0" i="0">
+                <a:solidFill>
+                  <a:srgbClr val="333333"/>
+                </a:solidFill>
+                <a:latin typeface="Calibri"/>
+              </a:rPr>
+              <a:t>–   En la clínica pasan las tres cosas: el dueno llega sin cedula a la mano, un microchip se digita mal y hay que corregirlo, y una mascota rescatada no tiene microchip.</a:t>
+            </a:r>
+          </a:p>
+          <a:p>
+            <a:pPr>
+              <a:spcAft>
+                <a:spcPts val="800"/>
+              </a:spcAft>
+            </a:pPr>
+            <a:r>
+              <a:rPr sz="2000" b="0" i="0">
+                <a:solidFill>
+                  <a:srgbClr val="333333"/>
+                </a:solidFill>
+                <a:latin typeface="Calibri"/>
+              </a:rPr>
+              <a:t>–   Regla citable, y es convencion de oficio, no regla dura: si el valor lo controla un tercero, el Estado o un fabricante, no lo use como clave primaria.</a:t>
             </a:r>
           </a:p>
         </p:txBody>
